--- a/slides/apresentacao_final.pptx
+++ b/slides/apresentacao_final.pptx
@@ -16,6 +16,10 @@
     <p:sldId id="264" r:id="rId15"/>
     <p:sldId id="265" r:id="rId16"/>
     <p:sldId id="266" r:id="rId17"/>
+    <p:sldId id="267" r:id="rId18"/>
+    <p:sldId id="268" r:id="rId19"/>
+    <p:sldId id="269" r:id="rId20"/>
+    <p:sldId id="270" r:id="rId21"/>
   </p:sldIdLst>
   <p:sldSz cx="12191695" cy="6858000" type="screen4x3"/>
   <p:notesSz cx="6858000" cy="9144000"/>
@@ -3091,6 +3095,14 @@
 <file path=ppt/slides/slide1.xml><?xml version="1.0" encoding="utf-8"?>
 <p:sld xmlns:a="http://schemas.openxmlformats.org/drawingml/2006/main" xmlns:p="http://schemas.openxmlformats.org/presentationml/2006/main" xmlns:r="http://schemas.openxmlformats.org/officeDocument/2006/relationships">
   <p:cSld>
+    <p:bg>
+      <p:bgPr>
+        <a:solidFill>
+          <a:srgbClr val="FFFFFF"/>
+        </a:solidFill>
+        <a:effectLst/>
+      </p:bgPr>
+    </p:bg>
     <p:spTree>
       <p:nvGrpSpPr>
         <p:cNvPr id="1" name=""/>
@@ -3100,485 +3112,20 @@
       <p:grpSpPr/>
       <p:sp>
         <p:nvSpPr>
-          <p:cNvPr id="2" name="TextBox 1"/>
-          <p:cNvSpPr txBox="1"/>
-          <p:nvPr/>
-        </p:nvSpPr>
-        <p:spPr>
-          <a:xfrm>
-            <a:off x="822960" y="914400"/>
-            <a:ext cx="10515600" cy="365760"/>
-          </a:xfrm>
-          <a:prstGeom prst="rect">
-            <a:avLst/>
-          </a:prstGeom>
-          <a:noFill/>
-        </p:spPr>
-        <p:txBody>
-          <a:bodyPr wrap="square">
-            <a:spAutoFit/>
-          </a:bodyPr>
-          <a:lstStyle/>
-          <a:p>
-            <a:pPr algn="l">
-              <a:spcBef>
-                <a:spcPts val="0"/>
-              </a:spcBef>
-            </a:pPr>
-            <a:r>
-              <a:rPr sz="1400" b="0" i="0">
-                <a:solidFill>
-                  <a:srgbClr val="5B6B7C"/>
-                </a:solidFill>
-                <a:latin typeface="Arial Narrow"/>
-              </a:rPr>
-              <a:t>ANÁLISE DE DADOS PARA PLANEJAMENTO TERRITORIAL · UFABC</a:t>
-            </a:r>
-          </a:p>
-        </p:txBody>
-      </p:sp>
-      <p:sp>
-        <p:nvSpPr>
-          <p:cNvPr id="3" name="TextBox 2"/>
-          <p:cNvSpPr txBox="1"/>
-          <p:nvPr/>
-        </p:nvSpPr>
-        <p:spPr>
-          <a:xfrm>
-            <a:off x="822960" y="1371600"/>
-            <a:ext cx="10515600" cy="2194560"/>
-          </a:xfrm>
-          <a:prstGeom prst="rect">
-            <a:avLst/>
-          </a:prstGeom>
-          <a:noFill/>
-        </p:spPr>
-        <p:txBody>
-          <a:bodyPr wrap="square">
-            <a:spAutoFit/>
-          </a:bodyPr>
-          <a:lstStyle/>
-          <a:p>
-            <a:pPr algn="l">
-              <a:spcBef>
-                <a:spcPts val="0"/>
-              </a:spcBef>
-            </a:pPr>
-            <a:r>
-              <a:rPr sz="6000" b="1" i="0">
-                <a:solidFill>
-                  <a:srgbClr val="17222E"/>
-                </a:solidFill>
-                <a:latin typeface="Arial Narrow"/>
-              </a:rPr>
-              <a:t>CRIME E TERRITÓRIO</a:t>
-            </a:r>
-          </a:p>
-          <a:p>
-            <a:pPr algn="l">
-              <a:spcBef>
-                <a:spcPts val="600"/>
-              </a:spcBef>
-            </a:pPr>
-            <a:r>
-              <a:rPr sz="6000" b="1" i="0">
-                <a:solidFill>
-                  <a:srgbClr val="D95F02"/>
-                </a:solidFill>
-                <a:latin typeface="Arial Narrow"/>
-              </a:rPr>
-              <a:t>TEM PRAIA NO MEIO</a:t>
-            </a:r>
-          </a:p>
-        </p:txBody>
-      </p:sp>
-      <p:sp>
-        <p:nvSpPr>
-          <p:cNvPr id="4" name="TextBox 3"/>
-          <p:cNvSpPr txBox="1"/>
-          <p:nvPr/>
-        </p:nvSpPr>
-        <p:spPr>
-          <a:xfrm>
-            <a:off x="822960" y="3657600"/>
-            <a:ext cx="8686800" cy="822960"/>
-          </a:xfrm>
-          <a:prstGeom prst="rect">
-            <a:avLst/>
-          </a:prstGeom>
-          <a:noFill/>
-        </p:spPr>
-        <p:txBody>
-          <a:bodyPr wrap="square">
-            <a:spAutoFit/>
-          </a:bodyPr>
-          <a:lstStyle/>
-          <a:p>
-            <a:pPr algn="l">
-              <a:spcBef>
-                <a:spcPts val="0"/>
-              </a:spcBef>
-            </a:pPr>
-            <a:r>
-              <a:rPr sz="1800" b="0" i="0">
-                <a:solidFill>
-                  <a:srgbClr val="17222E"/>
-                </a:solidFill>
-                <a:latin typeface="Georgia"/>
-              </a:rPr>
-              <a:t>A gente foi atrás de entender o furto nos municípios de São Paulo e descobriu que a resposta não estava na renda, e sim no mapa.</a:t>
-            </a:r>
-          </a:p>
-        </p:txBody>
-      </p:sp>
-      <p:sp>
-        <p:nvSpPr>
-          <p:cNvPr id="5" name="TextBox 4"/>
-          <p:cNvSpPr txBox="1"/>
-          <p:nvPr/>
-        </p:nvSpPr>
-        <p:spPr>
-          <a:xfrm>
-            <a:off x="822960" y="4663440"/>
-            <a:ext cx="2103120" cy="822960"/>
-          </a:xfrm>
-          <a:prstGeom prst="rect">
-            <a:avLst/>
-          </a:prstGeom>
-          <a:noFill/>
-        </p:spPr>
-        <p:txBody>
-          <a:bodyPr wrap="square">
-            <a:spAutoFit/>
-          </a:bodyPr>
-          <a:lstStyle/>
-          <a:p>
-            <a:pPr algn="l">
-              <a:spcBef>
-                <a:spcPts val="0"/>
-              </a:spcBef>
-            </a:pPr>
-            <a:r>
-              <a:rPr sz="2800" b="1" i="0">
-                <a:solidFill>
-                  <a:srgbClr val="D95F02"/>
-                </a:solidFill>
-                <a:latin typeface="Arial Narrow"/>
-              </a:rPr>
-              <a:t>645</a:t>
-            </a:r>
-          </a:p>
-          <a:p>
-            <a:pPr algn="l">
-              <a:spcBef>
-                <a:spcPts val="600"/>
-              </a:spcBef>
-            </a:pPr>
-            <a:r>
-              <a:rPr sz="1100" b="0" i="0">
-                <a:solidFill>
-                  <a:srgbClr val="5B6B7C"/>
-                </a:solidFill>
-                <a:latin typeface="Arial Narrow"/>
-              </a:rPr>
-              <a:t>MUNICÍPIOS</a:t>
-            </a:r>
-          </a:p>
-        </p:txBody>
-      </p:sp>
-      <p:sp>
-        <p:nvSpPr>
-          <p:cNvPr id="6" name="TextBox 5"/>
-          <p:cNvSpPr txBox="1"/>
-          <p:nvPr/>
-        </p:nvSpPr>
-        <p:spPr>
-          <a:xfrm>
-            <a:off x="3017520" y="4663440"/>
-            <a:ext cx="2103120" cy="822960"/>
-          </a:xfrm>
-          <a:prstGeom prst="rect">
-            <a:avLst/>
-          </a:prstGeom>
-          <a:noFill/>
-        </p:spPr>
-        <p:txBody>
-          <a:bodyPr wrap="square">
-            <a:spAutoFit/>
-          </a:bodyPr>
-          <a:lstStyle/>
-          <a:p>
-            <a:pPr algn="l">
-              <a:spcBef>
-                <a:spcPts val="0"/>
-              </a:spcBef>
-            </a:pPr>
-            <a:r>
-              <a:rPr sz="2800" b="1" i="0">
-                <a:solidFill>
-                  <a:srgbClr val="D95F02"/>
-                </a:solidFill>
-                <a:latin typeface="Arial Narrow"/>
-              </a:rPr>
-              <a:t>2025</a:t>
-            </a:r>
-          </a:p>
-          <a:p>
-            <a:pPr algn="l">
-              <a:spcBef>
-                <a:spcPts val="600"/>
-              </a:spcBef>
-            </a:pPr>
-            <a:r>
-              <a:rPr sz="1100" b="0" i="0">
-                <a:solidFill>
-                  <a:srgbClr val="5B6B7C"/>
-                </a:solidFill>
-                <a:latin typeface="Arial Narrow"/>
-              </a:rPr>
-              <a:t>DADOS DE CRIME</a:t>
-            </a:r>
-          </a:p>
-        </p:txBody>
-      </p:sp>
-      <p:sp>
-        <p:nvSpPr>
-          <p:cNvPr id="7" name="TextBox 6"/>
-          <p:cNvSpPr txBox="1"/>
-          <p:nvPr/>
-        </p:nvSpPr>
-        <p:spPr>
-          <a:xfrm>
-            <a:off x="5212080" y="4663440"/>
-            <a:ext cx="2103120" cy="822960"/>
-          </a:xfrm>
-          <a:prstGeom prst="rect">
-            <a:avLst/>
-          </a:prstGeom>
-          <a:noFill/>
-        </p:spPr>
-        <p:txBody>
-          <a:bodyPr wrap="square">
-            <a:spAutoFit/>
-          </a:bodyPr>
-          <a:lstStyle/>
-          <a:p>
-            <a:pPr algn="l">
-              <a:spcBef>
-                <a:spcPts val="0"/>
-              </a:spcBef>
-            </a:pPr>
-            <a:r>
-              <a:rPr sz="2800" b="1" i="0">
-                <a:solidFill>
-                  <a:srgbClr val="D95F02"/>
-                </a:solidFill>
-                <a:latin typeface="Arial Narrow"/>
-              </a:rPr>
-              <a:t>16</a:t>
-            </a:r>
-          </a:p>
-          <a:p>
-            <a:pPr algn="l">
-              <a:spcBef>
-                <a:spcPts val="600"/>
-              </a:spcBef>
-            </a:pPr>
-            <a:r>
-              <a:rPr sz="1100" b="0" i="0">
-                <a:solidFill>
-                  <a:srgbClr val="5B6B7C"/>
-                </a:solidFill>
-                <a:latin typeface="Arial Narrow"/>
-              </a:rPr>
-              <a:t>CIDADES DE PRAIA</a:t>
-            </a:r>
-          </a:p>
-        </p:txBody>
-      </p:sp>
-      <p:sp>
-        <p:nvSpPr>
-          <p:cNvPr id="8" name="TextBox 7"/>
-          <p:cNvSpPr txBox="1"/>
-          <p:nvPr/>
-        </p:nvSpPr>
-        <p:spPr>
-          <a:xfrm>
-            <a:off x="7406640" y="4663440"/>
-            <a:ext cx="2103120" cy="822960"/>
-          </a:xfrm>
-          <a:prstGeom prst="rect">
-            <a:avLst/>
-          </a:prstGeom>
-          <a:noFill/>
-        </p:spPr>
-        <p:txBody>
-          <a:bodyPr wrap="square">
-            <a:spAutoFit/>
-          </a:bodyPr>
-          <a:lstStyle/>
-          <a:p>
-            <a:pPr algn="l">
-              <a:spcBef>
-                <a:spcPts val="0"/>
-              </a:spcBef>
-            </a:pPr>
-            <a:r>
-              <a:rPr sz="2800" b="1" i="0">
-                <a:solidFill>
-                  <a:srgbClr val="D95F02"/>
-                </a:solidFill>
-                <a:latin typeface="Arial Narrow"/>
-              </a:rPr>
-              <a:t>/1.000</a:t>
-            </a:r>
-          </a:p>
-          <a:p>
-            <a:pPr algn="l">
-              <a:spcBef>
-                <a:spcPts val="600"/>
-              </a:spcBef>
-            </a:pPr>
-            <a:r>
-              <a:rPr sz="1100" b="0" i="0">
-                <a:solidFill>
-                  <a:srgbClr val="5B6B7C"/>
-                </a:solidFill>
-                <a:latin typeface="Arial Narrow"/>
-              </a:rPr>
-              <a:t>FURTOS POR HAB.</a:t>
-            </a:r>
-          </a:p>
-        </p:txBody>
-      </p:sp>
-      <p:sp>
-        <p:nvSpPr>
-          <p:cNvPr id="9" name="TextBox 8"/>
-          <p:cNvSpPr txBox="1"/>
-          <p:nvPr/>
-        </p:nvSpPr>
-        <p:spPr>
-          <a:xfrm>
-            <a:off x="822960" y="5760720"/>
-            <a:ext cx="10515600" cy="640080"/>
-          </a:xfrm>
-          <a:prstGeom prst="rect">
-            <a:avLst/>
-          </a:prstGeom>
-          <a:noFill/>
-        </p:spPr>
-        <p:txBody>
-          <a:bodyPr wrap="square">
-            <a:spAutoFit/>
-          </a:bodyPr>
-          <a:lstStyle/>
-          <a:p>
-            <a:pPr algn="l">
-              <a:spcBef>
-                <a:spcPts val="0"/>
-              </a:spcBef>
-            </a:pPr>
-            <a:r>
-              <a:rPr sz="1400" b="1" i="0">
-                <a:solidFill>
-                  <a:srgbClr val="17222E"/>
-                </a:solidFill>
-                <a:latin typeface="Georgia"/>
-              </a:rPr>
-              <a:t>João Vitor Oliveira · Julio Cesar Salvino · Lucas Amorim</a:t>
-            </a:r>
-          </a:p>
-          <a:p>
-            <a:pPr algn="l">
-              <a:spcBef>
-                <a:spcPts val="200"/>
-              </a:spcBef>
-            </a:pPr>
-            <a:r>
-              <a:rPr sz="1300" b="0" i="0">
-                <a:solidFill>
-                  <a:srgbClr val="5B6B7C"/>
-                </a:solidFill>
-                <a:latin typeface="Georgia"/>
-              </a:rPr>
-              <a:t>Orientação: Prof.ª Flávia da Fonseca Feitosa</a:t>
-            </a:r>
-          </a:p>
-        </p:txBody>
-      </p:sp>
-    </p:spTree>
-  </p:cSld>
-  <p:clrMapOvr>
-    <a:masterClrMapping/>
-  </p:clrMapOvr>
-</p:sld>
-</file>
-
-<file path=ppt/slides/slide10.xml><?xml version="1.0" encoding="utf-8"?>
-<p:sld xmlns:a="http://schemas.openxmlformats.org/drawingml/2006/main" xmlns:p="http://schemas.openxmlformats.org/presentationml/2006/main" xmlns:r="http://schemas.openxmlformats.org/officeDocument/2006/relationships">
-  <p:cSld>
-    <p:spTree>
-      <p:nvGrpSpPr>
-        <p:cNvPr id="1" name=""/>
-        <p:cNvGrpSpPr/>
-        <p:nvPr/>
-      </p:nvGrpSpPr>
-      <p:grpSpPr/>
-      <p:sp>
-        <p:nvSpPr>
-          <p:cNvPr id="2" name="TextBox 1"/>
-          <p:cNvSpPr txBox="1"/>
-          <p:nvPr/>
-        </p:nvSpPr>
-        <p:spPr>
-          <a:xfrm>
-            <a:off x="822960" y="384048"/>
-            <a:ext cx="10515600" cy="365760"/>
-          </a:xfrm>
-          <a:prstGeom prst="rect">
-            <a:avLst/>
-          </a:prstGeom>
-          <a:noFill/>
-        </p:spPr>
-        <p:txBody>
-          <a:bodyPr wrap="square">
-            <a:spAutoFit/>
-          </a:bodyPr>
-          <a:lstStyle/>
-          <a:p>
-            <a:pPr algn="l">
-              <a:spcBef>
-                <a:spcPts val="0"/>
-              </a:spcBef>
-            </a:pPr>
-            <a:r>
-              <a:rPr sz="1300" b="1" i="0">
-                <a:solidFill>
-                  <a:srgbClr val="D95F02"/>
-                </a:solidFill>
-                <a:latin typeface="Arial Narrow"/>
-              </a:rPr>
-              <a:t>CURIOSIDADES DOS DADOS</a:t>
-            </a:r>
-          </a:p>
-        </p:txBody>
-      </p:sp>
-      <p:sp>
-        <p:nvSpPr>
-          <p:cNvPr id="3" name="Rectangle 2"/>
+          <p:cNvPr id="2" name="Rectangle 1"/>
           <p:cNvSpPr/>
           <p:nvPr/>
         </p:nvSpPr>
         <p:spPr>
           <a:xfrm>
-            <a:off x="822960" y="749808"/>
-            <a:ext cx="10515600" cy="15240"/>
+            <a:off x="0" y="0"/>
+            <a:ext cx="12191695" cy="164592"/>
           </a:xfrm>
           <a:prstGeom prst="rect">
             <a:avLst/>
           </a:prstGeom>
           <a:solidFill>
-            <a:srgbClr val="D8DFE7"/>
+            <a:srgbClr val="1F4E79"/>
           </a:solidFill>
           <a:ln>
             <a:noFill/>
@@ -3609,14 +3156,53 @@
       </p:sp>
       <p:sp>
         <p:nvSpPr>
+          <p:cNvPr id="3" name="TextBox 2"/>
+          <p:cNvSpPr txBox="1"/>
+          <p:nvPr/>
+        </p:nvSpPr>
+        <p:spPr>
+          <a:xfrm>
+            <a:off x="822960" y="2148840"/>
+            <a:ext cx="10515600" cy="1737360"/>
+          </a:xfrm>
+          <a:prstGeom prst="rect">
+            <a:avLst/>
+          </a:prstGeom>
+          <a:noFill/>
+        </p:spPr>
+        <p:txBody>
+          <a:bodyPr wrap="square" anchor="t">
+            <a:spAutoFit/>
+          </a:bodyPr>
+          <a:lstStyle/>
+          <a:p>
+            <a:pPr algn="l">
+              <a:lnSpc>
+                <a:spcPct val="115000"/>
+              </a:lnSpc>
+            </a:pPr>
+            <a:r>
+              <a:rPr sz="4400" b="1" i="0">
+                <a:solidFill>
+                  <a:srgbClr val="1F4E79"/>
+                </a:solidFill>
+                <a:latin typeface="Calibri"/>
+              </a:rPr>
+              <a:t>Furto, Renda e Território</a:t>
+            </a:r>
+          </a:p>
+        </p:txBody>
+      </p:sp>
+      <p:sp>
+        <p:nvSpPr>
           <p:cNvPr id="4" name="TextBox 3"/>
           <p:cNvSpPr txBox="1"/>
           <p:nvPr/>
         </p:nvSpPr>
         <p:spPr>
           <a:xfrm>
-            <a:off x="9784080" y="384048"/>
-            <a:ext cx="1600200" cy="365760"/>
+            <a:off x="822960" y="3063240"/>
+            <a:ext cx="10515600" cy="914400"/>
           </a:xfrm>
           <a:prstGeom prst="rect">
             <a:avLst/>
@@ -3624,24 +3210,40 @@
           <a:noFill/>
         </p:spPr>
         <p:txBody>
-          <a:bodyPr wrap="square">
+          <a:bodyPr wrap="square" anchor="t">
             <a:spAutoFit/>
           </a:bodyPr>
           <a:lstStyle/>
           <a:p>
-            <a:pPr algn="r">
-              <a:spcBef>
-                <a:spcPts val="0"/>
-              </a:spcBef>
-            </a:pPr>
-            <a:r>
-              <a:rPr sz="1200" b="0" i="0">
-                <a:solidFill>
-                  <a:srgbClr val="5B6B7C"/>
-                </a:solidFill>
-                <a:latin typeface="Arial Narrow"/>
-              </a:rPr>
-              <a:t>09 · PÉROLAS</a:t>
+            <a:pPr algn="l">
+              <a:lnSpc>
+                <a:spcPct val="115000"/>
+              </a:lnSpc>
+            </a:pPr>
+            <a:r>
+              <a:rPr sz="2200" b="0" i="0">
+                <a:solidFill>
+                  <a:srgbClr val="333333"/>
+                </a:solidFill>
+                <a:latin typeface="Calibri"/>
+              </a:rPr>
+              <a:t>Uma análise espacial da criminalidade patrimonial</a:t>
+            </a:r>
+          </a:p>
+          <a:p>
+            <a:pPr algn="l">
+              <a:lnSpc>
+                <a:spcPct val="115000"/>
+              </a:lnSpc>
+            </a:pPr>
+            <a:r>
+              <a:rPr sz="2200" b="0" i="0">
+                <a:solidFill>
+                  <a:srgbClr val="333333"/>
+                </a:solidFill>
+                <a:latin typeface="Calibri"/>
+              </a:rPr>
+              <a:t>nos municípios de São Paulo</a:t>
             </a:r>
           </a:p>
         </p:txBody>
@@ -3654,8 +3256,8 @@
         </p:nvSpPr>
         <p:spPr>
           <a:xfrm>
-            <a:off x="822960" y="960120"/>
-            <a:ext cx="10515600" cy="914400"/>
+            <a:off x="822960" y="4343400"/>
+            <a:ext cx="10515600" cy="457200"/>
           </a:xfrm>
           <a:prstGeom prst="rect">
             <a:avLst/>
@@ -3663,71 +3265,38 @@
           <a:noFill/>
         </p:spPr>
         <p:txBody>
-          <a:bodyPr wrap="square">
+          <a:bodyPr wrap="square" anchor="t">
             <a:spAutoFit/>
           </a:bodyPr>
           <a:lstStyle/>
           <a:p>
             <a:pPr algn="l">
-              <a:spcBef>
-                <a:spcPts val="0"/>
-              </a:spcBef>
-            </a:pPr>
-            <a:r>
-              <a:rPr sz="3400" b="1" i="0">
-                <a:solidFill>
-                  <a:srgbClr val="17222E"/>
-                </a:solidFill>
-                <a:latin typeface="Arial Narrow"/>
-              </a:rPr>
-              <a:t>Coisas que </a:t>
-            </a:r>
-            <a:r>
-              <a:rPr sz="3400" b="1" i="0">
-                <a:solidFill>
-                  <a:srgbClr val="D95F02"/>
-                </a:solidFill>
-                <a:latin typeface="Arial Narrow"/>
-              </a:rPr>
-              <a:t>chamaram atenção</a:t>
-            </a:r>
-          </a:p>
-        </p:txBody>
-      </p:sp>
-      <p:pic>
-        <p:nvPicPr>
-          <p:cNvPr id="6" name="Picture 5" descr="litoral_regime_global_local.png"/>
-          <p:cNvPicPr>
-            <a:picLocks noChangeAspect="1"/>
-          </p:cNvPicPr>
-          <p:nvPr/>
-        </p:nvPicPr>
-        <p:blipFill>
-          <a:blip r:embed="rId2"/>
-          <a:stretch>
-            <a:fillRect/>
-          </a:stretch>
-        </p:blipFill>
-        <p:spPr>
-          <a:xfrm>
-            <a:off x="6400800" y="1554480"/>
-            <a:ext cx="6583680" cy="4389120"/>
-          </a:xfrm>
-          <a:prstGeom prst="rect">
-            <a:avLst/>
-          </a:prstGeom>
-        </p:spPr>
-      </p:pic>
-      <p:sp>
-        <p:nvSpPr>
-          <p:cNvPr id="7" name="TextBox 6"/>
+              <a:lnSpc>
+                <a:spcPct val="115000"/>
+              </a:lnSpc>
+            </a:pPr>
+            <a:r>
+              <a:rPr sz="1600" b="0" i="0">
+                <a:solidFill>
+                  <a:srgbClr val="595959"/>
+                </a:solidFill>
+                <a:latin typeface="Calibri"/>
+              </a:rPr>
+              <a:t>João Vitor Oliveira   •   Julio Cesar Salvino   •   Lucas Amorim</a:t>
+            </a:r>
+          </a:p>
+        </p:txBody>
+      </p:sp>
+      <p:sp>
+        <p:nvSpPr>
+          <p:cNvPr id="6" name="TextBox 5"/>
           <p:cNvSpPr txBox="1"/>
           <p:nvPr/>
         </p:nvSpPr>
         <p:spPr>
           <a:xfrm>
-            <a:off x="822960" y="1828800"/>
-            <a:ext cx="5212080" cy="4114800"/>
+            <a:off x="822960" y="4709160"/>
+            <a:ext cx="10515600" cy="822960"/>
           </a:xfrm>
           <a:prstGeom prst="rect">
             <a:avLst/>
@@ -3735,110 +3304,40 @@
           <a:noFill/>
         </p:spPr>
         <p:txBody>
-          <a:bodyPr wrap="square">
+          <a:bodyPr wrap="square" anchor="t">
             <a:spAutoFit/>
           </a:bodyPr>
           <a:lstStyle/>
           <a:p>
             <a:pPr algn="l">
-              <a:spcBef>
-                <a:spcPts val="0"/>
-              </a:spcBef>
-            </a:pPr>
-            <a:r>
-              <a:rPr sz="1100" b="0" i="0">
-                <a:solidFill>
-                  <a:srgbClr val="D95F02"/>
-                </a:solidFill>
-                <a:latin typeface="Arial Narrow"/>
-              </a:rPr>
-              <a:t>●  </a:t>
-            </a:r>
-            <a:r>
-              <a:rPr sz="1500" b="1" i="0">
-                <a:solidFill>
-                  <a:srgbClr val="17222E"/>
-                </a:solidFill>
-                <a:latin typeface="Georgia"/>
-              </a:rPr>
-              <a:t>No litoral, a renda não importa.</a:t>
-            </a:r>
-            <a:r>
-              <a:rPr sz="1500" b="0" i="0">
-                <a:solidFill>
-                  <a:srgbClr val="17222E"/>
-                </a:solidFill>
-                <a:latin typeface="Georgia"/>
-              </a:rPr>
-              <a:t> Um modelo só das praias acerta 0,8%: lá manda o turismo.</a:t>
+              <a:lnSpc>
+                <a:spcPct val="115000"/>
+              </a:lnSpc>
+            </a:pPr>
+            <a:r>
+              <a:rPr sz="1400" b="0" i="0">
+                <a:solidFill>
+                  <a:srgbClr val="595959"/>
+                </a:solidFill>
+                <a:latin typeface="Calibri"/>
+              </a:rPr>
+              <a:t>Centro de Matemática, Computação e Cognição — UFABC</a:t>
             </a:r>
           </a:p>
           <a:p>
             <a:pPr algn="l">
-              <a:spcBef>
-                <a:spcPts val="1400"/>
-              </a:spcBef>
-            </a:pPr>
-            <a:r>
-              <a:rPr sz="1100" b="0" i="0">
-                <a:solidFill>
-                  <a:srgbClr val="D95F02"/>
-                </a:solidFill>
-                <a:latin typeface="Arial Narrow"/>
-              </a:rPr>
-              <a:t>●  </a:t>
-            </a:r>
-            <a:r>
-              <a:rPr sz="1500" b="1" i="0">
-                <a:solidFill>
-                  <a:srgbClr val="17222E"/>
-                </a:solidFill>
-                <a:latin typeface="Georgia"/>
-              </a:rPr>
-              <a:t>Mongaguá</a:t>
-            </a:r>
-            <a:r>
-              <a:rPr sz="1500" b="0" i="0">
-                <a:solidFill>
-                  <a:srgbClr val="17222E"/>
-                </a:solidFill>
-                <a:latin typeface="Georgia"/>
-              </a:rPr>
-              <a:t> tem 34 furtos/1.000 hab., o dobro da capital.</a:t>
-            </a:r>
-          </a:p>
-          <a:p>
-            <a:pPr algn="l">
-              <a:spcBef>
-                <a:spcPts val="1400"/>
-              </a:spcBef>
-            </a:pPr>
-            <a:r>
-              <a:rPr sz="1100" b="0" i="0">
-                <a:solidFill>
-                  <a:srgbClr val="D95F02"/>
-                </a:solidFill>
-                <a:latin typeface="Arial Narrow"/>
-              </a:rPr>
-              <a:t>●  </a:t>
-            </a:r>
-            <a:r>
-              <a:rPr sz="1500" b="1" i="0">
-                <a:solidFill>
-                  <a:srgbClr val="17222E"/>
-                </a:solidFill>
-                <a:latin typeface="Georgia"/>
-              </a:rPr>
-              <a:t>Ilhabela</a:t>
-            </a:r>
-            <a:r>
-              <a:rPr sz="1500" b="0" i="0">
-                <a:solidFill>
-                  <a:srgbClr val="17222E"/>
-                </a:solidFill>
-                <a:latin typeface="Georgia"/>
-              </a:rPr>
-              <a:t> é ilha e ficou “sem vizinhos” no mapa, entra com asterisco.</a:t>
+              <a:lnSpc>
+                <a:spcPct val="115000"/>
+              </a:lnSpc>
+            </a:pPr>
+            <a:r>
+              <a:rPr sz="1400" b="0" i="0">
+                <a:solidFill>
+                  <a:srgbClr val="595959"/>
+                </a:solidFill>
+                <a:latin typeface="Calibri"/>
+              </a:rPr>
+              <a:t>Análise de Dados para Planejamento Territorial · Orientação: Prof.ª Flávia da Fonseca Feitosa</a:t>
             </a:r>
           </a:p>
         </p:txBody>
@@ -3851,9 +3350,17 @@
 </p:sld>
 </file>
 
-<file path=ppt/slides/slide11.xml><?xml version="1.0" encoding="utf-8"?>
+<file path=ppt/slides/slide10.xml><?xml version="1.0" encoding="utf-8"?>
 <p:sld xmlns:a="http://schemas.openxmlformats.org/drawingml/2006/main" xmlns:p="http://schemas.openxmlformats.org/presentationml/2006/main" xmlns:r="http://schemas.openxmlformats.org/officeDocument/2006/relationships">
   <p:cSld>
+    <p:bg>
+      <p:bgPr>
+        <a:solidFill>
+          <a:srgbClr val="FFFFFF"/>
+        </a:solidFill>
+        <a:effectLst/>
+      </p:bgPr>
+    </p:bg>
     <p:spTree>
       <p:nvGrpSpPr>
         <p:cNvPr id="1" name=""/>
@@ -3869,8 +3376,8 @@
         </p:nvSpPr>
         <p:spPr>
           <a:xfrm>
-            <a:off x="822960" y="384048"/>
-            <a:ext cx="10515600" cy="365760"/>
+            <a:off x="548640" y="320040"/>
+            <a:ext cx="7315200" cy="365760"/>
           </a:xfrm>
           <a:prstGeom prst="rect">
             <a:avLst/>
@@ -3878,44 +3385,83 @@
           <a:noFill/>
         </p:spPr>
         <p:txBody>
-          <a:bodyPr wrap="square">
+          <a:bodyPr wrap="square" anchor="t">
             <a:spAutoFit/>
           </a:bodyPr>
           <a:lstStyle/>
           <a:p>
             <a:pPr algn="l">
-              <a:spcBef>
-                <a:spcPts val="0"/>
-              </a:spcBef>
+              <a:lnSpc>
+                <a:spcPct val="115000"/>
+              </a:lnSpc>
             </a:pPr>
             <a:r>
               <a:rPr sz="1300" b="1" i="0">
                 <a:solidFill>
-                  <a:srgbClr val="D95F02"/>
-                </a:solidFill>
-                <a:latin typeface="Arial Narrow"/>
-              </a:rPr>
-              <a:t>CONCLUSÃO</a:t>
-            </a:r>
-          </a:p>
-        </p:txBody>
-      </p:sp>
-      <p:sp>
-        <p:nvSpPr>
-          <p:cNvPr id="3" name="Rectangle 2"/>
+                  <a:srgbClr val="1F4E79"/>
+                </a:solidFill>
+                <a:latin typeface="Calibri"/>
+              </a:rPr>
+              <a:t>DESENVOLVIMENTO E RESULTADOS</a:t>
+            </a:r>
+          </a:p>
+        </p:txBody>
+      </p:sp>
+      <p:sp>
+        <p:nvSpPr>
+          <p:cNvPr id="3" name="TextBox 2"/>
+          <p:cNvSpPr txBox="1"/>
+          <p:nvPr/>
+        </p:nvSpPr>
+        <p:spPr>
+          <a:xfrm>
+            <a:off x="548640" y="594360"/>
+            <a:ext cx="11064240" cy="822960"/>
+          </a:xfrm>
+          <a:prstGeom prst="rect">
+            <a:avLst/>
+          </a:prstGeom>
+          <a:noFill/>
+        </p:spPr>
+        <p:txBody>
+          <a:bodyPr wrap="square" anchor="t">
+            <a:spAutoFit/>
+          </a:bodyPr>
+          <a:lstStyle/>
+          <a:p>
+            <a:pPr algn="l">
+              <a:lnSpc>
+                <a:spcPct val="115000"/>
+              </a:lnSpc>
+            </a:pPr>
+            <a:r>
+              <a:rPr sz="3000" b="1" i="0">
+                <a:solidFill>
+                  <a:srgbClr val="1A1A1A"/>
+                </a:solidFill>
+                <a:latin typeface="Calibri"/>
+              </a:rPr>
+              <a:t>GWR com renda + litoral: coeficientes e significância local</a:t>
+            </a:r>
+          </a:p>
+        </p:txBody>
+      </p:sp>
+      <p:sp>
+        <p:nvSpPr>
+          <p:cNvPr id="4" name="Rectangle 3"/>
           <p:cNvSpPr/>
           <p:nvPr/>
         </p:nvSpPr>
         <p:spPr>
           <a:xfrm>
-            <a:off x="822960" y="749808"/>
-            <a:ext cx="10515600" cy="15240"/>
+            <a:off x="548640" y="1325880"/>
+            <a:ext cx="11064240" cy="27940"/>
           </a:xfrm>
           <a:prstGeom prst="rect">
             <a:avLst/>
           </a:prstGeom>
           <a:solidFill>
-            <a:srgbClr val="D8DFE7"/>
+            <a:srgbClr val="1F4E79"/>
           </a:solidFill>
           <a:ln>
             <a:noFill/>
@@ -3944,16 +3490,112 @@
           </a:p>
         </p:txBody>
       </p:sp>
-      <p:sp>
-        <p:nvSpPr>
-          <p:cNvPr id="4" name="TextBox 3"/>
+      <p:pic>
+        <p:nvPicPr>
+          <p:cNvPr id="5" name="Picture 4" descr="gwr_lit_coef_renda.png"/>
+          <p:cNvPicPr>
+            <a:picLocks noChangeAspect="1"/>
+          </p:cNvPicPr>
+          <p:nvPr/>
+        </p:nvPicPr>
+        <p:blipFill>
+          <a:blip r:embed="rId2"/>
+          <a:stretch>
+            <a:fillRect/>
+          </a:stretch>
+        </p:blipFill>
+        <p:spPr>
+          <a:xfrm>
+            <a:off x="457200" y="2606040"/>
+            <a:ext cx="2880360" cy="2560320"/>
+          </a:xfrm>
+          <a:prstGeom prst="rect">
+            <a:avLst/>
+          </a:prstGeom>
+        </p:spPr>
+      </p:pic>
+      <p:pic>
+        <p:nvPicPr>
+          <p:cNvPr id="6" name="Picture 5" descr="gwr_lit_coef_litoral.png"/>
+          <p:cNvPicPr>
+            <a:picLocks noChangeAspect="1"/>
+          </p:cNvPicPr>
+          <p:nvPr/>
+        </p:nvPicPr>
+        <p:blipFill>
+          <a:blip r:embed="rId3"/>
+          <a:stretch>
+            <a:fillRect/>
+          </a:stretch>
+        </p:blipFill>
+        <p:spPr>
+          <a:xfrm>
+            <a:off x="3429000" y="2606040"/>
+            <a:ext cx="2880360" cy="2560320"/>
+          </a:xfrm>
+          <a:prstGeom prst="rect">
+            <a:avLst/>
+          </a:prstGeom>
+        </p:spPr>
+      </p:pic>
+      <p:pic>
+        <p:nvPicPr>
+          <p:cNvPr id="7" name="Picture 6" descr="gwr_lit_t_renda.png"/>
+          <p:cNvPicPr>
+            <a:picLocks noChangeAspect="1"/>
+          </p:cNvPicPr>
+          <p:nvPr/>
+        </p:nvPicPr>
+        <p:blipFill>
+          <a:blip r:embed="rId4"/>
+          <a:stretch>
+            <a:fillRect/>
+          </a:stretch>
+        </p:blipFill>
+        <p:spPr>
+          <a:xfrm>
+            <a:off x="6400800" y="2606040"/>
+            <a:ext cx="2880360" cy="2560320"/>
+          </a:xfrm>
+          <a:prstGeom prst="rect">
+            <a:avLst/>
+          </a:prstGeom>
+        </p:spPr>
+      </p:pic>
+      <p:pic>
+        <p:nvPicPr>
+          <p:cNvPr id="8" name="Picture 7" descr="gwr_lit_t_litoral.png"/>
+          <p:cNvPicPr>
+            <a:picLocks noChangeAspect="1"/>
+          </p:cNvPicPr>
+          <p:nvPr/>
+        </p:nvPicPr>
+        <p:blipFill>
+          <a:blip r:embed="rId5"/>
+          <a:stretch>
+            <a:fillRect/>
+          </a:stretch>
+        </p:blipFill>
+        <p:spPr>
+          <a:xfrm>
+            <a:off x="9372600" y="2606040"/>
+            <a:ext cx="2880360" cy="2560320"/>
+          </a:xfrm>
+          <a:prstGeom prst="rect">
+            <a:avLst/>
+          </a:prstGeom>
+        </p:spPr>
+      </p:pic>
+      <p:sp>
+        <p:nvSpPr>
+          <p:cNvPr id="9" name="TextBox 8"/>
           <p:cNvSpPr txBox="1"/>
           <p:nvPr/>
         </p:nvSpPr>
         <p:spPr>
           <a:xfrm>
-            <a:off x="9784080" y="384048"/>
-            <a:ext cx="1600200" cy="365760"/>
+            <a:off x="548640" y="6172200"/>
+            <a:ext cx="11064240" cy="457200"/>
           </a:xfrm>
           <a:prstGeom prst="rect">
             <a:avLst/>
@@ -3961,38 +3603,38 @@
           <a:noFill/>
         </p:spPr>
         <p:txBody>
-          <a:bodyPr wrap="square">
+          <a:bodyPr wrap="square" anchor="t">
             <a:spAutoFit/>
           </a:bodyPr>
           <a:lstStyle/>
           <a:p>
-            <a:pPr algn="r">
-              <a:spcBef>
-                <a:spcPts val="0"/>
-              </a:spcBef>
-            </a:pPr>
-            <a:r>
-              <a:rPr sz="1200" b="0" i="0">
-                <a:solidFill>
-                  <a:srgbClr val="5B6B7C"/>
-                </a:solidFill>
-                <a:latin typeface="Arial Narrow"/>
-              </a:rPr>
-              <a:t>10 · FECHO</a:t>
-            </a:r>
-          </a:p>
-        </p:txBody>
-      </p:sp>
-      <p:sp>
-        <p:nvSpPr>
-          <p:cNvPr id="5" name="TextBox 4"/>
+            <a:pPr algn="l">
+              <a:lnSpc>
+                <a:spcPct val="115000"/>
+              </a:lnSpc>
+            </a:pPr>
+            <a:r>
+              <a:rPr sz="1300" b="0" i="0">
+                <a:solidFill>
+                  <a:srgbClr val="595959"/>
+                </a:solidFill>
+                <a:latin typeface="Calibri"/>
+              </a:rPr>
+              <a:t>Efeito litorâneo varia de 0 a 22 furtos/1.000 hab.; a estatística t mostra magnitude e significância crescendo do noroeste em direção à RMSP e à Baixada Santista.</a:t>
+            </a:r>
+          </a:p>
+        </p:txBody>
+      </p:sp>
+      <p:sp>
+        <p:nvSpPr>
+          <p:cNvPr id="10" name="TextBox 9"/>
           <p:cNvSpPr txBox="1"/>
           <p:nvPr/>
         </p:nvSpPr>
         <p:spPr>
           <a:xfrm>
-            <a:off x="822960" y="960120"/>
-            <a:ext cx="10515600" cy="914400"/>
+            <a:off x="548640" y="6510528"/>
+            <a:ext cx="7315200" cy="274320"/>
           </a:xfrm>
           <a:prstGeom prst="rect">
             <a:avLst/>
@@ -4000,58 +3642,190 @@
           <a:noFill/>
         </p:spPr>
         <p:txBody>
-          <a:bodyPr wrap="square">
+          <a:bodyPr wrap="square" anchor="t">
             <a:spAutoFit/>
           </a:bodyPr>
           <a:lstStyle/>
           <a:p>
             <a:pPr algn="l">
-              <a:spcBef>
-                <a:spcPts val="0"/>
-              </a:spcBef>
-            </a:pPr>
-            <a:r>
-              <a:rPr sz="3400" b="1" i="0">
-                <a:solidFill>
-                  <a:srgbClr val="17222E"/>
-                </a:solidFill>
-                <a:latin typeface="Arial Narrow"/>
-              </a:rPr>
-              <a:t>Não é sobre ser pobre, </a:t>
-            </a:r>
-            <a:r>
-              <a:rPr sz="3400" b="1" i="0">
-                <a:solidFill>
-                  <a:srgbClr val="D95F02"/>
-                </a:solidFill>
-                <a:latin typeface="Arial Narrow"/>
-              </a:rPr>
-              <a:t>é sobre ser praia</a:t>
-            </a:r>
-          </a:p>
-        </p:txBody>
-      </p:sp>
-      <p:sp>
-        <p:nvSpPr>
-          <p:cNvPr id="6" name="Rounded Rectangle 5"/>
+              <a:lnSpc>
+                <a:spcPct val="115000"/>
+              </a:lnSpc>
+            </a:pPr>
+            <a:r>
+              <a:rPr sz="1000" b="0" i="0">
+                <a:solidFill>
+                  <a:srgbClr val="595959"/>
+                </a:solidFill>
+                <a:latin typeface="Calibri"/>
+              </a:rPr>
+              <a:t>Furto, Renda e Território — UFABC</a:t>
+            </a:r>
+          </a:p>
+        </p:txBody>
+      </p:sp>
+      <p:sp>
+        <p:nvSpPr>
+          <p:cNvPr id="11" name="TextBox 10"/>
+          <p:cNvSpPr txBox="1"/>
+          <p:nvPr/>
+        </p:nvSpPr>
+        <p:spPr>
+          <a:xfrm>
+            <a:off x="10972800" y="6510528"/>
+            <a:ext cx="731520" cy="274320"/>
+          </a:xfrm>
+          <a:prstGeom prst="rect">
+            <a:avLst/>
+          </a:prstGeom>
+          <a:noFill/>
+        </p:spPr>
+        <p:txBody>
+          <a:bodyPr wrap="square" anchor="t">
+            <a:spAutoFit/>
+          </a:bodyPr>
+          <a:lstStyle/>
+          <a:p>
+            <a:pPr algn="r">
+              <a:lnSpc>
+                <a:spcPct val="115000"/>
+              </a:lnSpc>
+            </a:pPr>
+            <a:r>
+              <a:rPr sz="1000" b="0" i="0">
+                <a:solidFill>
+                  <a:srgbClr val="595959"/>
+                </a:solidFill>
+                <a:latin typeface="Calibri"/>
+              </a:rPr>
+              <a:t>10</a:t>
+            </a:r>
+          </a:p>
+        </p:txBody>
+      </p:sp>
+    </p:spTree>
+  </p:cSld>
+  <p:clrMapOvr>
+    <a:masterClrMapping/>
+  </p:clrMapOvr>
+</p:sld>
+</file>
+
+<file path=ppt/slides/slide11.xml><?xml version="1.0" encoding="utf-8"?>
+<p:sld xmlns:a="http://schemas.openxmlformats.org/drawingml/2006/main" xmlns:p="http://schemas.openxmlformats.org/presentationml/2006/main" xmlns:r="http://schemas.openxmlformats.org/officeDocument/2006/relationships">
+  <p:cSld>
+    <p:bg>
+      <p:bgPr>
+        <a:solidFill>
+          <a:srgbClr val="FFFFFF"/>
+        </a:solidFill>
+        <a:effectLst/>
+      </p:bgPr>
+    </p:bg>
+    <p:spTree>
+      <p:nvGrpSpPr>
+        <p:cNvPr id="1" name=""/>
+        <p:cNvGrpSpPr/>
+        <p:nvPr/>
+      </p:nvGrpSpPr>
+      <p:grpSpPr/>
+      <p:sp>
+        <p:nvSpPr>
+          <p:cNvPr id="2" name="TextBox 1"/>
+          <p:cNvSpPr txBox="1"/>
+          <p:nvPr/>
+        </p:nvSpPr>
+        <p:spPr>
+          <a:xfrm>
+            <a:off x="548640" y="320040"/>
+            <a:ext cx="7315200" cy="365760"/>
+          </a:xfrm>
+          <a:prstGeom prst="rect">
+            <a:avLst/>
+          </a:prstGeom>
+          <a:noFill/>
+        </p:spPr>
+        <p:txBody>
+          <a:bodyPr wrap="square" anchor="t">
+            <a:spAutoFit/>
+          </a:bodyPr>
+          <a:lstStyle/>
+          <a:p>
+            <a:pPr algn="l">
+              <a:lnSpc>
+                <a:spcPct val="115000"/>
+              </a:lnSpc>
+            </a:pPr>
+            <a:r>
+              <a:rPr sz="1300" b="1" i="0">
+                <a:solidFill>
+                  <a:srgbClr val="1F4E79"/>
+                </a:solidFill>
+                <a:latin typeface="Calibri"/>
+              </a:rPr>
+              <a:t>DESENVOLVIMENTO E RESULTADOS</a:t>
+            </a:r>
+          </a:p>
+        </p:txBody>
+      </p:sp>
+      <p:sp>
+        <p:nvSpPr>
+          <p:cNvPr id="3" name="TextBox 2"/>
+          <p:cNvSpPr txBox="1"/>
+          <p:nvPr/>
+        </p:nvSpPr>
+        <p:spPr>
+          <a:xfrm>
+            <a:off x="548640" y="594360"/>
+            <a:ext cx="11064240" cy="822960"/>
+          </a:xfrm>
+          <a:prstGeom prst="rect">
+            <a:avLst/>
+          </a:prstGeom>
+          <a:noFill/>
+        </p:spPr>
+        <p:txBody>
+          <a:bodyPr wrap="square" anchor="t">
+            <a:spAutoFit/>
+          </a:bodyPr>
+          <a:lstStyle/>
+          <a:p>
+            <a:pPr algn="l">
+              <a:lnSpc>
+                <a:spcPct val="115000"/>
+              </a:lnSpc>
+            </a:pPr>
+            <a:r>
+              <a:rPr sz="3000" b="1" i="0">
+                <a:solidFill>
+                  <a:srgbClr val="1A1A1A"/>
+                </a:solidFill>
+                <a:latin typeface="Calibri"/>
+              </a:rPr>
+              <a:t>Cenário contrafactual: isolando o efeito litorâneo</a:t>
+            </a:r>
+          </a:p>
+        </p:txBody>
+      </p:sp>
+      <p:sp>
+        <p:nvSpPr>
+          <p:cNvPr id="4" name="Rectangle 3"/>
           <p:cNvSpPr/>
           <p:nvPr/>
         </p:nvSpPr>
         <p:spPr>
           <a:xfrm>
-            <a:off x="822960" y="1783080"/>
-            <a:ext cx="5029200" cy="1554480"/>
-          </a:xfrm>
-          <a:prstGeom prst="roundRect">
+            <a:off x="548640" y="1325880"/>
+            <a:ext cx="11064240" cy="27940"/>
+          </a:xfrm>
+          <a:prstGeom prst="rect">
             <a:avLst/>
           </a:prstGeom>
           <a:solidFill>
-            <a:srgbClr val="FBE6D4"/>
+            <a:srgbClr val="1F4E79"/>
           </a:solidFill>
-          <a:ln w="9525">
-            <a:solidFill>
-              <a:srgbClr val="D8DFE7"/>
-            </a:solidFill>
+          <a:ln>
+            <a:noFill/>
           </a:ln>
           <a:effectLst/>
         </p:spPr>
@@ -4070,79 +3844,322 @@
           </a:fontRef>
         </p:style>
         <p:txBody>
-          <a:bodyPr rtlCol="0" anchor="ctr" wrap="square" lIns="182880" rIns="182880" tIns="128016" bIns="128016"/>
+          <a:bodyPr rtlCol="0" anchor="ctr"/>
+          <a:lstStyle/>
+          <a:p>
+            <a:pPr algn="ctr"/>
+          </a:p>
+        </p:txBody>
+      </p:sp>
+      <p:pic>
+        <p:nvPicPr>
+          <p:cNvPr id="5" name="Picture 4" descr="gwr_contrafactual_dif.png"/>
+          <p:cNvPicPr>
+            <a:picLocks noChangeAspect="1"/>
+          </p:cNvPicPr>
+          <p:nvPr/>
+        </p:nvPicPr>
+        <p:blipFill>
+          <a:blip r:embed="rId2"/>
+          <a:stretch>
+            <a:fillRect/>
+          </a:stretch>
+        </p:blipFill>
+        <p:spPr>
+          <a:xfrm>
+            <a:off x="902970" y="1691640"/>
+            <a:ext cx="5143500" cy="4572000"/>
+          </a:xfrm>
+          <a:prstGeom prst="rect">
+            <a:avLst/>
+          </a:prstGeom>
+        </p:spPr>
+      </p:pic>
+      <p:sp>
+        <p:nvSpPr>
+          <p:cNvPr id="6" name="TextBox 5"/>
+          <p:cNvSpPr txBox="1"/>
+          <p:nvPr/>
+        </p:nvSpPr>
+        <p:spPr>
+          <a:xfrm>
+            <a:off x="6675120" y="1828800"/>
+            <a:ext cx="4937760" cy="4114800"/>
+          </a:xfrm>
+          <a:prstGeom prst="rect">
+            <a:avLst/>
+          </a:prstGeom>
+          <a:noFill/>
+        </p:spPr>
+        <p:txBody>
+          <a:bodyPr wrap="square">
+            <a:spAutoFit/>
+          </a:bodyPr>
+          <a:lstStyle/>
+          <a:p>
+            <a:pPr>
+              <a:lnSpc>
+                <a:spcPct val="115000"/>
+              </a:lnSpc>
+              <a:spcAft>
+                <a:spcPts val="1600"/>
+              </a:spcAft>
+            </a:pPr>
+            <a:r>
+              <a:rPr sz="1500">
+                <a:solidFill>
+                  <a:srgbClr val="333333"/>
+                </a:solidFill>
+                <a:latin typeface="Calibri"/>
+              </a:rPr>
+              <a:t>—  Mantendo os coeficientes locais do GWR, zeramos a variável
+litoral e recalculamos a predição.</a:t>
+            </a:r>
+          </a:p>
+          <a:p>
+            <a:pPr>
+              <a:lnSpc>
+                <a:spcPct val="115000"/>
+              </a:lnSpc>
+              <a:spcAft>
+                <a:spcPts val="1600"/>
+              </a:spcAft>
+            </a:pPr>
+            <a:r>
+              <a:rPr sz="1500">
+                <a:solidFill>
+                  <a:srgbClr val="333333"/>
+                </a:solidFill>
+                <a:latin typeface="Calibri"/>
+              </a:rPr>
+              <a:t>—  Diferença entre predição real e contrafactual — até 12
+furtos/1.000 hab. — concentra-se inteiramente na faixa costeira.</a:t>
+            </a:r>
+          </a:p>
+          <a:p>
+            <a:pPr>
+              <a:lnSpc>
+                <a:spcPct val="115000"/>
+              </a:lnSpc>
+              <a:spcAft>
+                <a:spcPts val="1600"/>
+              </a:spcAft>
+            </a:pPr>
+            <a:r>
+              <a:rPr sz="1500">
+                <a:solidFill>
+                  <a:srgbClr val="333333"/>
+                </a:solidFill>
+                <a:latin typeface="Calibri"/>
+              </a:rPr>
+              <a:t>—  Regime separado: no interior, furto cresce com a renda (R²=0,19);
+no litoral, reta praticamente plana e num patamar bem mais alto
+(R²=0,008) — a renda não explica a variação lá dentro.</a:t>
+            </a:r>
+          </a:p>
+        </p:txBody>
+      </p:sp>
+      <p:sp>
+        <p:nvSpPr>
+          <p:cNvPr id="7" name="TextBox 6"/>
+          <p:cNvSpPr txBox="1"/>
+          <p:nvPr/>
+        </p:nvSpPr>
+        <p:spPr>
+          <a:xfrm>
+            <a:off x="548640" y="6510528"/>
+            <a:ext cx="7315200" cy="274320"/>
+          </a:xfrm>
+          <a:prstGeom prst="rect">
+            <a:avLst/>
+          </a:prstGeom>
+          <a:noFill/>
+        </p:spPr>
+        <p:txBody>
+          <a:bodyPr wrap="square" anchor="t">
+            <a:spAutoFit/>
+          </a:bodyPr>
           <a:lstStyle/>
           <a:p>
             <a:pPr algn="l">
-              <a:spcBef>
-                <a:spcPts val="0"/>
-              </a:spcBef>
-            </a:pPr>
-            <a:r>
-              <a:rPr sz="1200" b="1" i="0">
-                <a:solidFill>
-                  <a:srgbClr val="D95F02"/>
-                </a:solidFill>
-                <a:latin typeface="Arial Narrow"/>
-              </a:rPr>
-              <a:t>O QUE FICOU</a:t>
-            </a:r>
-          </a:p>
+              <a:lnSpc>
+                <a:spcPct val="115000"/>
+              </a:lnSpc>
+            </a:pPr>
+            <a:r>
+              <a:rPr sz="1000" b="0" i="0">
+                <a:solidFill>
+                  <a:srgbClr val="595959"/>
+                </a:solidFill>
+                <a:latin typeface="Calibri"/>
+              </a:rPr>
+              <a:t>Furto, Renda e Território — UFABC</a:t>
+            </a:r>
+          </a:p>
+        </p:txBody>
+      </p:sp>
+      <p:sp>
+        <p:nvSpPr>
+          <p:cNvPr id="8" name="TextBox 7"/>
+          <p:cNvSpPr txBox="1"/>
+          <p:nvPr/>
+        </p:nvSpPr>
+        <p:spPr>
+          <a:xfrm>
+            <a:off x="10972800" y="6510528"/>
+            <a:ext cx="731520" cy="274320"/>
+          </a:xfrm>
+          <a:prstGeom prst="rect">
+            <a:avLst/>
+          </a:prstGeom>
+          <a:noFill/>
+        </p:spPr>
+        <p:txBody>
+          <a:bodyPr wrap="square" anchor="t">
+            <a:spAutoFit/>
+          </a:bodyPr>
+          <a:lstStyle/>
+          <a:p>
+            <a:pPr algn="r">
+              <a:lnSpc>
+                <a:spcPct val="115000"/>
+              </a:lnSpc>
+            </a:pPr>
+            <a:r>
+              <a:rPr sz="1000" b="0" i="0">
+                <a:solidFill>
+                  <a:srgbClr val="595959"/>
+                </a:solidFill>
+                <a:latin typeface="Calibri"/>
+              </a:rPr>
+              <a:t>11</a:t>
+            </a:r>
+          </a:p>
+        </p:txBody>
+      </p:sp>
+    </p:spTree>
+  </p:cSld>
+  <p:clrMapOvr>
+    <a:masterClrMapping/>
+  </p:clrMapOvr>
+</p:sld>
+</file>
+
+<file path=ppt/slides/slide12.xml><?xml version="1.0" encoding="utf-8"?>
+<p:sld xmlns:a="http://schemas.openxmlformats.org/drawingml/2006/main" xmlns:p="http://schemas.openxmlformats.org/presentationml/2006/main" xmlns:r="http://schemas.openxmlformats.org/officeDocument/2006/relationships">
+  <p:cSld>
+    <p:bg>
+      <p:bgPr>
+        <a:solidFill>
+          <a:srgbClr val="FFFFFF"/>
+        </a:solidFill>
+        <a:effectLst/>
+      </p:bgPr>
+    </p:bg>
+    <p:spTree>
+      <p:nvGrpSpPr>
+        <p:cNvPr id="1" name=""/>
+        <p:cNvGrpSpPr/>
+        <p:nvPr/>
+      </p:nvGrpSpPr>
+      <p:grpSpPr/>
+      <p:sp>
+        <p:nvSpPr>
+          <p:cNvPr id="2" name="TextBox 1"/>
+          <p:cNvSpPr txBox="1"/>
+          <p:nvPr/>
+        </p:nvSpPr>
+        <p:spPr>
+          <a:xfrm>
+            <a:off x="548640" y="320040"/>
+            <a:ext cx="7315200" cy="365760"/>
+          </a:xfrm>
+          <a:prstGeom prst="rect">
+            <a:avLst/>
+          </a:prstGeom>
+          <a:noFill/>
+        </p:spPr>
+        <p:txBody>
+          <a:bodyPr wrap="square" anchor="t">
+            <a:spAutoFit/>
+          </a:bodyPr>
+          <a:lstStyle/>
           <a:p>
             <a:pPr algn="l">
-              <a:spcBef>
-                <a:spcPts val="400"/>
-              </a:spcBef>
-            </a:pPr>
-            <a:r>
-              <a:rPr sz="2000" b="1" i="0">
-                <a:solidFill>
-                  <a:srgbClr val="17222E"/>
-                </a:solidFill>
-                <a:latin typeface="Arial Narrow"/>
-              </a:rPr>
-              <a:t>Território &gt; renda</a:t>
-            </a:r>
-          </a:p>
+              <a:lnSpc>
+                <a:spcPct val="115000"/>
+              </a:lnSpc>
+            </a:pPr>
+            <a:r>
+              <a:rPr sz="1300" b="1" i="0">
+                <a:solidFill>
+                  <a:srgbClr val="1F4E79"/>
+                </a:solidFill>
+                <a:latin typeface="Calibri"/>
+              </a:rPr>
+              <a:t>DESENVOLVIMENTO E RESULTADOS</a:t>
+            </a:r>
+          </a:p>
+        </p:txBody>
+      </p:sp>
+      <p:sp>
+        <p:nvSpPr>
+          <p:cNvPr id="3" name="TextBox 2"/>
+          <p:cNvSpPr txBox="1"/>
+          <p:nvPr/>
+        </p:nvSpPr>
+        <p:spPr>
+          <a:xfrm>
+            <a:off x="548640" y="594360"/>
+            <a:ext cx="11064240" cy="822960"/>
+          </a:xfrm>
+          <a:prstGeom prst="rect">
+            <a:avLst/>
+          </a:prstGeom>
+          <a:noFill/>
+        </p:spPr>
+        <p:txBody>
+          <a:bodyPr wrap="square" anchor="t">
+            <a:spAutoFit/>
+          </a:bodyPr>
+          <a:lstStyle/>
           <a:p>
             <a:pPr algn="l">
-              <a:spcBef>
-                <a:spcPts val="400"/>
-              </a:spcBef>
-            </a:pPr>
-            <a:r>
-              <a:rPr sz="1400" b="0" i="0">
-                <a:solidFill>
-                  <a:srgbClr val="17222E"/>
-                </a:solidFill>
-                <a:latin typeface="Georgia"/>
-              </a:rPr>
-              <a:t>A taxa de furto responde mais a onde a cidade está do que a quanto ela ganha.</a:t>
-            </a:r>
-          </a:p>
-        </p:txBody>
-      </p:sp>
-      <p:sp>
-        <p:nvSpPr>
-          <p:cNvPr id="7" name="Rounded Rectangle 6"/>
+              <a:lnSpc>
+                <a:spcPct val="115000"/>
+              </a:lnSpc>
+            </a:pPr>
+            <a:r>
+              <a:rPr sz="3000" b="1" i="0">
+                <a:solidFill>
+                  <a:srgbClr val="1A1A1A"/>
+                </a:solidFill>
+                <a:latin typeface="Calibri"/>
+              </a:rPr>
+              <a:t>Resíduos confirmam o mecanismo</a:t>
+            </a:r>
+          </a:p>
+        </p:txBody>
+      </p:sp>
+      <p:sp>
+        <p:nvSpPr>
+          <p:cNvPr id="4" name="Rectangle 3"/>
           <p:cNvSpPr/>
           <p:nvPr/>
         </p:nvSpPr>
         <p:spPr>
           <a:xfrm>
-            <a:off x="6400800" y="1783080"/>
-            <a:ext cx="5029200" cy="1554480"/>
-          </a:xfrm>
-          <a:prstGeom prst="roundRect">
+            <a:off x="548640" y="1325880"/>
+            <a:ext cx="11064240" cy="27940"/>
+          </a:xfrm>
+          <a:prstGeom prst="rect">
             <a:avLst/>
           </a:prstGeom>
           <a:solidFill>
-            <a:srgbClr val="DBE7F3"/>
+            <a:srgbClr val="1F4E79"/>
           </a:solidFill>
-          <a:ln w="9525">
-            <a:solidFill>
-              <a:srgbClr val="D8DFE7"/>
-            </a:solidFill>
+          <a:ln>
+            <a:noFill/>
           </a:ln>
           <a:effectLst/>
         </p:spPr>
@@ -4161,68 +4178,47 @@
           </a:fontRef>
         </p:style>
         <p:txBody>
-          <a:bodyPr rtlCol="0" anchor="ctr" wrap="square" lIns="182880" rIns="182880" tIns="128016" bIns="128016"/>
-          <a:lstStyle/>
-          <a:p>
-            <a:pPr algn="l">
-              <a:spcBef>
-                <a:spcPts val="0"/>
-              </a:spcBef>
-            </a:pPr>
-            <a:r>
-              <a:rPr sz="1200" b="1" i="0">
-                <a:solidFill>
-                  <a:srgbClr val="0B5394"/>
-                </a:solidFill>
-                <a:latin typeface="Arial Narrow"/>
-              </a:rPr>
-              <a:t>O PORQUÊ</a:t>
-            </a:r>
-          </a:p>
-          <a:p>
-            <a:pPr algn="l">
-              <a:spcBef>
-                <a:spcPts val="400"/>
-              </a:spcBef>
-            </a:pPr>
-            <a:r>
-              <a:rPr sz="2000" b="1" i="0">
-                <a:solidFill>
-                  <a:srgbClr val="17222E"/>
-                </a:solidFill>
-                <a:latin typeface="Arial Narrow"/>
-              </a:rPr>
-              <a:t>População flutuante</a:t>
-            </a:r>
-          </a:p>
-          <a:p>
-            <a:pPr algn="l">
-              <a:spcBef>
-                <a:spcPts val="400"/>
-              </a:spcBef>
-            </a:pPr>
-            <a:r>
-              <a:rPr sz="1400" b="0" i="0">
-                <a:solidFill>
-                  <a:srgbClr val="17222E"/>
-                </a:solidFill>
-                <a:latin typeface="Georgia"/>
-              </a:rPr>
-              <a:t>Cidade de praia incha no verão, mas a taxa divide pela população fixa.</a:t>
-            </a:r>
-          </a:p>
-        </p:txBody>
-      </p:sp>
-      <p:sp>
-        <p:nvSpPr>
-          <p:cNvPr id="8" name="TextBox 7"/>
+          <a:bodyPr rtlCol="0" anchor="ctr"/>
+          <a:lstStyle/>
+          <a:p>
+            <a:pPr algn="ctr"/>
+          </a:p>
+        </p:txBody>
+      </p:sp>
+      <p:pic>
+        <p:nvPicPr>
+          <p:cNvPr id="5" name="Picture 4" descr="residuos_litoral_boxplot.png"/>
+          <p:cNvPicPr>
+            <a:picLocks noChangeAspect="1"/>
+          </p:cNvPicPr>
+          <p:nvPr/>
+        </p:nvPicPr>
+        <p:blipFill>
+          <a:blip r:embed="rId2"/>
+          <a:stretch>
+            <a:fillRect/>
+          </a:stretch>
+        </p:blipFill>
+        <p:spPr>
+          <a:xfrm>
+            <a:off x="548640" y="1892808"/>
+            <a:ext cx="6949440" cy="4169664"/>
+          </a:xfrm>
+          <a:prstGeom prst="rect">
+            <a:avLst/>
+          </a:prstGeom>
+        </p:spPr>
+      </p:pic>
+      <p:sp>
+        <p:nvSpPr>
+          <p:cNvPr id="6" name="TextBox 5"/>
           <p:cNvSpPr txBox="1"/>
           <p:nvPr/>
         </p:nvSpPr>
         <p:spPr>
           <a:xfrm>
-            <a:off x="822960" y="3657600"/>
-            <a:ext cx="10424160" cy="2377440"/>
+            <a:off x="7772400" y="1920240"/>
+            <a:ext cx="3840480" cy="4114800"/>
           </a:xfrm>
           <a:prstGeom prst="rect">
             <a:avLst/>
@@ -4235,150 +4231,138 @@
           </a:bodyPr>
           <a:lstStyle/>
           <a:p>
+            <a:pPr>
+              <a:lnSpc>
+                <a:spcPct val="115000"/>
+              </a:lnSpc>
+              <a:spcAft>
+                <a:spcPts val="1600"/>
+              </a:spcAft>
+            </a:pPr>
+            <a:r>
+              <a:rPr sz="1500">
+                <a:solidFill>
+                  <a:srgbClr val="333333"/>
+                </a:solidFill>
+                <a:latin typeface="Calibri"/>
+              </a:rPr>
+              <a:t>—  Sem litoral: resíduo médio +10,68 (litorâneos) vs. −0,27 (demais).</a:t>
+            </a:r>
+          </a:p>
+          <a:p>
+            <a:pPr>
+              <a:lnSpc>
+                <a:spcPct val="115000"/>
+              </a:lnSpc>
+              <a:spcAft>
+                <a:spcPts val="1600"/>
+              </a:spcAft>
+            </a:pPr>
+            <a:r>
+              <a:rPr sz="1500">
+                <a:solidFill>
+                  <a:srgbClr val="333333"/>
+                </a:solidFill>
+                <a:latin typeface="Calibri"/>
+              </a:rPr>
+              <a:t>—  Com litoral: os dois grupos centram em zero.</a:t>
+            </a:r>
+          </a:p>
+          <a:p>
+            <a:pPr>
+              <a:lnSpc>
+                <a:spcPct val="115000"/>
+              </a:lnSpc>
+              <a:spcAft>
+                <a:spcPts val="1600"/>
+              </a:spcAft>
+            </a:pPr>
+            <a:r>
+              <a:rPr sz="1500">
+                <a:solidFill>
+                  <a:srgbClr val="333333"/>
+                </a:solidFill>
+                <a:latin typeface="Calibri"/>
+              </a:rPr>
+              <a:t>—  Correlação resíduo × litoral cai de 0,51 para 0,00.</a:t>
+            </a:r>
+          </a:p>
+        </p:txBody>
+      </p:sp>
+      <p:sp>
+        <p:nvSpPr>
+          <p:cNvPr id="7" name="TextBox 6"/>
+          <p:cNvSpPr txBox="1"/>
+          <p:nvPr/>
+        </p:nvSpPr>
+        <p:spPr>
+          <a:xfrm>
+            <a:off x="548640" y="6510528"/>
+            <a:ext cx="7315200" cy="274320"/>
+          </a:xfrm>
+          <a:prstGeom prst="rect">
+            <a:avLst/>
+          </a:prstGeom>
+          <a:noFill/>
+        </p:spPr>
+        <p:txBody>
+          <a:bodyPr wrap="square" anchor="t">
+            <a:spAutoFit/>
+          </a:bodyPr>
+          <a:lstStyle/>
+          <a:p>
             <a:pPr algn="l">
-              <a:spcBef>
-                <a:spcPts val="0"/>
-              </a:spcBef>
-            </a:pPr>
-            <a:r>
-              <a:rPr sz="1100" b="0" i="0">
-                <a:solidFill>
-                  <a:srgbClr val="D95F02"/>
-                </a:solidFill>
-                <a:latin typeface="Arial Narrow"/>
-              </a:rPr>
-              <a:t>●  </a:t>
-            </a:r>
-            <a:r>
-              <a:rPr sz="1500" b="0" i="0">
-                <a:solidFill>
-                  <a:srgbClr val="17222E"/>
-                </a:solidFill>
-                <a:latin typeface="Georgia"/>
-              </a:rPr>
-              <a:t>Hipótese 1 (pobreza) </a:t>
-            </a:r>
-            <a:r>
-              <a:rPr sz="1500" b="1" i="0">
-                <a:solidFill>
-                  <a:srgbClr val="17222E"/>
-                </a:solidFill>
-                <a:latin typeface="Georgia"/>
-              </a:rPr>
-              <a:t>não</a:t>
-            </a:r>
-            <a:r>
-              <a:rPr sz="1500" b="0" i="0">
-                <a:solidFill>
-                  <a:srgbClr val="17222E"/>
-                </a:solidFill>
-                <a:latin typeface="Georgia"/>
-              </a:rPr>
-              <a:t> se sustentou; Hipótese 2 (praia) </a:t>
-            </a:r>
-            <a:r>
-              <a:rPr sz="1500" b="1" i="0">
-                <a:solidFill>
-                  <a:srgbClr val="17222E"/>
-                </a:solidFill>
-                <a:latin typeface="Georgia"/>
-              </a:rPr>
-              <a:t>sim</a:t>
-            </a:r>
-            <a:r>
-              <a:rPr sz="1500" b="0" i="0">
-                <a:solidFill>
-                  <a:srgbClr val="17222E"/>
-                </a:solidFill>
-                <a:latin typeface="Georgia"/>
-              </a:rPr>
-              <a:t>.</a:t>
-            </a:r>
-          </a:p>
-          <a:p>
-            <a:pPr algn="l">
-              <a:spcBef>
-                <a:spcPts val="1100"/>
-              </a:spcBef>
-            </a:pPr>
-            <a:r>
-              <a:rPr sz="1100" b="0" i="0">
-                <a:solidFill>
-                  <a:srgbClr val="D95F02"/>
-                </a:solidFill>
-                <a:latin typeface="Arial Narrow"/>
-              </a:rPr>
-              <a:t>●  </a:t>
-            </a:r>
-            <a:r>
-              <a:rPr sz="1500" b="0" i="0">
-                <a:solidFill>
-                  <a:srgbClr val="17222E"/>
-                </a:solidFill>
-                <a:latin typeface="Georgia"/>
-              </a:rPr>
-              <a:t>O litoral é praticamente um </a:t>
-            </a:r>
-            <a:r>
-              <a:rPr sz="1500" b="1" i="0">
-                <a:solidFill>
-                  <a:srgbClr val="17222E"/>
-                </a:solidFill>
-                <a:latin typeface="Georgia"/>
-              </a:rPr>
-              <a:t>mundo à parte</a:t>
-            </a:r>
-            <a:r>
-              <a:rPr sz="1500" b="0" i="0">
-                <a:solidFill>
-                  <a:srgbClr val="17222E"/>
-                </a:solidFill>
-                <a:latin typeface="Georgia"/>
-              </a:rPr>
-              <a:t>, e modelos que enxergam a geografia acertam mais.</a:t>
-            </a:r>
-          </a:p>
-          <a:p>
-            <a:pPr algn="l">
-              <a:spcBef>
-                <a:spcPts val="1100"/>
-              </a:spcBef>
-            </a:pPr>
-            <a:r>
-              <a:rPr sz="1100" b="0" i="0">
-                <a:solidFill>
-                  <a:srgbClr val="D95F02"/>
-                </a:solidFill>
-                <a:latin typeface="Arial Narrow"/>
-              </a:rPr>
-              <a:t>●  </a:t>
-            </a:r>
-            <a:r>
-              <a:rPr sz="1500" b="0" i="0">
-                <a:solidFill>
-                  <a:srgbClr val="17222E"/>
-                </a:solidFill>
-                <a:latin typeface="Georgia"/>
-              </a:rPr>
-              <a:t>Alerta de método: </a:t>
-            </a:r>
-            <a:r>
-              <a:rPr sz="1500" b="1" i="0">
-                <a:solidFill>
-                  <a:srgbClr val="17222E"/>
-                </a:solidFill>
-                <a:latin typeface="Georgia"/>
-              </a:rPr>
-              <a:t>medir por população residente engana</a:t>
-            </a:r>
-            <a:r>
-              <a:rPr sz="1500" b="0" i="0">
-                <a:solidFill>
-                  <a:srgbClr val="17222E"/>
-                </a:solidFill>
-                <a:latin typeface="Georgia"/>
-              </a:rPr>
-              <a:t> em lugar turístico.</a:t>
+              <a:lnSpc>
+                <a:spcPct val="115000"/>
+              </a:lnSpc>
+            </a:pPr>
+            <a:r>
+              <a:rPr sz="1000" b="0" i="0">
+                <a:solidFill>
+                  <a:srgbClr val="595959"/>
+                </a:solidFill>
+                <a:latin typeface="Calibri"/>
+              </a:rPr>
+              <a:t>Furto, Renda e Território — UFABC</a:t>
+            </a:r>
+          </a:p>
+        </p:txBody>
+      </p:sp>
+      <p:sp>
+        <p:nvSpPr>
+          <p:cNvPr id="8" name="TextBox 7"/>
+          <p:cNvSpPr txBox="1"/>
+          <p:nvPr/>
+        </p:nvSpPr>
+        <p:spPr>
+          <a:xfrm>
+            <a:off x="10972800" y="6510528"/>
+            <a:ext cx="731520" cy="274320"/>
+          </a:xfrm>
+          <a:prstGeom prst="rect">
+            <a:avLst/>
+          </a:prstGeom>
+          <a:noFill/>
+        </p:spPr>
+        <p:txBody>
+          <a:bodyPr wrap="square" anchor="t">
+            <a:spAutoFit/>
+          </a:bodyPr>
+          <a:lstStyle/>
+          <a:p>
+            <a:pPr algn="r">
+              <a:lnSpc>
+                <a:spcPct val="115000"/>
+              </a:lnSpc>
+            </a:pPr>
+            <a:r>
+              <a:rPr sz="1000" b="0" i="0">
+                <a:solidFill>
+                  <a:srgbClr val="595959"/>
+                </a:solidFill>
+                <a:latin typeface="Calibri"/>
+              </a:rPr>
+              <a:t>12</a:t>
             </a:r>
           </a:p>
         </p:txBody>
@@ -4391,9 +4375,17 @@
 </p:sld>
 </file>
 
-<file path=ppt/slides/slide2.xml><?xml version="1.0" encoding="utf-8"?>
+<file path=ppt/slides/slide13.xml><?xml version="1.0" encoding="utf-8"?>
 <p:sld xmlns:a="http://schemas.openxmlformats.org/drawingml/2006/main" xmlns:p="http://schemas.openxmlformats.org/presentationml/2006/main" xmlns:r="http://schemas.openxmlformats.org/officeDocument/2006/relationships">
   <p:cSld>
+    <p:bg>
+      <p:bgPr>
+        <a:solidFill>
+          <a:srgbClr val="FFFFFF"/>
+        </a:solidFill>
+        <a:effectLst/>
+      </p:bgPr>
+    </p:bg>
     <p:spTree>
       <p:nvGrpSpPr>
         <p:cNvPr id="1" name=""/>
@@ -4409,8 +4401,8 @@
         </p:nvSpPr>
         <p:spPr>
           <a:xfrm>
-            <a:off x="822960" y="384048"/>
-            <a:ext cx="10515600" cy="365760"/>
+            <a:off x="548640" y="320040"/>
+            <a:ext cx="7315200" cy="365760"/>
           </a:xfrm>
           <a:prstGeom prst="rect">
             <a:avLst/>
@@ -4418,44 +4410,83 @@
           <a:noFill/>
         </p:spPr>
         <p:txBody>
-          <a:bodyPr wrap="square">
+          <a:bodyPr wrap="square" anchor="t">
             <a:spAutoFit/>
           </a:bodyPr>
           <a:lstStyle/>
           <a:p>
             <a:pPr algn="l">
-              <a:spcBef>
-                <a:spcPts val="0"/>
-              </a:spcBef>
+              <a:lnSpc>
+                <a:spcPct val="115000"/>
+              </a:lnSpc>
             </a:pPr>
             <a:r>
               <a:rPr sz="1300" b="1" i="0">
                 <a:solidFill>
-                  <a:srgbClr val="D95F02"/>
-                </a:solidFill>
-                <a:latin typeface="Arial Narrow"/>
-              </a:rPr>
-              <a:t>DE ONDE VIERAM OS DADOS</a:t>
-            </a:r>
-          </a:p>
-        </p:txBody>
-      </p:sp>
-      <p:sp>
-        <p:nvSpPr>
-          <p:cNvPr id="3" name="Rectangle 2"/>
+                  <a:srgbClr val="1F4E79"/>
+                </a:solidFill>
+                <a:latin typeface="Calibri"/>
+              </a:rPr>
+              <a:t>DESENVOLVIMENTO E RESULTADOS</a:t>
+            </a:r>
+          </a:p>
+        </p:txBody>
+      </p:sp>
+      <p:sp>
+        <p:nvSpPr>
+          <p:cNvPr id="3" name="TextBox 2"/>
+          <p:cNvSpPr txBox="1"/>
+          <p:nvPr/>
+        </p:nvSpPr>
+        <p:spPr>
+          <a:xfrm>
+            <a:off x="548640" y="594360"/>
+            <a:ext cx="11064240" cy="822960"/>
+          </a:xfrm>
+          <a:prstGeom prst="rect">
+            <a:avLst/>
+          </a:prstGeom>
+          <a:noFill/>
+        </p:spPr>
+        <p:txBody>
+          <a:bodyPr wrap="square" anchor="t">
+            <a:spAutoFit/>
+          </a:bodyPr>
+          <a:lstStyle/>
+          <a:p>
+            <a:pPr algn="l">
+              <a:lnSpc>
+                <a:spcPct val="115000"/>
+              </a:lnSpc>
+            </a:pPr>
+            <a:r>
+              <a:rPr sz="3000" b="1" i="0">
+                <a:solidFill>
+                  <a:srgbClr val="1A1A1A"/>
+                </a:solidFill>
+                <a:latin typeface="Calibri"/>
+              </a:rPr>
+              <a:t>Comparação final dos modelos</a:t>
+            </a:r>
+          </a:p>
+        </p:txBody>
+      </p:sp>
+      <p:sp>
+        <p:nvSpPr>
+          <p:cNvPr id="4" name="Rectangle 3"/>
           <p:cNvSpPr/>
           <p:nvPr/>
         </p:nvSpPr>
         <p:spPr>
           <a:xfrm>
-            <a:off x="822960" y="749808"/>
-            <a:ext cx="10515600" cy="15240"/>
+            <a:off x="548640" y="1325880"/>
+            <a:ext cx="11064240" cy="27940"/>
           </a:xfrm>
           <a:prstGeom prst="rect">
             <a:avLst/>
           </a:prstGeom>
           <a:solidFill>
-            <a:srgbClr val="D8DFE7"/>
+            <a:srgbClr val="1F4E79"/>
           </a:solidFill>
           <a:ln>
             <a:noFill/>
@@ -4484,16 +4515,404 @@
           </a:p>
         </p:txBody>
       </p:sp>
-      <p:sp>
-        <p:nvSpPr>
-          <p:cNvPr id="4" name="TextBox 3"/>
+      <p:graphicFrame>
+        <p:nvGraphicFramePr>
+          <p:cNvPr id="5" name="Table 4"/>
+          <p:cNvGraphicFramePr>
+            <a:graphicFrameLocks noGrp="1"/>
+          </p:cNvGraphicFramePr>
+          <p:nvPr/>
+        </p:nvGraphicFramePr>
+        <p:xfrm>
+          <a:off x="1280160" y="2011680"/>
+          <a:ext cx="6766560" cy="2011680"/>
+        </p:xfrm>
+        <a:graphic>
+          <a:graphicData uri="http://schemas.openxmlformats.org/drawingml/2006/table">
+            <a:tbl>
+              <a:tblPr firstRow="1" bandRow="1">
+                <a:tableStyleId>{5C22544A-7EE6-4342-B048-85BDC9FD1C3A}</a:tableStyleId>
+              </a:tblPr>
+              <a:tblGrid>
+                <a:gridCol w="2194560"/>
+                <a:gridCol w="1645920"/>
+                <a:gridCol w="1645920"/>
+                <a:gridCol w="1280160"/>
+              </a:tblGrid>
+              <a:tr h="502920">
+                <a:tc>
+                  <a:txBody>
+                    <a:bodyPr/>
+                    <a:lstStyle/>
+                    <a:p>
+                      <a:pPr algn="ctr"/>
+                      <a:r>
+                        <a:rPr b="1" sz="1500">
+                          <a:solidFill>
+                            <a:srgbClr val="FFFFFF"/>
+                          </a:solidFill>
+                        </a:rPr>
+                        <a:t>Modelo</a:t>
+                      </a:r>
+                    </a:p>
+                  </a:txBody>
+                  <a:tcPr>
+                    <a:solidFill>
+                      <a:srgbClr val="1F4E79"/>
+                    </a:solidFill>
+                  </a:tcPr>
+                </a:tc>
+                <a:tc>
+                  <a:txBody>
+                    <a:bodyPr/>
+                    <a:lstStyle/>
+                    <a:p>
+                      <a:pPr algn="ctr"/>
+                      <a:r>
+                        <a:rPr b="1" sz="1500">
+                          <a:solidFill>
+                            <a:srgbClr val="FFFFFF"/>
+                          </a:solidFill>
+                        </a:rPr>
+                        <a:t>Sem litoral</a:t>
+                      </a:r>
+                    </a:p>
+                  </a:txBody>
+                  <a:tcPr>
+                    <a:solidFill>
+                      <a:srgbClr val="1F4E79"/>
+                    </a:solidFill>
+                  </a:tcPr>
+                </a:tc>
+                <a:tc>
+                  <a:txBody>
+                    <a:bodyPr/>
+                    <a:lstStyle/>
+                    <a:p>
+                      <a:pPr algn="ctr"/>
+                      <a:r>
+                        <a:rPr b="1" sz="1500">
+                          <a:solidFill>
+                            <a:srgbClr val="FFFFFF"/>
+                          </a:solidFill>
+                        </a:rPr>
+                        <a:t>Com litoral</a:t>
+                      </a:r>
+                    </a:p>
+                  </a:txBody>
+                  <a:tcPr>
+                    <a:solidFill>
+                      <a:srgbClr val="1F4E79"/>
+                    </a:solidFill>
+                  </a:tcPr>
+                </a:tc>
+                <a:tc>
+                  <a:txBody>
+                    <a:bodyPr/>
+                    <a:lstStyle/>
+                    <a:p>
+                      <a:pPr algn="ctr"/>
+                      <a:r>
+                        <a:rPr b="1" sz="1500">
+                          <a:solidFill>
+                            <a:srgbClr val="FFFFFF"/>
+                          </a:solidFill>
+                        </a:rPr>
+                        <a:t>Δ</a:t>
+                      </a:r>
+                    </a:p>
+                  </a:txBody>
+                  <a:tcPr>
+                    <a:solidFill>
+                      <a:srgbClr val="1F4E79"/>
+                    </a:solidFill>
+                  </a:tcPr>
+                </a:tc>
+              </a:tr>
+              <a:tr h="502920">
+                <a:tc>
+                  <a:txBody>
+                    <a:bodyPr/>
+                    <a:lstStyle/>
+                    <a:p>
+                      <a:pPr algn="ctr"/>
+                      <a:r>
+                        <a:rPr sz="1600" b="0">
+                          <a:solidFill>
+                            <a:srgbClr val="1A1A1A"/>
+                          </a:solidFill>
+                        </a:rPr>
+                        <a:t>OLS</a:t>
+                      </a:r>
+                    </a:p>
+                  </a:txBody>
+                  <a:tcPr>
+                    <a:solidFill>
+                      <a:srgbClr val="FFFFFF"/>
+                    </a:solidFill>
+                  </a:tcPr>
+                </a:tc>
+                <a:tc>
+                  <a:txBody>
+                    <a:bodyPr/>
+                    <a:lstStyle/>
+                    <a:p>
+                      <a:pPr algn="ctr"/>
+                      <a:r>
+                        <a:rPr sz="1600" b="0">
+                          <a:solidFill>
+                            <a:srgbClr val="1A1A1A"/>
+                          </a:solidFill>
+                        </a:rPr>
+                        <a:t>0,129</a:t>
+                      </a:r>
+                    </a:p>
+                  </a:txBody>
+                  <a:tcPr>
+                    <a:solidFill>
+                      <a:srgbClr val="FFFFFF"/>
+                    </a:solidFill>
+                  </a:tcPr>
+                </a:tc>
+                <a:tc>
+                  <a:txBody>
+                    <a:bodyPr/>
+                    <a:lstStyle/>
+                    <a:p>
+                      <a:pPr algn="ctr"/>
+                      <a:r>
+                        <a:rPr sz="1600" b="0">
+                          <a:solidFill>
+                            <a:srgbClr val="1A1A1A"/>
+                          </a:solidFill>
+                        </a:rPr>
+                        <a:t>0,357</a:t>
+                      </a:r>
+                    </a:p>
+                  </a:txBody>
+                  <a:tcPr>
+                    <a:solidFill>
+                      <a:srgbClr val="FFFFFF"/>
+                    </a:solidFill>
+                  </a:tcPr>
+                </a:tc>
+                <a:tc>
+                  <a:txBody>
+                    <a:bodyPr/>
+                    <a:lstStyle/>
+                    <a:p>
+                      <a:pPr algn="ctr"/>
+                      <a:r>
+                        <a:rPr sz="1600" b="0">
+                          <a:solidFill>
+                            <a:srgbClr val="1A1A1A"/>
+                          </a:solidFill>
+                        </a:rPr>
+                        <a:t>+0,228</a:t>
+                      </a:r>
+                    </a:p>
+                  </a:txBody>
+                  <a:tcPr>
+                    <a:solidFill>
+                      <a:srgbClr val="FFFFFF"/>
+                    </a:solidFill>
+                  </a:tcPr>
+                </a:tc>
+              </a:tr>
+              <a:tr h="502920">
+                <a:tc>
+                  <a:txBody>
+                    <a:bodyPr/>
+                    <a:lstStyle/>
+                    <a:p>
+                      <a:pPr algn="ctr"/>
+                      <a:r>
+                        <a:rPr sz="1600" b="0">
+                          <a:solidFill>
+                            <a:srgbClr val="1A1A1A"/>
+                          </a:solidFill>
+                        </a:rPr>
+                        <a:t>Spatial Error</a:t>
+                      </a:r>
+                    </a:p>
+                  </a:txBody>
+                  <a:tcPr>
+                    <a:solidFill>
+                      <a:srgbClr val="F2F2F2"/>
+                    </a:solidFill>
+                  </a:tcPr>
+                </a:tc>
+                <a:tc>
+                  <a:txBody>
+                    <a:bodyPr/>
+                    <a:lstStyle/>
+                    <a:p>
+                      <a:pPr algn="ctr"/>
+                      <a:r>
+                        <a:rPr sz="1600" b="0">
+                          <a:solidFill>
+                            <a:srgbClr val="1A1A1A"/>
+                          </a:solidFill>
+                        </a:rPr>
+                        <a:t>0,392</a:t>
+                      </a:r>
+                    </a:p>
+                  </a:txBody>
+                  <a:tcPr>
+                    <a:solidFill>
+                      <a:srgbClr val="F2F2F2"/>
+                    </a:solidFill>
+                  </a:tcPr>
+                </a:tc>
+                <a:tc>
+                  <a:txBody>
+                    <a:bodyPr/>
+                    <a:lstStyle/>
+                    <a:p>
+                      <a:pPr algn="ctr"/>
+                      <a:r>
+                        <a:rPr sz="1600" b="0">
+                          <a:solidFill>
+                            <a:srgbClr val="1A1A1A"/>
+                          </a:solidFill>
+                        </a:rPr>
+                        <a:t>0,444</a:t>
+                      </a:r>
+                    </a:p>
+                  </a:txBody>
+                  <a:tcPr>
+                    <a:solidFill>
+                      <a:srgbClr val="F2F2F2"/>
+                    </a:solidFill>
+                  </a:tcPr>
+                </a:tc>
+                <a:tc>
+                  <a:txBody>
+                    <a:bodyPr/>
+                    <a:lstStyle/>
+                    <a:p>
+                      <a:pPr algn="ctr"/>
+                      <a:r>
+                        <a:rPr sz="1600" b="0">
+                          <a:solidFill>
+                            <a:srgbClr val="1A1A1A"/>
+                          </a:solidFill>
+                        </a:rPr>
+                        <a:t>+0,052</a:t>
+                      </a:r>
+                    </a:p>
+                  </a:txBody>
+                  <a:tcPr>
+                    <a:solidFill>
+                      <a:srgbClr val="F2F2F2"/>
+                    </a:solidFill>
+                  </a:tcPr>
+                </a:tc>
+              </a:tr>
+              <a:tr h="502920">
+                <a:tc>
+                  <a:txBody>
+                    <a:bodyPr/>
+                    <a:lstStyle/>
+                    <a:p>
+                      <a:pPr algn="ctr"/>
+                      <a:r>
+                        <a:rPr sz="1600" b="1">
+                          <a:solidFill>
+                            <a:srgbClr val="1A1A1A"/>
+                          </a:solidFill>
+                        </a:rPr>
+                        <a:t>GWR</a:t>
+                      </a:r>
+                    </a:p>
+                  </a:txBody>
+                  <a:tcPr>
+                    <a:solidFill>
+                      <a:srgbClr val="E2EFDA"/>
+                    </a:solidFill>
+                  </a:tcPr>
+                </a:tc>
+                <a:tc>
+                  <a:txBody>
+                    <a:bodyPr/>
+                    <a:lstStyle/>
+                    <a:p>
+                      <a:pPr algn="ctr"/>
+                      <a:r>
+                        <a:rPr sz="1600" b="1">
+                          <a:solidFill>
+                            <a:srgbClr val="1A1A1A"/>
+                          </a:solidFill>
+                        </a:rPr>
+                        <a:t>0,458</a:t>
+                      </a:r>
+                    </a:p>
+                  </a:txBody>
+                  <a:tcPr>
+                    <a:solidFill>
+                      <a:srgbClr val="E2EFDA"/>
+                    </a:solidFill>
+                  </a:tcPr>
+                </a:tc>
+                <a:tc>
+                  <a:txBody>
+                    <a:bodyPr/>
+                    <a:lstStyle/>
+                    <a:p>
+                      <a:pPr algn="ctr"/>
+                      <a:r>
+                        <a:rPr sz="1600" b="1">
+                          <a:solidFill>
+                            <a:srgbClr val="1A1A1A"/>
+                          </a:solidFill>
+                        </a:rPr>
+                        <a:t>0,532</a:t>
+                      </a:r>
+                    </a:p>
+                  </a:txBody>
+                  <a:tcPr>
+                    <a:solidFill>
+                      <a:srgbClr val="E2EFDA"/>
+                    </a:solidFill>
+                  </a:tcPr>
+                </a:tc>
+                <a:tc>
+                  <a:txBody>
+                    <a:bodyPr/>
+                    <a:lstStyle/>
+                    <a:p>
+                      <a:pPr algn="ctr"/>
+                      <a:r>
+                        <a:rPr sz="1600" b="1">
+                          <a:solidFill>
+                            <a:srgbClr val="1A1A1A"/>
+                          </a:solidFill>
+                        </a:rPr>
+                        <a:t>+0,074</a:t>
+                      </a:r>
+                    </a:p>
+                  </a:txBody>
+                  <a:tcPr>
+                    <a:solidFill>
+                      <a:srgbClr val="E2EFDA"/>
+                    </a:solidFill>
+                  </a:tcPr>
+                </a:tc>
+              </a:tr>
+            </a:tbl>
+          </a:graphicData>
+        </a:graphic>
+      </p:graphicFrame>
+      <p:sp>
+        <p:nvSpPr>
+          <p:cNvPr id="6" name="TextBox 5"/>
           <p:cNvSpPr txBox="1"/>
           <p:nvPr/>
         </p:nvSpPr>
         <p:spPr>
           <a:xfrm>
-            <a:off x="9784080" y="384048"/>
-            <a:ext cx="1600200" cy="365760"/>
+            <a:off x="1280160" y="4297680"/>
+            <a:ext cx="9692640" cy="1280160"/>
           </a:xfrm>
           <a:prstGeom prst="rect">
             <a:avLst/>
@@ -4501,111 +4920,24 @@
           <a:noFill/>
         </p:spPr>
         <p:txBody>
-          <a:bodyPr wrap="square">
+          <a:bodyPr wrap="square" anchor="t">
             <a:spAutoFit/>
           </a:bodyPr>
           <a:lstStyle/>
           <a:p>
-            <a:pPr algn="r">
-              <a:spcBef>
-                <a:spcPts val="0"/>
-              </a:spcBef>
-            </a:pPr>
-            <a:r>
-              <a:rPr sz="1200" b="0" i="0">
-                <a:solidFill>
-                  <a:srgbClr val="5B6B7C"/>
-                </a:solidFill>
-                <a:latin typeface="Arial Narrow"/>
-              </a:rPr>
-              <a:t>01 · FONTES</a:t>
-            </a:r>
-          </a:p>
-        </p:txBody>
-      </p:sp>
-      <p:sp>
-        <p:nvSpPr>
-          <p:cNvPr id="5" name="TextBox 4"/>
-          <p:cNvSpPr txBox="1"/>
-          <p:nvPr/>
-        </p:nvSpPr>
-        <p:spPr>
-          <a:xfrm>
-            <a:off x="822960" y="960120"/>
-            <a:ext cx="10515600" cy="914400"/>
-          </a:xfrm>
-          <a:prstGeom prst="rect">
-            <a:avLst/>
-          </a:prstGeom>
-          <a:noFill/>
-        </p:spPr>
-        <p:txBody>
-          <a:bodyPr wrap="square">
-            <a:spAutoFit/>
-          </a:bodyPr>
-          <a:lstStyle/>
-          <a:p>
             <a:pPr algn="l">
-              <a:spcBef>
-                <a:spcPts val="0"/>
-              </a:spcBef>
-            </a:pPr>
-            <a:r>
-              <a:rPr sz="3400" b="1" i="0">
-                <a:solidFill>
-                  <a:srgbClr val="17222E"/>
-                </a:solidFill>
-                <a:latin typeface="Arial Narrow"/>
-              </a:rPr>
-              <a:t>Duas bases oficiais, </a:t>
-            </a:r>
-            <a:r>
-              <a:rPr sz="3400" b="1" i="0">
-                <a:solidFill>
-                  <a:srgbClr val="D95F02"/>
-                </a:solidFill>
-                <a:latin typeface="Arial Narrow"/>
-              </a:rPr>
-              <a:t>um município de cada vez</a:t>
-            </a:r>
-          </a:p>
-        </p:txBody>
-      </p:sp>
-      <p:sp>
-        <p:nvSpPr>
-          <p:cNvPr id="6" name="TextBox 5"/>
-          <p:cNvSpPr txBox="1"/>
-          <p:nvPr/>
-        </p:nvSpPr>
-        <p:spPr>
-          <a:xfrm>
-            <a:off x="822960" y="1737360"/>
-            <a:ext cx="10515600" cy="457200"/>
-          </a:xfrm>
-          <a:prstGeom prst="rect">
-            <a:avLst/>
-          </a:prstGeom>
-          <a:noFill/>
-        </p:spPr>
-        <p:txBody>
-          <a:bodyPr wrap="square">
-            <a:spAutoFit/>
-          </a:bodyPr>
-          <a:lstStyle/>
-          <a:p>
-            <a:pPr algn="l">
-              <a:spcBef>
-                <a:spcPts val="0"/>
-              </a:spcBef>
-            </a:pPr>
-            <a:r>
-              <a:rPr sz="1700" b="0" i="0">
-                <a:solidFill>
-                  <a:srgbClr val="17222E"/>
-                </a:solidFill>
-                <a:latin typeface="Georgia"/>
-              </a:rPr>
-              <a:t>Juntamos tudo por município (os 645 do estado), usando o código do IBGE como chave.</a:t>
+              <a:lnSpc>
+                <a:spcPct val="115000"/>
+              </a:lnSpc>
+            </a:pPr>
+            <a:r>
+              <a:rPr sz="1500" b="0" i="0">
+                <a:solidFill>
+                  <a:srgbClr val="595959"/>
+                </a:solidFill>
+                <a:latin typeface="Calibri"/>
+              </a:rPr>
+              <a:t>O ganho da variável litoral é maior no modelo mais simples (OLS, +0,228) e menor nos modelos espaciais (+0,052 no spatial error, +0,074 no GWR) — sinal de que os modelos espaciais já capturavam parte do padrão litorâneo implicitamente.</a:t>
             </a:r>
           </a:p>
         </p:txBody>
@@ -4618,19 +4950,19 @@
         </p:nvSpPr>
         <p:spPr>
           <a:xfrm>
-            <a:off x="822960" y="2377440"/>
-            <a:ext cx="5029200" cy="1554480"/>
+            <a:off x="8686800" y="2011680"/>
+            <a:ext cx="2743200" cy="2011680"/>
           </a:xfrm>
           <a:prstGeom prst="roundRect">
-            <a:avLst/>
+            <a:avLst>
+              <a:gd name="adj" fmla="val 8000"/>
+            </a:avLst>
           </a:prstGeom>
           <a:solidFill>
-            <a:srgbClr val="DBE7F3"/>
+            <a:srgbClr val="F2F2F2"/>
           </a:solidFill>
-          <a:ln w="9525">
-            <a:solidFill>
-              <a:srgbClr val="D8DFE7"/>
-            </a:solidFill>
+          <a:ln>
+            <a:noFill/>
           </a:ln>
           <a:effectLst/>
         </p:spPr>
@@ -4649,79 +4981,237 @@
           </a:fontRef>
         </p:style>
         <p:txBody>
-          <a:bodyPr rtlCol="0" anchor="ctr" wrap="square" lIns="182880" rIns="182880" tIns="128016" bIns="128016"/>
+          <a:bodyPr rtlCol="0" anchor="ctr" wrap="square" lIns="137160" rIns="137160"/>
+          <a:lstStyle/>
+          <a:p>
+            <a:pPr algn="ctr"/>
+            <a:r>
+              <a:rPr sz="2600" b="1">
+                <a:solidFill>
+                  <a:srgbClr val="2E7D32"/>
+                </a:solidFill>
+                <a:latin typeface="Calibri"/>
+              </a:rPr>
+              <a:t>R² = 0,532</a:t>
+            </a:r>
+          </a:p>
+          <a:p>
+            <a:pPr algn="ctr"/>
+            <a:r>
+              <a:rPr sz="1200">
+                <a:solidFill>
+                  <a:srgbClr val="595959"/>
+                </a:solidFill>
+                <a:latin typeface="Calibri"/>
+              </a:rPr>
+              <a:t>melhor modelo:
+GWR renda + litoral
+(menor AIC: 3027,4)</a:t>
+            </a:r>
+          </a:p>
+        </p:txBody>
+      </p:sp>
+      <p:sp>
+        <p:nvSpPr>
+          <p:cNvPr id="8" name="TextBox 7"/>
+          <p:cNvSpPr txBox="1"/>
+          <p:nvPr/>
+        </p:nvSpPr>
+        <p:spPr>
+          <a:xfrm>
+            <a:off x="548640" y="6510528"/>
+            <a:ext cx="7315200" cy="274320"/>
+          </a:xfrm>
+          <a:prstGeom prst="rect">
+            <a:avLst/>
+          </a:prstGeom>
+          <a:noFill/>
+        </p:spPr>
+        <p:txBody>
+          <a:bodyPr wrap="square" anchor="t">
+            <a:spAutoFit/>
+          </a:bodyPr>
           <a:lstStyle/>
           <a:p>
             <a:pPr algn="l">
-              <a:spcBef>
-                <a:spcPts val="0"/>
-              </a:spcBef>
-            </a:pPr>
-            <a:r>
-              <a:rPr sz="1200" b="1" i="0">
-                <a:solidFill>
-                  <a:srgbClr val="0B5394"/>
-                </a:solidFill>
-                <a:latin typeface="Arial Narrow"/>
-              </a:rPr>
-              <a:t>CRIMES</a:t>
-            </a:r>
-          </a:p>
+              <a:lnSpc>
+                <a:spcPct val="115000"/>
+              </a:lnSpc>
+            </a:pPr>
+            <a:r>
+              <a:rPr sz="1000" b="0" i="0">
+                <a:solidFill>
+                  <a:srgbClr val="595959"/>
+                </a:solidFill>
+                <a:latin typeface="Calibri"/>
+              </a:rPr>
+              <a:t>Furto, Renda e Território — UFABC</a:t>
+            </a:r>
+          </a:p>
+        </p:txBody>
+      </p:sp>
+      <p:sp>
+        <p:nvSpPr>
+          <p:cNvPr id="9" name="TextBox 8"/>
+          <p:cNvSpPr txBox="1"/>
+          <p:nvPr/>
+        </p:nvSpPr>
+        <p:spPr>
+          <a:xfrm>
+            <a:off x="10972800" y="6510528"/>
+            <a:ext cx="731520" cy="274320"/>
+          </a:xfrm>
+          <a:prstGeom prst="rect">
+            <a:avLst/>
+          </a:prstGeom>
+          <a:noFill/>
+        </p:spPr>
+        <p:txBody>
+          <a:bodyPr wrap="square" anchor="t">
+            <a:spAutoFit/>
+          </a:bodyPr>
+          <a:lstStyle/>
+          <a:p>
+            <a:pPr algn="r">
+              <a:lnSpc>
+                <a:spcPct val="115000"/>
+              </a:lnSpc>
+            </a:pPr>
+            <a:r>
+              <a:rPr sz="1000" b="0" i="0">
+                <a:solidFill>
+                  <a:srgbClr val="595959"/>
+                </a:solidFill>
+                <a:latin typeface="Calibri"/>
+              </a:rPr>
+              <a:t>13</a:t>
+            </a:r>
+          </a:p>
+        </p:txBody>
+      </p:sp>
+    </p:spTree>
+  </p:cSld>
+  <p:clrMapOvr>
+    <a:masterClrMapping/>
+  </p:clrMapOvr>
+</p:sld>
+</file>
+
+<file path=ppt/slides/slide14.xml><?xml version="1.0" encoding="utf-8"?>
+<p:sld xmlns:a="http://schemas.openxmlformats.org/drawingml/2006/main" xmlns:p="http://schemas.openxmlformats.org/presentationml/2006/main" xmlns:r="http://schemas.openxmlformats.org/officeDocument/2006/relationships">
+  <p:cSld>
+    <p:bg>
+      <p:bgPr>
+        <a:solidFill>
+          <a:srgbClr val="FFFFFF"/>
+        </a:solidFill>
+        <a:effectLst/>
+      </p:bgPr>
+    </p:bg>
+    <p:spTree>
+      <p:nvGrpSpPr>
+        <p:cNvPr id="1" name=""/>
+        <p:cNvGrpSpPr/>
+        <p:nvPr/>
+      </p:nvGrpSpPr>
+      <p:grpSpPr/>
+      <p:sp>
+        <p:nvSpPr>
+          <p:cNvPr id="2" name="TextBox 1"/>
+          <p:cNvSpPr txBox="1"/>
+          <p:nvPr/>
+        </p:nvSpPr>
+        <p:spPr>
+          <a:xfrm>
+            <a:off x="548640" y="320040"/>
+            <a:ext cx="7315200" cy="365760"/>
+          </a:xfrm>
+          <a:prstGeom prst="rect">
+            <a:avLst/>
+          </a:prstGeom>
+          <a:noFill/>
+        </p:spPr>
+        <p:txBody>
+          <a:bodyPr wrap="square" anchor="t">
+            <a:spAutoFit/>
+          </a:bodyPr>
+          <a:lstStyle/>
           <a:p>
             <a:pPr algn="l">
-              <a:spcBef>
-                <a:spcPts val="400"/>
-              </a:spcBef>
-            </a:pPr>
-            <a:r>
-              <a:rPr sz="2000" b="1" i="0">
-                <a:solidFill>
-                  <a:srgbClr val="17222E"/>
-                </a:solidFill>
-                <a:latin typeface="Arial Narrow"/>
-              </a:rPr>
-              <a:t>SSP-SP · 2025</a:t>
-            </a:r>
-          </a:p>
+              <a:lnSpc>
+                <a:spcPct val="115000"/>
+              </a:lnSpc>
+            </a:pPr>
+            <a:r>
+              <a:rPr sz="1300" b="1" i="0">
+                <a:solidFill>
+                  <a:srgbClr val="1F4E79"/>
+                </a:solidFill>
+                <a:latin typeface="Calibri"/>
+              </a:rPr>
+              <a:t>CONCLUSÃO</a:t>
+            </a:r>
+          </a:p>
+        </p:txBody>
+      </p:sp>
+      <p:sp>
+        <p:nvSpPr>
+          <p:cNvPr id="3" name="TextBox 2"/>
+          <p:cNvSpPr txBox="1"/>
+          <p:nvPr/>
+        </p:nvSpPr>
+        <p:spPr>
+          <a:xfrm>
+            <a:off x="548640" y="594360"/>
+            <a:ext cx="11064240" cy="822960"/>
+          </a:xfrm>
+          <a:prstGeom prst="rect">
+            <a:avLst/>
+          </a:prstGeom>
+          <a:noFill/>
+        </p:spPr>
+        <p:txBody>
+          <a:bodyPr wrap="square" anchor="t">
+            <a:spAutoFit/>
+          </a:bodyPr>
+          <a:lstStyle/>
           <a:p>
             <a:pPr algn="l">
-              <a:spcBef>
-                <a:spcPts val="400"/>
-              </a:spcBef>
-            </a:pPr>
-            <a:r>
-              <a:rPr sz="1400" b="0" i="0">
-                <a:solidFill>
-                  <a:srgbClr val="17222E"/>
-                </a:solidFill>
-                <a:latin typeface="Georgia"/>
-              </a:rPr>
-              <a:t>Boletins de roubo, furto e lesão corporal, mês a mês, por município.</a:t>
-            </a:r>
-          </a:p>
-        </p:txBody>
-      </p:sp>
-      <p:sp>
-        <p:nvSpPr>
-          <p:cNvPr id="8" name="Rounded Rectangle 7"/>
+              <a:lnSpc>
+                <a:spcPct val="115000"/>
+              </a:lnSpc>
+            </a:pPr>
+            <a:r>
+              <a:rPr sz="3000" b="1" i="0">
+                <a:solidFill>
+                  <a:srgbClr val="1A1A1A"/>
+                </a:solidFill>
+                <a:latin typeface="Calibri"/>
+              </a:rPr>
+              <a:t>H1 não se sustenta; H2 explica o padrão observado</a:t>
+            </a:r>
+          </a:p>
+        </p:txBody>
+      </p:sp>
+      <p:sp>
+        <p:nvSpPr>
+          <p:cNvPr id="4" name="Rectangle 3"/>
           <p:cNvSpPr/>
           <p:nvPr/>
         </p:nvSpPr>
         <p:spPr>
           <a:xfrm>
-            <a:off x="6400800" y="2377440"/>
-            <a:ext cx="5029200" cy="1554480"/>
-          </a:xfrm>
-          <a:prstGeom prst="roundRect">
+            <a:off x="548640" y="1325880"/>
+            <a:ext cx="11064240" cy="27940"/>
+          </a:xfrm>
+          <a:prstGeom prst="rect">
             <a:avLst/>
           </a:prstGeom>
           <a:solidFill>
-            <a:srgbClr val="DBE7F3"/>
+            <a:srgbClr val="1F4E79"/>
           </a:solidFill>
-          <a:ln w="9525">
-            <a:solidFill>
-              <a:srgbClr val="D8DFE7"/>
-            </a:solidFill>
+          <a:ln>
+            <a:noFill/>
           </a:ln>
           <a:effectLst/>
         </p:spPr>
@@ -4740,68 +5230,23 @@
           </a:fontRef>
         </p:style>
         <p:txBody>
-          <a:bodyPr rtlCol="0" anchor="ctr" wrap="square" lIns="182880" rIns="182880" tIns="128016" bIns="128016"/>
-          <a:lstStyle/>
-          <a:p>
-            <a:pPr algn="l">
-              <a:spcBef>
-                <a:spcPts val="0"/>
-              </a:spcBef>
-            </a:pPr>
-            <a:r>
-              <a:rPr sz="1200" b="1" i="0">
-                <a:solidFill>
-                  <a:srgbClr val="0B5394"/>
-                </a:solidFill>
-                <a:latin typeface="Arial Narrow"/>
-              </a:rPr>
-              <a:t>CONTEXTO</a:t>
-            </a:r>
-          </a:p>
-          <a:p>
-            <a:pPr algn="l">
-              <a:spcBef>
-                <a:spcPts val="400"/>
-              </a:spcBef>
-            </a:pPr>
-            <a:r>
-              <a:rPr sz="2000" b="1" i="0">
-                <a:solidFill>
-                  <a:srgbClr val="17222E"/>
-                </a:solidFill>
-                <a:latin typeface="Arial Narrow"/>
-              </a:rPr>
-              <a:t>IBGE · Censo 2022</a:t>
-            </a:r>
-          </a:p>
-          <a:p>
-            <a:pPr algn="l">
-              <a:spcBef>
-                <a:spcPts val="400"/>
-              </a:spcBef>
-            </a:pPr>
-            <a:r>
-              <a:rPr sz="1400" b="0" i="0">
-                <a:solidFill>
-                  <a:srgbClr val="17222E"/>
-                </a:solidFill>
-                <a:latin typeface="Georgia"/>
-              </a:rPr>
-              <a:t>Renda média, população residente e a malha de cada município.</a:t>
-            </a:r>
-          </a:p>
-        </p:txBody>
-      </p:sp>
-      <p:sp>
-        <p:nvSpPr>
-          <p:cNvPr id="9" name="TextBox 8"/>
+          <a:bodyPr rtlCol="0" anchor="ctr"/>
+          <a:lstStyle/>
+          <a:p>
+            <a:pPr algn="ctr"/>
+          </a:p>
+        </p:txBody>
+      </p:sp>
+      <p:sp>
+        <p:nvSpPr>
+          <p:cNvPr id="5" name="TextBox 4"/>
           <p:cNvSpPr txBox="1"/>
           <p:nvPr/>
         </p:nvSpPr>
         <p:spPr>
           <a:xfrm>
-            <a:off x="822960" y="4206240"/>
-            <a:ext cx="10424160" cy="1828800"/>
+            <a:off x="548640" y="1737360"/>
+            <a:ext cx="11064240" cy="4206240"/>
           </a:xfrm>
           <a:prstGeom prst="rect">
             <a:avLst/>
@@ -4814,89 +5259,143 @@
           </a:bodyPr>
           <a:lstStyle/>
           <a:p>
+            <a:pPr>
+              <a:lnSpc>
+                <a:spcPct val="115000"/>
+              </a:lnSpc>
+              <a:spcAft>
+                <a:spcPts val="1800"/>
+              </a:spcAft>
+            </a:pPr>
+            <a:r>
+              <a:rPr sz="1700">
+                <a:solidFill>
+                  <a:srgbClr val="333333"/>
+                </a:solidFill>
+                <a:latin typeface="Calibri"/>
+              </a:rPr>
+              <a:t>—  A relação entre renda e taxa de furto é positiva, não negativa — em toda
+correlação simples e em todos os modelos de regressão testados.</a:t>
+            </a:r>
+          </a:p>
+          <a:p>
+            <a:pPr>
+              <a:lnSpc>
+                <a:spcPct val="115000"/>
+              </a:lnSpc>
+              <a:spcAft>
+                <a:spcPts val="1800"/>
+              </a:spcAft>
+            </a:pPr>
+            <a:r>
+              <a:rPr sz="1700">
+                <a:solidFill>
+                  <a:srgbClr val="333333"/>
+                </a:solidFill>
+                <a:latin typeface="Calibri"/>
+              </a:rPr>
+              <a:t>—  Três camadas do fenômeno: (i) a renda sozinha deixa estrutura espacial não
+explicada nos resíduos; (ii) essa estrutura é majoritariamente absorvida pela
+condição litorânea; (iii) mesmo controlando por ela, a relação renda–furto
+não é estacionária — forte no interior, quase nula no litoral.</a:t>
+            </a:r>
+          </a:p>
+          <a:p>
+            <a:pPr>
+              <a:lnSpc>
+                <a:spcPct val="115000"/>
+              </a:lnSpc>
+              <a:spcAft>
+                <a:spcPts val="1800"/>
+              </a:spcAft>
+            </a:pPr>
+            <a:r>
+              <a:rPr sz="1700">
+                <a:solidFill>
+                  <a:srgbClr val="333333"/>
+                </a:solidFill>
+                <a:latin typeface="Calibri"/>
+              </a:rPr>
+              <a:t>—  Mecanismo mais consistente com a evidência: população flutuante de verão
+infla o numerador (ocorrências) sobre um denominador de população residente.</a:t>
+            </a:r>
+          </a:p>
+        </p:txBody>
+      </p:sp>
+      <p:sp>
+        <p:nvSpPr>
+          <p:cNvPr id="6" name="TextBox 5"/>
+          <p:cNvSpPr txBox="1"/>
+          <p:nvPr/>
+        </p:nvSpPr>
+        <p:spPr>
+          <a:xfrm>
+            <a:off x="548640" y="6510528"/>
+            <a:ext cx="7315200" cy="274320"/>
+          </a:xfrm>
+          <a:prstGeom prst="rect">
+            <a:avLst/>
+          </a:prstGeom>
+          <a:noFill/>
+        </p:spPr>
+        <p:txBody>
+          <a:bodyPr wrap="square" anchor="t">
+            <a:spAutoFit/>
+          </a:bodyPr>
+          <a:lstStyle/>
+          <a:p>
             <a:pPr algn="l">
-              <a:spcBef>
-                <a:spcPts val="0"/>
-              </a:spcBef>
-            </a:pPr>
-            <a:r>
-              <a:rPr sz="1100" b="0" i="0">
-                <a:solidFill>
-                  <a:srgbClr val="D95F02"/>
-                </a:solidFill>
-                <a:latin typeface="Arial Narrow"/>
-              </a:rPr>
-              <a:t>●  </a:t>
-            </a:r>
-            <a:r>
-              <a:rPr sz="1500" b="0" i="0">
-                <a:solidFill>
-                  <a:srgbClr val="17222E"/>
-                </a:solidFill>
-                <a:latin typeface="Georgia"/>
-              </a:rPr>
-              <a:t>Trabalhamos com </a:t>
-            </a:r>
-            <a:r>
-              <a:rPr sz="1500" b="1" i="0">
-                <a:solidFill>
-                  <a:srgbClr val="17222E"/>
-                </a:solidFill>
-                <a:latin typeface="Georgia"/>
-              </a:rPr>
-              <a:t>taxa por 1.000 habitantes</a:t>
-            </a:r>
-            <a:r>
-              <a:rPr sz="1500" b="0" i="0">
-                <a:solidFill>
-                  <a:srgbClr val="17222E"/>
-                </a:solidFill>
-                <a:latin typeface="Georgia"/>
-              </a:rPr>
-              <a:t>, não com número bruto: senão São Paulo ganha só por ser gigante.</a:t>
-            </a:r>
-          </a:p>
-          <a:p>
-            <a:pPr algn="l">
-              <a:spcBef>
-                <a:spcPts val="1000"/>
-              </a:spcBef>
-            </a:pPr>
-            <a:r>
-              <a:rPr sz="1100" b="0" i="0">
-                <a:solidFill>
-                  <a:srgbClr val="D95F02"/>
-                </a:solidFill>
-                <a:latin typeface="Arial Narrow"/>
-              </a:rPr>
-              <a:t>●  </a:t>
-            </a:r>
-            <a:r>
-              <a:rPr sz="1500" b="0" i="0">
-                <a:solidFill>
-                  <a:srgbClr val="17222E"/>
-                </a:solidFill>
-                <a:latin typeface="Georgia"/>
-              </a:rPr>
-              <a:t>Foco no </a:t>
-            </a:r>
-            <a:r>
-              <a:rPr sz="1500" b="1" i="0">
-                <a:solidFill>
-                  <a:srgbClr val="17222E"/>
-                </a:solidFill>
-                <a:latin typeface="Georgia"/>
-              </a:rPr>
-              <a:t>furto</a:t>
-            </a:r>
-            <a:r>
-              <a:rPr sz="1500" b="0" i="0">
-                <a:solidFill>
-                  <a:srgbClr val="17222E"/>
-                </a:solidFill>
-                <a:latin typeface="Georgia"/>
-              </a:rPr>
-              <a:t>, o crime com o padrão mais interessante no mapa.</a:t>
+              <a:lnSpc>
+                <a:spcPct val="115000"/>
+              </a:lnSpc>
+            </a:pPr>
+            <a:r>
+              <a:rPr sz="1000" b="0" i="0">
+                <a:solidFill>
+                  <a:srgbClr val="595959"/>
+                </a:solidFill>
+                <a:latin typeface="Calibri"/>
+              </a:rPr>
+              <a:t>Furto, Renda e Território — UFABC</a:t>
+            </a:r>
+          </a:p>
+        </p:txBody>
+      </p:sp>
+      <p:sp>
+        <p:nvSpPr>
+          <p:cNvPr id="7" name="TextBox 6"/>
+          <p:cNvSpPr txBox="1"/>
+          <p:nvPr/>
+        </p:nvSpPr>
+        <p:spPr>
+          <a:xfrm>
+            <a:off x="10972800" y="6510528"/>
+            <a:ext cx="731520" cy="274320"/>
+          </a:xfrm>
+          <a:prstGeom prst="rect">
+            <a:avLst/>
+          </a:prstGeom>
+          <a:noFill/>
+        </p:spPr>
+        <p:txBody>
+          <a:bodyPr wrap="square" anchor="t">
+            <a:spAutoFit/>
+          </a:bodyPr>
+          <a:lstStyle/>
+          <a:p>
+            <a:pPr algn="r">
+              <a:lnSpc>
+                <a:spcPct val="115000"/>
+              </a:lnSpc>
+            </a:pPr>
+            <a:r>
+              <a:rPr sz="1000" b="0" i="0">
+                <a:solidFill>
+                  <a:srgbClr val="595959"/>
+                </a:solidFill>
+                <a:latin typeface="Calibri"/>
+              </a:rPr>
+              <a:t>14</a:t>
             </a:r>
           </a:p>
         </p:txBody>
@@ -4909,9 +5408,17 @@
 </p:sld>
 </file>
 
-<file path=ppt/slides/slide3.xml><?xml version="1.0" encoding="utf-8"?>
+<file path=ppt/slides/slide15.xml><?xml version="1.0" encoding="utf-8"?>
 <p:sld xmlns:a="http://schemas.openxmlformats.org/drawingml/2006/main" xmlns:p="http://schemas.openxmlformats.org/presentationml/2006/main" xmlns:r="http://schemas.openxmlformats.org/officeDocument/2006/relationships">
   <p:cSld>
+    <p:bg>
+      <p:bgPr>
+        <a:solidFill>
+          <a:srgbClr val="FFFFFF"/>
+        </a:solidFill>
+        <a:effectLst/>
+      </p:bgPr>
+    </p:bg>
     <p:spTree>
       <p:nvGrpSpPr>
         <p:cNvPr id="1" name=""/>
@@ -4921,59 +5428,20 @@
       <p:grpSpPr/>
       <p:sp>
         <p:nvSpPr>
-          <p:cNvPr id="2" name="TextBox 1"/>
-          <p:cNvSpPr txBox="1"/>
-          <p:nvPr/>
-        </p:nvSpPr>
-        <p:spPr>
-          <a:xfrm>
-            <a:off x="822960" y="384048"/>
-            <a:ext cx="10515600" cy="365760"/>
-          </a:xfrm>
-          <a:prstGeom prst="rect">
-            <a:avLst/>
-          </a:prstGeom>
-          <a:noFill/>
-        </p:spPr>
-        <p:txBody>
-          <a:bodyPr wrap="square">
-            <a:spAutoFit/>
-          </a:bodyPr>
-          <a:lstStyle/>
-          <a:p>
-            <a:pPr algn="l">
-              <a:spcBef>
-                <a:spcPts val="0"/>
-              </a:spcBef>
-            </a:pPr>
-            <a:r>
-              <a:rPr sz="1300" b="1" i="0">
-                <a:solidFill>
-                  <a:srgbClr val="D95F02"/>
-                </a:solidFill>
-                <a:latin typeface="Arial Narrow"/>
-              </a:rPr>
-              <a:t>O QUE A GENTE ACHAVA QUE IA ACHAR</a:t>
-            </a:r>
-          </a:p>
-        </p:txBody>
-      </p:sp>
-      <p:sp>
-        <p:nvSpPr>
-          <p:cNvPr id="3" name="Rectangle 2"/>
+          <p:cNvPr id="2" name="Rectangle 1"/>
           <p:cNvSpPr/>
           <p:nvPr/>
         </p:nvSpPr>
         <p:spPr>
           <a:xfrm>
-            <a:off x="822960" y="749808"/>
-            <a:ext cx="10515600" cy="15240"/>
+            <a:off x="0" y="6693408"/>
+            <a:ext cx="12191695" cy="164592"/>
           </a:xfrm>
           <a:prstGeom prst="rect">
             <a:avLst/>
           </a:prstGeom>
           <a:solidFill>
-            <a:srgbClr val="D8DFE7"/>
+            <a:srgbClr val="1F4E79"/>
           </a:solidFill>
           <a:ln>
             <a:noFill/>
@@ -5004,14 +5472,53 @@
       </p:sp>
       <p:sp>
         <p:nvSpPr>
+          <p:cNvPr id="3" name="TextBox 2"/>
+          <p:cNvSpPr txBox="1"/>
+          <p:nvPr/>
+        </p:nvSpPr>
+        <p:spPr>
+          <a:xfrm>
+            <a:off x="548640" y="320040"/>
+            <a:ext cx="7315200" cy="365760"/>
+          </a:xfrm>
+          <a:prstGeom prst="rect">
+            <a:avLst/>
+          </a:prstGeom>
+          <a:noFill/>
+        </p:spPr>
+        <p:txBody>
+          <a:bodyPr wrap="square" anchor="t">
+            <a:spAutoFit/>
+          </a:bodyPr>
+          <a:lstStyle/>
+          <a:p>
+            <a:pPr algn="l">
+              <a:lnSpc>
+                <a:spcPct val="115000"/>
+              </a:lnSpc>
+            </a:pPr>
+            <a:r>
+              <a:rPr sz="1300" b="1" i="0">
+                <a:solidFill>
+                  <a:srgbClr val="1F4E79"/>
+                </a:solidFill>
+                <a:latin typeface="Calibri"/>
+              </a:rPr>
+              <a:t>CONCLUSÃO</a:t>
+            </a:r>
+          </a:p>
+        </p:txBody>
+      </p:sp>
+      <p:sp>
+        <p:nvSpPr>
           <p:cNvPr id="4" name="TextBox 3"/>
           <p:cNvSpPr txBox="1"/>
           <p:nvPr/>
         </p:nvSpPr>
         <p:spPr>
           <a:xfrm>
-            <a:off x="9784080" y="384048"/>
-            <a:ext cx="1600200" cy="365760"/>
+            <a:off x="548640" y="594360"/>
+            <a:ext cx="11064240" cy="822960"/>
           </a:xfrm>
           <a:prstGeom prst="rect">
             <a:avLst/>
@@ -5019,97 +5526,47 @@
           <a:noFill/>
         </p:spPr>
         <p:txBody>
-          <a:bodyPr wrap="square">
+          <a:bodyPr wrap="square" anchor="t">
             <a:spAutoFit/>
           </a:bodyPr>
           <a:lstStyle/>
           <a:p>
-            <a:pPr algn="r">
-              <a:spcBef>
-                <a:spcPts val="0"/>
-              </a:spcBef>
-            </a:pPr>
-            <a:r>
-              <a:rPr sz="1200" b="0" i="0">
-                <a:solidFill>
-                  <a:srgbClr val="5B6B7C"/>
-                </a:solidFill>
-                <a:latin typeface="Arial Narrow"/>
-              </a:rPr>
-              <a:t>02 · HIPÓTESES</a:t>
-            </a:r>
-          </a:p>
-        </p:txBody>
-      </p:sp>
-      <p:sp>
-        <p:nvSpPr>
-          <p:cNvPr id="5" name="TextBox 4"/>
-          <p:cNvSpPr txBox="1"/>
-          <p:nvPr/>
-        </p:nvSpPr>
-        <p:spPr>
-          <a:xfrm>
-            <a:off x="822960" y="960120"/>
-            <a:ext cx="10515600" cy="914400"/>
-          </a:xfrm>
-          <a:prstGeom prst="rect">
-            <a:avLst/>
-          </a:prstGeom>
-          <a:noFill/>
-        </p:spPr>
-        <p:txBody>
-          <a:bodyPr wrap="square">
-            <a:spAutoFit/>
-          </a:bodyPr>
-          <a:lstStyle/>
-          <a:p>
             <a:pPr algn="l">
-              <a:spcBef>
-                <a:spcPts val="0"/>
-              </a:spcBef>
-            </a:pPr>
-            <a:r>
-              <a:rPr sz="3400" b="1" i="0">
-                <a:solidFill>
-                  <a:srgbClr val="17222E"/>
-                </a:solidFill>
-                <a:latin typeface="Arial Narrow"/>
-              </a:rPr>
-              <a:t>Duas apostas </a:t>
-            </a:r>
-            <a:r>
-              <a:rPr sz="3400" b="1" i="0">
-                <a:solidFill>
-                  <a:srgbClr val="D95F02"/>
-                </a:solidFill>
-                <a:latin typeface="Arial Narrow"/>
-              </a:rPr>
-              <a:t>bem diferentes</a:t>
-            </a:r>
-          </a:p>
-        </p:txBody>
-      </p:sp>
-      <p:sp>
-        <p:nvSpPr>
-          <p:cNvPr id="6" name="Rounded Rectangle 5"/>
+              <a:lnSpc>
+                <a:spcPct val="115000"/>
+              </a:lnSpc>
+            </a:pPr>
+            <a:r>
+              <a:rPr sz="3000" b="1" i="0">
+                <a:solidFill>
+                  <a:srgbClr val="1A1A1A"/>
+                </a:solidFill>
+                <a:latin typeface="Calibri"/>
+              </a:rPr>
+              <a:t>Direção futura e agradecimentos</a:t>
+            </a:r>
+          </a:p>
+        </p:txBody>
+      </p:sp>
+      <p:sp>
+        <p:nvSpPr>
+          <p:cNvPr id="5" name="Rectangle 4"/>
           <p:cNvSpPr/>
           <p:nvPr/>
         </p:nvSpPr>
         <p:spPr>
           <a:xfrm>
-            <a:off x="822960" y="1828800"/>
-            <a:ext cx="5029200" cy="2194560"/>
-          </a:xfrm>
-          <a:prstGeom prst="roundRect">
+            <a:off x="548640" y="1325880"/>
+            <a:ext cx="11064240" cy="27940"/>
+          </a:xfrm>
+          <a:prstGeom prst="rect">
             <a:avLst/>
           </a:prstGeom>
           <a:solidFill>
-            <a:srgbClr val="DBE7F3"/>
+            <a:srgbClr val="1F4E79"/>
           </a:solidFill>
-          <a:ln w="9525">
-            <a:solidFill>
-              <a:srgbClr val="D8DFE7"/>
-            </a:solidFill>
+          <a:ln>
+            <a:noFill/>
           </a:ln>
           <a:effectLst/>
         </p:spPr>
@@ -5128,95 +5585,258 @@
           </a:fontRef>
         </p:style>
         <p:txBody>
-          <a:bodyPr rtlCol="0" anchor="ctr" wrap="square" lIns="182880" rIns="182880" tIns="128016" bIns="128016"/>
+          <a:bodyPr rtlCol="0" anchor="ctr"/>
+          <a:lstStyle/>
+          <a:p>
+            <a:pPr algn="ctr"/>
+          </a:p>
+        </p:txBody>
+      </p:sp>
+      <p:sp>
+        <p:nvSpPr>
+          <p:cNvPr id="6" name="TextBox 5"/>
+          <p:cNvSpPr txBox="1"/>
+          <p:nvPr/>
+        </p:nvSpPr>
+        <p:spPr>
+          <a:xfrm>
+            <a:off x="548640" y="1737360"/>
+            <a:ext cx="11064240" cy="2011680"/>
+          </a:xfrm>
+          <a:prstGeom prst="rect">
+            <a:avLst/>
+          </a:prstGeom>
+          <a:noFill/>
+        </p:spPr>
+        <p:txBody>
+          <a:bodyPr wrap="square">
+            <a:spAutoFit/>
+          </a:bodyPr>
+          <a:lstStyle/>
+          <a:p>
+            <a:pPr>
+              <a:lnSpc>
+                <a:spcPct val="115000"/>
+              </a:lnSpc>
+              <a:spcAft>
+                <a:spcPts val="1600"/>
+              </a:spcAft>
+            </a:pPr>
+            <a:r>
+              <a:rPr sz="1700">
+                <a:solidFill>
+                  <a:srgbClr val="333333"/>
+                </a:solidFill>
+                <a:latin typeface="Calibri"/>
+              </a:rPr>
+              <a:t>—  Incluir uma medida direta de fluxo turístico (hospedagem, pedágios, dados
+de telefonia) para testar o mecanismo diretamente, hoje capturado só
+indiretamente pela dummy litorânea/turística.</a:t>
+            </a:r>
+          </a:p>
+        </p:txBody>
+      </p:sp>
+      <p:sp>
+        <p:nvSpPr>
+          <p:cNvPr id="7" name="TextBox 6"/>
+          <p:cNvSpPr txBox="1"/>
+          <p:nvPr/>
+        </p:nvSpPr>
+        <p:spPr>
+          <a:xfrm>
+            <a:off x="548640" y="4206240"/>
+            <a:ext cx="11064240" cy="1463040"/>
+          </a:xfrm>
+          <a:prstGeom prst="rect">
+            <a:avLst/>
+          </a:prstGeom>
+          <a:noFill/>
+        </p:spPr>
+        <p:txBody>
+          <a:bodyPr wrap="square" anchor="t">
+            <a:spAutoFit/>
+          </a:bodyPr>
           <a:lstStyle/>
           <a:p>
             <a:pPr algn="l">
-              <a:spcBef>
-                <a:spcPts val="0"/>
-              </a:spcBef>
-            </a:pPr>
-            <a:r>
-              <a:rPr sz="1200" b="1" i="0">
-                <a:solidFill>
-                  <a:srgbClr val="0B5394"/>
-                </a:solidFill>
-                <a:latin typeface="Arial Narrow"/>
-              </a:rPr>
-              <a:t>HIPÓTESE 1</a:t>
-            </a:r>
-          </a:p>
+              <a:lnSpc>
+                <a:spcPct val="115000"/>
+              </a:lnSpc>
+            </a:pPr>
+            <a:r>
+              <a:rPr sz="1800" b="0" i="1">
+                <a:solidFill>
+                  <a:srgbClr val="1F4E79"/>
+                </a:solidFill>
+                <a:latin typeface="Calibri"/>
+              </a:rPr>
+              <a:t>Agradecemos à Prof.ª Flávia da Fonseca Feitosa pela orientação ao longo da disciplina de Análise de Dados para Planejamento Territorial.</a:t>
+            </a:r>
+          </a:p>
+        </p:txBody>
+      </p:sp>
+      <p:sp>
+        <p:nvSpPr>
+          <p:cNvPr id="8" name="TextBox 7"/>
+          <p:cNvSpPr txBox="1"/>
+          <p:nvPr/>
+        </p:nvSpPr>
+        <p:spPr>
+          <a:xfrm>
+            <a:off x="548640" y="5760720"/>
+            <a:ext cx="11064240" cy="548640"/>
+          </a:xfrm>
+          <a:prstGeom prst="rect">
+            <a:avLst/>
+          </a:prstGeom>
+          <a:noFill/>
+        </p:spPr>
+        <p:txBody>
+          <a:bodyPr wrap="square" anchor="t">
+            <a:spAutoFit/>
+          </a:bodyPr>
+          <a:lstStyle/>
           <a:p>
             <a:pPr algn="l">
-              <a:spcBef>
-                <a:spcPts val="400"/>
-              </a:spcBef>
-            </a:pPr>
-            <a:r>
-              <a:rPr sz="2000" b="1" i="0">
-                <a:solidFill>
-                  <a:srgbClr val="17222E"/>
-                </a:solidFill>
-                <a:latin typeface="Arial Narrow"/>
-              </a:rPr>
-              <a:t>“Crime é coisa de cidade pobre”</a:t>
-            </a:r>
-          </a:p>
+              <a:lnSpc>
+                <a:spcPct val="115000"/>
+              </a:lnSpc>
+            </a:pPr>
+            <a:r>
+              <a:rPr sz="1500" b="0" i="0">
+                <a:solidFill>
+                  <a:srgbClr val="595959"/>
+                </a:solidFill>
+                <a:latin typeface="Calibri"/>
+              </a:rPr>
+              <a:t>João Vitor Oliveira · Julio Cesar Salvino · Lucas Amorim — UFABC</a:t>
+            </a:r>
+          </a:p>
+        </p:txBody>
+      </p:sp>
+    </p:spTree>
+  </p:cSld>
+  <p:clrMapOvr>
+    <a:masterClrMapping/>
+  </p:clrMapOvr>
+</p:sld>
+</file>
+
+<file path=ppt/slides/slide2.xml><?xml version="1.0" encoding="utf-8"?>
+<p:sld xmlns:a="http://schemas.openxmlformats.org/drawingml/2006/main" xmlns:p="http://schemas.openxmlformats.org/presentationml/2006/main" xmlns:r="http://schemas.openxmlformats.org/officeDocument/2006/relationships">
+  <p:cSld>
+    <p:bg>
+      <p:bgPr>
+        <a:solidFill>
+          <a:srgbClr val="FFFFFF"/>
+        </a:solidFill>
+        <a:effectLst/>
+      </p:bgPr>
+    </p:bg>
+    <p:spTree>
+      <p:nvGrpSpPr>
+        <p:cNvPr id="1" name=""/>
+        <p:cNvGrpSpPr/>
+        <p:nvPr/>
+      </p:nvGrpSpPr>
+      <p:grpSpPr/>
+      <p:sp>
+        <p:nvSpPr>
+          <p:cNvPr id="2" name="TextBox 1"/>
+          <p:cNvSpPr txBox="1"/>
+          <p:nvPr/>
+        </p:nvSpPr>
+        <p:spPr>
+          <a:xfrm>
+            <a:off x="548640" y="320040"/>
+            <a:ext cx="7315200" cy="365760"/>
+          </a:xfrm>
+          <a:prstGeom prst="rect">
+            <a:avLst/>
+          </a:prstGeom>
+          <a:noFill/>
+        </p:spPr>
+        <p:txBody>
+          <a:bodyPr wrap="square" anchor="t">
+            <a:spAutoFit/>
+          </a:bodyPr>
+          <a:lstStyle/>
           <a:p>
             <a:pPr algn="l">
-              <a:spcBef>
-                <a:spcPts val="400"/>
-              </a:spcBef>
-            </a:pPr>
-            <a:r>
-              <a:rPr sz="1400" b="0" i="0">
-                <a:solidFill>
-                  <a:srgbClr val="17222E"/>
-                </a:solidFill>
-                <a:latin typeface="Georgia"/>
-              </a:rPr>
-              <a:t>A aposta clássica: quanto menor a renda, maior a taxa de crime.</a:t>
-            </a:r>
-          </a:p>
+              <a:lnSpc>
+                <a:spcPct val="115000"/>
+              </a:lnSpc>
+            </a:pPr>
+            <a:r>
+              <a:rPr sz="1300" b="1" i="0">
+                <a:solidFill>
+                  <a:srgbClr val="1F4E79"/>
+                </a:solidFill>
+                <a:latin typeface="Calibri"/>
+              </a:rPr>
+              <a:t>HIPÓTESE E MOTIVAÇÃO</a:t>
+            </a:r>
+          </a:p>
+        </p:txBody>
+      </p:sp>
+      <p:sp>
+        <p:nvSpPr>
+          <p:cNvPr id="3" name="TextBox 2"/>
+          <p:cNvSpPr txBox="1"/>
+          <p:nvPr/>
+        </p:nvSpPr>
+        <p:spPr>
+          <a:xfrm>
+            <a:off x="548640" y="594360"/>
+            <a:ext cx="11064240" cy="822960"/>
+          </a:xfrm>
+          <a:prstGeom prst="rect">
+            <a:avLst/>
+          </a:prstGeom>
+          <a:noFill/>
+        </p:spPr>
+        <p:txBody>
+          <a:bodyPr wrap="square" anchor="t">
+            <a:spAutoFit/>
+          </a:bodyPr>
+          <a:lstStyle/>
           <a:p>
             <a:pPr algn="l">
-              <a:spcBef>
-                <a:spcPts val="600"/>
-              </a:spcBef>
-            </a:pPr>
-            <a:r>
-              <a:rPr sz="1200" b="1" i="0">
-                <a:solidFill>
-                  <a:srgbClr val="D95F02"/>
-                </a:solidFill>
-                <a:latin typeface="Arial Narrow"/>
-              </a:rPr>
-              <a:t>NÃO COLOU</a:t>
-            </a:r>
-          </a:p>
-        </p:txBody>
-      </p:sp>
-      <p:sp>
-        <p:nvSpPr>
-          <p:cNvPr id="7" name="Rounded Rectangle 6"/>
+              <a:lnSpc>
+                <a:spcPct val="115000"/>
+              </a:lnSpc>
+            </a:pPr>
+            <a:r>
+              <a:rPr sz="3000" b="1" i="0">
+                <a:solidFill>
+                  <a:srgbClr val="1A1A1A"/>
+                </a:solidFill>
+                <a:latin typeface="Calibri"/>
+              </a:rPr>
+              <a:t>Acontecem mais crimes nas cidades mais pobres?</a:t>
+            </a:r>
+          </a:p>
+        </p:txBody>
+      </p:sp>
+      <p:sp>
+        <p:nvSpPr>
+          <p:cNvPr id="4" name="Rectangle 3"/>
           <p:cNvSpPr/>
           <p:nvPr/>
         </p:nvSpPr>
         <p:spPr>
           <a:xfrm>
-            <a:off x="6400800" y="1828800"/>
-            <a:ext cx="5029200" cy="2194560"/>
-          </a:xfrm>
-          <a:prstGeom prst="roundRect">
+            <a:off x="548640" y="1325880"/>
+            <a:ext cx="11064240" cy="27940"/>
+          </a:xfrm>
+          <a:prstGeom prst="rect">
             <a:avLst/>
           </a:prstGeom>
           <a:solidFill>
-            <a:srgbClr val="FBE6D4"/>
+            <a:srgbClr val="1F4E79"/>
           </a:solidFill>
-          <a:ln w="9525">
-            <a:solidFill>
-              <a:srgbClr val="D8DFE7"/>
-            </a:solidFill>
+          <a:ln>
+            <a:noFill/>
           </a:ln>
           <a:effectLst/>
         </p:spPr>
@@ -5235,84 +5855,23 @@
           </a:fontRef>
         </p:style>
         <p:txBody>
-          <a:bodyPr rtlCol="0" anchor="ctr" wrap="square" lIns="182880" rIns="182880" tIns="128016" bIns="128016"/>
-          <a:lstStyle/>
-          <a:p>
-            <a:pPr algn="l">
-              <a:spcBef>
-                <a:spcPts val="0"/>
-              </a:spcBef>
-            </a:pPr>
-            <a:r>
-              <a:rPr sz="1200" b="1" i="0">
-                <a:solidFill>
-                  <a:srgbClr val="D95F02"/>
-                </a:solidFill>
-                <a:latin typeface="Arial Narrow"/>
-              </a:rPr>
-              <a:t>HIPÓTESE 2</a:t>
-            </a:r>
-          </a:p>
-          <a:p>
-            <a:pPr algn="l">
-              <a:spcBef>
-                <a:spcPts val="400"/>
-              </a:spcBef>
-            </a:pPr>
-            <a:r>
-              <a:rPr sz="2000" b="1" i="0">
-                <a:solidFill>
-                  <a:srgbClr val="17222E"/>
-                </a:solidFill>
-                <a:latin typeface="Arial Narrow"/>
-              </a:rPr>
-              <a:t>“Crime é coisa de cidade de praia”</a:t>
-            </a:r>
-          </a:p>
-          <a:p>
-            <a:pPr algn="l">
-              <a:spcBef>
-                <a:spcPts val="400"/>
-              </a:spcBef>
-            </a:pPr>
-            <a:r>
-              <a:rPr sz="1400" b="0" i="0">
-                <a:solidFill>
-                  <a:srgbClr val="17222E"/>
-                </a:solidFill>
-                <a:latin typeface="Georgia"/>
-              </a:rPr>
-              <a:t>No verão enche de turista, mas a conta divide pela população fixa. A taxa estoura.</a:t>
-            </a:r>
-          </a:p>
-          <a:p>
-            <a:pPr algn="l">
-              <a:spcBef>
-                <a:spcPts val="600"/>
-              </a:spcBef>
-            </a:pPr>
-            <a:r>
-              <a:rPr sz="1200" b="1" i="0">
-                <a:solidFill>
-                  <a:srgbClr val="0B5394"/>
-                </a:solidFill>
-                <a:latin typeface="Arial Narrow"/>
-              </a:rPr>
-              <a:t>FOI ESSA</a:t>
-            </a:r>
-          </a:p>
-        </p:txBody>
-      </p:sp>
-      <p:sp>
-        <p:nvSpPr>
-          <p:cNvPr id="8" name="TextBox 7"/>
+          <a:bodyPr rtlCol="0" anchor="ctr"/>
+          <a:lstStyle/>
+          <a:p>
+            <a:pPr algn="ctr"/>
+          </a:p>
+        </p:txBody>
+      </p:sp>
+      <p:sp>
+        <p:nvSpPr>
+          <p:cNvPr id="5" name="TextBox 4"/>
           <p:cNvSpPr txBox="1"/>
           <p:nvPr/>
         </p:nvSpPr>
         <p:spPr>
           <a:xfrm>
-            <a:off x="822960" y="4297680"/>
-            <a:ext cx="10515600" cy="914400"/>
+            <a:off x="548640" y="1691640"/>
+            <a:ext cx="6126480" cy="4206240"/>
           </a:xfrm>
           <a:prstGeom prst="rect">
             <a:avLst/>
@@ -5325,96 +5884,103 @@
           </a:bodyPr>
           <a:lstStyle/>
           <a:p>
-            <a:pPr algn="l">
-              <a:spcBef>
-                <a:spcPts val="0"/>
-              </a:spcBef>
-            </a:pPr>
-            <a:r>
-              <a:rPr sz="1700" b="0" i="0">
-                <a:solidFill>
-                  <a:srgbClr val="17222E"/>
-                </a:solidFill>
-                <a:latin typeface="Georgia"/>
-              </a:rPr>
-              <a:t>Spoiler: a renda até tem relação com o furto, só que ao contrário do esperado. E a praia explicou muito mais do que a gente imaginava.</a:t>
-            </a:r>
-          </a:p>
-        </p:txBody>
-      </p:sp>
-    </p:spTree>
-  </p:cSld>
-  <p:clrMapOvr>
-    <a:masterClrMapping/>
-  </p:clrMapOvr>
-</p:sld>
-</file>
-
-<file path=ppt/slides/slide4.xml><?xml version="1.0" encoding="utf-8"?>
-<p:sld xmlns:a="http://schemas.openxmlformats.org/drawingml/2006/main" xmlns:p="http://schemas.openxmlformats.org/presentationml/2006/main" xmlns:r="http://schemas.openxmlformats.org/officeDocument/2006/relationships">
-  <p:cSld>
-    <p:spTree>
-      <p:nvGrpSpPr>
-        <p:cNvPr id="1" name=""/>
-        <p:cNvGrpSpPr/>
-        <p:nvPr/>
-      </p:nvGrpSpPr>
-      <p:grpSpPr/>
-      <p:sp>
-        <p:nvSpPr>
-          <p:cNvPr id="2" name="TextBox 1"/>
-          <p:cNvSpPr txBox="1"/>
-          <p:nvPr/>
-        </p:nvSpPr>
-        <p:spPr>
-          <a:xfrm>
-            <a:off x="822960" y="384048"/>
-            <a:ext cx="10515600" cy="365760"/>
-          </a:xfrm>
-          <a:prstGeom prst="rect">
-            <a:avLst/>
-          </a:prstGeom>
-          <a:noFill/>
-        </p:spPr>
-        <p:txBody>
-          <a:bodyPr wrap="square">
-            <a:spAutoFit/>
-          </a:bodyPr>
-          <a:lstStyle/>
-          <a:p>
-            <a:pPr algn="l">
-              <a:spcBef>
-                <a:spcPts val="0"/>
-              </a:spcBef>
-            </a:pPr>
-            <a:r>
-              <a:rPr sz="1300" b="1" i="0">
-                <a:solidFill>
-                  <a:srgbClr val="D95F02"/>
-                </a:solidFill>
-                <a:latin typeface="Arial Narrow"/>
-              </a:rPr>
-              <a:t>COMO A GENTE CHEGOU LÁ</a:t>
-            </a:r>
-          </a:p>
-        </p:txBody>
-      </p:sp>
-      <p:sp>
-        <p:nvSpPr>
-          <p:cNvPr id="3" name="Rectangle 2"/>
+            <a:pPr>
+              <a:lnSpc>
+                <a:spcPct val="115000"/>
+              </a:lnSpc>
+              <a:spcAft>
+                <a:spcPts val="1600"/>
+              </a:spcAft>
+            </a:pPr>
+            <a:r>
+              <a:rPr sz="1700">
+                <a:solidFill>
+                  <a:srgbClr val="333333"/>
+                </a:solidFill>
+                <a:latin typeface="Calibri"/>
+              </a:rPr>
+              <a:t>—  Hipótese de senso comum sobre criminalidade (H1): renda baixa → mais crime.</a:t>
+            </a:r>
+          </a:p>
+          <a:p>
+            <a:pPr>
+              <a:lnSpc>
+                <a:spcPct val="115000"/>
+              </a:lnSpc>
+              <a:spcAft>
+                <a:spcPts val="1600"/>
+              </a:spcAft>
+            </a:pPr>
+            <a:r>
+              <a:rPr sz="1700">
+                <a:solidFill>
+                  <a:srgbClr val="333333"/>
+                </a:solidFill>
+                <a:latin typeface="Calibri"/>
+              </a:rPr>
+              <a:t>—  Testada com a taxa de furto (art. 155) por 1.000 hab. nos 645 municípios de SP,
+contra a renda média per capita (Censo IBGE 2022).</a:t>
+            </a:r>
+          </a:p>
+          <a:p>
+            <a:pPr>
+              <a:lnSpc>
+                <a:spcPct val="115000"/>
+              </a:lnSpc>
+              <a:spcAft>
+                <a:spcPts val="1600"/>
+              </a:spcAft>
+            </a:pPr>
+            <a:r>
+              <a:rPr sz="1700">
+                <a:solidFill>
+                  <a:srgbClr val="333333"/>
+                </a:solidFill>
+                <a:latin typeface="Calibri"/>
+              </a:rPr>
+              <a:t>—  Por que taxa e não contagem? A contagem bruta acompanha o tamanho da
+população — qualquer mapa de contagem destaca só as cidades grandes.</a:t>
+            </a:r>
+          </a:p>
+          <a:p>
+            <a:pPr>
+              <a:lnSpc>
+                <a:spcPct val="115000"/>
+              </a:lnSpc>
+              <a:spcAft>
+                <a:spcPts val="1600"/>
+              </a:spcAft>
+            </a:pPr>
+            <a:r>
+              <a:rPr sz="1700">
+                <a:solidFill>
+                  <a:srgbClr val="333333"/>
+                </a:solidFill>
+                <a:latin typeface="Calibri"/>
+              </a:rPr>
+              <a:t>—  Fontes: SSP-SP (ocorrências, 2025) e IBGE (renda e população, Censo 2022).</a:t>
+            </a:r>
+          </a:p>
+        </p:txBody>
+      </p:sp>
+      <p:sp>
+        <p:nvSpPr>
+          <p:cNvPr id="6" name="Rounded Rectangle 5"/>
           <p:cNvSpPr/>
           <p:nvPr/>
         </p:nvSpPr>
         <p:spPr>
           <a:xfrm>
-            <a:off x="822960" y="749808"/>
-            <a:ext cx="10515600" cy="15240"/>
-          </a:xfrm>
-          <a:prstGeom prst="rect">
-            <a:avLst/>
+            <a:off x="7040880" y="1828800"/>
+            <a:ext cx="4480560" cy="1188720"/>
+          </a:xfrm>
+          <a:prstGeom prst="roundRect">
+            <a:avLst>
+              <a:gd name="adj" fmla="val 8000"/>
+            </a:avLst>
           </a:prstGeom>
           <a:solidFill>
-            <a:srgbClr val="D8DFE7"/>
+            <a:srgbClr val="F2F2F2"/>
           </a:solidFill>
           <a:ln>
             <a:noFill/>
@@ -5436,554 +6002,52 @@
           </a:fontRef>
         </p:style>
         <p:txBody>
-          <a:bodyPr rtlCol="0" anchor="ctr"/>
+          <a:bodyPr rtlCol="0" anchor="ctr" wrap="square" lIns="137160" rIns="137160"/>
           <a:lstStyle/>
           <a:p>
             <a:pPr algn="ctr"/>
-          </a:p>
-        </p:txBody>
-      </p:sp>
-      <p:sp>
-        <p:nvSpPr>
-          <p:cNvPr id="4" name="TextBox 3"/>
-          <p:cNvSpPr txBox="1"/>
-          <p:nvPr/>
-        </p:nvSpPr>
-        <p:spPr>
-          <a:xfrm>
-            <a:off x="9784080" y="384048"/>
-            <a:ext cx="1600200" cy="365760"/>
-          </a:xfrm>
-          <a:prstGeom prst="rect">
-            <a:avLst/>
-          </a:prstGeom>
-          <a:noFill/>
-        </p:spPr>
-        <p:txBody>
-          <a:bodyPr wrap="square">
-            <a:spAutoFit/>
-          </a:bodyPr>
-          <a:lstStyle/>
-          <a:p>
-            <a:pPr algn="r">
-              <a:spcBef>
-                <a:spcPts val="0"/>
-              </a:spcBef>
-            </a:pPr>
-            <a:r>
-              <a:rPr sz="1200" b="0" i="0">
-                <a:solidFill>
-                  <a:srgbClr val="5B6B7C"/>
-                </a:solidFill>
-                <a:latin typeface="Arial Narrow"/>
-              </a:rPr>
-              <a:t>03 · DESENVOLVIMENTO</a:t>
-            </a:r>
-          </a:p>
-        </p:txBody>
-      </p:sp>
-      <p:sp>
-        <p:nvSpPr>
-          <p:cNvPr id="5" name="TextBox 4"/>
-          <p:cNvSpPr txBox="1"/>
-          <p:nvPr/>
-        </p:nvSpPr>
-        <p:spPr>
-          <a:xfrm>
-            <a:off x="822960" y="960120"/>
-            <a:ext cx="10515600" cy="914400"/>
-          </a:xfrm>
-          <a:prstGeom prst="rect">
-            <a:avLst/>
-          </a:prstGeom>
-          <a:noFill/>
-        </p:spPr>
-        <p:txBody>
-          <a:bodyPr wrap="square">
-            <a:spAutoFit/>
-          </a:bodyPr>
-          <a:lstStyle/>
-          <a:p>
-            <a:pPr algn="l">
-              <a:spcBef>
-                <a:spcPts val="0"/>
-              </a:spcBef>
-            </a:pPr>
-            <a:r>
-              <a:rPr sz="3400" b="1" i="0">
-                <a:solidFill>
-                  <a:srgbClr val="17222E"/>
-                </a:solidFill>
-                <a:latin typeface="Arial Narrow"/>
-              </a:rPr>
-              <a:t>Do tabelão </a:t>
-            </a:r>
-            <a:r>
-              <a:rPr sz="3400" b="1" i="0">
-                <a:solidFill>
-                  <a:srgbClr val="D95F02"/>
-                </a:solidFill>
-                <a:latin typeface="Arial Narrow"/>
-              </a:rPr>
-              <a:t>ao mapa que se explica sozinho</a:t>
-            </a:r>
-          </a:p>
-        </p:txBody>
-      </p:sp>
-      <p:sp>
-        <p:nvSpPr>
-          <p:cNvPr id="6" name="TextBox 5"/>
-          <p:cNvSpPr txBox="1"/>
-          <p:nvPr/>
-        </p:nvSpPr>
-        <p:spPr>
-          <a:xfrm>
-            <a:off x="822960" y="1920240"/>
-            <a:ext cx="10241280" cy="4114800"/>
-          </a:xfrm>
-          <a:prstGeom prst="rect">
-            <a:avLst/>
-          </a:prstGeom>
-          <a:noFill/>
-        </p:spPr>
-        <p:txBody>
-          <a:bodyPr wrap="square">
-            <a:spAutoFit/>
-          </a:bodyPr>
-          <a:lstStyle/>
-          <a:p>
-            <a:pPr algn="l">
-              <a:spcBef>
-                <a:spcPts val="0"/>
-              </a:spcBef>
-            </a:pPr>
-            <a:r>
-              <a:rPr sz="1800" b="1" i="0">
-                <a:solidFill>
-                  <a:srgbClr val="D95F02"/>
-                </a:solidFill>
-                <a:latin typeface="Arial Narrow"/>
-              </a:rPr>
-              <a:t>1   </a:t>
-            </a:r>
-            <a:r>
-              <a:rPr sz="1600" b="1" i="0">
-                <a:solidFill>
-                  <a:srgbClr val="17222E"/>
-                </a:solidFill>
-                <a:latin typeface="Georgia"/>
-              </a:rPr>
-              <a:t>Juntamos</a:t>
-            </a:r>
-            <a:r>
-              <a:rPr sz="1600" b="0" i="0">
-                <a:solidFill>
-                  <a:srgbClr val="17222E"/>
-                </a:solidFill>
-                <a:latin typeface="Georgia"/>
-              </a:rPr>
-              <a:t> crime, renda e população num tabelão validado, um município por linha.</a:t>
-            </a:r>
-          </a:p>
-          <a:p>
-            <a:pPr algn="l">
-              <a:spcBef>
-                <a:spcPts val="1000"/>
-              </a:spcBef>
-            </a:pPr>
-            <a:r>
-              <a:rPr sz="1800" b="1" i="0">
-                <a:solidFill>
-                  <a:srgbClr val="D95F02"/>
-                </a:solidFill>
-                <a:latin typeface="Arial Narrow"/>
-              </a:rPr>
-              <a:t>2   </a:t>
-            </a:r>
-            <a:r>
-              <a:rPr sz="1600" b="1" i="0">
-                <a:solidFill>
-                  <a:srgbClr val="17222E"/>
-                </a:solidFill>
-                <a:latin typeface="Georgia"/>
-              </a:rPr>
-              <a:t>Olhamos</a:t>
-            </a:r>
-            <a:r>
-              <a:rPr sz="1600" b="0" i="0">
-                <a:solidFill>
-                  <a:srgbClr val="17222E"/>
-                </a:solidFill>
-                <a:latin typeface="Georgia"/>
-              </a:rPr>
-              <a:t> a correlação entre renda e os crimes (e levamos o primeiro susto).</a:t>
-            </a:r>
-          </a:p>
-          <a:p>
-            <a:pPr algn="l">
-              <a:spcBef>
-                <a:spcPts val="1000"/>
-              </a:spcBef>
-            </a:pPr>
-            <a:r>
-              <a:rPr sz="1800" b="1" i="0">
-                <a:solidFill>
-                  <a:srgbClr val="D95F02"/>
-                </a:solidFill>
-                <a:latin typeface="Arial Narrow"/>
-              </a:rPr>
-              <a:t>3   </a:t>
-            </a:r>
-            <a:r>
-              <a:rPr sz="1600" b="1" i="0">
-                <a:solidFill>
-                  <a:srgbClr val="17222E"/>
-                </a:solidFill>
-                <a:latin typeface="Georgia"/>
-              </a:rPr>
-              <a:t>Fomos para o mapa:</a:t>
-            </a:r>
-            <a:r>
-              <a:rPr sz="1600" b="0" i="0">
-                <a:solidFill>
-                  <a:srgbClr val="17222E"/>
-                </a:solidFill>
-                <a:latin typeface="Georgia"/>
-              </a:rPr>
-              <a:t> onde estão as taxas altas? Elas se agrupam? (Moran e LISA)</a:t>
-            </a:r>
-          </a:p>
-          <a:p>
-            <a:pPr algn="l">
-              <a:spcBef>
-                <a:spcPts val="1000"/>
-              </a:spcBef>
-            </a:pPr>
-            <a:r>
-              <a:rPr sz="1800" b="1" i="0">
-                <a:solidFill>
-                  <a:srgbClr val="D95F02"/>
-                </a:solidFill>
-                <a:latin typeface="Arial Narrow"/>
-              </a:rPr>
-              <a:t>4   </a:t>
-            </a:r>
-            <a:r>
-              <a:rPr sz="1600" b="1" i="0">
-                <a:solidFill>
-                  <a:srgbClr val="17222E"/>
-                </a:solidFill>
-                <a:latin typeface="Georgia"/>
-              </a:rPr>
-              <a:t>Montamos modelos:</a:t>
-            </a:r>
-            <a:r>
-              <a:rPr sz="1600" b="0" i="0">
-                <a:solidFill>
-                  <a:srgbClr val="17222E"/>
-                </a:solidFill>
-                <a:latin typeface="Georgia"/>
-              </a:rPr>
-              <a:t> da regressão simples até a espacial e a local (GWR).</a:t>
-            </a:r>
-          </a:p>
-          <a:p>
-            <a:pPr algn="l">
-              <a:spcBef>
-                <a:spcPts val="1000"/>
-              </a:spcBef>
-            </a:pPr>
-            <a:r>
-              <a:rPr sz="1800" b="1" i="0">
-                <a:solidFill>
-                  <a:srgbClr val="D95F02"/>
-                </a:solidFill>
-                <a:latin typeface="Arial Narrow"/>
-              </a:rPr>
-              <a:t>5   </a:t>
-            </a:r>
-            <a:r>
-              <a:rPr sz="1600" b="1" i="0">
-                <a:solidFill>
-                  <a:srgbClr val="17222E"/>
-                </a:solidFill>
-                <a:latin typeface="Georgia"/>
-              </a:rPr>
-              <a:t>Fizemos um “e se?”:</a:t>
-            </a:r>
-            <a:r>
-              <a:rPr sz="1600" b="0" i="0">
-                <a:solidFill>
-                  <a:srgbClr val="17222E"/>
-                </a:solidFill>
-                <a:latin typeface="Georgia"/>
-              </a:rPr>
-              <a:t> e se as cidades de praia não existissem no modelo?</a:t>
-            </a:r>
-          </a:p>
-        </p:txBody>
-      </p:sp>
-    </p:spTree>
-  </p:cSld>
-  <p:clrMapOvr>
-    <a:masterClrMapping/>
-  </p:clrMapOvr>
-</p:sld>
-</file>
-
-<file path=ppt/slides/slide5.xml><?xml version="1.0" encoding="utf-8"?>
-<p:sld xmlns:a="http://schemas.openxmlformats.org/drawingml/2006/main" xmlns:p="http://schemas.openxmlformats.org/presentationml/2006/main" xmlns:r="http://schemas.openxmlformats.org/officeDocument/2006/relationships">
-  <p:cSld>
-    <p:spTree>
-      <p:nvGrpSpPr>
-        <p:cNvPr id="1" name=""/>
-        <p:cNvGrpSpPr/>
-        <p:nvPr/>
-      </p:nvGrpSpPr>
-      <p:grpSpPr/>
-      <p:pic>
-        <p:nvPicPr>
-          <p:cNvPr id="2" name="Picture 1" descr="mapa_taxa_furto.png"/>
-          <p:cNvPicPr>
-            <a:picLocks noChangeAspect="1"/>
-          </p:cNvPicPr>
-          <p:nvPr/>
-        </p:nvPicPr>
-        <p:blipFill>
-          <a:blip r:embed="rId2"/>
-          <a:stretch>
-            <a:fillRect/>
-          </a:stretch>
-        </p:blipFill>
-        <p:spPr>
-          <a:xfrm>
-            <a:off x="822960" y="1280160"/>
-            <a:ext cx="5452110" cy="4846320"/>
-          </a:xfrm>
-          <a:prstGeom prst="rect">
-            <a:avLst/>
-          </a:prstGeom>
-        </p:spPr>
-      </p:pic>
-      <p:sp>
-        <p:nvSpPr>
-          <p:cNvPr id="3" name="TextBox 2"/>
-          <p:cNvSpPr txBox="1"/>
-          <p:nvPr/>
-        </p:nvSpPr>
-        <p:spPr>
-          <a:xfrm>
-            <a:off x="6492240" y="1463040"/>
-            <a:ext cx="4937760" cy="1097280"/>
-          </a:xfrm>
-          <a:prstGeom prst="rect">
-            <a:avLst/>
-          </a:prstGeom>
-          <a:noFill/>
-        </p:spPr>
-        <p:txBody>
-          <a:bodyPr wrap="square">
-            <a:spAutoFit/>
-          </a:bodyPr>
-          <a:lstStyle/>
-          <a:p>
-            <a:pPr algn="l">
-              <a:spcBef>
-                <a:spcPts val="0"/>
-              </a:spcBef>
-            </a:pPr>
-            <a:r>
-              <a:rPr sz="3000" b="1" i="0">
-                <a:solidFill>
-                  <a:srgbClr val="17222E"/>
-                </a:solidFill>
-                <a:latin typeface="Arial Narrow"/>
-              </a:rPr>
-              <a:t>O litoral </a:t>
-            </a:r>
-            <a:r>
-              <a:rPr sz="3000" b="1" i="0">
-                <a:solidFill>
-                  <a:srgbClr val="D95F02"/>
-                </a:solidFill>
-                <a:latin typeface="Arial Narrow"/>
-              </a:rPr>
-              <a:t>inteiro aceso</a:t>
-            </a:r>
-          </a:p>
-        </p:txBody>
-      </p:sp>
-      <p:sp>
-        <p:nvSpPr>
-          <p:cNvPr id="4" name="TextBox 3"/>
-          <p:cNvSpPr txBox="1"/>
-          <p:nvPr/>
-        </p:nvSpPr>
-        <p:spPr>
-          <a:xfrm>
-            <a:off x="6492240" y="2743200"/>
-            <a:ext cx="4937760" cy="3474720"/>
-          </a:xfrm>
-          <a:prstGeom prst="rect">
-            <a:avLst/>
-          </a:prstGeom>
-          <a:noFill/>
-        </p:spPr>
-        <p:txBody>
-          <a:bodyPr wrap="square">
-            <a:spAutoFit/>
-          </a:bodyPr>
-          <a:lstStyle/>
-          <a:p>
-            <a:pPr algn="l">
-              <a:spcBef>
-                <a:spcPts val="0"/>
-              </a:spcBef>
-            </a:pPr>
-            <a:r>
-              <a:rPr sz="1100" b="0" i="0">
-                <a:solidFill>
-                  <a:srgbClr val="D95F02"/>
-                </a:solidFill>
-                <a:latin typeface="Arial Narrow"/>
-              </a:rPr>
-              <a:t>●  </a:t>
-            </a:r>
-            <a:r>
-              <a:rPr sz="1500" b="0" i="0">
-                <a:solidFill>
-                  <a:srgbClr val="17222E"/>
-                </a:solidFill>
-                <a:latin typeface="Georgia"/>
-              </a:rPr>
-              <a:t>A faixa da praia, de Ubatuba a Cananéia, salta no tom mais escuro.</a:t>
-            </a:r>
-          </a:p>
-          <a:p>
-            <a:pPr algn="l">
-              <a:spcBef>
-                <a:spcPts val="1200"/>
-              </a:spcBef>
-            </a:pPr>
-            <a:r>
-              <a:rPr sz="1100" b="0" i="0">
-                <a:solidFill>
-                  <a:srgbClr val="D95F02"/>
-                </a:solidFill>
-                <a:latin typeface="Arial Narrow"/>
-              </a:rPr>
-              <a:t>●  </a:t>
-            </a:r>
-            <a:r>
-              <a:rPr sz="1500" b="0" i="0">
-                <a:solidFill>
-                  <a:srgbClr val="17222E"/>
-                </a:solidFill>
-                <a:latin typeface="Georgia"/>
-              </a:rPr>
-              <a:t>No topo do furto: </a:t>
-            </a:r>
-            <a:r>
-              <a:rPr sz="1500" b="1" i="0">
-                <a:solidFill>
-                  <a:srgbClr val="17222E"/>
-                </a:solidFill>
-                <a:latin typeface="Georgia"/>
-              </a:rPr>
-              <a:t>Mongaguá (34/1.000)</a:t>
-            </a:r>
-            <a:r>
-              <a:rPr sz="1500" b="0" i="0">
-                <a:solidFill>
-                  <a:srgbClr val="17222E"/>
-                </a:solidFill>
-                <a:latin typeface="Georgia"/>
-              </a:rPr>
-              <a:t>, Itanhaém, Ilha Comprida, Peruíbe. Quase tudo praia.</a:t>
-            </a:r>
-          </a:p>
-          <a:p>
-            <a:pPr algn="l">
-              <a:spcBef>
-                <a:spcPts val="1200"/>
-              </a:spcBef>
-            </a:pPr>
-            <a:r>
-              <a:rPr sz="1100" b="0" i="0">
-                <a:solidFill>
-                  <a:srgbClr val="D95F02"/>
-                </a:solidFill>
-                <a:latin typeface="Arial Narrow"/>
-              </a:rPr>
-              <a:t>●  </a:t>
-            </a:r>
-            <a:r>
-              <a:rPr sz="1500" b="0" i="0">
-                <a:solidFill>
-                  <a:srgbClr val="17222E"/>
-                </a:solidFill>
-                <a:latin typeface="Georgia"/>
-              </a:rPr>
-              <a:t>O interior é bem mais claro, com bolsões escuros na macrometrópole.</a:t>
-            </a:r>
-          </a:p>
-        </p:txBody>
-      </p:sp>
-      <p:sp>
-        <p:nvSpPr>
-          <p:cNvPr id="5" name="TextBox 4"/>
-          <p:cNvSpPr txBox="1"/>
-          <p:nvPr/>
-        </p:nvSpPr>
-        <p:spPr>
-          <a:xfrm>
-            <a:off x="822960" y="384048"/>
-            <a:ext cx="10515600" cy="365760"/>
-          </a:xfrm>
-          <a:prstGeom prst="rect">
-            <a:avLst/>
-          </a:prstGeom>
-          <a:noFill/>
-        </p:spPr>
-        <p:txBody>
-          <a:bodyPr wrap="square">
-            <a:spAutoFit/>
-          </a:bodyPr>
-          <a:lstStyle/>
-          <a:p>
-            <a:pPr algn="l">
-              <a:spcBef>
-                <a:spcPts val="0"/>
-              </a:spcBef>
-            </a:pPr>
-            <a:r>
-              <a:rPr sz="1300" b="1" i="0">
-                <a:solidFill>
-                  <a:srgbClr val="D95F02"/>
-                </a:solidFill>
-                <a:latin typeface="Arial Narrow"/>
-              </a:rPr>
-              <a:t>DESCOBERTAS</a:t>
-            </a:r>
-          </a:p>
-        </p:txBody>
-      </p:sp>
-      <p:sp>
-        <p:nvSpPr>
-          <p:cNvPr id="6" name="Rectangle 5"/>
+            <a:r>
+              <a:rPr sz="2600" b="1">
+                <a:solidFill>
+                  <a:srgbClr val="1F4E79"/>
+                </a:solidFill>
+                <a:latin typeface="Calibri"/>
+              </a:rPr>
+              <a:t>645</a:t>
+            </a:r>
+          </a:p>
+          <a:p>
+            <a:pPr algn="ctr"/>
+            <a:r>
+              <a:rPr sz="1200">
+                <a:solidFill>
+                  <a:srgbClr val="595959"/>
+                </a:solidFill>
+                <a:latin typeface="Calibri"/>
+              </a:rPr>
+              <a:t>municípios de São Paulo</a:t>
+            </a:r>
+          </a:p>
+        </p:txBody>
+      </p:sp>
+      <p:sp>
+        <p:nvSpPr>
+          <p:cNvPr id="7" name="Rounded Rectangle 6"/>
           <p:cNvSpPr/>
           <p:nvPr/>
         </p:nvSpPr>
         <p:spPr>
           <a:xfrm>
-            <a:off x="822960" y="749808"/>
-            <a:ext cx="10515600" cy="15240"/>
-          </a:xfrm>
-          <a:prstGeom prst="rect">
-            <a:avLst/>
+            <a:off x="7040880" y="3200400"/>
+            <a:ext cx="4480560" cy="1188720"/>
+          </a:xfrm>
+          <a:prstGeom prst="roundRect">
+            <a:avLst>
+              <a:gd name="adj" fmla="val 8000"/>
+            </a:avLst>
           </a:prstGeom>
           <a:solidFill>
-            <a:srgbClr val="D8DFE7"/>
+            <a:srgbClr val="F2F2F2"/>
           </a:solidFill>
           <a:ln>
             <a:noFill/>
@@ -6005,349 +6069,53 @@
           </a:fontRef>
         </p:style>
         <p:txBody>
-          <a:bodyPr rtlCol="0" anchor="ctr"/>
+          <a:bodyPr rtlCol="0" anchor="ctr" wrap="square" lIns="137160" rIns="137160"/>
           <a:lstStyle/>
           <a:p>
             <a:pPr algn="ctr"/>
-          </a:p>
-        </p:txBody>
-      </p:sp>
-      <p:sp>
-        <p:nvSpPr>
-          <p:cNvPr id="7" name="TextBox 6"/>
-          <p:cNvSpPr txBox="1"/>
-          <p:nvPr/>
-        </p:nvSpPr>
-        <p:spPr>
-          <a:xfrm>
-            <a:off x="9784080" y="384048"/>
-            <a:ext cx="1600200" cy="365760"/>
-          </a:xfrm>
-          <a:prstGeom prst="rect">
-            <a:avLst/>
-          </a:prstGeom>
-          <a:noFill/>
-        </p:spPr>
-        <p:txBody>
-          <a:bodyPr wrap="square">
-            <a:spAutoFit/>
-          </a:bodyPr>
-          <a:lstStyle/>
-          <a:p>
-            <a:pPr algn="r">
-              <a:spcBef>
-                <a:spcPts val="0"/>
-              </a:spcBef>
-            </a:pPr>
-            <a:r>
-              <a:rPr sz="1200" b="0" i="0">
-                <a:solidFill>
-                  <a:srgbClr val="5B6B7C"/>
-                </a:solidFill>
-                <a:latin typeface="Arial Narrow"/>
-              </a:rPr>
-              <a:t>04 · O MAPA</a:t>
-            </a:r>
-          </a:p>
-        </p:txBody>
-      </p:sp>
-    </p:spTree>
-  </p:cSld>
-  <p:clrMapOvr>
-    <a:masterClrMapping/>
-  </p:clrMapOvr>
-</p:sld>
-</file>
-
-<file path=ppt/slides/slide6.xml><?xml version="1.0" encoding="utf-8"?>
-<p:sld xmlns:a="http://schemas.openxmlformats.org/drawingml/2006/main" xmlns:p="http://schemas.openxmlformats.org/presentationml/2006/main" xmlns:r="http://schemas.openxmlformats.org/officeDocument/2006/relationships">
-  <p:cSld>
-    <p:spTree>
-      <p:nvGrpSpPr>
-        <p:cNvPr id="1" name=""/>
-        <p:cNvGrpSpPr/>
-        <p:nvPr/>
-      </p:nvGrpSpPr>
-      <p:grpSpPr/>
-      <p:pic>
-        <p:nvPicPr>
-          <p:cNvPr id="2" name="Picture 1" descr="dispersoes_taxas_renda.png"/>
-          <p:cNvPicPr>
-            <a:picLocks noChangeAspect="1"/>
-          </p:cNvPicPr>
-          <p:nvPr/>
-        </p:nvPicPr>
-        <p:blipFill>
-          <a:blip r:embed="rId2"/>
-          <a:stretch>
-            <a:fillRect/>
-          </a:stretch>
-        </p:blipFill>
-        <p:spPr>
-          <a:xfrm>
-            <a:off x="822960" y="1280160"/>
-            <a:ext cx="7615646" cy="4846320"/>
-          </a:xfrm>
-          <a:prstGeom prst="rect">
-            <a:avLst/>
-          </a:prstGeom>
-        </p:spPr>
-      </p:pic>
-      <p:sp>
-        <p:nvSpPr>
-          <p:cNvPr id="3" name="TextBox 2"/>
-          <p:cNvSpPr txBox="1"/>
-          <p:nvPr/>
-        </p:nvSpPr>
-        <p:spPr>
-          <a:xfrm>
-            <a:off x="6492240" y="1463040"/>
-            <a:ext cx="4937760" cy="1097280"/>
-          </a:xfrm>
-          <a:prstGeom prst="rect">
-            <a:avLst/>
-          </a:prstGeom>
-          <a:noFill/>
-        </p:spPr>
-        <p:txBody>
-          <a:bodyPr wrap="square">
-            <a:spAutoFit/>
-          </a:bodyPr>
-          <a:lstStyle/>
-          <a:p>
-            <a:pPr algn="l">
-              <a:spcBef>
-                <a:spcPts val="0"/>
-              </a:spcBef>
-            </a:pPr>
-            <a:r>
-              <a:rPr sz="3000" b="1" i="0">
-                <a:solidFill>
-                  <a:srgbClr val="17222E"/>
-                </a:solidFill>
-                <a:latin typeface="Arial Narrow"/>
-              </a:rPr>
-              <a:t>Renda maior, </a:t>
-            </a:r>
-            <a:r>
-              <a:rPr sz="3000" b="1" i="0">
-                <a:solidFill>
-                  <a:srgbClr val="D95F02"/>
-                </a:solidFill>
-                <a:latin typeface="Arial Narrow"/>
-              </a:rPr>
-              <a:t>mais furto?!</a:t>
-            </a:r>
-          </a:p>
-        </p:txBody>
-      </p:sp>
-      <p:sp>
-        <p:nvSpPr>
-          <p:cNvPr id="4" name="TextBox 3"/>
-          <p:cNvSpPr txBox="1"/>
-          <p:nvPr/>
-        </p:nvSpPr>
-        <p:spPr>
-          <a:xfrm>
-            <a:off x="6492240" y="2743200"/>
-            <a:ext cx="4937760" cy="3474720"/>
-          </a:xfrm>
-          <a:prstGeom prst="rect">
-            <a:avLst/>
-          </a:prstGeom>
-          <a:noFill/>
-        </p:spPr>
-        <p:txBody>
-          <a:bodyPr wrap="square">
-            <a:spAutoFit/>
-          </a:bodyPr>
-          <a:lstStyle/>
-          <a:p>
-            <a:pPr algn="l">
-              <a:spcBef>
-                <a:spcPts val="0"/>
-              </a:spcBef>
-            </a:pPr>
-            <a:r>
-              <a:rPr sz="1100" b="0" i="0">
-                <a:solidFill>
-                  <a:srgbClr val="D95F02"/>
-                </a:solidFill>
-                <a:latin typeface="Arial Narrow"/>
-              </a:rPr>
-              <a:t>●  </a:t>
-            </a:r>
-            <a:r>
-              <a:rPr sz="1500" b="0" i="0">
-                <a:solidFill>
-                  <a:srgbClr val="17222E"/>
-                </a:solidFill>
-                <a:latin typeface="Georgia"/>
-              </a:rPr>
-              <a:t>A relação entre renda e furto é </a:t>
-            </a:r>
-            <a:r>
-              <a:rPr sz="1500" b="1" i="0">
-                <a:solidFill>
-                  <a:srgbClr val="17222E"/>
-                </a:solidFill>
-                <a:latin typeface="Georgia"/>
-              </a:rPr>
-              <a:t>positiva</a:t>
-            </a:r>
-            <a:r>
-              <a:rPr sz="1500" b="0" i="0">
-                <a:solidFill>
-                  <a:srgbClr val="17222E"/>
-                </a:solidFill>
-                <a:latin typeface="Georgia"/>
-              </a:rPr>
-              <a:t>, não negativa.</a:t>
-            </a:r>
-          </a:p>
-          <a:p>
-            <a:pPr algn="l">
-              <a:spcBef>
-                <a:spcPts val="1200"/>
-              </a:spcBef>
-            </a:pPr>
-            <a:r>
-              <a:rPr sz="1100" b="0" i="0">
-                <a:solidFill>
-                  <a:srgbClr val="D95F02"/>
-                </a:solidFill>
-                <a:latin typeface="Arial Narrow"/>
-              </a:rPr>
-              <a:t>●  </a:t>
-            </a:r>
-            <a:r>
-              <a:rPr sz="1500" b="0" i="0">
-                <a:solidFill>
-                  <a:srgbClr val="17222E"/>
-                </a:solidFill>
-                <a:latin typeface="Georgia"/>
-              </a:rPr>
-              <a:t>Isso já </a:t>
-            </a:r>
-            <a:r>
-              <a:rPr sz="1500" b="1" i="0">
-                <a:solidFill>
-                  <a:srgbClr val="17222E"/>
-                </a:solidFill>
-                <a:latin typeface="Georgia"/>
-              </a:rPr>
-              <a:t>derruba a Hipótese 1</a:t>
-            </a:r>
-            <a:r>
-              <a:rPr sz="1500" b="0" i="0">
-                <a:solidFill>
-                  <a:srgbClr val="17222E"/>
-                </a:solidFill>
-                <a:latin typeface="Georgia"/>
-              </a:rPr>
-              <a:t>: não é a pobreza que puxa o furto.</a:t>
-            </a:r>
-          </a:p>
-          <a:p>
-            <a:pPr algn="l">
-              <a:spcBef>
-                <a:spcPts val="1200"/>
-              </a:spcBef>
-            </a:pPr>
-            <a:r>
-              <a:rPr sz="1100" b="0" i="0">
-                <a:solidFill>
-                  <a:srgbClr val="D95F02"/>
-                </a:solidFill>
-                <a:latin typeface="Arial Narrow"/>
-              </a:rPr>
-              <a:t>●  </a:t>
-            </a:r>
-            <a:r>
-              <a:rPr sz="1500" b="0" i="0">
-                <a:solidFill>
-                  <a:srgbClr val="17222E"/>
-                </a:solidFill>
-                <a:latin typeface="Georgia"/>
-              </a:rPr>
-              <a:t>Os pontos de praia ficam quase todos </a:t>
-            </a:r>
-            <a:r>
-              <a:rPr sz="1500" b="1" i="0">
-                <a:solidFill>
-                  <a:srgbClr val="17222E"/>
-                </a:solidFill>
-                <a:latin typeface="Georgia"/>
-              </a:rPr>
-              <a:t>acima</a:t>
-            </a:r>
-            <a:r>
-              <a:rPr sz="1500" b="0" i="0">
-                <a:solidFill>
-                  <a:srgbClr val="17222E"/>
-                </a:solidFill>
-                <a:latin typeface="Georgia"/>
-              </a:rPr>
-              <a:t> da reta.</a:t>
-            </a:r>
-          </a:p>
-        </p:txBody>
-      </p:sp>
-      <p:sp>
-        <p:nvSpPr>
-          <p:cNvPr id="5" name="TextBox 4"/>
-          <p:cNvSpPr txBox="1"/>
-          <p:nvPr/>
-        </p:nvSpPr>
-        <p:spPr>
-          <a:xfrm>
-            <a:off x="822960" y="384048"/>
-            <a:ext cx="10515600" cy="365760"/>
-          </a:xfrm>
-          <a:prstGeom prst="rect">
-            <a:avLst/>
-          </a:prstGeom>
-          <a:noFill/>
-        </p:spPr>
-        <p:txBody>
-          <a:bodyPr wrap="square">
-            <a:spAutoFit/>
-          </a:bodyPr>
-          <a:lstStyle/>
-          <a:p>
-            <a:pPr algn="l">
-              <a:spcBef>
-                <a:spcPts val="0"/>
-              </a:spcBef>
-            </a:pPr>
-            <a:r>
-              <a:rPr sz="1300" b="1" i="0">
-                <a:solidFill>
-                  <a:srgbClr val="D95F02"/>
-                </a:solidFill>
-                <a:latin typeface="Arial Narrow"/>
-              </a:rPr>
-              <a:t>DESCOBERTAS</a:t>
-            </a:r>
-          </a:p>
-        </p:txBody>
-      </p:sp>
-      <p:sp>
-        <p:nvSpPr>
-          <p:cNvPr id="6" name="Rectangle 5"/>
+            <a:r>
+              <a:rPr sz="2600" b="1">
+                <a:solidFill>
+                  <a:srgbClr val="1F4E79"/>
+                </a:solidFill>
+                <a:latin typeface="Calibri"/>
+              </a:rPr>
+              <a:t>3</a:t>
+            </a:r>
+          </a:p>
+          <a:p>
+            <a:pPr algn="ctr"/>
+            <a:r>
+              <a:rPr sz="1200">
+                <a:solidFill>
+                  <a:srgbClr val="595959"/>
+                </a:solidFill>
+                <a:latin typeface="Calibri"/>
+              </a:rPr>
+              <a:t>crimes analisados:
+roubo · furto · lesão corporal</a:t>
+            </a:r>
+          </a:p>
+        </p:txBody>
+      </p:sp>
+      <p:sp>
+        <p:nvSpPr>
+          <p:cNvPr id="8" name="Rounded Rectangle 7"/>
           <p:cNvSpPr/>
           <p:nvPr/>
         </p:nvSpPr>
         <p:spPr>
           <a:xfrm>
-            <a:off x="822960" y="749808"/>
-            <a:ext cx="10515600" cy="15240"/>
-          </a:xfrm>
-          <a:prstGeom prst="rect">
-            <a:avLst/>
+            <a:off x="7040880" y="4572000"/>
+            <a:ext cx="4480560" cy="1188720"/>
+          </a:xfrm>
+          <a:prstGeom prst="roundRect">
+            <a:avLst>
+              <a:gd name="adj" fmla="val 8000"/>
+            </a:avLst>
           </a:prstGeom>
           <a:solidFill>
-            <a:srgbClr val="D8DFE7"/>
+            <a:srgbClr val="F2F2F2"/>
           </a:solidFill>
           <a:ln>
             <a:noFill/>
@@ -6369,23 +6137,45 @@
           </a:fontRef>
         </p:style>
         <p:txBody>
-          <a:bodyPr rtlCol="0" anchor="ctr"/>
+          <a:bodyPr rtlCol="0" anchor="ctr" wrap="square" lIns="137160" rIns="137160"/>
           <a:lstStyle/>
           <a:p>
             <a:pPr algn="ctr"/>
-          </a:p>
-        </p:txBody>
-      </p:sp>
-      <p:sp>
-        <p:nvSpPr>
-          <p:cNvPr id="7" name="TextBox 6"/>
+            <a:r>
+              <a:rPr sz="2600" b="1">
+                <a:solidFill>
+                  <a:srgbClr val="1F4E79"/>
+                </a:solidFill>
+                <a:latin typeface="Calibri"/>
+              </a:rPr>
+              <a:t>por 1.000 hab.</a:t>
+            </a:r>
+          </a:p>
+          <a:p>
+            <a:pPr algn="ctr"/>
+            <a:r>
+              <a:rPr sz="1200">
+                <a:solidFill>
+                  <a:srgbClr val="595959"/>
+                </a:solidFill>
+                <a:latin typeface="Calibri"/>
+              </a:rPr>
+              <a:t>unidade de análise
+(comparável entre municípios)</a:t>
+            </a:r>
+          </a:p>
+        </p:txBody>
+      </p:sp>
+      <p:sp>
+        <p:nvSpPr>
+          <p:cNvPr id="9" name="TextBox 8"/>
           <p:cNvSpPr txBox="1"/>
           <p:nvPr/>
         </p:nvSpPr>
         <p:spPr>
           <a:xfrm>
-            <a:off x="9784080" y="384048"/>
-            <a:ext cx="1600200" cy="365760"/>
+            <a:off x="548640" y="6510528"/>
+            <a:ext cx="7315200" cy="274320"/>
           </a:xfrm>
           <a:prstGeom prst="rect">
             <a:avLst/>
@@ -6393,24 +6183,63 @@
           <a:noFill/>
         </p:spPr>
         <p:txBody>
-          <a:bodyPr wrap="square">
+          <a:bodyPr wrap="square" anchor="t">
             <a:spAutoFit/>
           </a:bodyPr>
           <a:lstStyle/>
           <a:p>
+            <a:pPr algn="l">
+              <a:lnSpc>
+                <a:spcPct val="115000"/>
+              </a:lnSpc>
+            </a:pPr>
+            <a:r>
+              <a:rPr sz="1000" b="0" i="0">
+                <a:solidFill>
+                  <a:srgbClr val="595959"/>
+                </a:solidFill>
+                <a:latin typeface="Calibri"/>
+              </a:rPr>
+              <a:t>Furto, Renda e Território — UFABC</a:t>
+            </a:r>
+          </a:p>
+        </p:txBody>
+      </p:sp>
+      <p:sp>
+        <p:nvSpPr>
+          <p:cNvPr id="10" name="TextBox 9"/>
+          <p:cNvSpPr txBox="1"/>
+          <p:nvPr/>
+        </p:nvSpPr>
+        <p:spPr>
+          <a:xfrm>
+            <a:off x="10972800" y="6510528"/>
+            <a:ext cx="731520" cy="274320"/>
+          </a:xfrm>
+          <a:prstGeom prst="rect">
+            <a:avLst/>
+          </a:prstGeom>
+          <a:noFill/>
+        </p:spPr>
+        <p:txBody>
+          <a:bodyPr wrap="square" anchor="t">
+            <a:spAutoFit/>
+          </a:bodyPr>
+          <a:lstStyle/>
+          <a:p>
             <a:pPr algn="r">
-              <a:spcBef>
-                <a:spcPts val="0"/>
-              </a:spcBef>
-            </a:pPr>
-            <a:r>
-              <a:rPr sz="1200" b="0" i="0">
-                <a:solidFill>
-                  <a:srgbClr val="5B6B7C"/>
-                </a:solidFill>
-                <a:latin typeface="Arial Narrow"/>
-              </a:rPr>
-              <a:t>05 · O SUSTO</a:t>
+              <a:lnSpc>
+                <a:spcPct val="115000"/>
+              </a:lnSpc>
+            </a:pPr>
+            <a:r>
+              <a:rPr sz="1000" b="0" i="0">
+                <a:solidFill>
+                  <a:srgbClr val="595959"/>
+                </a:solidFill>
+                <a:latin typeface="Calibri"/>
+              </a:rPr>
+              <a:t>2</a:t>
             </a:r>
           </a:p>
         </p:txBody>
@@ -6423,9 +6252,17 @@
 </p:sld>
 </file>
 
-<file path=ppt/slides/slide7.xml><?xml version="1.0" encoding="utf-8"?>
+<file path=ppt/slides/slide3.xml><?xml version="1.0" encoding="utf-8"?>
 <p:sld xmlns:a="http://schemas.openxmlformats.org/drawingml/2006/main" xmlns:p="http://schemas.openxmlformats.org/presentationml/2006/main" xmlns:r="http://schemas.openxmlformats.org/officeDocument/2006/relationships">
   <p:cSld>
+    <p:bg>
+      <p:bgPr>
+        <a:solidFill>
+          <a:srgbClr val="FFFFFF"/>
+        </a:solidFill>
+        <a:effectLst/>
+      </p:bgPr>
+    </p:bg>
     <p:spTree>
       <p:nvGrpSpPr>
         <p:cNvPr id="1" name=""/>
@@ -6433,30 +6270,45 @@
         <p:nvPr/>
       </p:nvGrpSpPr>
       <p:grpSpPr/>
-      <p:pic>
-        <p:nvPicPr>
-          <p:cNvPr id="2" name="Picture 1" descr="mapa_lisa_furto.png"/>
-          <p:cNvPicPr>
-            <a:picLocks noChangeAspect="1"/>
-          </p:cNvPicPr>
-          <p:nvPr/>
-        </p:nvPicPr>
-        <p:blipFill>
-          <a:blip r:embed="rId2"/>
-          <a:stretch>
-            <a:fillRect/>
-          </a:stretch>
-        </p:blipFill>
-        <p:spPr>
-          <a:xfrm>
-            <a:off x="822960" y="1280160"/>
-            <a:ext cx="5452110" cy="4846320"/>
-          </a:xfrm>
-          <a:prstGeom prst="rect">
-            <a:avLst/>
-          </a:prstGeom>
-        </p:spPr>
-      </p:pic>
+      <p:sp>
+        <p:nvSpPr>
+          <p:cNvPr id="2" name="TextBox 1"/>
+          <p:cNvSpPr txBox="1"/>
+          <p:nvPr/>
+        </p:nvSpPr>
+        <p:spPr>
+          <a:xfrm>
+            <a:off x="548640" y="320040"/>
+            <a:ext cx="7315200" cy="365760"/>
+          </a:xfrm>
+          <a:prstGeom prst="rect">
+            <a:avLst/>
+          </a:prstGeom>
+          <a:noFill/>
+        </p:spPr>
+        <p:txBody>
+          <a:bodyPr wrap="square" anchor="t">
+            <a:spAutoFit/>
+          </a:bodyPr>
+          <a:lstStyle/>
+          <a:p>
+            <a:pPr algn="l">
+              <a:lnSpc>
+                <a:spcPct val="115000"/>
+              </a:lnSpc>
+            </a:pPr>
+            <a:r>
+              <a:rPr sz="1300" b="1" i="0">
+                <a:solidFill>
+                  <a:srgbClr val="1F4E79"/>
+                </a:solidFill>
+                <a:latin typeface="Calibri"/>
+              </a:rPr>
+              <a:t>HIPÓTESE E MOTIVAÇÃO</a:t>
+            </a:r>
+          </a:p>
+        </p:txBody>
+      </p:sp>
       <p:sp>
         <p:nvSpPr>
           <p:cNvPr id="3" name="TextBox 2"/>
@@ -6465,8 +6317,8 @@
         </p:nvSpPr>
         <p:spPr>
           <a:xfrm>
-            <a:off x="6492240" y="1463040"/>
-            <a:ext cx="4937760" cy="1097280"/>
+            <a:off x="548640" y="594360"/>
+            <a:ext cx="11064240" cy="822960"/>
           </a:xfrm>
           <a:prstGeom prst="rect">
             <a:avLst/>
@@ -6474,244 +6326,44 @@
           <a:noFill/>
         </p:spPr>
         <p:txBody>
-          <a:bodyPr wrap="square">
+          <a:bodyPr wrap="square" anchor="t">
             <a:spAutoFit/>
           </a:bodyPr>
           <a:lstStyle/>
           <a:p>
             <a:pPr algn="l">
-              <a:spcBef>
-                <a:spcPts val="0"/>
-              </a:spcBef>
+              <a:lnSpc>
+                <a:spcPct val="115000"/>
+              </a:lnSpc>
             </a:pPr>
             <a:r>
               <a:rPr sz="3000" b="1" i="0">
                 <a:solidFill>
-                  <a:srgbClr val="17222E"/>
-                </a:solidFill>
-                <a:latin typeface="Arial Narrow"/>
-              </a:rPr>
-              <a:t>Furto anda </a:t>
-            </a:r>
-            <a:r>
-              <a:rPr sz="3000" b="1" i="0">
-                <a:solidFill>
-                  <a:srgbClr val="D95F02"/>
-                </a:solidFill>
-                <a:latin typeface="Arial Narrow"/>
-              </a:rPr>
-              <a:t>em bando</a:t>
-            </a:r>
-          </a:p>
-        </p:txBody>
-      </p:sp>
-      <p:sp>
-        <p:nvSpPr>
-          <p:cNvPr id="4" name="TextBox 3"/>
-          <p:cNvSpPr txBox="1"/>
-          <p:nvPr/>
-        </p:nvSpPr>
-        <p:spPr>
-          <a:xfrm>
-            <a:off x="6492240" y="2743200"/>
-            <a:ext cx="4937760" cy="3474720"/>
-          </a:xfrm>
-          <a:prstGeom prst="rect">
-            <a:avLst/>
-          </a:prstGeom>
-          <a:noFill/>
-        </p:spPr>
-        <p:txBody>
-          <a:bodyPr wrap="square">
-            <a:spAutoFit/>
-          </a:bodyPr>
-          <a:lstStyle/>
-          <a:p>
-            <a:pPr algn="l">
-              <a:spcBef>
-                <a:spcPts val="0"/>
-              </a:spcBef>
-            </a:pPr>
-            <a:r>
-              <a:rPr sz="1100" b="0" i="0">
-                <a:solidFill>
-                  <a:srgbClr val="D95F02"/>
-                </a:solidFill>
-                <a:latin typeface="Arial Narrow"/>
-              </a:rPr>
-              <a:t>●  </a:t>
-            </a:r>
-            <a:r>
-              <a:rPr sz="1500" b="0" i="0">
-                <a:solidFill>
-                  <a:srgbClr val="17222E"/>
-                </a:solidFill>
-                <a:latin typeface="Georgia"/>
-              </a:rPr>
-              <a:t>Cidade com furto alto costuma ter </a:t>
-            </a:r>
-            <a:r>
-              <a:rPr sz="1500" b="1" i="0">
-                <a:solidFill>
-                  <a:srgbClr val="17222E"/>
-                </a:solidFill>
-                <a:latin typeface="Georgia"/>
-              </a:rPr>
-              <a:t>vizinha também alta</a:t>
-            </a:r>
-            <a:r>
-              <a:rPr sz="1500" b="0" i="0">
-                <a:solidFill>
-                  <a:srgbClr val="17222E"/>
-                </a:solidFill>
-                <a:latin typeface="Georgia"/>
-              </a:rPr>
-              <a:t> (Moran's I = 0,42).</a:t>
-            </a:r>
-          </a:p>
-          <a:p>
-            <a:pPr algn="l">
-              <a:spcBef>
-                <a:spcPts val="1200"/>
-              </a:spcBef>
-            </a:pPr>
-            <a:r>
-              <a:rPr sz="1100" b="0" i="0">
-                <a:solidFill>
-                  <a:srgbClr val="D95F02"/>
-                </a:solidFill>
-                <a:latin typeface="Arial Narrow"/>
-              </a:rPr>
-              <a:t>●  </a:t>
-            </a:r>
-            <a:r>
-              <a:rPr sz="1500" b="0" i="0">
-                <a:solidFill>
-                  <a:srgbClr val="17222E"/>
-                </a:solidFill>
-                <a:latin typeface="Georgia"/>
-              </a:rPr>
-              <a:t>Os agrupamentos vermelhos acompanham </a:t>
-            </a:r>
-            <a:r>
-              <a:rPr sz="1500" b="1" i="0">
-                <a:solidFill>
-                  <a:srgbClr val="17222E"/>
-                </a:solidFill>
-                <a:latin typeface="Georgia"/>
-              </a:rPr>
-              <a:t>o litoral</a:t>
-            </a:r>
-            <a:r>
-              <a:rPr sz="1500" b="0" i="0">
-                <a:solidFill>
-                  <a:srgbClr val="17222E"/>
-                </a:solidFill>
-                <a:latin typeface="Georgia"/>
-              </a:rPr>
-              <a:t> e a região metropolitana.</a:t>
-            </a:r>
-          </a:p>
-          <a:p>
-            <a:pPr algn="l">
-              <a:spcBef>
-                <a:spcPts val="1200"/>
-              </a:spcBef>
-            </a:pPr>
-            <a:r>
-              <a:rPr sz="1100" b="0" i="0">
-                <a:solidFill>
-                  <a:srgbClr val="D95F02"/>
-                </a:solidFill>
-                <a:latin typeface="Arial Narrow"/>
-              </a:rPr>
-              <a:t>●  </a:t>
-            </a:r>
-            <a:r>
-              <a:rPr sz="1500" b="0" i="0">
-                <a:solidFill>
-                  <a:srgbClr val="17222E"/>
-                </a:solidFill>
-                <a:latin typeface="Georgia"/>
-              </a:rPr>
-              <a:t>Ou seja: o crime tem </a:t>
-            </a:r>
-            <a:r>
-              <a:rPr sz="1500" b="1" i="0">
-                <a:solidFill>
-                  <a:srgbClr val="17222E"/>
-                </a:solidFill>
-                <a:latin typeface="Georgia"/>
-              </a:rPr>
-              <a:t>geografia</a:t>
-            </a:r>
-            <a:r>
-              <a:rPr sz="1500" b="0" i="0">
-                <a:solidFill>
-                  <a:srgbClr val="17222E"/>
-                </a:solidFill>
-                <a:latin typeface="Georgia"/>
-              </a:rPr>
-              <a:t>.</a:t>
-            </a:r>
-          </a:p>
-        </p:txBody>
-      </p:sp>
-      <p:sp>
-        <p:nvSpPr>
-          <p:cNvPr id="5" name="TextBox 4"/>
-          <p:cNvSpPr txBox="1"/>
-          <p:nvPr/>
-        </p:nvSpPr>
-        <p:spPr>
-          <a:xfrm>
-            <a:off x="822960" y="384048"/>
-            <a:ext cx="10515600" cy="365760"/>
-          </a:xfrm>
-          <a:prstGeom prst="rect">
-            <a:avLst/>
-          </a:prstGeom>
-          <a:noFill/>
-        </p:spPr>
-        <p:txBody>
-          <a:bodyPr wrap="square">
-            <a:spAutoFit/>
-          </a:bodyPr>
-          <a:lstStyle/>
-          <a:p>
-            <a:pPr algn="l">
-              <a:spcBef>
-                <a:spcPts val="0"/>
-              </a:spcBef>
-            </a:pPr>
-            <a:r>
-              <a:rPr sz="1300" b="1" i="0">
-                <a:solidFill>
-                  <a:srgbClr val="D95F02"/>
-                </a:solidFill>
-                <a:latin typeface="Arial Narrow"/>
-              </a:rPr>
-              <a:t>DESCOBERTAS</a:t>
-            </a:r>
-          </a:p>
-        </p:txBody>
-      </p:sp>
-      <p:sp>
-        <p:nvSpPr>
-          <p:cNvPr id="6" name="Rectangle 5"/>
+                  <a:srgbClr val="1A1A1A"/>
+                </a:solidFill>
+                <a:latin typeface="Calibri"/>
+              </a:rPr>
+              <a:t>A correlação é positiva — o oposto de H1</a:t>
+            </a:r>
+          </a:p>
+        </p:txBody>
+      </p:sp>
+      <p:sp>
+        <p:nvSpPr>
+          <p:cNvPr id="4" name="Rectangle 3"/>
           <p:cNvSpPr/>
           <p:nvPr/>
         </p:nvSpPr>
         <p:spPr>
           <a:xfrm>
-            <a:off x="822960" y="749808"/>
-            <a:ext cx="10515600" cy="15240"/>
+            <a:off x="548640" y="1325880"/>
+            <a:ext cx="11064240" cy="27940"/>
           </a:xfrm>
           <a:prstGeom prst="rect">
             <a:avLst/>
           </a:prstGeom>
           <a:solidFill>
-            <a:srgbClr val="D8DFE7"/>
+            <a:srgbClr val="1F4E79"/>
           </a:solidFill>
           <a:ln>
             <a:noFill/>
@@ -6742,14 +6394,14 @@
       </p:sp>
       <p:sp>
         <p:nvSpPr>
-          <p:cNvPr id="7" name="TextBox 6"/>
+          <p:cNvPr id="5" name="TextBox 4"/>
           <p:cNvSpPr txBox="1"/>
           <p:nvPr/>
         </p:nvSpPr>
         <p:spPr>
           <a:xfrm>
-            <a:off x="9784080" y="384048"/>
-            <a:ext cx="1600200" cy="365760"/>
+            <a:off x="548640" y="1691640"/>
+            <a:ext cx="6126480" cy="2377440"/>
           </a:xfrm>
           <a:prstGeom prst="rect">
             <a:avLst/>
@@ -6762,51 +6414,74 @@
           </a:bodyPr>
           <a:lstStyle/>
           <a:p>
-            <a:pPr algn="r">
-              <a:spcBef>
-                <a:spcPts val="0"/>
-              </a:spcBef>
-            </a:pPr>
-            <a:r>
-              <a:rPr sz="1200" b="0" i="0">
-                <a:solidFill>
-                  <a:srgbClr val="5B6B7C"/>
-                </a:solidFill>
-                <a:latin typeface="Arial Narrow"/>
-              </a:rPr>
-              <a:t>06 · VIZINHANÇA</a:t>
-            </a:r>
-          </a:p>
-        </p:txBody>
-      </p:sp>
-    </p:spTree>
-  </p:cSld>
-  <p:clrMapOvr>
-    <a:masterClrMapping/>
-  </p:clrMapOvr>
-</p:sld>
-</file>
-
-<file path=ppt/slides/slide8.xml><?xml version="1.0" encoding="utf-8"?>
-<p:sld xmlns:a="http://schemas.openxmlformats.org/drawingml/2006/main" xmlns:p="http://schemas.openxmlformats.org/presentationml/2006/main" xmlns:r="http://schemas.openxmlformats.org/officeDocument/2006/relationships">
-  <p:cSld>
-    <p:spTree>
-      <p:nvGrpSpPr>
-        <p:cNvPr id="1" name=""/>
-        <p:cNvGrpSpPr/>
-        <p:nvPr/>
-      </p:nvGrpSpPr>
-      <p:grpSpPr/>
-      <p:sp>
-        <p:nvSpPr>
-          <p:cNvPr id="2" name="TextBox 1"/>
+            <a:pPr>
+              <a:lnSpc>
+                <a:spcPct val="115000"/>
+              </a:lnSpc>
+              <a:spcAft>
+                <a:spcPts val="1400"/>
+              </a:spcAft>
+            </a:pPr>
+            <a:r>
+              <a:rPr sz="1700">
+                <a:solidFill>
+                  <a:srgbClr val="333333"/>
+                </a:solidFill>
+                <a:latin typeface="Calibri"/>
+              </a:rPr>
+              <a:t>—  Renda × furto: Pearson = 0,359, Spearman = 0,380 — positivo e significativo.</a:t>
+            </a:r>
+          </a:p>
+          <a:p>
+            <a:pPr>
+              <a:lnSpc>
+                <a:spcPct val="115000"/>
+              </a:lnSpc>
+              <a:spcAft>
+                <a:spcPts val="1400"/>
+              </a:spcAft>
+            </a:pPr>
+            <a:r>
+              <a:rPr sz="1700">
+                <a:solidFill>
+                  <a:srgbClr val="333333"/>
+                </a:solidFill>
+                <a:latin typeface="Calibri"/>
+              </a:rPr>
+              <a:t>—  Renda × roubo: também positivo (0,302 / 0,389).</a:t>
+            </a:r>
+          </a:p>
+          <a:p>
+            <a:pPr>
+              <a:lnSpc>
+                <a:spcPct val="115000"/>
+              </a:lnSpc>
+              <a:spcAft>
+                <a:spcPts val="1400"/>
+              </a:spcAft>
+            </a:pPr>
+            <a:r>
+              <a:rPr sz="1700">
+                <a:solidFill>
+                  <a:srgbClr val="333333"/>
+                </a:solidFill>
+                <a:latin typeface="Calibri"/>
+              </a:rPr>
+              <a:t>—  Só a lesão corporal correlaciona negativamente, e fraco (−0,19).</a:t>
+            </a:r>
+          </a:p>
+        </p:txBody>
+      </p:sp>
+      <p:sp>
+        <p:nvSpPr>
+          <p:cNvPr id="6" name="TextBox 5"/>
           <p:cNvSpPr txBox="1"/>
           <p:nvPr/>
         </p:nvSpPr>
         <p:spPr>
           <a:xfrm>
-            <a:off x="822960" y="384048"/>
-            <a:ext cx="10515600" cy="365760"/>
+            <a:off x="548640" y="3977639"/>
+            <a:ext cx="6126480" cy="457200"/>
           </a:xfrm>
           <a:prstGeom prst="rect">
             <a:avLst/>
@@ -6814,47 +6489,51 @@
           <a:noFill/>
         </p:spPr>
         <p:txBody>
-          <a:bodyPr wrap="square">
+          <a:bodyPr wrap="square" anchor="t">
             <a:spAutoFit/>
           </a:bodyPr>
           <a:lstStyle/>
           <a:p>
             <a:pPr algn="l">
-              <a:spcBef>
-                <a:spcPts val="0"/>
-              </a:spcBef>
-            </a:pPr>
-            <a:r>
-              <a:rPr sz="1300" b="1" i="0">
-                <a:solidFill>
-                  <a:srgbClr val="D95F02"/>
-                </a:solidFill>
-                <a:latin typeface="Arial Narrow"/>
-              </a:rPr>
-              <a:t>RESULTADO DO MODELO</a:t>
-            </a:r>
-          </a:p>
-        </p:txBody>
-      </p:sp>
-      <p:sp>
-        <p:nvSpPr>
-          <p:cNvPr id="3" name="Rectangle 2"/>
+              <a:lnSpc>
+                <a:spcPct val="115000"/>
+              </a:lnSpc>
+            </a:pPr>
+            <a:r>
+              <a:rPr sz="1700" b="1" i="0">
+                <a:solidFill>
+                  <a:srgbClr val="1F4E79"/>
+                </a:solidFill>
+                <a:latin typeface="Calibri"/>
+              </a:rPr>
+              <a:t>Isso abriu espaço para uma segunda hipótese, exploratória:</a:t>
+            </a:r>
+          </a:p>
+        </p:txBody>
+      </p:sp>
+      <p:sp>
+        <p:nvSpPr>
+          <p:cNvPr id="7" name="Rounded Rectangle 6"/>
           <p:cNvSpPr/>
           <p:nvPr/>
         </p:nvSpPr>
         <p:spPr>
           <a:xfrm>
-            <a:off x="822960" y="749808"/>
-            <a:ext cx="10515600" cy="15240"/>
-          </a:xfrm>
-          <a:prstGeom prst="rect">
-            <a:avLst/>
+            <a:off x="548640" y="4480560"/>
+            <a:ext cx="6126480" cy="1737360"/>
+          </a:xfrm>
+          <a:prstGeom prst="roundRect">
+            <a:avLst>
+              <a:gd name="adj" fmla="val 6000"/>
+            </a:avLst>
           </a:prstGeom>
           <a:solidFill>
-            <a:srgbClr val="D8DFE7"/>
+            <a:srgbClr val="FDEEE3"/>
           </a:solidFill>
-          <a:ln>
-            <a:noFill/>
+          <a:ln w="12700">
+            <a:solidFill>
+              <a:srgbClr val="ED7D31"/>
+            </a:solidFill>
           </a:ln>
           <a:effectLst/>
         </p:spPr>
@@ -6873,23 +6552,56 @@
           </a:fontRef>
         </p:style>
         <p:txBody>
-          <a:bodyPr rtlCol="0" anchor="ctr"/>
+          <a:bodyPr rtlCol="0" anchor="ctr" wrap="square" lIns="228600" rIns="228600"/>
           <a:lstStyle/>
           <a:p>
             <a:pPr algn="ctr"/>
-          </a:p>
-        </p:txBody>
-      </p:sp>
-      <p:sp>
-        <p:nvSpPr>
-          <p:cNvPr id="4" name="TextBox 3"/>
+            <a:r>
+              <a:rPr sz="1600">
+                <a:solidFill>
+                  <a:srgbClr val="663300"/>
+                </a:solidFill>
+                <a:latin typeface="Calibri"/>
+              </a:rPr>
+              <a:t>H2 — municípios litorâneos/turísticos concentram taxas mais altas: a população flutuante de verão infla o numerador (ocorrências) sobre um denominador que mede só a população residente.</a:t>
+            </a:r>
+          </a:p>
+        </p:txBody>
+      </p:sp>
+      <p:pic>
+        <p:nvPicPr>
+          <p:cNvPr id="8" name="Picture 7" descr="mapa_taxa_furto.png"/>
+          <p:cNvPicPr>
+            <a:picLocks noChangeAspect="1"/>
+          </p:cNvPicPr>
+          <p:nvPr/>
+        </p:nvPicPr>
+        <p:blipFill>
+          <a:blip r:embed="rId2"/>
+          <a:stretch>
+            <a:fillRect/>
+          </a:stretch>
+        </p:blipFill>
+        <p:spPr>
+          <a:xfrm>
+            <a:off x="7040880" y="1963420"/>
+            <a:ext cx="4480560" cy="3982720"/>
+          </a:xfrm>
+          <a:prstGeom prst="rect">
+            <a:avLst/>
+          </a:prstGeom>
+        </p:spPr>
+      </p:pic>
+      <p:sp>
+        <p:nvSpPr>
+          <p:cNvPr id="9" name="TextBox 8"/>
           <p:cNvSpPr txBox="1"/>
           <p:nvPr/>
         </p:nvSpPr>
         <p:spPr>
           <a:xfrm>
-            <a:off x="9784080" y="384048"/>
-            <a:ext cx="1600200" cy="365760"/>
+            <a:off x="548640" y="6510528"/>
+            <a:ext cx="7315200" cy="274320"/>
           </a:xfrm>
           <a:prstGeom prst="rect">
             <a:avLst/>
@@ -6897,38 +6609,38 @@
           <a:noFill/>
         </p:spPr>
         <p:txBody>
-          <a:bodyPr wrap="square">
+          <a:bodyPr wrap="square" anchor="t">
             <a:spAutoFit/>
           </a:bodyPr>
           <a:lstStyle/>
           <a:p>
-            <a:pPr algn="r">
-              <a:spcBef>
-                <a:spcPts val="0"/>
-              </a:spcBef>
-            </a:pPr>
-            <a:r>
-              <a:rPr sz="1200" b="0" i="0">
-                <a:solidFill>
-                  <a:srgbClr val="5B6B7C"/>
-                </a:solidFill>
-                <a:latin typeface="Arial Narrow"/>
-              </a:rPr>
-              <a:t>07 · ACURÁCIA</a:t>
-            </a:r>
-          </a:p>
-        </p:txBody>
-      </p:sp>
-      <p:sp>
-        <p:nvSpPr>
-          <p:cNvPr id="5" name="TextBox 4"/>
+            <a:pPr algn="l">
+              <a:lnSpc>
+                <a:spcPct val="115000"/>
+              </a:lnSpc>
+            </a:pPr>
+            <a:r>
+              <a:rPr sz="1000" b="0" i="0">
+                <a:solidFill>
+                  <a:srgbClr val="595959"/>
+                </a:solidFill>
+                <a:latin typeface="Calibri"/>
+              </a:rPr>
+              <a:t>Furto, Renda e Território — UFABC</a:t>
+            </a:r>
+          </a:p>
+        </p:txBody>
+      </p:sp>
+      <p:sp>
+        <p:nvSpPr>
+          <p:cNvPr id="10" name="TextBox 9"/>
           <p:cNvSpPr txBox="1"/>
           <p:nvPr/>
         </p:nvSpPr>
         <p:spPr>
           <a:xfrm>
-            <a:off x="822960" y="1280160"/>
-            <a:ext cx="5120640" cy="914400"/>
+            <a:off x="10972800" y="6510528"/>
+            <a:ext cx="731520" cy="274320"/>
           </a:xfrm>
           <a:prstGeom prst="rect">
             <a:avLst/>
@@ -6936,48 +6648,187 @@
           <a:noFill/>
         </p:spPr>
         <p:txBody>
-          <a:bodyPr wrap="square">
+          <a:bodyPr wrap="square" anchor="t">
             <a:spAutoFit/>
           </a:bodyPr>
           <a:lstStyle/>
           <a:p>
+            <a:pPr algn="r">
+              <a:lnSpc>
+                <a:spcPct val="115000"/>
+              </a:lnSpc>
+            </a:pPr>
+            <a:r>
+              <a:rPr sz="1000" b="0" i="0">
+                <a:solidFill>
+                  <a:srgbClr val="595959"/>
+                </a:solidFill>
+                <a:latin typeface="Calibri"/>
+              </a:rPr>
+              <a:t>3</a:t>
+            </a:r>
+          </a:p>
+        </p:txBody>
+      </p:sp>
+    </p:spTree>
+  </p:cSld>
+  <p:clrMapOvr>
+    <a:masterClrMapping/>
+  </p:clrMapOvr>
+</p:sld>
+</file>
+
+<file path=ppt/slides/slide4.xml><?xml version="1.0" encoding="utf-8"?>
+<p:sld xmlns:a="http://schemas.openxmlformats.org/drawingml/2006/main" xmlns:p="http://schemas.openxmlformats.org/presentationml/2006/main" xmlns:r="http://schemas.openxmlformats.org/officeDocument/2006/relationships">
+  <p:cSld>
+    <p:bg>
+      <p:bgPr>
+        <a:solidFill>
+          <a:srgbClr val="FFFFFF"/>
+        </a:solidFill>
+        <a:effectLst/>
+      </p:bgPr>
+    </p:bg>
+    <p:spTree>
+      <p:nvGrpSpPr>
+        <p:cNvPr id="1" name=""/>
+        <p:cNvGrpSpPr/>
+        <p:nvPr/>
+      </p:nvGrpSpPr>
+      <p:grpSpPr/>
+      <p:sp>
+        <p:nvSpPr>
+          <p:cNvPr id="2" name="TextBox 1"/>
+          <p:cNvSpPr txBox="1"/>
+          <p:nvPr/>
+        </p:nvSpPr>
+        <p:spPr>
+          <a:xfrm>
+            <a:off x="548640" y="320040"/>
+            <a:ext cx="7315200" cy="365760"/>
+          </a:xfrm>
+          <a:prstGeom prst="rect">
+            <a:avLst/>
+          </a:prstGeom>
+          <a:noFill/>
+        </p:spPr>
+        <p:txBody>
+          <a:bodyPr wrap="square" anchor="t">
+            <a:spAutoFit/>
+          </a:bodyPr>
+          <a:lstStyle/>
+          <a:p>
             <a:pPr algn="l">
-              <a:spcBef>
-                <a:spcPts val="0"/>
-              </a:spcBef>
-            </a:pPr>
-            <a:r>
-              <a:rPr sz="2800" b="1" i="0">
-                <a:solidFill>
-                  <a:srgbClr val="17222E"/>
-                </a:solidFill>
-                <a:latin typeface="Arial Narrow"/>
-              </a:rPr>
-              <a:t>Quanto mais território, </a:t>
-            </a:r>
-            <a:r>
-              <a:rPr sz="2800" b="1" i="0">
-                <a:solidFill>
-                  <a:srgbClr val="D95F02"/>
-                </a:solidFill>
-                <a:latin typeface="Arial Narrow"/>
-              </a:rPr>
-              <a:t>melhor o modelo</a:t>
-            </a:r>
+              <a:lnSpc>
+                <a:spcPct val="115000"/>
+              </a:lnSpc>
+            </a:pPr>
+            <a:r>
+              <a:rPr sz="1300" b="1" i="0">
+                <a:solidFill>
+                  <a:srgbClr val="1F4E79"/>
+                </a:solidFill>
+                <a:latin typeface="Calibri"/>
+              </a:rPr>
+              <a:t>DADOS E VARIÁVEIS</a:t>
+            </a:r>
+          </a:p>
+        </p:txBody>
+      </p:sp>
+      <p:sp>
+        <p:nvSpPr>
+          <p:cNvPr id="3" name="TextBox 2"/>
+          <p:cNvSpPr txBox="1"/>
+          <p:nvPr/>
+        </p:nvSpPr>
+        <p:spPr>
+          <a:xfrm>
+            <a:off x="548640" y="594360"/>
+            <a:ext cx="11064240" cy="822960"/>
+          </a:xfrm>
+          <a:prstGeom prst="rect">
+            <a:avLst/>
+          </a:prstGeom>
+          <a:noFill/>
+        </p:spPr>
+        <p:txBody>
+          <a:bodyPr wrap="square" anchor="t">
+            <a:spAutoFit/>
+          </a:bodyPr>
+          <a:lstStyle/>
+          <a:p>
+            <a:pPr algn="l">
+              <a:lnSpc>
+                <a:spcPct val="115000"/>
+              </a:lnSpc>
+            </a:pPr>
+            <a:r>
+              <a:rPr sz="3000" b="1" i="0">
+                <a:solidFill>
+                  <a:srgbClr val="1A1A1A"/>
+                </a:solidFill>
+                <a:latin typeface="Calibri"/>
+              </a:rPr>
+              <a:t>Bases, chave de junção e variáveis</a:t>
+            </a:r>
+          </a:p>
+        </p:txBody>
+      </p:sp>
+      <p:sp>
+        <p:nvSpPr>
+          <p:cNvPr id="4" name="Rectangle 3"/>
+          <p:cNvSpPr/>
+          <p:nvPr/>
+        </p:nvSpPr>
+        <p:spPr>
+          <a:xfrm>
+            <a:off x="548640" y="1325880"/>
+            <a:ext cx="11064240" cy="27940"/>
+          </a:xfrm>
+          <a:prstGeom prst="rect">
+            <a:avLst/>
+          </a:prstGeom>
+          <a:solidFill>
+            <a:srgbClr val="1F4E79"/>
+          </a:solidFill>
+          <a:ln>
+            <a:noFill/>
+          </a:ln>
+          <a:effectLst/>
+        </p:spPr>
+        <p:style>
+          <a:lnRef idx="1">
+            <a:schemeClr val="accent1"/>
+          </a:lnRef>
+          <a:fillRef idx="3">
+            <a:schemeClr val="accent1"/>
+          </a:fillRef>
+          <a:effectRef idx="2">
+            <a:schemeClr val="accent1"/>
+          </a:effectRef>
+          <a:fontRef idx="minor">
+            <a:schemeClr val="lt1"/>
+          </a:fontRef>
+        </p:style>
+        <p:txBody>
+          <a:bodyPr rtlCol="0" anchor="ctr"/>
+          <a:lstStyle/>
+          <a:p>
+            <a:pPr algn="ctr"/>
           </a:p>
         </p:txBody>
       </p:sp>
       <p:graphicFrame>
         <p:nvGraphicFramePr>
-          <p:cNvPr id="6" name="Table 5"/>
+          <p:cNvPr id="5" name="Table 4"/>
           <p:cNvGraphicFramePr>
             <a:graphicFrameLocks noGrp="1"/>
           </p:cNvGraphicFramePr>
           <p:nvPr/>
         </p:nvGraphicFramePr>
         <p:xfrm>
-          <a:off x="822960" y="2377440"/>
-          <a:ext cx="5120640" cy="1828800"/>
+          <a:off x="548640" y="1691640"/>
+          <a:ext cx="8412480" cy="3108960"/>
         </p:xfrm>
         <a:graphic>
           <a:graphicData uri="http://schemas.openxmlformats.org/drawingml/2006/table">
@@ -6986,30 +6837,29 @@
                 <a:tableStyleId>{5C22544A-7EE6-4342-B048-85BDC9FD1C3A}</a:tableStyleId>
               </a:tblPr>
               <a:tblGrid>
-                <a:gridCol w="3657600"/>
-                <a:gridCol w="1463040"/>
+                <a:gridCol w="3291840"/>
+                <a:gridCol w="2194560"/>
+                <a:gridCol w="2926080"/>
               </a:tblGrid>
-              <a:tr h="365760">
+              <a:tr h="444137">
                 <a:tc>
                   <a:txBody>
                     <a:bodyPr/>
                     <a:lstStyle/>
                     <a:p>
-                      <a:pPr algn="l"/>
                       <a:r>
-                        <a:rPr sz="1200" b="1" i="0">
+                        <a:rPr b="1" sz="1300">
                           <a:solidFill>
                             <a:srgbClr val="FFFFFF"/>
                           </a:solidFill>
-                          <a:latin typeface="Arial Narrow"/>
                         </a:rPr>
-                        <a:t>Modelo</a:t>
+                        <a:t>Variável</a:t>
                       </a:r>
                     </a:p>
                   </a:txBody>
                   <a:tcPr>
                     <a:solidFill>
-                      <a:srgbClr val="0B5394"/>
+                      <a:srgbClr val="1F4E79"/>
                     </a:solidFill>
                   </a:tcPr>
                 </a:tc>
@@ -7018,40 +6868,57 @@
                     <a:bodyPr/>
                     <a:lstStyle/>
                     <a:p>
-                      <a:pPr algn="l"/>
                       <a:r>
-                        <a:rPr sz="1200" b="1" i="0">
+                        <a:rPr b="1" sz="1300">
                           <a:solidFill>
                             <a:srgbClr val="FFFFFF"/>
                           </a:solidFill>
-                          <a:latin typeface="Arial Narrow"/>
                         </a:rPr>
-                        <a:t>Acerto (R²)</a:t>
+                        <a:t>Fonte</a:t>
                       </a:r>
                     </a:p>
                   </a:txBody>
                   <a:tcPr>
                     <a:solidFill>
-                      <a:srgbClr val="0B5394"/>
+                      <a:srgbClr val="1F4E79"/>
                     </a:solidFill>
                   </a:tcPr>
                 </a:tc>
-              </a:tr>
-              <a:tr h="365760">
                 <a:tc>
                   <a:txBody>
                     <a:bodyPr/>
                     <a:lstStyle/>
                     <a:p>
-                      <a:pPr algn="l"/>
                       <a:r>
-                        <a:rPr sz="1300" b="0" i="0">
+                        <a:rPr b="1" sz="1300">
                           <a:solidFill>
-                            <a:srgbClr val="17222E"/>
+                            <a:srgbClr val="FFFFFF"/>
                           </a:solidFill>
-                          <a:latin typeface="Georgia"/>
                         </a:rPr>
-                        <a:t>Só a renda</a:t>
+                        <a:t>Descrição</a:t>
+                      </a:r>
+                    </a:p>
+                  </a:txBody>
+                  <a:tcPr>
+                    <a:solidFill>
+                      <a:srgbClr val="1F4E79"/>
+                    </a:solidFill>
+                  </a:tcPr>
+                </a:tc>
+              </a:tr>
+              <a:tr h="444137">
+                <a:tc>
+                  <a:txBody>
+                    <a:bodyPr/>
+                    <a:lstStyle/>
+                    <a:p>
+                      <a:r>
+                        <a:rPr sz="1200">
+                          <a:solidFill>
+                            <a:srgbClr val="333333"/>
+                          </a:solidFill>
+                        </a:rPr>
+                        <a:t>Taxa de roubo (art. 157)</a:t>
                       </a:r>
                     </a:p>
                   </a:txBody>
@@ -7066,40 +6933,13 @@
                     <a:bodyPr/>
                     <a:lstStyle/>
                     <a:p>
-                      <a:pPr algn="r"/>
                       <a:r>
-                        <a:rPr sz="1300" b="0" i="0">
+                        <a:rPr sz="1200">
                           <a:solidFill>
-                            <a:srgbClr val="17222E"/>
+                            <a:srgbClr val="333333"/>
                           </a:solidFill>
-                          <a:latin typeface="Georgia"/>
                         </a:rPr>
-                        <a:t>13%</a:t>
-                      </a:r>
-                    </a:p>
-                  </a:txBody>
-                  <a:tcPr>
-                    <a:solidFill>
-                      <a:srgbClr val="FFFFFF"/>
-                    </a:solidFill>
-                  </a:tcPr>
-                </a:tc>
-              </a:tr>
-              <a:tr h="365760">
-                <a:tc>
-                  <a:txBody>
-                    <a:bodyPr/>
-                    <a:lstStyle/>
-                    <a:p>
-                      <a:pPr algn="l"/>
-                      <a:r>
-                        <a:rPr sz="1300" b="0" i="0">
-                          <a:solidFill>
-                            <a:srgbClr val="17222E"/>
-                          </a:solidFill>
-                          <a:latin typeface="Georgia"/>
-                        </a:rPr>
-                        <a:t>Renda + praia</a:t>
+                        <a:t>SSP-SP, 2025</a:t>
                       </a:r>
                     </a:p>
                   </a:txBody>
@@ -7114,15 +6954,13 @@
                     <a:bodyPr/>
                     <a:lstStyle/>
                     <a:p>
-                      <a:pPr algn="r"/>
                       <a:r>
-                        <a:rPr sz="1300" b="0" i="0">
+                        <a:rPr sz="1200">
                           <a:solidFill>
-                            <a:srgbClr val="17222E"/>
+                            <a:srgbClr val="333333"/>
                           </a:solidFill>
-                          <a:latin typeface="Georgia"/>
                         </a:rPr>
-                        <a:t>36%</a:t>
+                        <a:t>Ocorrências / 1.000 hab.</a:t>
                       </a:r>
                     </a:p>
                   </a:txBody>
@@ -7133,21 +6971,84 @@
                   </a:tcPr>
                 </a:tc>
               </a:tr>
-              <a:tr h="365760">
+              <a:tr h="444137">
                 <a:tc>
                   <a:txBody>
                     <a:bodyPr/>
                     <a:lstStyle/>
                     <a:p>
-                      <a:pPr algn="l"/>
                       <a:r>
-                        <a:rPr sz="1300" b="0" i="0">
+                        <a:rPr sz="1200">
                           <a:solidFill>
-                            <a:srgbClr val="17222E"/>
+                            <a:srgbClr val="333333"/>
                           </a:solidFill>
-                          <a:latin typeface="Georgia"/>
                         </a:rPr>
-                        <a:t>+ efeito espacial</a:t>
+                        <a:t>Taxa de furto (art. 155)</a:t>
+                      </a:r>
+                    </a:p>
+                  </a:txBody>
+                  <a:tcPr>
+                    <a:solidFill>
+                      <a:srgbClr val="F2F2F2"/>
+                    </a:solidFill>
+                  </a:tcPr>
+                </a:tc>
+                <a:tc>
+                  <a:txBody>
+                    <a:bodyPr/>
+                    <a:lstStyle/>
+                    <a:p>
+                      <a:r>
+                        <a:rPr sz="1200">
+                          <a:solidFill>
+                            <a:srgbClr val="333333"/>
+                          </a:solidFill>
+                        </a:rPr>
+                        <a:t>SSP-SP, 2025</a:t>
+                      </a:r>
+                    </a:p>
+                  </a:txBody>
+                  <a:tcPr>
+                    <a:solidFill>
+                      <a:srgbClr val="F2F2F2"/>
+                    </a:solidFill>
+                  </a:tcPr>
+                </a:tc>
+                <a:tc>
+                  <a:txBody>
+                    <a:bodyPr/>
+                    <a:lstStyle/>
+                    <a:p>
+                      <a:r>
+                        <a:rPr sz="1200">
+                          <a:solidFill>
+                            <a:srgbClr val="333333"/>
+                          </a:solidFill>
+                        </a:rPr>
+                        <a:t>Ocorrências / 1.000 hab.</a:t>
+                      </a:r>
+                    </a:p>
+                  </a:txBody>
+                  <a:tcPr>
+                    <a:solidFill>
+                      <a:srgbClr val="F2F2F2"/>
+                    </a:solidFill>
+                  </a:tcPr>
+                </a:tc>
+              </a:tr>
+              <a:tr h="444137">
+                <a:tc>
+                  <a:txBody>
+                    <a:bodyPr/>
+                    <a:lstStyle/>
+                    <a:p>
+                      <a:r>
+                        <a:rPr sz="1200">
+                          <a:solidFill>
+                            <a:srgbClr val="333333"/>
+                          </a:solidFill>
+                        </a:rPr>
+                        <a:t>Taxa de lesão corporal (art. 129)</a:t>
                       </a:r>
                     </a:p>
                   </a:txBody>
@@ -7162,15 +7063,34 @@
                     <a:bodyPr/>
                     <a:lstStyle/>
                     <a:p>
-                      <a:pPr algn="r"/>
                       <a:r>
-                        <a:rPr sz="1300" b="0" i="0">
+                        <a:rPr sz="1200">
                           <a:solidFill>
-                            <a:srgbClr val="17222E"/>
+                            <a:srgbClr val="333333"/>
                           </a:solidFill>
-                          <a:latin typeface="Georgia"/>
                         </a:rPr>
-                        <a:t>44%</a:t>
+                        <a:t>SSP-SP, 2025</a:t>
+                      </a:r>
+                    </a:p>
+                  </a:txBody>
+                  <a:tcPr>
+                    <a:solidFill>
+                      <a:srgbClr val="FFFFFF"/>
+                    </a:solidFill>
+                  </a:tcPr>
+                </a:tc>
+                <a:tc>
+                  <a:txBody>
+                    <a:bodyPr/>
+                    <a:lstStyle/>
+                    <a:p>
+                      <a:r>
+                        <a:rPr sz="1200">
+                          <a:solidFill>
+                            <a:srgbClr val="333333"/>
+                          </a:solidFill>
+                        </a:rPr>
+                        <a:t>Ocorrências / 1.000 hab.</a:t>
                       </a:r>
                     </a:p>
                   </a:txBody>
@@ -7181,27 +7101,25 @@
                   </a:tcPr>
                 </a:tc>
               </a:tr>
-              <a:tr h="365760">
+              <a:tr h="444137">
                 <a:tc>
                   <a:txBody>
                     <a:bodyPr/>
                     <a:lstStyle/>
                     <a:p>
-                      <a:pPr algn="l"/>
                       <a:r>
-                        <a:rPr sz="1300" b="1" i="0">
+                        <a:rPr sz="1200">
                           <a:solidFill>
-                            <a:srgbClr val="17222E"/>
+                            <a:srgbClr val="333333"/>
                           </a:solidFill>
-                          <a:latin typeface="Georgia"/>
                         </a:rPr>
-                        <a:t>Modelo local (GWR)</a:t>
+                        <a:t>Renda média</a:t>
                       </a:r>
                     </a:p>
                   </a:txBody>
                   <a:tcPr>
                     <a:solidFill>
-                      <a:srgbClr val="DBE7F3"/>
+                      <a:srgbClr val="F2F2F2"/>
                     </a:solidFill>
                   </a:tcPr>
                 </a:tc>
@@ -7210,21 +7128,170 @@
                     <a:bodyPr/>
                     <a:lstStyle/>
                     <a:p>
-                      <a:pPr algn="r"/>
                       <a:r>
-                        <a:rPr sz="1300" b="1" i="0">
+                        <a:rPr sz="1200">
                           <a:solidFill>
-                            <a:srgbClr val="17222E"/>
+                            <a:srgbClr val="333333"/>
                           </a:solidFill>
-                          <a:latin typeface="Georgia"/>
                         </a:rPr>
-                        <a:t>53%</a:t>
+                        <a:t>IBGE, Censo 2022</a:t>
                       </a:r>
                     </a:p>
                   </a:txBody>
                   <a:tcPr>
                     <a:solidFill>
-                      <a:srgbClr val="DBE7F3"/>
+                      <a:srgbClr val="F2F2F2"/>
+                    </a:solidFill>
+                  </a:tcPr>
+                </a:tc>
+                <a:tc>
+                  <a:txBody>
+                    <a:bodyPr/>
+                    <a:lstStyle/>
+                    <a:p>
+                      <a:r>
+                        <a:rPr sz="1200">
+                          <a:solidFill>
+                            <a:srgbClr val="333333"/>
+                          </a:solidFill>
+                        </a:rPr>
+                        <a:t>Renda per capita em R$</a:t>
+                      </a:r>
+                    </a:p>
+                  </a:txBody>
+                  <a:tcPr>
+                    <a:solidFill>
+                      <a:srgbClr val="F2F2F2"/>
+                    </a:solidFill>
+                  </a:tcPr>
+                </a:tc>
+              </a:tr>
+              <a:tr h="444137">
+                <a:tc>
+                  <a:txBody>
+                    <a:bodyPr/>
+                    <a:lstStyle/>
+                    <a:p>
+                      <a:r>
+                        <a:rPr sz="1200">
+                          <a:solidFill>
+                            <a:srgbClr val="333333"/>
+                          </a:solidFill>
+                        </a:rPr>
+                        <a:t>População</a:t>
+                      </a:r>
+                    </a:p>
+                  </a:txBody>
+                  <a:tcPr>
+                    <a:solidFill>
+                      <a:srgbClr val="FFFFFF"/>
+                    </a:solidFill>
+                  </a:tcPr>
+                </a:tc>
+                <a:tc>
+                  <a:txBody>
+                    <a:bodyPr/>
+                    <a:lstStyle/>
+                    <a:p>
+                      <a:r>
+                        <a:rPr sz="1200">
+                          <a:solidFill>
+                            <a:srgbClr val="333333"/>
+                          </a:solidFill>
+                        </a:rPr>
+                        <a:t>IBGE, Tabela 4709</a:t>
+                      </a:r>
+                    </a:p>
+                  </a:txBody>
+                  <a:tcPr>
+                    <a:solidFill>
+                      <a:srgbClr val="FFFFFF"/>
+                    </a:solidFill>
+                  </a:tcPr>
+                </a:tc>
+                <a:tc>
+                  <a:txBody>
+                    <a:bodyPr/>
+                    <a:lstStyle/>
+                    <a:p>
+                      <a:r>
+                        <a:rPr sz="1200">
+                          <a:solidFill>
+                            <a:srgbClr val="333333"/>
+                          </a:solidFill>
+                        </a:rPr>
+                        <a:t>Denominador das taxas</a:t>
+                      </a:r>
+                    </a:p>
+                  </a:txBody>
+                  <a:tcPr>
+                    <a:solidFill>
+                      <a:srgbClr val="FFFFFF"/>
+                    </a:solidFill>
+                  </a:tcPr>
+                </a:tc>
+              </a:tr>
+              <a:tr h="444138">
+                <a:tc>
+                  <a:txBody>
+                    <a:bodyPr/>
+                    <a:lstStyle/>
+                    <a:p>
+                      <a:r>
+                        <a:rPr sz="1200">
+                          <a:solidFill>
+                            <a:srgbClr val="333333"/>
+                          </a:solidFill>
+                        </a:rPr>
+                        <a:t>Litorâneo/turístico</a:t>
+                      </a:r>
+                    </a:p>
+                  </a:txBody>
+                  <a:tcPr>
+                    <a:solidFill>
+                      <a:srgbClr val="F2F2F2"/>
+                    </a:solidFill>
+                  </a:tcPr>
+                </a:tc>
+                <a:tc>
+                  <a:txBody>
+                    <a:bodyPr/>
+                    <a:lstStyle/>
+                    <a:p>
+                      <a:r>
+                        <a:rPr sz="1200">
+                          <a:solidFill>
+                            <a:srgbClr val="333333"/>
+                          </a:solidFill>
+                        </a:rPr>
+                        <a:t>Classificação do grupo</a:t>
+                      </a:r>
+                    </a:p>
+                  </a:txBody>
+                  <a:tcPr>
+                    <a:solidFill>
+                      <a:srgbClr val="F2F2F2"/>
+                    </a:solidFill>
+                  </a:tcPr>
+                </a:tc>
+                <a:tc>
+                  <a:txBody>
+                    <a:bodyPr/>
+                    <a:lstStyle/>
+                    <a:p>
+                      <a:r>
+                        <a:rPr sz="1200">
+                          <a:solidFill>
+                            <a:srgbClr val="333333"/>
+                          </a:solidFill>
+                        </a:rPr>
+                        <a:t>Dummy (1/0), 16 municípios da costa</a:t>
+                      </a:r>
+                    </a:p>
+                  </a:txBody>
+                  <a:tcPr>
+                    <a:solidFill>
+                      <a:srgbClr val="F2F2F2"/>
                     </a:solidFill>
                   </a:tcPr>
                 </a:tc>
@@ -7235,14 +7302,14 @@
       </p:graphicFrame>
       <p:sp>
         <p:nvSpPr>
-          <p:cNvPr id="7" name="TextBox 6"/>
+          <p:cNvPr id="6" name="TextBox 5"/>
           <p:cNvSpPr txBox="1"/>
           <p:nvPr/>
         </p:nvSpPr>
         <p:spPr>
           <a:xfrm>
-            <a:off x="822960" y="4389120"/>
-            <a:ext cx="5120640" cy="1645920"/>
+            <a:off x="548640" y="5074920"/>
+            <a:ext cx="8412480" cy="1280160"/>
           </a:xfrm>
           <a:prstGeom prst="rect">
             <a:avLst/>
@@ -7255,117 +7322,105 @@
           </a:bodyPr>
           <a:lstStyle/>
           <a:p>
+            <a:pPr>
+              <a:lnSpc>
+                <a:spcPct val="115000"/>
+              </a:lnSpc>
+              <a:spcAft>
+                <a:spcPts val="1000"/>
+              </a:spcAft>
+            </a:pPr>
+            <a:r>
+              <a:rPr sz="1400">
+                <a:solidFill>
+                  <a:srgbClr val="595959"/>
+                </a:solidFill>
+                <a:latin typeface="Calibri"/>
+              </a:rPr>
+              <a:t>—  Chave de junção: código IBGE de 7 dígitos (nunca o nome — a SSP abrevia,
+ex. "S BARBARA D OESTE"): correspondência exata → abreviações → distância de edição ≤ 1.</a:t>
+            </a:r>
+          </a:p>
+        </p:txBody>
+      </p:sp>
+      <p:sp>
+        <p:nvSpPr>
+          <p:cNvPr id="7" name="TextBox 6"/>
+          <p:cNvSpPr txBox="1"/>
+          <p:nvPr/>
+        </p:nvSpPr>
+        <p:spPr>
+          <a:xfrm>
+            <a:off x="548640" y="6510528"/>
+            <a:ext cx="7315200" cy="274320"/>
+          </a:xfrm>
+          <a:prstGeom prst="rect">
+            <a:avLst/>
+          </a:prstGeom>
+          <a:noFill/>
+        </p:spPr>
+        <p:txBody>
+          <a:bodyPr wrap="square" anchor="t">
+            <a:spAutoFit/>
+          </a:bodyPr>
+          <a:lstStyle/>
+          <a:p>
             <a:pPr algn="l">
-              <a:spcBef>
-                <a:spcPts val="0"/>
-              </a:spcBef>
+              <a:lnSpc>
+                <a:spcPct val="115000"/>
+              </a:lnSpc>
             </a:pPr>
             <a:r>
               <a:rPr sz="1000" b="0" i="0">
                 <a:solidFill>
-                  <a:srgbClr val="D95F02"/>
-                </a:solidFill>
-                <a:latin typeface="Arial Narrow"/>
-              </a:rPr>
-              <a:t>●  </a:t>
-            </a:r>
-            <a:r>
-              <a:rPr sz="1400" b="0" i="0">
-                <a:solidFill>
-                  <a:srgbClr val="17222E"/>
-                </a:solidFill>
-                <a:latin typeface="Georgia"/>
-              </a:rPr>
-              <a:t>Botar a variável “praia” é o </a:t>
-            </a:r>
-            <a:r>
-              <a:rPr sz="1400" b="1" i="0">
-                <a:solidFill>
-                  <a:srgbClr val="17222E"/>
-                </a:solidFill>
-                <a:latin typeface="Georgia"/>
-              </a:rPr>
-              <a:t>maior salto</a:t>
-            </a:r>
-            <a:r>
-              <a:rPr sz="1400" b="0" i="0">
-                <a:solidFill>
-                  <a:srgbClr val="17222E"/>
-                </a:solidFill>
-                <a:latin typeface="Georgia"/>
-              </a:rPr>
-              <a:t> (quase o triplo).</a:t>
-            </a:r>
-          </a:p>
-          <a:p>
-            <a:pPr algn="l">
-              <a:spcBef>
-                <a:spcPts val="800"/>
-              </a:spcBef>
+                  <a:srgbClr val="595959"/>
+                </a:solidFill>
+                <a:latin typeface="Calibri"/>
+              </a:rPr>
+              <a:t>Furto, Renda e Território — UFABC</a:t>
+            </a:r>
+          </a:p>
+        </p:txBody>
+      </p:sp>
+      <p:sp>
+        <p:nvSpPr>
+          <p:cNvPr id="8" name="TextBox 7"/>
+          <p:cNvSpPr txBox="1"/>
+          <p:nvPr/>
+        </p:nvSpPr>
+        <p:spPr>
+          <a:xfrm>
+            <a:off x="10972800" y="6510528"/>
+            <a:ext cx="731520" cy="274320"/>
+          </a:xfrm>
+          <a:prstGeom prst="rect">
+            <a:avLst/>
+          </a:prstGeom>
+          <a:noFill/>
+        </p:spPr>
+        <p:txBody>
+          <a:bodyPr wrap="square" anchor="t">
+            <a:spAutoFit/>
+          </a:bodyPr>
+          <a:lstStyle/>
+          <a:p>
+            <a:pPr algn="r">
+              <a:lnSpc>
+                <a:spcPct val="115000"/>
+              </a:lnSpc>
             </a:pPr>
             <a:r>
               <a:rPr sz="1000" b="0" i="0">
                 <a:solidFill>
-                  <a:srgbClr val="D95F02"/>
-                </a:solidFill>
-                <a:latin typeface="Arial Narrow"/>
-              </a:rPr>
-              <a:t>●  </a:t>
-            </a:r>
-            <a:r>
-              <a:rPr sz="1400" b="0" i="0">
-                <a:solidFill>
-                  <a:srgbClr val="17222E"/>
-                </a:solidFill>
-                <a:latin typeface="Georgia"/>
-              </a:rPr>
-              <a:t>O </a:t>
-            </a:r>
-            <a:r>
-              <a:rPr sz="1400" b="1" i="0">
-                <a:solidFill>
-                  <a:srgbClr val="17222E"/>
-                </a:solidFill>
-                <a:latin typeface="Georgia"/>
-              </a:rPr>
-              <a:t>GWR</a:t>
-            </a:r>
-            <a:r>
-              <a:rPr sz="1400" b="0" i="0">
-                <a:solidFill>
-                  <a:srgbClr val="17222E"/>
-                </a:solidFill>
-                <a:latin typeface="Georgia"/>
-              </a:rPr>
-              <a:t>, que deixa a regra mudar de lugar, é o campeão.</a:t>
-            </a:r>
-          </a:p>
-        </p:txBody>
-      </p:sp>
-      <p:pic>
-        <p:nvPicPr>
-          <p:cNvPr id="8" name="Picture 7" descr="gwr_lit_r2_local.png"/>
-          <p:cNvPicPr>
-            <a:picLocks noChangeAspect="1"/>
-          </p:cNvPicPr>
-          <p:nvPr/>
-        </p:nvPicPr>
-        <p:blipFill>
-          <a:blip r:embed="rId2"/>
-          <a:stretch>
-            <a:fillRect/>
-          </a:stretch>
-        </p:blipFill>
-        <p:spPr>
-          <a:xfrm>
-            <a:off x="6400800" y="1371600"/>
-            <a:ext cx="5349240" cy="4754880"/>
-          </a:xfrm>
-          <a:prstGeom prst="rect">
-            <a:avLst/>
-          </a:prstGeom>
-        </p:spPr>
-      </p:pic>
+                  <a:srgbClr val="595959"/>
+                </a:solidFill>
+                <a:latin typeface="Calibri"/>
+              </a:rPr>
+              <a:t>4</a:t>
+            </a:r>
+          </a:p>
+        </p:txBody>
+      </p:sp>
     </p:spTree>
   </p:cSld>
   <p:clrMapOvr>
@@ -7374,9 +7429,17 @@
 </p:sld>
 </file>
 
-<file path=ppt/slides/slide9.xml><?xml version="1.0" encoding="utf-8"?>
+<file path=ppt/slides/slide5.xml><?xml version="1.0" encoding="utf-8"?>
 <p:sld xmlns:a="http://schemas.openxmlformats.org/drawingml/2006/main" xmlns:p="http://schemas.openxmlformats.org/presentationml/2006/main" xmlns:r="http://schemas.openxmlformats.org/officeDocument/2006/relationships">
   <p:cSld>
+    <p:bg>
+      <p:bgPr>
+        <a:solidFill>
+          <a:srgbClr val="FFFFFF"/>
+        </a:solidFill>
+        <a:effectLst/>
+      </p:bgPr>
+    </p:bg>
     <p:spTree>
       <p:nvGrpSpPr>
         <p:cNvPr id="1" name=""/>
@@ -7384,30 +7447,45 @@
         <p:nvPr/>
       </p:nvGrpSpPr>
       <p:grpSpPr/>
-      <p:pic>
-        <p:nvPicPr>
-          <p:cNvPr id="2" name="Picture 1" descr="gwr_contrafactual_dif.png"/>
-          <p:cNvPicPr>
-            <a:picLocks noChangeAspect="1"/>
-          </p:cNvPicPr>
-          <p:nvPr/>
-        </p:nvPicPr>
-        <p:blipFill>
-          <a:blip r:embed="rId2"/>
-          <a:stretch>
-            <a:fillRect/>
-          </a:stretch>
-        </p:blipFill>
-        <p:spPr>
-          <a:xfrm>
-            <a:off x="822960" y="1280160"/>
-            <a:ext cx="5452110" cy="4846320"/>
-          </a:xfrm>
-          <a:prstGeom prst="rect">
-            <a:avLst/>
-          </a:prstGeom>
-        </p:spPr>
-      </p:pic>
+      <p:sp>
+        <p:nvSpPr>
+          <p:cNvPr id="2" name="TextBox 1"/>
+          <p:cNvSpPr txBox="1"/>
+          <p:nvPr/>
+        </p:nvSpPr>
+        <p:spPr>
+          <a:xfrm>
+            <a:off x="548640" y="320040"/>
+            <a:ext cx="7315200" cy="365760"/>
+          </a:xfrm>
+          <a:prstGeom prst="rect">
+            <a:avLst/>
+          </a:prstGeom>
+          <a:noFill/>
+        </p:spPr>
+        <p:txBody>
+          <a:bodyPr wrap="square" anchor="t">
+            <a:spAutoFit/>
+          </a:bodyPr>
+          <a:lstStyle/>
+          <a:p>
+            <a:pPr algn="l">
+              <a:lnSpc>
+                <a:spcPct val="115000"/>
+              </a:lnSpc>
+            </a:pPr>
+            <a:r>
+              <a:rPr sz="1300" b="1" i="0">
+                <a:solidFill>
+                  <a:srgbClr val="1F4E79"/>
+                </a:solidFill>
+                <a:latin typeface="Calibri"/>
+              </a:rPr>
+              <a:t>DADOS E VARIÁVEIS</a:t>
+            </a:r>
+          </a:p>
+        </p:txBody>
+      </p:sp>
       <p:sp>
         <p:nvSpPr>
           <p:cNvPr id="3" name="TextBox 2"/>
@@ -7416,8 +7494,8 @@
         </p:nvSpPr>
         <p:spPr>
           <a:xfrm>
-            <a:off x="6492240" y="1463040"/>
-            <a:ext cx="4937760" cy="1097280"/>
+            <a:off x="548640" y="594360"/>
+            <a:ext cx="11064240" cy="822960"/>
           </a:xfrm>
           <a:prstGeom prst="rect">
             <a:avLst/>
@@ -7425,226 +7503,44 @@
           <a:noFill/>
         </p:spPr>
         <p:txBody>
-          <a:bodyPr wrap="square">
+          <a:bodyPr wrap="square" anchor="t">
             <a:spAutoFit/>
           </a:bodyPr>
           <a:lstStyle/>
           <a:p>
             <a:pPr algn="l">
-              <a:spcBef>
-                <a:spcPts val="0"/>
-              </a:spcBef>
+              <a:lnSpc>
+                <a:spcPct val="115000"/>
+              </a:lnSpc>
             </a:pPr>
             <a:r>
               <a:rPr sz="3000" b="1" i="0">
                 <a:solidFill>
-                  <a:srgbClr val="17222E"/>
-                </a:solidFill>
-                <a:latin typeface="Arial Narrow"/>
-              </a:rPr>
-              <a:t>Desligando a praia, </a:t>
-            </a:r>
-            <a:r>
-              <a:rPr sz="3000" b="1" i="0">
-                <a:solidFill>
-                  <a:srgbClr val="D95F02"/>
-                </a:solidFill>
-                <a:latin typeface="Arial Narrow"/>
-              </a:rPr>
-              <a:t>o litoral apaga</a:t>
-            </a:r>
-          </a:p>
-        </p:txBody>
-      </p:sp>
-      <p:sp>
-        <p:nvSpPr>
-          <p:cNvPr id="4" name="TextBox 3"/>
-          <p:cNvSpPr txBox="1"/>
-          <p:nvPr/>
-        </p:nvSpPr>
-        <p:spPr>
-          <a:xfrm>
-            <a:off x="6492240" y="2743200"/>
-            <a:ext cx="4937760" cy="3474720"/>
-          </a:xfrm>
-          <a:prstGeom prst="rect">
-            <a:avLst/>
-          </a:prstGeom>
-          <a:noFill/>
-        </p:spPr>
-        <p:txBody>
-          <a:bodyPr wrap="square">
-            <a:spAutoFit/>
-          </a:bodyPr>
-          <a:lstStyle/>
-          <a:p>
-            <a:pPr algn="l">
-              <a:spcBef>
-                <a:spcPts val="0"/>
-              </a:spcBef>
-            </a:pPr>
-            <a:r>
-              <a:rPr sz="1100" b="0" i="0">
-                <a:solidFill>
-                  <a:srgbClr val="D95F02"/>
-                </a:solidFill>
-                <a:latin typeface="Arial Narrow"/>
-              </a:rPr>
-              <a:t>●  </a:t>
-            </a:r>
-            <a:r>
-              <a:rPr sz="1500" b="0" i="0">
-                <a:solidFill>
-                  <a:srgbClr val="17222E"/>
-                </a:solidFill>
-                <a:latin typeface="Georgia"/>
-              </a:rPr>
-              <a:t>Cenário “e se essas cidades não fossem de praia?”.</a:t>
-            </a:r>
-          </a:p>
-          <a:p>
-            <a:pPr algn="l">
-              <a:spcBef>
-                <a:spcPts val="1200"/>
-              </a:spcBef>
-            </a:pPr>
-            <a:r>
-              <a:rPr sz="1100" b="0" i="0">
-                <a:solidFill>
-                  <a:srgbClr val="D95F02"/>
-                </a:solidFill>
-                <a:latin typeface="Arial Narrow"/>
-              </a:rPr>
-              <a:t>●  </a:t>
-            </a:r>
-            <a:r>
-              <a:rPr sz="1500" b="0" i="0">
-                <a:solidFill>
-                  <a:srgbClr val="17222E"/>
-                </a:solidFill>
-                <a:latin typeface="Georgia"/>
-              </a:rPr>
-              <a:t>Some um extra de </a:t>
-            </a:r>
-            <a:r>
-              <a:rPr sz="1500" b="1" i="0">
-                <a:solidFill>
-                  <a:srgbClr val="17222E"/>
-                </a:solidFill>
-                <a:latin typeface="Georgia"/>
-              </a:rPr>
-              <a:t>até 12 furtos por 1.000 hab.</a:t>
-            </a:r>
-            <a:r>
-              <a:rPr sz="1500" b="0" i="0">
-                <a:solidFill>
-                  <a:srgbClr val="17222E"/>
-                </a:solidFill>
-                <a:latin typeface="Georgia"/>
-              </a:rPr>
-              <a:t>, tudo na costa.</a:t>
-            </a:r>
-          </a:p>
-          <a:p>
-            <a:pPr algn="l">
-              <a:spcBef>
-                <a:spcPts val="1200"/>
-              </a:spcBef>
-            </a:pPr>
-            <a:r>
-              <a:rPr sz="1100" b="0" i="0">
-                <a:solidFill>
-                  <a:srgbClr val="D95F02"/>
-                </a:solidFill>
-                <a:latin typeface="Arial Narrow"/>
-              </a:rPr>
-              <a:t>●  </a:t>
-            </a:r>
-            <a:r>
-              <a:rPr sz="1500" b="0" i="0">
-                <a:solidFill>
-                  <a:srgbClr val="17222E"/>
-                </a:solidFill>
-                <a:latin typeface="Georgia"/>
-              </a:rPr>
-              <a:t>É a população flutuante: o turista entra na ocorrência, mas </a:t>
-            </a:r>
-            <a:r>
-              <a:rPr sz="1500" b="1" i="0">
-                <a:solidFill>
-                  <a:srgbClr val="17222E"/>
-                </a:solidFill>
-                <a:latin typeface="Georgia"/>
-              </a:rPr>
-              <a:t>não na conta de habitantes</a:t>
-            </a:r>
-            <a:r>
-              <a:rPr sz="1500" b="0" i="0">
-                <a:solidFill>
-                  <a:srgbClr val="17222E"/>
-                </a:solidFill>
-                <a:latin typeface="Georgia"/>
-              </a:rPr>
-              <a:t>.</a:t>
-            </a:r>
-          </a:p>
-        </p:txBody>
-      </p:sp>
-      <p:sp>
-        <p:nvSpPr>
-          <p:cNvPr id="5" name="TextBox 4"/>
-          <p:cNvSpPr txBox="1"/>
-          <p:nvPr/>
-        </p:nvSpPr>
-        <p:spPr>
-          <a:xfrm>
-            <a:off x="822960" y="384048"/>
-            <a:ext cx="10515600" cy="365760"/>
-          </a:xfrm>
-          <a:prstGeom prst="rect">
-            <a:avLst/>
-          </a:prstGeom>
-          <a:noFill/>
-        </p:spPr>
-        <p:txBody>
-          <a:bodyPr wrap="square">
-            <a:spAutoFit/>
-          </a:bodyPr>
-          <a:lstStyle/>
-          <a:p>
-            <a:pPr algn="l">
-              <a:spcBef>
-                <a:spcPts val="0"/>
-              </a:spcBef>
-            </a:pPr>
-            <a:r>
-              <a:rPr sz="1300" b="1" i="0">
-                <a:solidFill>
-                  <a:srgbClr val="D95F02"/>
-                </a:solidFill>
-                <a:latin typeface="Arial Narrow"/>
-              </a:rPr>
-              <a:t>RESULTADO DO MODELO</a:t>
-            </a:r>
-          </a:p>
-        </p:txBody>
-      </p:sp>
-      <p:sp>
-        <p:nvSpPr>
-          <p:cNvPr id="6" name="Rectangle 5"/>
+                  <a:srgbClr val="1A1A1A"/>
+                </a:solidFill>
+                <a:latin typeface="Calibri"/>
+              </a:rPr>
+              <a:t>Metodologia: quatro etapas progressivas</a:t>
+            </a:r>
+          </a:p>
+        </p:txBody>
+      </p:sp>
+      <p:sp>
+        <p:nvSpPr>
+          <p:cNvPr id="4" name="Rectangle 3"/>
           <p:cNvSpPr/>
           <p:nvPr/>
         </p:nvSpPr>
         <p:spPr>
           <a:xfrm>
-            <a:off x="822960" y="749808"/>
-            <a:ext cx="10515600" cy="15240"/>
+            <a:off x="548640" y="1325880"/>
+            <a:ext cx="11064240" cy="27940"/>
           </a:xfrm>
           <a:prstGeom prst="rect">
             <a:avLst/>
           </a:prstGeom>
           <a:solidFill>
-            <a:srgbClr val="D8DFE7"/>
+            <a:srgbClr val="1F4E79"/>
           </a:solidFill>
           <a:ln>
             <a:noFill/>
@@ -7675,14 +7571,1313 @@
       </p:sp>
       <p:sp>
         <p:nvSpPr>
+          <p:cNvPr id="5" name="TextBox 4"/>
+          <p:cNvSpPr txBox="1"/>
+          <p:nvPr/>
+        </p:nvSpPr>
+        <p:spPr>
+          <a:xfrm>
+            <a:off x="548640" y="1600200"/>
+            <a:ext cx="11064240" cy="457200"/>
+          </a:xfrm>
+          <a:prstGeom prst="rect">
+            <a:avLst/>
+          </a:prstGeom>
+          <a:noFill/>
+        </p:spPr>
+        <p:txBody>
+          <a:bodyPr wrap="square" anchor="t">
+            <a:spAutoFit/>
+          </a:bodyPr>
+          <a:lstStyle/>
+          <a:p>
+            <a:pPr algn="l">
+              <a:lnSpc>
+                <a:spcPct val="115000"/>
+              </a:lnSpc>
+            </a:pPr>
+            <a:r>
+              <a:rPr sz="1400" b="0" i="1">
+                <a:solidFill>
+                  <a:srgbClr val="595959"/>
+                </a:solidFill>
+                <a:latin typeface="Calibri"/>
+              </a:rPr>
+              <a:t>Vizinhança espacial: contiguidade queen de ordem 1, pesos row-standardized (645 municípios, média 5,50 vizinhos; Ilhabela sem vizinhos)</a:t>
+            </a:r>
+          </a:p>
+        </p:txBody>
+      </p:sp>
+      <p:sp>
+        <p:nvSpPr>
+          <p:cNvPr id="6" name="Oval 5"/>
+          <p:cNvSpPr/>
+          <p:nvPr/>
+        </p:nvSpPr>
+        <p:spPr>
+          <a:xfrm>
+            <a:off x="548640" y="2286000"/>
+            <a:ext cx="640080" cy="640080"/>
+          </a:xfrm>
+          <a:prstGeom prst="ellipse">
+            <a:avLst/>
+          </a:prstGeom>
+          <a:solidFill>
+            <a:srgbClr val="1F4E79"/>
+          </a:solidFill>
+          <a:ln>
+            <a:noFill/>
+          </a:ln>
+          <a:effectLst/>
+        </p:spPr>
+        <p:style>
+          <a:lnRef idx="1">
+            <a:schemeClr val="accent1"/>
+          </a:lnRef>
+          <a:fillRef idx="3">
+            <a:schemeClr val="accent1"/>
+          </a:fillRef>
+          <a:effectRef idx="2">
+            <a:schemeClr val="accent1"/>
+          </a:effectRef>
+          <a:fontRef idx="minor">
+            <a:schemeClr val="lt1"/>
+          </a:fontRef>
+        </p:style>
+        <p:txBody>
+          <a:bodyPr rtlCol="0" anchor="ctr"/>
+          <a:lstStyle/>
+          <a:p>
+            <a:pPr algn="ctr"/>
+            <a:r>
+              <a:rPr sz="2000" b="1">
+                <a:solidFill>
+                  <a:srgbClr val="FFFFFF"/>
+                </a:solidFill>
+              </a:rPr>
+              <a:t>1</a:t>
+            </a:r>
+          </a:p>
+        </p:txBody>
+      </p:sp>
+      <p:sp>
+        <p:nvSpPr>
           <p:cNvPr id="7" name="TextBox 6"/>
           <p:cNvSpPr txBox="1"/>
           <p:nvPr/>
         </p:nvSpPr>
         <p:spPr>
           <a:xfrm>
-            <a:off x="9784080" y="384048"/>
-            <a:ext cx="1600200" cy="365760"/>
+            <a:off x="1417320" y="2258568"/>
+            <a:ext cx="9875520" cy="365760"/>
+          </a:xfrm>
+          <a:prstGeom prst="rect">
+            <a:avLst/>
+          </a:prstGeom>
+          <a:noFill/>
+        </p:spPr>
+        <p:txBody>
+          <a:bodyPr wrap="square" anchor="t">
+            <a:spAutoFit/>
+          </a:bodyPr>
+          <a:lstStyle/>
+          <a:p>
+            <a:pPr algn="l">
+              <a:lnSpc>
+                <a:spcPct val="115000"/>
+              </a:lnSpc>
+            </a:pPr>
+            <a:r>
+              <a:rPr sz="1800" b="1" i="0">
+                <a:solidFill>
+                  <a:srgbClr val="1A1A1A"/>
+                </a:solidFill>
+                <a:latin typeface="Calibri"/>
+              </a:rPr>
+              <a:t>Correlação e autocorrelação espacial</a:t>
+            </a:r>
+          </a:p>
+        </p:txBody>
+      </p:sp>
+      <p:sp>
+        <p:nvSpPr>
+          <p:cNvPr id="8" name="TextBox 7"/>
+          <p:cNvSpPr txBox="1"/>
+          <p:nvPr/>
+        </p:nvSpPr>
+        <p:spPr>
+          <a:xfrm>
+            <a:off x="1417320" y="2606040"/>
+            <a:ext cx="9875520" cy="457200"/>
+          </a:xfrm>
+          <a:prstGeom prst="rect">
+            <a:avLst/>
+          </a:prstGeom>
+          <a:noFill/>
+        </p:spPr>
+        <p:txBody>
+          <a:bodyPr wrap="square" anchor="t">
+            <a:spAutoFit/>
+          </a:bodyPr>
+          <a:lstStyle/>
+          <a:p>
+            <a:pPr algn="l">
+              <a:lnSpc>
+                <a:spcPct val="115000"/>
+              </a:lnSpc>
+            </a:pPr>
+            <a:r>
+              <a:rPr sz="1300" b="0" i="0">
+                <a:solidFill>
+                  <a:srgbClr val="595959"/>
+                </a:solidFill>
+                <a:latin typeface="Calibri"/>
+              </a:rPr>
+              <a:t>Pearson/Spearman; Moran's I global e LISA (permutação condicional, 999 simulações)</a:t>
+            </a:r>
+          </a:p>
+        </p:txBody>
+      </p:sp>
+      <p:sp>
+        <p:nvSpPr>
+          <p:cNvPr id="9" name="Oval 8"/>
+          <p:cNvSpPr/>
+          <p:nvPr/>
+        </p:nvSpPr>
+        <p:spPr>
+          <a:xfrm>
+            <a:off x="548640" y="3291840"/>
+            <a:ext cx="640080" cy="640080"/>
+          </a:xfrm>
+          <a:prstGeom prst="ellipse">
+            <a:avLst/>
+          </a:prstGeom>
+          <a:solidFill>
+            <a:srgbClr val="1F4E79"/>
+          </a:solidFill>
+          <a:ln>
+            <a:noFill/>
+          </a:ln>
+          <a:effectLst/>
+        </p:spPr>
+        <p:style>
+          <a:lnRef idx="1">
+            <a:schemeClr val="accent1"/>
+          </a:lnRef>
+          <a:fillRef idx="3">
+            <a:schemeClr val="accent1"/>
+          </a:fillRef>
+          <a:effectRef idx="2">
+            <a:schemeClr val="accent1"/>
+          </a:effectRef>
+          <a:fontRef idx="minor">
+            <a:schemeClr val="lt1"/>
+          </a:fontRef>
+        </p:style>
+        <p:txBody>
+          <a:bodyPr rtlCol="0" anchor="ctr"/>
+          <a:lstStyle/>
+          <a:p>
+            <a:pPr algn="ctr"/>
+            <a:r>
+              <a:rPr sz="2000" b="1">
+                <a:solidFill>
+                  <a:srgbClr val="FFFFFF"/>
+                </a:solidFill>
+              </a:rPr>
+              <a:t>2</a:t>
+            </a:r>
+          </a:p>
+        </p:txBody>
+      </p:sp>
+      <p:sp>
+        <p:nvSpPr>
+          <p:cNvPr id="10" name="TextBox 9"/>
+          <p:cNvSpPr txBox="1"/>
+          <p:nvPr/>
+        </p:nvSpPr>
+        <p:spPr>
+          <a:xfrm>
+            <a:off x="1417320" y="3264408"/>
+            <a:ext cx="9875520" cy="365760"/>
+          </a:xfrm>
+          <a:prstGeom prst="rect">
+            <a:avLst/>
+          </a:prstGeom>
+          <a:noFill/>
+        </p:spPr>
+        <p:txBody>
+          <a:bodyPr wrap="square" anchor="t">
+            <a:spAutoFit/>
+          </a:bodyPr>
+          <a:lstStyle/>
+          <a:p>
+            <a:pPr algn="l">
+              <a:lnSpc>
+                <a:spcPct val="115000"/>
+              </a:lnSpc>
+            </a:pPr>
+            <a:r>
+              <a:rPr sz="1800" b="1" i="0">
+                <a:solidFill>
+                  <a:srgbClr val="1A1A1A"/>
+                </a:solidFill>
+                <a:latin typeface="Calibri"/>
+              </a:rPr>
+              <a:t>Regressão linear clássica (OLS)</a:t>
+            </a:r>
+          </a:p>
+        </p:txBody>
+      </p:sp>
+      <p:sp>
+        <p:nvSpPr>
+          <p:cNvPr id="11" name="TextBox 10"/>
+          <p:cNvSpPr txBox="1"/>
+          <p:nvPr/>
+        </p:nvSpPr>
+        <p:spPr>
+          <a:xfrm>
+            <a:off x="1417320" y="3611880"/>
+            <a:ext cx="9875520" cy="457200"/>
+          </a:xfrm>
+          <a:prstGeom prst="rect">
+            <a:avLst/>
+          </a:prstGeom>
+          <a:noFill/>
+        </p:spPr>
+        <p:txBody>
+          <a:bodyPr wrap="square" anchor="t">
+            <a:spAutoFit/>
+          </a:bodyPr>
+          <a:lstStyle/>
+          <a:p>
+            <a:pPr algn="l">
+              <a:lnSpc>
+                <a:spcPct val="115000"/>
+              </a:lnSpc>
+            </a:pPr>
+            <a:r>
+              <a:rPr sz="1300" b="0" i="0">
+                <a:solidFill>
+                  <a:srgbClr val="595959"/>
+                </a:solidFill>
+                <a:latin typeface="Calibri"/>
+              </a:rPr>
+              <a:t>taxa ~ renda e taxa ~ renda + litoral, com diagnóstico de resíduos</a:t>
+            </a:r>
+          </a:p>
+        </p:txBody>
+      </p:sp>
+      <p:sp>
+        <p:nvSpPr>
+          <p:cNvPr id="12" name="Oval 11"/>
+          <p:cNvSpPr/>
+          <p:nvPr/>
+        </p:nvSpPr>
+        <p:spPr>
+          <a:xfrm>
+            <a:off x="548640" y="4297680"/>
+            <a:ext cx="640080" cy="640080"/>
+          </a:xfrm>
+          <a:prstGeom prst="ellipse">
+            <a:avLst/>
+          </a:prstGeom>
+          <a:solidFill>
+            <a:srgbClr val="1F4E79"/>
+          </a:solidFill>
+          <a:ln>
+            <a:noFill/>
+          </a:ln>
+          <a:effectLst/>
+        </p:spPr>
+        <p:style>
+          <a:lnRef idx="1">
+            <a:schemeClr val="accent1"/>
+          </a:lnRef>
+          <a:fillRef idx="3">
+            <a:schemeClr val="accent1"/>
+          </a:fillRef>
+          <a:effectRef idx="2">
+            <a:schemeClr val="accent1"/>
+          </a:effectRef>
+          <a:fontRef idx="minor">
+            <a:schemeClr val="lt1"/>
+          </a:fontRef>
+        </p:style>
+        <p:txBody>
+          <a:bodyPr rtlCol="0" anchor="ctr"/>
+          <a:lstStyle/>
+          <a:p>
+            <a:pPr algn="ctr"/>
+            <a:r>
+              <a:rPr sz="2000" b="1">
+                <a:solidFill>
+                  <a:srgbClr val="FFFFFF"/>
+                </a:solidFill>
+              </a:rPr>
+              <a:t>3</a:t>
+            </a:r>
+          </a:p>
+        </p:txBody>
+      </p:sp>
+      <p:sp>
+        <p:nvSpPr>
+          <p:cNvPr id="13" name="TextBox 12"/>
+          <p:cNvSpPr txBox="1"/>
+          <p:nvPr/>
+        </p:nvSpPr>
+        <p:spPr>
+          <a:xfrm>
+            <a:off x="1417320" y="4270248"/>
+            <a:ext cx="9875520" cy="365760"/>
+          </a:xfrm>
+          <a:prstGeom prst="rect">
+            <a:avLst/>
+          </a:prstGeom>
+          <a:noFill/>
+        </p:spPr>
+        <p:txBody>
+          <a:bodyPr wrap="square" anchor="t">
+            <a:spAutoFit/>
+          </a:bodyPr>
+          <a:lstStyle/>
+          <a:p>
+            <a:pPr algn="l">
+              <a:lnSpc>
+                <a:spcPct val="115000"/>
+              </a:lnSpc>
+            </a:pPr>
+            <a:r>
+              <a:rPr sz="1800" b="1" i="0">
+                <a:solidFill>
+                  <a:srgbClr val="1A1A1A"/>
+                </a:solidFill>
+                <a:latin typeface="Calibri"/>
+              </a:rPr>
+              <a:t>Regressão espacial global</a:t>
+            </a:r>
+          </a:p>
+        </p:txBody>
+      </p:sp>
+      <p:sp>
+        <p:nvSpPr>
+          <p:cNvPr id="14" name="TextBox 13"/>
+          <p:cNvSpPr txBox="1"/>
+          <p:nvPr/>
+        </p:nvSpPr>
+        <p:spPr>
+          <a:xfrm>
+            <a:off x="1417320" y="4617720"/>
+            <a:ext cx="9875520" cy="457200"/>
+          </a:xfrm>
+          <a:prstGeom prst="rect">
+            <a:avLst/>
+          </a:prstGeom>
+          <a:noFill/>
+        </p:spPr>
+        <p:txBody>
+          <a:bodyPr wrap="square" anchor="t">
+            <a:spAutoFit/>
+          </a:bodyPr>
+          <a:lstStyle/>
+          <a:p>
+            <a:pPr algn="l">
+              <a:lnSpc>
+                <a:spcPct val="115000"/>
+              </a:lnSpc>
+            </a:pPr>
+            <a:r>
+              <a:rPr sz="1300" b="0" i="0">
+                <a:solidFill>
+                  <a:srgbClr val="595959"/>
+                </a:solidFill>
+                <a:latin typeface="Calibri"/>
+              </a:rPr>
+              <a:t>Testes de Multiplicadores de Lagrange → spatial lag (ρ) vs. spatial error (λ)</a:t>
+            </a:r>
+          </a:p>
+        </p:txBody>
+      </p:sp>
+      <p:sp>
+        <p:nvSpPr>
+          <p:cNvPr id="15" name="Oval 14"/>
+          <p:cNvSpPr/>
+          <p:nvPr/>
+        </p:nvSpPr>
+        <p:spPr>
+          <a:xfrm>
+            <a:off x="548640" y="5303520"/>
+            <a:ext cx="640080" cy="640080"/>
+          </a:xfrm>
+          <a:prstGeom prst="ellipse">
+            <a:avLst/>
+          </a:prstGeom>
+          <a:solidFill>
+            <a:srgbClr val="1F4E79"/>
+          </a:solidFill>
+          <a:ln>
+            <a:noFill/>
+          </a:ln>
+          <a:effectLst/>
+        </p:spPr>
+        <p:style>
+          <a:lnRef idx="1">
+            <a:schemeClr val="accent1"/>
+          </a:lnRef>
+          <a:fillRef idx="3">
+            <a:schemeClr val="accent1"/>
+          </a:fillRef>
+          <a:effectRef idx="2">
+            <a:schemeClr val="accent1"/>
+          </a:effectRef>
+          <a:fontRef idx="minor">
+            <a:schemeClr val="lt1"/>
+          </a:fontRef>
+        </p:style>
+        <p:txBody>
+          <a:bodyPr rtlCol="0" anchor="ctr"/>
+          <a:lstStyle/>
+          <a:p>
+            <a:pPr algn="ctr"/>
+            <a:r>
+              <a:rPr sz="2000" b="1">
+                <a:solidFill>
+                  <a:srgbClr val="FFFFFF"/>
+                </a:solidFill>
+              </a:rPr>
+              <a:t>4</a:t>
+            </a:r>
+          </a:p>
+        </p:txBody>
+      </p:sp>
+      <p:sp>
+        <p:nvSpPr>
+          <p:cNvPr id="16" name="TextBox 15"/>
+          <p:cNvSpPr txBox="1"/>
+          <p:nvPr/>
+        </p:nvSpPr>
+        <p:spPr>
+          <a:xfrm>
+            <a:off x="1417320" y="5276088"/>
+            <a:ext cx="9875520" cy="365760"/>
+          </a:xfrm>
+          <a:prstGeom prst="rect">
+            <a:avLst/>
+          </a:prstGeom>
+          <a:noFill/>
+        </p:spPr>
+        <p:txBody>
+          <a:bodyPr wrap="square" anchor="t">
+            <a:spAutoFit/>
+          </a:bodyPr>
+          <a:lstStyle/>
+          <a:p>
+            <a:pPr algn="l">
+              <a:lnSpc>
+                <a:spcPct val="115000"/>
+              </a:lnSpc>
+            </a:pPr>
+            <a:r>
+              <a:rPr sz="1800" b="1" i="0">
+                <a:solidFill>
+                  <a:srgbClr val="1A1A1A"/>
+                </a:solidFill>
+                <a:latin typeface="Calibri"/>
+              </a:rPr>
+              <a:t>GWR — Regressão Geograficamente Ponderada</a:t>
+            </a:r>
+          </a:p>
+        </p:txBody>
+      </p:sp>
+      <p:sp>
+        <p:nvSpPr>
+          <p:cNvPr id="17" name="TextBox 16"/>
+          <p:cNvSpPr txBox="1"/>
+          <p:nvPr/>
+        </p:nvSpPr>
+        <p:spPr>
+          <a:xfrm>
+            <a:off x="1417320" y="5623560"/>
+            <a:ext cx="9875520" cy="457200"/>
+          </a:xfrm>
+          <a:prstGeom prst="rect">
+            <a:avLst/>
+          </a:prstGeom>
+          <a:noFill/>
+        </p:spPr>
+        <p:txBody>
+          <a:bodyPr wrap="square" anchor="t">
+            <a:spAutoFit/>
+          </a:bodyPr>
+          <a:lstStyle/>
+          <a:p>
+            <a:pPr algn="l">
+              <a:lnSpc>
+                <a:spcPct val="115000"/>
+              </a:lnSpc>
+            </a:pPr>
+            <a:r>
+              <a:rPr sz="1300" b="0" i="0">
+                <a:solidFill>
+                  <a:srgbClr val="595959"/>
+                </a:solidFill>
+                <a:latin typeface="Calibri"/>
+              </a:rPr>
+              <a:t>Regressão local por município, núcleo gaussiano, banda adaptativa (k ≈ 10)</a:t>
+            </a:r>
+          </a:p>
+        </p:txBody>
+      </p:sp>
+      <p:sp>
+        <p:nvSpPr>
+          <p:cNvPr id="18" name="TextBox 17"/>
+          <p:cNvSpPr txBox="1"/>
+          <p:nvPr/>
+        </p:nvSpPr>
+        <p:spPr>
+          <a:xfrm>
+            <a:off x="548640" y="6510528"/>
+            <a:ext cx="7315200" cy="274320"/>
+          </a:xfrm>
+          <a:prstGeom prst="rect">
+            <a:avLst/>
+          </a:prstGeom>
+          <a:noFill/>
+        </p:spPr>
+        <p:txBody>
+          <a:bodyPr wrap="square" anchor="t">
+            <a:spAutoFit/>
+          </a:bodyPr>
+          <a:lstStyle/>
+          <a:p>
+            <a:pPr algn="l">
+              <a:lnSpc>
+                <a:spcPct val="115000"/>
+              </a:lnSpc>
+            </a:pPr>
+            <a:r>
+              <a:rPr sz="1000" b="0" i="0">
+                <a:solidFill>
+                  <a:srgbClr val="595959"/>
+                </a:solidFill>
+                <a:latin typeface="Calibri"/>
+              </a:rPr>
+              <a:t>Furto, Renda e Território — UFABC</a:t>
+            </a:r>
+          </a:p>
+        </p:txBody>
+      </p:sp>
+      <p:sp>
+        <p:nvSpPr>
+          <p:cNvPr id="19" name="TextBox 18"/>
+          <p:cNvSpPr txBox="1"/>
+          <p:nvPr/>
+        </p:nvSpPr>
+        <p:spPr>
+          <a:xfrm>
+            <a:off x="10972800" y="6510528"/>
+            <a:ext cx="731520" cy="274320"/>
+          </a:xfrm>
+          <a:prstGeom prst="rect">
+            <a:avLst/>
+          </a:prstGeom>
+          <a:noFill/>
+        </p:spPr>
+        <p:txBody>
+          <a:bodyPr wrap="square" anchor="t">
+            <a:spAutoFit/>
+          </a:bodyPr>
+          <a:lstStyle/>
+          <a:p>
+            <a:pPr algn="r">
+              <a:lnSpc>
+                <a:spcPct val="115000"/>
+              </a:lnSpc>
+            </a:pPr>
+            <a:r>
+              <a:rPr sz="1000" b="0" i="0">
+                <a:solidFill>
+                  <a:srgbClr val="595959"/>
+                </a:solidFill>
+                <a:latin typeface="Calibri"/>
+              </a:rPr>
+              <a:t>5</a:t>
+            </a:r>
+          </a:p>
+        </p:txBody>
+      </p:sp>
+    </p:spTree>
+  </p:cSld>
+  <p:clrMapOvr>
+    <a:masterClrMapping/>
+  </p:clrMapOvr>
+</p:sld>
+</file>
+
+<file path=ppt/slides/slide6.xml><?xml version="1.0" encoding="utf-8"?>
+<p:sld xmlns:a="http://schemas.openxmlformats.org/drawingml/2006/main" xmlns:p="http://schemas.openxmlformats.org/presentationml/2006/main" xmlns:r="http://schemas.openxmlformats.org/officeDocument/2006/relationships">
+  <p:cSld>
+    <p:bg>
+      <p:bgPr>
+        <a:solidFill>
+          <a:srgbClr val="FFFFFF"/>
+        </a:solidFill>
+        <a:effectLst/>
+      </p:bgPr>
+    </p:bg>
+    <p:spTree>
+      <p:nvGrpSpPr>
+        <p:cNvPr id="1" name=""/>
+        <p:cNvGrpSpPr/>
+        <p:nvPr/>
+      </p:nvGrpSpPr>
+      <p:grpSpPr/>
+      <p:sp>
+        <p:nvSpPr>
+          <p:cNvPr id="2" name="TextBox 1"/>
+          <p:cNvSpPr txBox="1"/>
+          <p:nvPr/>
+        </p:nvSpPr>
+        <p:spPr>
+          <a:xfrm>
+            <a:off x="548640" y="320040"/>
+            <a:ext cx="7315200" cy="365760"/>
+          </a:xfrm>
+          <a:prstGeom prst="rect">
+            <a:avLst/>
+          </a:prstGeom>
+          <a:noFill/>
+        </p:spPr>
+        <p:txBody>
+          <a:bodyPr wrap="square" anchor="t">
+            <a:spAutoFit/>
+          </a:bodyPr>
+          <a:lstStyle/>
+          <a:p>
+            <a:pPr algn="l">
+              <a:lnSpc>
+                <a:spcPct val="115000"/>
+              </a:lnSpc>
+            </a:pPr>
+            <a:r>
+              <a:rPr sz="1300" b="1" i="0">
+                <a:solidFill>
+                  <a:srgbClr val="1F4E79"/>
+                </a:solidFill>
+                <a:latin typeface="Calibri"/>
+              </a:rPr>
+              <a:t>DESENVOLVIMENTO E RESULTADOS</a:t>
+            </a:r>
+          </a:p>
+        </p:txBody>
+      </p:sp>
+      <p:sp>
+        <p:nvSpPr>
+          <p:cNvPr id="3" name="TextBox 2"/>
+          <p:cNvSpPr txBox="1"/>
+          <p:nvPr/>
+        </p:nvSpPr>
+        <p:spPr>
+          <a:xfrm>
+            <a:off x="548640" y="594360"/>
+            <a:ext cx="11064240" cy="822960"/>
+          </a:xfrm>
+          <a:prstGeom prst="rect">
+            <a:avLst/>
+          </a:prstGeom>
+          <a:noFill/>
+        </p:spPr>
+        <p:txBody>
+          <a:bodyPr wrap="square" anchor="t">
+            <a:spAutoFit/>
+          </a:bodyPr>
+          <a:lstStyle/>
+          <a:p>
+            <a:pPr algn="l">
+              <a:lnSpc>
+                <a:spcPct val="115000"/>
+              </a:lnSpc>
+            </a:pPr>
+            <a:r>
+              <a:rPr sz="3000" b="1" i="0">
+                <a:solidFill>
+                  <a:srgbClr val="1A1A1A"/>
+                </a:solidFill>
+                <a:latin typeface="Calibri"/>
+              </a:rPr>
+              <a:t>Autocorrelação espacial: Moran's I e LISA</a:t>
+            </a:r>
+          </a:p>
+        </p:txBody>
+      </p:sp>
+      <p:sp>
+        <p:nvSpPr>
+          <p:cNvPr id="4" name="Rectangle 3"/>
+          <p:cNvSpPr/>
+          <p:nvPr/>
+        </p:nvSpPr>
+        <p:spPr>
+          <a:xfrm>
+            <a:off x="548640" y="1325880"/>
+            <a:ext cx="11064240" cy="27940"/>
+          </a:xfrm>
+          <a:prstGeom prst="rect">
+            <a:avLst/>
+          </a:prstGeom>
+          <a:solidFill>
+            <a:srgbClr val="1F4E79"/>
+          </a:solidFill>
+          <a:ln>
+            <a:noFill/>
+          </a:ln>
+          <a:effectLst/>
+        </p:spPr>
+        <p:style>
+          <a:lnRef idx="1">
+            <a:schemeClr val="accent1"/>
+          </a:lnRef>
+          <a:fillRef idx="3">
+            <a:schemeClr val="accent1"/>
+          </a:fillRef>
+          <a:effectRef idx="2">
+            <a:schemeClr val="accent1"/>
+          </a:effectRef>
+          <a:fontRef idx="minor">
+            <a:schemeClr val="lt1"/>
+          </a:fontRef>
+        </p:style>
+        <p:txBody>
+          <a:bodyPr rtlCol="0" anchor="ctr"/>
+          <a:lstStyle/>
+          <a:p>
+            <a:pPr algn="ctr"/>
+          </a:p>
+        </p:txBody>
+      </p:sp>
+      <p:pic>
+        <p:nvPicPr>
+          <p:cNvPr id="5" name="Picture 4" descr="mapa_lisa_furto.png"/>
+          <p:cNvPicPr>
+            <a:picLocks noChangeAspect="1"/>
+          </p:cNvPicPr>
+          <p:nvPr/>
+        </p:nvPicPr>
+        <p:blipFill>
+          <a:blip r:embed="rId2"/>
+          <a:stretch>
+            <a:fillRect/>
+          </a:stretch>
+        </p:blipFill>
+        <p:spPr>
+          <a:xfrm>
+            <a:off x="1131570" y="1691640"/>
+            <a:ext cx="5143500" cy="4572000"/>
+          </a:xfrm>
+          <a:prstGeom prst="rect">
+            <a:avLst/>
+          </a:prstGeom>
+        </p:spPr>
+      </p:pic>
+      <p:sp>
+        <p:nvSpPr>
+          <p:cNvPr id="6" name="Rounded Rectangle 5"/>
+          <p:cNvSpPr/>
+          <p:nvPr/>
+        </p:nvSpPr>
+        <p:spPr>
+          <a:xfrm>
+            <a:off x="7132320" y="1737360"/>
+            <a:ext cx="4389120" cy="960120"/>
+          </a:xfrm>
+          <a:prstGeom prst="roundRect">
+            <a:avLst>
+              <a:gd name="adj" fmla="val 8000"/>
+            </a:avLst>
+          </a:prstGeom>
+          <a:solidFill>
+            <a:srgbClr val="F2F2F2"/>
+          </a:solidFill>
+          <a:ln>
+            <a:noFill/>
+          </a:ln>
+          <a:effectLst/>
+        </p:spPr>
+        <p:style>
+          <a:lnRef idx="1">
+            <a:schemeClr val="accent1"/>
+          </a:lnRef>
+          <a:fillRef idx="3">
+            <a:schemeClr val="accent1"/>
+          </a:fillRef>
+          <a:effectRef idx="2">
+            <a:schemeClr val="accent1"/>
+          </a:effectRef>
+          <a:fontRef idx="minor">
+            <a:schemeClr val="lt1"/>
+          </a:fontRef>
+        </p:style>
+        <p:txBody>
+          <a:bodyPr rtlCol="0" anchor="ctr" wrap="square" lIns="137160" rIns="137160"/>
+          <a:lstStyle/>
+          <a:p>
+            <a:pPr algn="ctr"/>
+            <a:r>
+              <a:rPr sz="2600" b="1">
+                <a:solidFill>
+                  <a:srgbClr val="1F4E79"/>
+                </a:solidFill>
+                <a:latin typeface="Calibri"/>
+              </a:rPr>
+              <a:t>I = 0,832</a:t>
+            </a:r>
+          </a:p>
+          <a:p>
+            <a:pPr algn="ctr"/>
+            <a:r>
+              <a:rPr sz="1200">
+                <a:solidFill>
+                  <a:srgbClr val="595959"/>
+                </a:solidFill>
+                <a:latin typeface="Calibri"/>
+              </a:rPr>
+              <a:t>Moran's I — taxa de roubo (forte)</a:t>
+            </a:r>
+          </a:p>
+        </p:txBody>
+      </p:sp>
+      <p:sp>
+        <p:nvSpPr>
+          <p:cNvPr id="7" name="Rounded Rectangle 6"/>
+          <p:cNvSpPr/>
+          <p:nvPr/>
+        </p:nvSpPr>
+        <p:spPr>
+          <a:xfrm>
+            <a:off x="7132320" y="2834640"/>
+            <a:ext cx="4389120" cy="960120"/>
+          </a:xfrm>
+          <a:prstGeom prst="roundRect">
+            <a:avLst>
+              <a:gd name="adj" fmla="val 8000"/>
+            </a:avLst>
+          </a:prstGeom>
+          <a:solidFill>
+            <a:srgbClr val="F2F2F2"/>
+          </a:solidFill>
+          <a:ln>
+            <a:noFill/>
+          </a:ln>
+          <a:effectLst/>
+        </p:spPr>
+        <p:style>
+          <a:lnRef idx="1">
+            <a:schemeClr val="accent1"/>
+          </a:lnRef>
+          <a:fillRef idx="3">
+            <a:schemeClr val="accent1"/>
+          </a:fillRef>
+          <a:effectRef idx="2">
+            <a:schemeClr val="accent1"/>
+          </a:effectRef>
+          <a:fontRef idx="minor">
+            <a:schemeClr val="lt1"/>
+          </a:fontRef>
+        </p:style>
+        <p:txBody>
+          <a:bodyPr rtlCol="0" anchor="ctr" wrap="square" lIns="137160" rIns="137160"/>
+          <a:lstStyle/>
+          <a:p>
+            <a:pPr algn="ctr"/>
+            <a:r>
+              <a:rPr sz="2600" b="1">
+                <a:solidFill>
+                  <a:srgbClr val="1F4E79"/>
+                </a:solidFill>
+                <a:latin typeface="Calibri"/>
+              </a:rPr>
+              <a:t>I = 0,422</a:t>
+            </a:r>
+          </a:p>
+          <a:p>
+            <a:pPr algn="ctr"/>
+            <a:r>
+              <a:rPr sz="1200">
+                <a:solidFill>
+                  <a:srgbClr val="595959"/>
+                </a:solidFill>
+                <a:latin typeface="Calibri"/>
+              </a:rPr>
+              <a:t>Moran's I — taxa de furto (moderada)</a:t>
+            </a:r>
+          </a:p>
+        </p:txBody>
+      </p:sp>
+      <p:sp>
+        <p:nvSpPr>
+          <p:cNvPr id="8" name="Rounded Rectangle 7"/>
+          <p:cNvSpPr/>
+          <p:nvPr/>
+        </p:nvSpPr>
+        <p:spPr>
+          <a:xfrm>
+            <a:off x="7132320" y="3931920"/>
+            <a:ext cx="4389120" cy="960120"/>
+          </a:xfrm>
+          <a:prstGeom prst="roundRect">
+            <a:avLst>
+              <a:gd name="adj" fmla="val 8000"/>
+            </a:avLst>
+          </a:prstGeom>
+          <a:solidFill>
+            <a:srgbClr val="F2F2F2"/>
+          </a:solidFill>
+          <a:ln>
+            <a:noFill/>
+          </a:ln>
+          <a:effectLst/>
+        </p:spPr>
+        <p:style>
+          <a:lnRef idx="1">
+            <a:schemeClr val="accent1"/>
+          </a:lnRef>
+          <a:fillRef idx="3">
+            <a:schemeClr val="accent1"/>
+          </a:fillRef>
+          <a:effectRef idx="2">
+            <a:schemeClr val="accent1"/>
+          </a:effectRef>
+          <a:fontRef idx="minor">
+            <a:schemeClr val="lt1"/>
+          </a:fontRef>
+        </p:style>
+        <p:txBody>
+          <a:bodyPr rtlCol="0" anchor="ctr" wrap="square" lIns="137160" rIns="137160"/>
+          <a:lstStyle/>
+          <a:p>
+            <a:pPr algn="ctr"/>
+            <a:r>
+              <a:rPr sz="2600" b="1">
+                <a:solidFill>
+                  <a:srgbClr val="1F4E79"/>
+                </a:solidFill>
+                <a:latin typeface="Calibri"/>
+              </a:rPr>
+              <a:t>I = 0,181</a:t>
+            </a:r>
+          </a:p>
+          <a:p>
+            <a:pPr algn="ctr"/>
+            <a:r>
+              <a:rPr sz="1200">
+                <a:solidFill>
+                  <a:srgbClr val="595959"/>
+                </a:solidFill>
+                <a:latin typeface="Calibri"/>
+              </a:rPr>
+              <a:t>Moran's I — lesão corporal (fraca)</a:t>
+            </a:r>
+          </a:p>
+        </p:txBody>
+      </p:sp>
+      <p:sp>
+        <p:nvSpPr>
+          <p:cNvPr id="9" name="TextBox 8"/>
+          <p:cNvSpPr txBox="1"/>
+          <p:nvPr/>
+        </p:nvSpPr>
+        <p:spPr>
+          <a:xfrm>
+            <a:off x="7132320" y="5074920"/>
+            <a:ext cx="4389120" cy="1188720"/>
+          </a:xfrm>
+          <a:prstGeom prst="rect">
+            <a:avLst/>
+          </a:prstGeom>
+          <a:noFill/>
+        </p:spPr>
+        <p:txBody>
+          <a:bodyPr wrap="square" anchor="t">
+            <a:spAutoFit/>
+          </a:bodyPr>
+          <a:lstStyle/>
+          <a:p>
+            <a:pPr algn="l">
+              <a:lnSpc>
+                <a:spcPct val="115000"/>
+              </a:lnSpc>
+            </a:pPr>
+            <a:r>
+              <a:rPr sz="1300" b="0" i="0">
+                <a:solidFill>
+                  <a:srgbClr val="595959"/>
+                </a:solidFill>
+                <a:latin typeface="Calibri"/>
+              </a:rPr>
+              <a:t>LISA (furto): 36 municípios em cluster Alto-Alto ao longo do litoral (36% litorâneos/turísticos) e 45 Baixo-Baixo no oeste/centro-sul — todos significativos a p = 0,001 (999 permutações).</a:t>
+            </a:r>
+          </a:p>
+        </p:txBody>
+      </p:sp>
+      <p:sp>
+        <p:nvSpPr>
+          <p:cNvPr id="10" name="TextBox 9"/>
+          <p:cNvSpPr txBox="1"/>
+          <p:nvPr/>
+        </p:nvSpPr>
+        <p:spPr>
+          <a:xfrm>
+            <a:off x="548640" y="6510528"/>
+            <a:ext cx="7315200" cy="274320"/>
+          </a:xfrm>
+          <a:prstGeom prst="rect">
+            <a:avLst/>
+          </a:prstGeom>
+          <a:noFill/>
+        </p:spPr>
+        <p:txBody>
+          <a:bodyPr wrap="square" anchor="t">
+            <a:spAutoFit/>
+          </a:bodyPr>
+          <a:lstStyle/>
+          <a:p>
+            <a:pPr algn="l">
+              <a:lnSpc>
+                <a:spcPct val="115000"/>
+              </a:lnSpc>
+            </a:pPr>
+            <a:r>
+              <a:rPr sz="1000" b="0" i="0">
+                <a:solidFill>
+                  <a:srgbClr val="595959"/>
+                </a:solidFill>
+                <a:latin typeface="Calibri"/>
+              </a:rPr>
+              <a:t>Furto, Renda e Território — UFABC</a:t>
+            </a:r>
+          </a:p>
+        </p:txBody>
+      </p:sp>
+      <p:sp>
+        <p:nvSpPr>
+          <p:cNvPr id="11" name="TextBox 10"/>
+          <p:cNvSpPr txBox="1"/>
+          <p:nvPr/>
+        </p:nvSpPr>
+        <p:spPr>
+          <a:xfrm>
+            <a:off x="10972800" y="6510528"/>
+            <a:ext cx="731520" cy="274320"/>
+          </a:xfrm>
+          <a:prstGeom prst="rect">
+            <a:avLst/>
+          </a:prstGeom>
+          <a:noFill/>
+        </p:spPr>
+        <p:txBody>
+          <a:bodyPr wrap="square" anchor="t">
+            <a:spAutoFit/>
+          </a:bodyPr>
+          <a:lstStyle/>
+          <a:p>
+            <a:pPr algn="r">
+              <a:lnSpc>
+                <a:spcPct val="115000"/>
+              </a:lnSpc>
+            </a:pPr>
+            <a:r>
+              <a:rPr sz="1000" b="0" i="0">
+                <a:solidFill>
+                  <a:srgbClr val="595959"/>
+                </a:solidFill>
+                <a:latin typeface="Calibri"/>
+              </a:rPr>
+              <a:t>6</a:t>
+            </a:r>
+          </a:p>
+        </p:txBody>
+      </p:sp>
+    </p:spTree>
+  </p:cSld>
+  <p:clrMapOvr>
+    <a:masterClrMapping/>
+  </p:clrMapOvr>
+</p:sld>
+</file>
+
+<file path=ppt/slides/slide7.xml><?xml version="1.0" encoding="utf-8"?>
+<p:sld xmlns:a="http://schemas.openxmlformats.org/drawingml/2006/main" xmlns:p="http://schemas.openxmlformats.org/presentationml/2006/main" xmlns:r="http://schemas.openxmlformats.org/officeDocument/2006/relationships">
+  <p:cSld>
+    <p:bg>
+      <p:bgPr>
+        <a:solidFill>
+          <a:srgbClr val="FFFFFF"/>
+        </a:solidFill>
+        <a:effectLst/>
+      </p:bgPr>
+    </p:bg>
+    <p:spTree>
+      <p:nvGrpSpPr>
+        <p:cNvPr id="1" name=""/>
+        <p:cNvGrpSpPr/>
+        <p:nvPr/>
+      </p:nvGrpSpPr>
+      <p:grpSpPr/>
+      <p:sp>
+        <p:nvSpPr>
+          <p:cNvPr id="2" name="TextBox 1"/>
+          <p:cNvSpPr txBox="1"/>
+          <p:nvPr/>
+        </p:nvSpPr>
+        <p:spPr>
+          <a:xfrm>
+            <a:off x="548640" y="320040"/>
+            <a:ext cx="7315200" cy="365760"/>
+          </a:xfrm>
+          <a:prstGeom prst="rect">
+            <a:avLst/>
+          </a:prstGeom>
+          <a:noFill/>
+        </p:spPr>
+        <p:txBody>
+          <a:bodyPr wrap="square" anchor="t">
+            <a:spAutoFit/>
+          </a:bodyPr>
+          <a:lstStyle/>
+          <a:p>
+            <a:pPr algn="l">
+              <a:lnSpc>
+                <a:spcPct val="115000"/>
+              </a:lnSpc>
+            </a:pPr>
+            <a:r>
+              <a:rPr sz="1300" b="1" i="0">
+                <a:solidFill>
+                  <a:srgbClr val="1F4E79"/>
+                </a:solidFill>
+                <a:latin typeface="Calibri"/>
+              </a:rPr>
+              <a:t>DESENVOLVIMENTO E RESULTADOS</a:t>
+            </a:r>
+          </a:p>
+        </p:txBody>
+      </p:sp>
+      <p:sp>
+        <p:nvSpPr>
+          <p:cNvPr id="3" name="TextBox 2"/>
+          <p:cNvSpPr txBox="1"/>
+          <p:nvPr/>
+        </p:nvSpPr>
+        <p:spPr>
+          <a:xfrm>
+            <a:off x="548640" y="594360"/>
+            <a:ext cx="11064240" cy="822960"/>
+          </a:xfrm>
+          <a:prstGeom prst="rect">
+            <a:avLst/>
+          </a:prstGeom>
+          <a:noFill/>
+        </p:spPr>
+        <p:txBody>
+          <a:bodyPr wrap="square" anchor="t">
+            <a:spAutoFit/>
+          </a:bodyPr>
+          <a:lstStyle/>
+          <a:p>
+            <a:pPr algn="l">
+              <a:lnSpc>
+                <a:spcPct val="115000"/>
+              </a:lnSpc>
+            </a:pPr>
+            <a:r>
+              <a:rPr sz="3000" b="1" i="0">
+                <a:solidFill>
+                  <a:srgbClr val="1A1A1A"/>
+                </a:solidFill>
+                <a:latin typeface="Calibri"/>
+              </a:rPr>
+              <a:t>Regressão linear clássica: renda explica pouco sozinha</a:t>
+            </a:r>
+          </a:p>
+        </p:txBody>
+      </p:sp>
+      <p:sp>
+        <p:nvSpPr>
+          <p:cNvPr id="4" name="Rectangle 3"/>
+          <p:cNvSpPr/>
+          <p:nvPr/>
+        </p:nvSpPr>
+        <p:spPr>
+          <a:xfrm>
+            <a:off x="548640" y="1325880"/>
+            <a:ext cx="11064240" cy="27940"/>
+          </a:xfrm>
+          <a:prstGeom prst="rect">
+            <a:avLst/>
+          </a:prstGeom>
+          <a:solidFill>
+            <a:srgbClr val="1F4E79"/>
+          </a:solidFill>
+          <a:ln>
+            <a:noFill/>
+          </a:ln>
+          <a:effectLst/>
+        </p:spPr>
+        <p:style>
+          <a:lnRef idx="1">
+            <a:schemeClr val="accent1"/>
+          </a:lnRef>
+          <a:fillRef idx="3">
+            <a:schemeClr val="accent1"/>
+          </a:fillRef>
+          <a:effectRef idx="2">
+            <a:schemeClr val="accent1"/>
+          </a:effectRef>
+          <a:fontRef idx="minor">
+            <a:schemeClr val="lt1"/>
+          </a:fontRef>
+        </p:style>
+        <p:txBody>
+          <a:bodyPr rtlCol="0" anchor="ctr"/>
+          <a:lstStyle/>
+          <a:p>
+            <a:pPr algn="ctr"/>
+          </a:p>
+        </p:txBody>
+      </p:sp>
+      <p:pic>
+        <p:nvPicPr>
+          <p:cNvPr id="5" name="Picture 4" descr="reg_multipla.png"/>
+          <p:cNvPicPr>
+            <a:picLocks noChangeAspect="1"/>
+          </p:cNvPicPr>
+          <p:nvPr/>
+        </p:nvPicPr>
+        <p:blipFill>
+          <a:blip r:embed="rId2"/>
+          <a:stretch>
+            <a:fillRect/>
+          </a:stretch>
+        </p:blipFill>
+        <p:spPr>
+          <a:xfrm>
+            <a:off x="548640" y="1844040"/>
+            <a:ext cx="6400800" cy="4267200"/>
+          </a:xfrm>
+          <a:prstGeom prst="rect">
+            <a:avLst/>
+          </a:prstGeom>
+        </p:spPr>
+      </p:pic>
+      <p:sp>
+        <p:nvSpPr>
+          <p:cNvPr id="6" name="TextBox 5"/>
+          <p:cNvSpPr txBox="1"/>
+          <p:nvPr/>
+        </p:nvSpPr>
+        <p:spPr>
+          <a:xfrm>
+            <a:off x="7223760" y="1783080"/>
+            <a:ext cx="4297680" cy="2926080"/>
           </a:xfrm>
           <a:prstGeom prst="rect">
             <a:avLst/>
@@ -7695,19 +8890,930 @@
           </a:bodyPr>
           <a:lstStyle/>
           <a:p>
+            <a:pPr>
+              <a:lnSpc>
+                <a:spcPct val="115000"/>
+              </a:lnSpc>
+              <a:spcAft>
+                <a:spcPts val="1400"/>
+              </a:spcAft>
+            </a:pPr>
+            <a:r>
+              <a:rPr sz="1400">
+                <a:solidFill>
+                  <a:srgbClr val="333333"/>
+                </a:solidFill>
+                <a:latin typeface="Calibri"/>
+              </a:rPr>
+              <a:t>—  Simples: taxa = 0,971 + 0,00247·renda   R² = 0,129</a:t>
+            </a:r>
+          </a:p>
+          <a:p>
+            <a:pPr>
+              <a:lnSpc>
+                <a:spcPct val="115000"/>
+              </a:lnSpc>
+              <a:spcAft>
+                <a:spcPts val="1400"/>
+              </a:spcAft>
+            </a:pPr>
+            <a:r>
+              <a:rPr sz="1400">
+                <a:solidFill>
+                  <a:srgbClr val="333333"/>
+                </a:solidFill>
+                <a:latin typeface="Calibri"/>
+              </a:rPr>
+              <a:t>—  Com litoral: taxa = 1,036 + 0,00233·renda + 10,969·litoral   R² = 0,357</a:t>
+            </a:r>
+          </a:p>
+          <a:p>
+            <a:pPr>
+              <a:lnSpc>
+                <a:spcPct val="115000"/>
+              </a:lnSpc>
+              <a:spcAft>
+                <a:spcPts val="1400"/>
+              </a:spcAft>
+            </a:pPr>
+            <a:r>
+              <a:rPr sz="1400">
+                <a:solidFill>
+                  <a:srgbClr val="333333"/>
+                </a:solidFill>
+                <a:latin typeface="Calibri"/>
+              </a:rPr>
+              <a:t>—  Litoral soma ~11 furtos/1.000 hab., equivalente a
++R$4.700 de renda.</a:t>
+            </a:r>
+          </a:p>
+        </p:txBody>
+      </p:sp>
+      <p:sp>
+        <p:nvSpPr>
+          <p:cNvPr id="7" name="TextBox 6"/>
+          <p:cNvSpPr txBox="1"/>
+          <p:nvPr/>
+        </p:nvSpPr>
+        <p:spPr>
+          <a:xfrm>
+            <a:off x="7223760" y="4892040"/>
+            <a:ext cx="4297680" cy="1280160"/>
+          </a:xfrm>
+          <a:prstGeom prst="rect">
+            <a:avLst/>
+          </a:prstGeom>
+          <a:noFill/>
+        </p:spPr>
+        <p:txBody>
+          <a:bodyPr wrap="square" anchor="t">
+            <a:spAutoFit/>
+          </a:bodyPr>
+          <a:lstStyle/>
+          <a:p>
+            <a:pPr algn="l">
+              <a:lnSpc>
+                <a:spcPct val="115000"/>
+              </a:lnSpc>
+            </a:pPr>
+            <a:r>
+              <a:rPr sz="1300" b="0" i="0">
+                <a:solidFill>
+                  <a:srgbClr val="595959"/>
+                </a:solidFill>
+                <a:latin typeface="Calibri"/>
+              </a:rPr>
+              <a:t>Resíduos não normais e heterocedásticos (Shapiro-Wilk, ncvTest</a:t>
+            </a:r>
+          </a:p>
+          <a:p>
+            <a:pPr algn="l">
+              <a:lnSpc>
+                <a:spcPct val="115000"/>
+              </a:lnSpc>
+            </a:pPr>
+            <a:r>
+              <a:rPr sz="1300" b="0" i="0">
+                <a:solidFill>
+                  <a:srgbClr val="595959"/>
+                </a:solidFill>
+                <a:latin typeface="Calibri"/>
+              </a:rPr>
+              <a:t>p&lt;0,001) e Moran's I dos resíduos = 0,38 → estrutura espacial</a:t>
+            </a:r>
+          </a:p>
+          <a:p>
+            <a:pPr algn="l">
+              <a:lnSpc>
+                <a:spcPct val="115000"/>
+              </a:lnSpc>
+            </a:pPr>
+            <a:r>
+              <a:rPr sz="1300" b="0" i="0">
+                <a:solidFill>
+                  <a:srgbClr val="595959"/>
+                </a:solidFill>
+                <a:latin typeface="Calibri"/>
+              </a:rPr>
+              <a:t>não explicada motiva os modelos espaciais.</a:t>
+            </a:r>
+          </a:p>
+        </p:txBody>
+      </p:sp>
+      <p:sp>
+        <p:nvSpPr>
+          <p:cNvPr id="8" name="TextBox 7"/>
+          <p:cNvSpPr txBox="1"/>
+          <p:nvPr/>
+        </p:nvSpPr>
+        <p:spPr>
+          <a:xfrm>
+            <a:off x="548640" y="6510528"/>
+            <a:ext cx="7315200" cy="274320"/>
+          </a:xfrm>
+          <a:prstGeom prst="rect">
+            <a:avLst/>
+          </a:prstGeom>
+          <a:noFill/>
+        </p:spPr>
+        <p:txBody>
+          <a:bodyPr wrap="square" anchor="t">
+            <a:spAutoFit/>
+          </a:bodyPr>
+          <a:lstStyle/>
+          <a:p>
+            <a:pPr algn="l">
+              <a:lnSpc>
+                <a:spcPct val="115000"/>
+              </a:lnSpc>
+            </a:pPr>
+            <a:r>
+              <a:rPr sz="1000" b="0" i="0">
+                <a:solidFill>
+                  <a:srgbClr val="595959"/>
+                </a:solidFill>
+                <a:latin typeface="Calibri"/>
+              </a:rPr>
+              <a:t>Furto, Renda e Território — UFABC</a:t>
+            </a:r>
+          </a:p>
+        </p:txBody>
+      </p:sp>
+      <p:sp>
+        <p:nvSpPr>
+          <p:cNvPr id="9" name="TextBox 8"/>
+          <p:cNvSpPr txBox="1"/>
+          <p:nvPr/>
+        </p:nvSpPr>
+        <p:spPr>
+          <a:xfrm>
+            <a:off x="10972800" y="6510528"/>
+            <a:ext cx="731520" cy="274320"/>
+          </a:xfrm>
+          <a:prstGeom prst="rect">
+            <a:avLst/>
+          </a:prstGeom>
+          <a:noFill/>
+        </p:spPr>
+        <p:txBody>
+          <a:bodyPr wrap="square" anchor="t">
+            <a:spAutoFit/>
+          </a:bodyPr>
+          <a:lstStyle/>
+          <a:p>
             <a:pPr algn="r">
-              <a:spcBef>
-                <a:spcPts val="0"/>
-              </a:spcBef>
-            </a:pPr>
-            <a:r>
-              <a:rPr sz="1200" b="0" i="0">
-                <a:solidFill>
-                  <a:srgbClr val="5B6B7C"/>
-                </a:solidFill>
-                <a:latin typeface="Arial Narrow"/>
-              </a:rPr>
-              <a:t>08 · E SE?</a:t>
+              <a:lnSpc>
+                <a:spcPct val="115000"/>
+              </a:lnSpc>
+            </a:pPr>
+            <a:r>
+              <a:rPr sz="1000" b="0" i="0">
+                <a:solidFill>
+                  <a:srgbClr val="595959"/>
+                </a:solidFill>
+                <a:latin typeface="Calibri"/>
+              </a:rPr>
+              <a:t>7</a:t>
+            </a:r>
+          </a:p>
+        </p:txBody>
+      </p:sp>
+    </p:spTree>
+  </p:cSld>
+  <p:clrMapOvr>
+    <a:masterClrMapping/>
+  </p:clrMapOvr>
+</p:sld>
+</file>
+
+<file path=ppt/slides/slide8.xml><?xml version="1.0" encoding="utf-8"?>
+<p:sld xmlns:a="http://schemas.openxmlformats.org/drawingml/2006/main" xmlns:p="http://schemas.openxmlformats.org/presentationml/2006/main" xmlns:r="http://schemas.openxmlformats.org/officeDocument/2006/relationships">
+  <p:cSld>
+    <p:bg>
+      <p:bgPr>
+        <a:solidFill>
+          <a:srgbClr val="FFFFFF"/>
+        </a:solidFill>
+        <a:effectLst/>
+      </p:bgPr>
+    </p:bg>
+    <p:spTree>
+      <p:nvGrpSpPr>
+        <p:cNvPr id="1" name=""/>
+        <p:cNvGrpSpPr/>
+        <p:nvPr/>
+      </p:nvGrpSpPr>
+      <p:grpSpPr/>
+      <p:sp>
+        <p:nvSpPr>
+          <p:cNvPr id="2" name="TextBox 1"/>
+          <p:cNvSpPr txBox="1"/>
+          <p:nvPr/>
+        </p:nvSpPr>
+        <p:spPr>
+          <a:xfrm>
+            <a:off x="548640" y="320040"/>
+            <a:ext cx="7315200" cy="365760"/>
+          </a:xfrm>
+          <a:prstGeom prst="rect">
+            <a:avLst/>
+          </a:prstGeom>
+          <a:noFill/>
+        </p:spPr>
+        <p:txBody>
+          <a:bodyPr wrap="square" anchor="t">
+            <a:spAutoFit/>
+          </a:bodyPr>
+          <a:lstStyle/>
+          <a:p>
+            <a:pPr algn="l">
+              <a:lnSpc>
+                <a:spcPct val="115000"/>
+              </a:lnSpc>
+            </a:pPr>
+            <a:r>
+              <a:rPr sz="1300" b="1" i="0">
+                <a:solidFill>
+                  <a:srgbClr val="1F4E79"/>
+                </a:solidFill>
+                <a:latin typeface="Calibri"/>
+              </a:rPr>
+              <a:t>DESENVOLVIMENTO E RESULTADOS</a:t>
+            </a:r>
+          </a:p>
+        </p:txBody>
+      </p:sp>
+      <p:sp>
+        <p:nvSpPr>
+          <p:cNvPr id="3" name="TextBox 2"/>
+          <p:cNvSpPr txBox="1"/>
+          <p:nvPr/>
+        </p:nvSpPr>
+        <p:spPr>
+          <a:xfrm>
+            <a:off x="548640" y="594360"/>
+            <a:ext cx="11064240" cy="822960"/>
+          </a:xfrm>
+          <a:prstGeom prst="rect">
+            <a:avLst/>
+          </a:prstGeom>
+          <a:noFill/>
+        </p:spPr>
+        <p:txBody>
+          <a:bodyPr wrap="square" anchor="t">
+            <a:spAutoFit/>
+          </a:bodyPr>
+          <a:lstStyle/>
+          <a:p>
+            <a:pPr algn="l">
+              <a:lnSpc>
+                <a:spcPct val="115000"/>
+              </a:lnSpc>
+            </a:pPr>
+            <a:r>
+              <a:rPr sz="3000" b="1" i="0">
+                <a:solidFill>
+                  <a:srgbClr val="1A1A1A"/>
+                </a:solidFill>
+                <a:latin typeface="Calibri"/>
+              </a:rPr>
+              <a:t>Regressão espacial global: spatial error vence</a:t>
+            </a:r>
+          </a:p>
+        </p:txBody>
+      </p:sp>
+      <p:sp>
+        <p:nvSpPr>
+          <p:cNvPr id="4" name="Rectangle 3"/>
+          <p:cNvSpPr/>
+          <p:nvPr/>
+        </p:nvSpPr>
+        <p:spPr>
+          <a:xfrm>
+            <a:off x="548640" y="1325880"/>
+            <a:ext cx="11064240" cy="27940"/>
+          </a:xfrm>
+          <a:prstGeom prst="rect">
+            <a:avLst/>
+          </a:prstGeom>
+          <a:solidFill>
+            <a:srgbClr val="1F4E79"/>
+          </a:solidFill>
+          <a:ln>
+            <a:noFill/>
+          </a:ln>
+          <a:effectLst/>
+        </p:spPr>
+        <p:style>
+          <a:lnRef idx="1">
+            <a:schemeClr val="accent1"/>
+          </a:lnRef>
+          <a:fillRef idx="3">
+            <a:schemeClr val="accent1"/>
+          </a:fillRef>
+          <a:effectRef idx="2">
+            <a:schemeClr val="accent1"/>
+          </a:effectRef>
+          <a:fontRef idx="minor">
+            <a:schemeClr val="lt1"/>
+          </a:fontRef>
+        </p:style>
+        <p:txBody>
+          <a:bodyPr rtlCol="0" anchor="ctr"/>
+          <a:lstStyle/>
+          <a:p>
+            <a:pPr algn="ctr"/>
+          </a:p>
+        </p:txBody>
+      </p:sp>
+      <p:sp>
+        <p:nvSpPr>
+          <p:cNvPr id="5" name="TextBox 4"/>
+          <p:cNvSpPr txBox="1"/>
+          <p:nvPr/>
+        </p:nvSpPr>
+        <p:spPr>
+          <a:xfrm>
+            <a:off x="548640" y="1737360"/>
+            <a:ext cx="5486400" cy="3291840"/>
+          </a:xfrm>
+          <a:prstGeom prst="rect">
+            <a:avLst/>
+          </a:prstGeom>
+          <a:noFill/>
+        </p:spPr>
+        <p:txBody>
+          <a:bodyPr wrap="square">
+            <a:spAutoFit/>
+          </a:bodyPr>
+          <a:lstStyle/>
+          <a:p>
+            <a:pPr>
+              <a:lnSpc>
+                <a:spcPct val="115000"/>
+              </a:lnSpc>
+              <a:spcAft>
+                <a:spcPts val="1600"/>
+              </a:spcAft>
+            </a:pPr>
+            <a:r>
+              <a:rPr sz="1600">
+                <a:solidFill>
+                  <a:srgbClr val="333333"/>
+                </a:solidFill>
+                <a:latin typeface="Calibri"/>
+              </a:rPr>
+              <a:t>—  Testes de Lagrange (robustos): LM error significativo (p&lt;0,001),
+LM lag não significativo (p=0,267) → spatial error é o modelo indicado.</a:t>
+            </a:r>
+          </a:p>
+          <a:p>
+            <a:pPr>
+              <a:lnSpc>
+                <a:spcPct val="115000"/>
+              </a:lnSpc>
+              <a:spcAft>
+                <a:spcPts val="1600"/>
+              </a:spcAft>
+            </a:pPr>
+            <a:r>
+              <a:rPr sz="1600">
+                <a:solidFill>
+                  <a:srgbClr val="333333"/>
+                </a:solidFill>
+                <a:latin typeface="Calibri"/>
+              </a:rPr>
+              <a:t>—  λ = 0,588, R² = 0,392, AIC = 3220,6.</a:t>
+            </a:r>
+          </a:p>
+          <a:p>
+            <a:pPr>
+              <a:lnSpc>
+                <a:spcPct val="115000"/>
+              </a:lnSpc>
+              <a:spcAft>
+                <a:spcPts val="1600"/>
+              </a:spcAft>
+            </a:pPr>
+            <a:r>
+              <a:rPr sz="1600">
+                <a:solidFill>
+                  <a:srgbClr val="333333"/>
+                </a:solidFill>
+                <a:latin typeface="Calibri"/>
+              </a:rPr>
+              <a:t>—  Moran's I dos resíduos cai de 0,38 para −0,03 — autocorrelação
+espacial praticamente eliminada.</a:t>
+            </a:r>
+          </a:p>
+        </p:txBody>
+      </p:sp>
+      <p:sp>
+        <p:nvSpPr>
+          <p:cNvPr id="6" name="Rounded Rectangle 5"/>
+          <p:cNvSpPr/>
+          <p:nvPr/>
+        </p:nvSpPr>
+        <p:spPr>
+          <a:xfrm>
+            <a:off x="548640" y="5029200"/>
+            <a:ext cx="5486400" cy="1188720"/>
+          </a:xfrm>
+          <a:prstGeom prst="roundRect">
+            <a:avLst>
+              <a:gd name="adj" fmla="val 8000"/>
+            </a:avLst>
+          </a:prstGeom>
+          <a:solidFill>
+            <a:srgbClr val="F2F2F2"/>
+          </a:solidFill>
+          <a:ln>
+            <a:noFill/>
+          </a:ln>
+          <a:effectLst/>
+        </p:spPr>
+        <p:style>
+          <a:lnRef idx="1">
+            <a:schemeClr val="accent1"/>
+          </a:lnRef>
+          <a:fillRef idx="3">
+            <a:schemeClr val="accent1"/>
+          </a:fillRef>
+          <a:effectRef idx="2">
+            <a:schemeClr val="accent1"/>
+          </a:effectRef>
+          <a:fontRef idx="minor">
+            <a:schemeClr val="lt1"/>
+          </a:fontRef>
+        </p:style>
+        <p:txBody>
+          <a:bodyPr rtlCol="0" anchor="ctr" wrap="square" lIns="182880" rIns="182880"/>
+          <a:lstStyle/>
+          <a:p>
+            <a:pPr algn="ctr"/>
+            <a:r>
+              <a:rPr sz="1300" i="1">
+                <a:solidFill>
+                  <a:srgbClr val="595959"/>
+                </a:solidFill>
+              </a:rPr>
+              <a:t>Leitura: a dependência espacial está no erro — coerente com uma variável omitida e espacialmente agrupada, como a condição litorânea.</a:t>
+            </a:r>
+          </a:p>
+        </p:txBody>
+      </p:sp>
+      <p:pic>
+        <p:nvPicPr>
+          <p:cNvPr id="7" name="Picture 6" descr="reg_esp_residuos_ols.png"/>
+          <p:cNvPicPr>
+            <a:picLocks noChangeAspect="1"/>
+          </p:cNvPicPr>
+          <p:nvPr/>
+        </p:nvPicPr>
+        <p:blipFill>
+          <a:blip r:embed="rId2"/>
+          <a:stretch>
+            <a:fillRect/>
+          </a:stretch>
+        </p:blipFill>
+        <p:spPr>
+          <a:xfrm>
+            <a:off x="6389370" y="1691640"/>
+            <a:ext cx="5143500" cy="4572000"/>
+          </a:xfrm>
+          <a:prstGeom prst="rect">
+            <a:avLst/>
+          </a:prstGeom>
+        </p:spPr>
+      </p:pic>
+      <p:sp>
+        <p:nvSpPr>
+          <p:cNvPr id="8" name="TextBox 7"/>
+          <p:cNvSpPr txBox="1"/>
+          <p:nvPr/>
+        </p:nvSpPr>
+        <p:spPr>
+          <a:xfrm>
+            <a:off x="548640" y="6510528"/>
+            <a:ext cx="7315200" cy="274320"/>
+          </a:xfrm>
+          <a:prstGeom prst="rect">
+            <a:avLst/>
+          </a:prstGeom>
+          <a:noFill/>
+        </p:spPr>
+        <p:txBody>
+          <a:bodyPr wrap="square" anchor="t">
+            <a:spAutoFit/>
+          </a:bodyPr>
+          <a:lstStyle/>
+          <a:p>
+            <a:pPr algn="l">
+              <a:lnSpc>
+                <a:spcPct val="115000"/>
+              </a:lnSpc>
+            </a:pPr>
+            <a:r>
+              <a:rPr sz="1000" b="0" i="0">
+                <a:solidFill>
+                  <a:srgbClr val="595959"/>
+                </a:solidFill>
+                <a:latin typeface="Calibri"/>
+              </a:rPr>
+              <a:t>Furto, Renda e Território — UFABC</a:t>
+            </a:r>
+          </a:p>
+        </p:txBody>
+      </p:sp>
+      <p:sp>
+        <p:nvSpPr>
+          <p:cNvPr id="9" name="TextBox 8"/>
+          <p:cNvSpPr txBox="1"/>
+          <p:nvPr/>
+        </p:nvSpPr>
+        <p:spPr>
+          <a:xfrm>
+            <a:off x="10972800" y="6510528"/>
+            <a:ext cx="731520" cy="274320"/>
+          </a:xfrm>
+          <a:prstGeom prst="rect">
+            <a:avLst/>
+          </a:prstGeom>
+          <a:noFill/>
+        </p:spPr>
+        <p:txBody>
+          <a:bodyPr wrap="square" anchor="t">
+            <a:spAutoFit/>
+          </a:bodyPr>
+          <a:lstStyle/>
+          <a:p>
+            <a:pPr algn="r">
+              <a:lnSpc>
+                <a:spcPct val="115000"/>
+              </a:lnSpc>
+            </a:pPr>
+            <a:r>
+              <a:rPr sz="1000" b="0" i="0">
+                <a:solidFill>
+                  <a:srgbClr val="595959"/>
+                </a:solidFill>
+                <a:latin typeface="Calibri"/>
+              </a:rPr>
+              <a:t>8</a:t>
+            </a:r>
+          </a:p>
+        </p:txBody>
+      </p:sp>
+    </p:spTree>
+  </p:cSld>
+  <p:clrMapOvr>
+    <a:masterClrMapping/>
+  </p:clrMapOvr>
+</p:sld>
+</file>
+
+<file path=ppt/slides/slide9.xml><?xml version="1.0" encoding="utf-8"?>
+<p:sld xmlns:a="http://schemas.openxmlformats.org/drawingml/2006/main" xmlns:p="http://schemas.openxmlformats.org/presentationml/2006/main" xmlns:r="http://schemas.openxmlformats.org/officeDocument/2006/relationships">
+  <p:cSld>
+    <p:bg>
+      <p:bgPr>
+        <a:solidFill>
+          <a:srgbClr val="FFFFFF"/>
+        </a:solidFill>
+        <a:effectLst/>
+      </p:bgPr>
+    </p:bg>
+    <p:spTree>
+      <p:nvGrpSpPr>
+        <p:cNvPr id="1" name=""/>
+        <p:cNvGrpSpPr/>
+        <p:nvPr/>
+      </p:nvGrpSpPr>
+      <p:grpSpPr/>
+      <p:sp>
+        <p:nvSpPr>
+          <p:cNvPr id="2" name="TextBox 1"/>
+          <p:cNvSpPr txBox="1"/>
+          <p:nvPr/>
+        </p:nvSpPr>
+        <p:spPr>
+          <a:xfrm>
+            <a:off x="548640" y="320040"/>
+            <a:ext cx="7315200" cy="365760"/>
+          </a:xfrm>
+          <a:prstGeom prst="rect">
+            <a:avLst/>
+          </a:prstGeom>
+          <a:noFill/>
+        </p:spPr>
+        <p:txBody>
+          <a:bodyPr wrap="square" anchor="t">
+            <a:spAutoFit/>
+          </a:bodyPr>
+          <a:lstStyle/>
+          <a:p>
+            <a:pPr algn="l">
+              <a:lnSpc>
+                <a:spcPct val="115000"/>
+              </a:lnSpc>
+            </a:pPr>
+            <a:r>
+              <a:rPr sz="1300" b="1" i="0">
+                <a:solidFill>
+                  <a:srgbClr val="1F4E79"/>
+                </a:solidFill>
+                <a:latin typeface="Calibri"/>
+              </a:rPr>
+              <a:t>DESENVOLVIMENTO E RESULTADOS</a:t>
+            </a:r>
+          </a:p>
+        </p:txBody>
+      </p:sp>
+      <p:sp>
+        <p:nvSpPr>
+          <p:cNvPr id="3" name="TextBox 2"/>
+          <p:cNvSpPr txBox="1"/>
+          <p:nvPr/>
+        </p:nvSpPr>
+        <p:spPr>
+          <a:xfrm>
+            <a:off x="548640" y="594360"/>
+            <a:ext cx="11064240" cy="822960"/>
+          </a:xfrm>
+          <a:prstGeom prst="rect">
+            <a:avLst/>
+          </a:prstGeom>
+          <a:noFill/>
+        </p:spPr>
+        <p:txBody>
+          <a:bodyPr wrap="square" anchor="t">
+            <a:spAutoFit/>
+          </a:bodyPr>
+          <a:lstStyle/>
+          <a:p>
+            <a:pPr algn="l">
+              <a:lnSpc>
+                <a:spcPct val="115000"/>
+              </a:lnSpc>
+            </a:pPr>
+            <a:r>
+              <a:rPr sz="3000" b="1" i="0">
+                <a:solidFill>
+                  <a:srgbClr val="1A1A1A"/>
+                </a:solidFill>
+                <a:latin typeface="Calibri"/>
+              </a:rPr>
+              <a:t>GWR: a relação renda–furto não é fixa no espaço</a:t>
+            </a:r>
+          </a:p>
+        </p:txBody>
+      </p:sp>
+      <p:sp>
+        <p:nvSpPr>
+          <p:cNvPr id="4" name="Rectangle 3"/>
+          <p:cNvSpPr/>
+          <p:nvPr/>
+        </p:nvSpPr>
+        <p:spPr>
+          <a:xfrm>
+            <a:off x="548640" y="1325880"/>
+            <a:ext cx="11064240" cy="27940"/>
+          </a:xfrm>
+          <a:prstGeom prst="rect">
+            <a:avLst/>
+          </a:prstGeom>
+          <a:solidFill>
+            <a:srgbClr val="1F4E79"/>
+          </a:solidFill>
+          <a:ln>
+            <a:noFill/>
+          </a:ln>
+          <a:effectLst/>
+        </p:spPr>
+        <p:style>
+          <a:lnRef idx="1">
+            <a:schemeClr val="accent1"/>
+          </a:lnRef>
+          <a:fillRef idx="3">
+            <a:schemeClr val="accent1"/>
+          </a:fillRef>
+          <a:effectRef idx="2">
+            <a:schemeClr val="accent1"/>
+          </a:effectRef>
+          <a:fontRef idx="minor">
+            <a:schemeClr val="lt1"/>
+          </a:fontRef>
+        </p:style>
+        <p:txBody>
+          <a:bodyPr rtlCol="0" anchor="ctr"/>
+          <a:lstStyle/>
+          <a:p>
+            <a:pPr algn="ctr"/>
+          </a:p>
+        </p:txBody>
+      </p:sp>
+      <p:pic>
+        <p:nvPicPr>
+          <p:cNvPr id="5" name="Picture 4" descr="reg_esp_gwr_r2.png"/>
+          <p:cNvPicPr>
+            <a:picLocks noChangeAspect="1"/>
+          </p:cNvPicPr>
+          <p:nvPr/>
+        </p:nvPicPr>
+        <p:blipFill>
+          <a:blip r:embed="rId2"/>
+          <a:stretch>
+            <a:fillRect/>
+          </a:stretch>
+        </p:blipFill>
+        <p:spPr>
+          <a:xfrm>
+            <a:off x="902970" y="1691640"/>
+            <a:ext cx="5143500" cy="4572000"/>
+          </a:xfrm>
+          <a:prstGeom prst="rect">
+            <a:avLst/>
+          </a:prstGeom>
+        </p:spPr>
+      </p:pic>
+      <p:sp>
+        <p:nvSpPr>
+          <p:cNvPr id="6" name="TextBox 5"/>
+          <p:cNvSpPr txBox="1"/>
+          <p:nvPr/>
+        </p:nvSpPr>
+        <p:spPr>
+          <a:xfrm>
+            <a:off x="6675120" y="1783080"/>
+            <a:ext cx="4937760" cy="3291840"/>
+          </a:xfrm>
+          <a:prstGeom prst="rect">
+            <a:avLst/>
+          </a:prstGeom>
+          <a:noFill/>
+        </p:spPr>
+        <p:txBody>
+          <a:bodyPr wrap="square">
+            <a:spAutoFit/>
+          </a:bodyPr>
+          <a:lstStyle/>
+          <a:p>
+            <a:pPr>
+              <a:lnSpc>
+                <a:spcPct val="115000"/>
+              </a:lnSpc>
+              <a:spcAft>
+                <a:spcPts val="1400"/>
+              </a:spcAft>
+            </a:pPr>
+            <a:r>
+              <a:rPr sz="1500">
+                <a:solidFill>
+                  <a:srgbClr val="333333"/>
+                </a:solidFill>
+                <a:latin typeface="Calibri"/>
+              </a:rPr>
+              <a:t>—  Banda adaptativa (k ≈ 10 vizinhos) → R² quase-global sobe para 0,458,
+superando os modelos globais.</a:t>
+            </a:r>
+          </a:p>
+          <a:p>
+            <a:pPr>
+              <a:lnSpc>
+                <a:spcPct val="115000"/>
+              </a:lnSpc>
+              <a:spcAft>
+                <a:spcPts val="1400"/>
+              </a:spcAft>
+            </a:pPr>
+            <a:r>
+              <a:rPr sz="1500">
+                <a:solidFill>
+                  <a:srgbClr val="333333"/>
+                </a:solidFill>
+                <a:latin typeface="Calibri"/>
+              </a:rPr>
+              <a:t>—  Coeficiente local da renda varia de −0,00216 a +0,00562 pelo estado;
+significativo (|t|&gt;1,96) em 72% dos municípios.</a:t>
+            </a:r>
+          </a:p>
+          <a:p>
+            <a:pPr>
+              <a:lnSpc>
+                <a:spcPct val="115000"/>
+              </a:lnSpc>
+              <a:spcAft>
+                <a:spcPts val="1400"/>
+              </a:spcAft>
+            </a:pPr>
+            <a:r>
+              <a:rPr sz="1500">
+                <a:solidFill>
+                  <a:srgbClr val="333333"/>
+                </a:solidFill>
+                <a:latin typeface="Calibri"/>
+              </a:rPr>
+              <a:t>—  R² local varia de 0,05 a 0,64: a renda explica bem o furto no
+centro-oeste e mal no litoral e na RMSP — onde H2 prevê que
+o turismo domina.</a:t>
+            </a:r>
+          </a:p>
+        </p:txBody>
+      </p:sp>
+      <p:sp>
+        <p:nvSpPr>
+          <p:cNvPr id="7" name="TextBox 6"/>
+          <p:cNvSpPr txBox="1"/>
+          <p:nvPr/>
+        </p:nvSpPr>
+        <p:spPr>
+          <a:xfrm>
+            <a:off x="548640" y="6510528"/>
+            <a:ext cx="7315200" cy="274320"/>
+          </a:xfrm>
+          <a:prstGeom prst="rect">
+            <a:avLst/>
+          </a:prstGeom>
+          <a:noFill/>
+        </p:spPr>
+        <p:txBody>
+          <a:bodyPr wrap="square" anchor="t">
+            <a:spAutoFit/>
+          </a:bodyPr>
+          <a:lstStyle/>
+          <a:p>
+            <a:pPr algn="l">
+              <a:lnSpc>
+                <a:spcPct val="115000"/>
+              </a:lnSpc>
+            </a:pPr>
+            <a:r>
+              <a:rPr sz="1000" b="0" i="0">
+                <a:solidFill>
+                  <a:srgbClr val="595959"/>
+                </a:solidFill>
+                <a:latin typeface="Calibri"/>
+              </a:rPr>
+              <a:t>Furto, Renda e Território — UFABC</a:t>
+            </a:r>
+          </a:p>
+        </p:txBody>
+      </p:sp>
+      <p:sp>
+        <p:nvSpPr>
+          <p:cNvPr id="8" name="TextBox 7"/>
+          <p:cNvSpPr txBox="1"/>
+          <p:nvPr/>
+        </p:nvSpPr>
+        <p:spPr>
+          <a:xfrm>
+            <a:off x="10972800" y="6510528"/>
+            <a:ext cx="731520" cy="274320"/>
+          </a:xfrm>
+          <a:prstGeom prst="rect">
+            <a:avLst/>
+          </a:prstGeom>
+          <a:noFill/>
+        </p:spPr>
+        <p:txBody>
+          <a:bodyPr wrap="square" anchor="t">
+            <a:spAutoFit/>
+          </a:bodyPr>
+          <a:lstStyle/>
+          <a:p>
+            <a:pPr algn="r">
+              <a:lnSpc>
+                <a:spcPct val="115000"/>
+              </a:lnSpc>
+            </a:pPr>
+            <a:r>
+              <a:rPr sz="1000" b="0" i="0">
+                <a:solidFill>
+                  <a:srgbClr val="595959"/>
+                </a:solidFill>
+                <a:latin typeface="Calibri"/>
+              </a:rPr>
+              <a:t>9</a:t>
             </a:r>
           </a:p>
         </p:txBody>

--- a/slides/apresentacao_final.pptx
+++ b/slides/apresentacao_final.pptx
@@ -18,8 +18,6 @@
     <p:sldId id="266" r:id="rId17"/>
     <p:sldId id="267" r:id="rId18"/>
     <p:sldId id="268" r:id="rId19"/>
-    <p:sldId id="269" r:id="rId20"/>
-    <p:sldId id="270" r:id="rId21"/>
   </p:sldIdLst>
   <p:sldSz cx="12191695" cy="6858000" type="screen4x3"/>
   <p:notesSz cx="6858000" cy="9144000"/>
@@ -3162,8 +3160,8 @@
         </p:nvSpPr>
         <p:spPr>
           <a:xfrm>
-            <a:off x="822960" y="2148840"/>
-            <a:ext cx="10515600" cy="1737360"/>
+            <a:off x="822960" y="2011680"/>
+            <a:ext cx="10515600" cy="365760"/>
           </a:xfrm>
           <a:prstGeom prst="rect">
             <a:avLst/>
@@ -3182,13 +3180,13 @@
               </a:lnSpc>
             </a:pPr>
             <a:r>
-              <a:rPr sz="4400" b="1" i="0">
-                <a:solidFill>
-                  <a:srgbClr val="1F4E79"/>
+              <a:rPr sz="1300" b="1" i="0">
+                <a:solidFill>
+                  <a:srgbClr val="595959"/>
                 </a:solidFill>
                 <a:latin typeface="Calibri"/>
               </a:rPr>
-              <a:t>Furto, Renda e Território</a:t>
+              <a:t>ANÁLISE DE DADOS PARA PLANEJAMENTO TERRITORIAL • UFABC</a:t>
             </a:r>
           </a:p>
         </p:txBody>
@@ -3201,8 +3199,8 @@
         </p:nvSpPr>
         <p:spPr>
           <a:xfrm>
-            <a:off x="822960" y="3063240"/>
-            <a:ext cx="10515600" cy="914400"/>
+            <a:off x="822960" y="2423160"/>
+            <a:ext cx="10515600" cy="1005840"/>
           </a:xfrm>
           <a:prstGeom prst="rect">
             <a:avLst/>
@@ -3221,15 +3219,38 @@
               </a:lnSpc>
             </a:pPr>
             <a:r>
-              <a:rPr sz="2200" b="0" i="0">
-                <a:solidFill>
-                  <a:srgbClr val="333333"/>
+              <a:rPr sz="4400" b="1" i="0">
+                <a:solidFill>
+                  <a:srgbClr val="1F4E79"/>
                 </a:solidFill>
                 <a:latin typeface="Calibri"/>
               </a:rPr>
-              <a:t>Uma análise espacial da criminalidade patrimonial</a:t>
-            </a:r>
-          </a:p>
+              <a:t>Furto, Renda e Território</a:t>
+            </a:r>
+          </a:p>
+        </p:txBody>
+      </p:sp>
+      <p:sp>
+        <p:nvSpPr>
+          <p:cNvPr id="5" name="TextBox 4"/>
+          <p:cNvSpPr txBox="1"/>
+          <p:nvPr/>
+        </p:nvSpPr>
+        <p:spPr>
+          <a:xfrm>
+            <a:off x="822960" y="3291840"/>
+            <a:ext cx="10515600" cy="548640"/>
+          </a:xfrm>
+          <a:prstGeom prst="rect">
+            <a:avLst/>
+          </a:prstGeom>
+          <a:noFill/>
+        </p:spPr>
+        <p:txBody>
+          <a:bodyPr wrap="square" anchor="t">
+            <a:spAutoFit/>
+          </a:bodyPr>
+          <a:lstStyle/>
           <a:p>
             <a:pPr algn="l">
               <a:lnSpc>
@@ -3237,26 +3258,26 @@
               </a:lnSpc>
             </a:pPr>
             <a:r>
-              <a:rPr sz="2200" b="0" i="0">
+              <a:rPr sz="2000" b="0" i="0">
                 <a:solidFill>
                   <a:srgbClr val="333333"/>
                 </a:solidFill>
                 <a:latin typeface="Calibri"/>
               </a:rPr>
-              <a:t>nos municípios de São Paulo</a:t>
-            </a:r>
-          </a:p>
-        </p:txBody>
-      </p:sp>
-      <p:sp>
-        <p:nvSpPr>
-          <p:cNvPr id="5" name="TextBox 4"/>
+              <a:t>Uma análise espacial da criminalidade patrimonial nos municípios de São Paulo</a:t>
+            </a:r>
+          </a:p>
+        </p:txBody>
+      </p:sp>
+      <p:sp>
+        <p:nvSpPr>
+          <p:cNvPr id="6" name="TextBox 5"/>
           <p:cNvSpPr txBox="1"/>
           <p:nvPr/>
         </p:nvSpPr>
         <p:spPr>
           <a:xfrm>
-            <a:off x="822960" y="4343400"/>
+            <a:off x="822960" y="4480560"/>
             <a:ext cx="10515600" cy="457200"/>
           </a:xfrm>
           <a:prstGeom prst="rect">
@@ -3276,27 +3297,27 @@
               </a:lnSpc>
             </a:pPr>
             <a:r>
-              <a:rPr sz="1600" b="0" i="0">
+              <a:rPr sz="1500" b="0" i="0">
                 <a:solidFill>
                   <a:srgbClr val="595959"/>
                 </a:solidFill>
                 <a:latin typeface="Calibri"/>
               </a:rPr>
-              <a:t>João Vitor Oliveira   •   Julio Cesar Salvino   •   Lucas Amorim</a:t>
-            </a:r>
-          </a:p>
-        </p:txBody>
-      </p:sp>
-      <p:sp>
-        <p:nvSpPr>
-          <p:cNvPr id="6" name="TextBox 5"/>
+              <a:t>Equipe: João Vitor Oliveira, Julio Cesar Salvino, Lucas Amorim</a:t>
+            </a:r>
+          </a:p>
+        </p:txBody>
+      </p:sp>
+      <p:sp>
+        <p:nvSpPr>
+          <p:cNvPr id="7" name="TextBox 6"/>
           <p:cNvSpPr txBox="1"/>
           <p:nvPr/>
         </p:nvSpPr>
         <p:spPr>
           <a:xfrm>
-            <a:off x="822960" y="4709160"/>
-            <a:ext cx="10515600" cy="822960"/>
+            <a:off x="822960" y="4800600"/>
+            <a:ext cx="10515600" cy="457200"/>
           </a:xfrm>
           <a:prstGeom prst="rect">
             <a:avLst/>
@@ -3315,29 +3336,13 @@
               </a:lnSpc>
             </a:pPr>
             <a:r>
-              <a:rPr sz="1400" b="0" i="0">
+              <a:rPr sz="1500" b="0" i="0">
                 <a:solidFill>
                   <a:srgbClr val="595959"/>
                 </a:solidFill>
                 <a:latin typeface="Calibri"/>
               </a:rPr>
-              <a:t>Centro de Matemática, Computação e Cognição — UFABC</a:t>
-            </a:r>
-          </a:p>
-          <a:p>
-            <a:pPr algn="l">
-              <a:lnSpc>
-                <a:spcPct val="115000"/>
-              </a:lnSpc>
-            </a:pPr>
-            <a:r>
-              <a:rPr sz="1400" b="0" i="0">
-                <a:solidFill>
-                  <a:srgbClr val="595959"/>
-                </a:solidFill>
-                <a:latin typeface="Calibri"/>
-              </a:rPr>
-              <a:t>Análise de Dados para Planejamento Territorial · Orientação: Prof.ª Flávia da Fonseca Feitosa</a:t>
+              <a:t>Orientação: Prof.ª Flávia da Fonseca Feitosa</a:t>
             </a:r>
           </a:p>
         </p:txBody>
@@ -3377,7 +3382,7 @@
         <p:spPr>
           <a:xfrm>
             <a:off x="548640" y="320040"/>
-            <a:ext cx="7315200" cy="365760"/>
+            <a:ext cx="8229600" cy="365760"/>
           </a:xfrm>
           <a:prstGeom prst="rect">
             <a:avLst/>
@@ -3435,13 +3440,13 @@
               </a:lnSpc>
             </a:pPr>
             <a:r>
-              <a:rPr sz="3000" b="1" i="0">
+              <a:rPr sz="2800" b="1" i="0">
                 <a:solidFill>
                   <a:srgbClr val="1A1A1A"/>
                 </a:solidFill>
                 <a:latin typeface="Calibri"/>
               </a:rPr>
-              <a:t>GWR com renda + litoral: coeficientes e significância local</a:t>
+              <a:t>Onde o modelo erra: o rastro da população flutuante</a:t>
             </a:r>
           </a:p>
         </p:txBody>
@@ -3454,7 +3459,7 @@
         </p:nvSpPr>
         <p:spPr>
           <a:xfrm>
-            <a:off x="548640" y="1325880"/>
+            <a:off x="548640" y="1280160"/>
             <a:ext cx="11064240" cy="27940"/>
           </a:xfrm>
           <a:prstGeom prst="rect">
@@ -3492,7 +3497,7 @@
       </p:sp>
       <p:pic>
         <p:nvPicPr>
-          <p:cNvPr id="5" name="Picture 4" descr="gwr_lit_coef_renda.png"/>
+          <p:cNvPr id="5" name="Picture 4" descr="residuos_mapa_sem_litoral.png"/>
           <p:cNvPicPr>
             <a:picLocks noChangeAspect="1"/>
           </p:cNvPicPr>
@@ -3506,96 +3511,24 @@
         </p:blipFill>
         <p:spPr>
           <a:xfrm>
-            <a:off x="457200" y="2606040"/>
-            <a:ext cx="2880360" cy="2560320"/>
+            <a:off x="851535" y="1600200"/>
+            <a:ext cx="5246370" cy="4663440"/>
           </a:xfrm>
           <a:prstGeom prst="rect">
             <a:avLst/>
           </a:prstGeom>
         </p:spPr>
       </p:pic>
-      <p:pic>
-        <p:nvPicPr>
-          <p:cNvPr id="6" name="Picture 5" descr="gwr_lit_coef_litoral.png"/>
-          <p:cNvPicPr>
-            <a:picLocks noChangeAspect="1"/>
-          </p:cNvPicPr>
-          <p:nvPr/>
-        </p:nvPicPr>
-        <p:blipFill>
-          <a:blip r:embed="rId3"/>
-          <a:stretch>
-            <a:fillRect/>
-          </a:stretch>
-        </p:blipFill>
-        <p:spPr>
-          <a:xfrm>
-            <a:off x="3429000" y="2606040"/>
-            <a:ext cx="2880360" cy="2560320"/>
-          </a:xfrm>
-          <a:prstGeom prst="rect">
-            <a:avLst/>
-          </a:prstGeom>
-        </p:spPr>
-      </p:pic>
-      <p:pic>
-        <p:nvPicPr>
-          <p:cNvPr id="7" name="Picture 6" descr="gwr_lit_t_renda.png"/>
-          <p:cNvPicPr>
-            <a:picLocks noChangeAspect="1"/>
-          </p:cNvPicPr>
-          <p:nvPr/>
-        </p:nvPicPr>
-        <p:blipFill>
-          <a:blip r:embed="rId4"/>
-          <a:stretch>
-            <a:fillRect/>
-          </a:stretch>
-        </p:blipFill>
-        <p:spPr>
-          <a:xfrm>
-            <a:off x="6400800" y="2606040"/>
-            <a:ext cx="2880360" cy="2560320"/>
-          </a:xfrm>
-          <a:prstGeom prst="rect">
-            <a:avLst/>
-          </a:prstGeom>
-        </p:spPr>
-      </p:pic>
-      <p:pic>
-        <p:nvPicPr>
-          <p:cNvPr id="8" name="Picture 7" descr="gwr_lit_t_litoral.png"/>
-          <p:cNvPicPr>
-            <a:picLocks noChangeAspect="1"/>
-          </p:cNvPicPr>
-          <p:nvPr/>
-        </p:nvPicPr>
-        <p:blipFill>
-          <a:blip r:embed="rId5"/>
-          <a:stretch>
-            <a:fillRect/>
-          </a:stretch>
-        </p:blipFill>
-        <p:spPr>
-          <a:xfrm>
-            <a:off x="9372600" y="2606040"/>
-            <a:ext cx="2880360" cy="2560320"/>
-          </a:xfrm>
-          <a:prstGeom prst="rect">
-            <a:avLst/>
-          </a:prstGeom>
-        </p:spPr>
-      </p:pic>
-      <p:sp>
-        <p:nvSpPr>
-          <p:cNvPr id="9" name="TextBox 8"/>
+      <p:sp>
+        <p:nvSpPr>
+          <p:cNvPr id="6" name="TextBox 5"/>
           <p:cNvSpPr txBox="1"/>
           <p:nvPr/>
         </p:nvSpPr>
         <p:spPr>
           <a:xfrm>
-            <a:off x="548640" y="6172200"/>
-            <a:ext cx="11064240" cy="457200"/>
+            <a:off x="6675120" y="1737360"/>
+            <a:ext cx="4937760" cy="822960"/>
           </a:xfrm>
           <a:prstGeom prst="rect">
             <a:avLst/>
@@ -3614,13 +3547,169 @@
               </a:lnSpc>
             </a:pPr>
             <a:r>
-              <a:rPr sz="1300" b="0" i="0">
-                <a:solidFill>
-                  <a:srgbClr val="595959"/>
+              <a:rPr sz="1400" b="0" i="0">
+                <a:solidFill>
+                  <a:srgbClr val="333333"/>
                 </a:solidFill>
                 <a:latin typeface="Calibri"/>
               </a:rPr>
-              <a:t>Efeito litorâneo varia de 0 a 22 furtos/1.000 hab.; a estatística t mostra magnitude e significância crescendo do noroeste em direção à RMSP e à Baixada Santista.</a:t>
+              <a:t>O modelo (sem litoral) subestima as ocorrências exatamente no litoral — a faixa costeira concentra a subestimação mais intensa do estado.</a:t>
+            </a:r>
+          </a:p>
+        </p:txBody>
+      </p:sp>
+      <p:sp>
+        <p:nvSpPr>
+          <p:cNvPr id="7" name="TextBox 6"/>
+          <p:cNvSpPr txBox="1"/>
+          <p:nvPr/>
+        </p:nvSpPr>
+        <p:spPr>
+          <a:xfrm>
+            <a:off x="6675120" y="2743200"/>
+            <a:ext cx="4937760" cy="365760"/>
+          </a:xfrm>
+          <a:prstGeom prst="rect">
+            <a:avLst/>
+          </a:prstGeom>
+          <a:noFill/>
+        </p:spPr>
+        <p:txBody>
+          <a:bodyPr wrap="square" anchor="t">
+            <a:spAutoFit/>
+          </a:bodyPr>
+          <a:lstStyle/>
+          <a:p>
+            <a:pPr algn="l">
+              <a:lnSpc>
+                <a:spcPct val="115000"/>
+              </a:lnSpc>
+            </a:pPr>
+            <a:r>
+              <a:rPr sz="1600" b="1" i="0">
+                <a:solidFill>
+                  <a:srgbClr val="1F4E79"/>
+                </a:solidFill>
+                <a:latin typeface="Calibri"/>
+              </a:rPr>
+              <a:t>O mecanismo numérico</a:t>
+            </a:r>
+          </a:p>
+        </p:txBody>
+      </p:sp>
+      <p:sp>
+        <p:nvSpPr>
+          <p:cNvPr id="8" name="TextBox 7"/>
+          <p:cNvSpPr txBox="1"/>
+          <p:nvPr/>
+        </p:nvSpPr>
+        <p:spPr>
+          <a:xfrm>
+            <a:off x="6675120" y="3200400"/>
+            <a:ext cx="4937760" cy="1645920"/>
+          </a:xfrm>
+          <a:prstGeom prst="rect">
+            <a:avLst/>
+          </a:prstGeom>
+          <a:noFill/>
+        </p:spPr>
+        <p:txBody>
+          <a:bodyPr wrap="square">
+            <a:spAutoFit/>
+          </a:bodyPr>
+          <a:lstStyle/>
+          <a:p>
+            <a:pPr>
+              <a:lnSpc>
+                <a:spcPct val="115000"/>
+              </a:lnSpc>
+              <a:spcAft>
+                <a:spcPts val="1000"/>
+              </a:spcAft>
+            </a:pPr>
+            <a:r>
+              <a:rPr sz="1400">
+                <a:solidFill>
+                  <a:srgbClr val="333333"/>
+                </a:solidFill>
+                <a:latin typeface="Calibri"/>
+              </a:rPr>
+              <a:t>—  Numerador (crimes): as ocorrências inflam com o fluxo de turistas no verão.</a:t>
+            </a:r>
+          </a:p>
+          <a:p>
+            <a:pPr>
+              <a:lnSpc>
+                <a:spcPct val="115000"/>
+              </a:lnSpc>
+              <a:spcAft>
+                <a:spcPts val="1000"/>
+              </a:spcAft>
+            </a:pPr>
+            <a:r>
+              <a:rPr sz="1400">
+                <a:solidFill>
+                  <a:srgbClr val="333333"/>
+                </a:solidFill>
+                <a:latin typeface="Calibri"/>
+              </a:rPr>
+              <a:t>—  Denominador (população): o modelo conta só a população residente medida pelo Censo IBGE.</a:t>
+            </a:r>
+          </a:p>
+        </p:txBody>
+      </p:sp>
+      <p:sp>
+        <p:nvSpPr>
+          <p:cNvPr id="9" name="Rounded Rectangle 8"/>
+          <p:cNvSpPr/>
+          <p:nvPr/>
+        </p:nvSpPr>
+        <p:spPr>
+          <a:xfrm>
+            <a:off x="6675120" y="5029200"/>
+            <a:ext cx="4937760" cy="1097280"/>
+          </a:xfrm>
+          <a:prstGeom prst="roundRect">
+            <a:avLst>
+              <a:gd name="adj" fmla="val 8000"/>
+            </a:avLst>
+          </a:prstGeom>
+          <a:solidFill>
+            <a:srgbClr val="FDEEE3"/>
+          </a:solidFill>
+          <a:ln w="12700">
+            <a:solidFill>
+              <a:srgbClr val="ED7D31"/>
+            </a:solidFill>
+          </a:ln>
+          <a:effectLst/>
+        </p:spPr>
+        <p:style>
+          <a:lnRef idx="1">
+            <a:schemeClr val="accent1"/>
+          </a:lnRef>
+          <a:fillRef idx="3">
+            <a:schemeClr val="accent1"/>
+          </a:fillRef>
+          <a:effectRef idx="2">
+            <a:schemeClr val="accent1"/>
+          </a:effectRef>
+          <a:fontRef idx="minor">
+            <a:schemeClr val="lt1"/>
+          </a:fontRef>
+        </p:style>
+        <p:txBody>
+          <a:bodyPr rtlCol="0" anchor="ctr" wrap="square" lIns="182880" rIns="182880"/>
+          <a:lstStyle/>
+          <a:p>
+            <a:pPr algn="ctr"/>
+            <a:r>
+              <a:rPr sz="1300">
+                <a:solidFill>
+                  <a:srgbClr val="663300"/>
+                </a:solidFill>
+              </a:rPr>
+              <a:t>A taxa por 1.000 hab. superestima o risco real para quem mora lá — sem o dummy, o modelo sempre vai subestimar a taxa observada.</a:t>
             </a:r>
           </a:p>
         </p:txBody>
@@ -3738,7 +3827,7 @@
         <p:spPr>
           <a:xfrm>
             <a:off x="548640" y="320040"/>
-            <a:ext cx="7315200" cy="365760"/>
+            <a:ext cx="8229600" cy="365760"/>
           </a:xfrm>
           <a:prstGeom prst="rect">
             <a:avLst/>
@@ -3796,13 +3885,13 @@
               </a:lnSpc>
             </a:pPr>
             <a:r>
-              <a:rPr sz="3000" b="1" i="0">
+              <a:rPr sz="2800" b="1" i="0">
                 <a:solidFill>
                   <a:srgbClr val="1A1A1A"/>
                 </a:solidFill>
                 <a:latin typeface="Calibri"/>
               </a:rPr>
-              <a:t>Cenário contrafactual: isolando o efeito litorâneo</a:t>
+              <a:t>Quanto R$ 1 de renda pesa — e onde falha</a:t>
             </a:r>
           </a:p>
         </p:txBody>
@@ -3815,7 +3904,7 @@
         </p:nvSpPr>
         <p:spPr>
           <a:xfrm>
-            <a:off x="548640" y="1325880"/>
+            <a:off x="548640" y="1280160"/>
             <a:ext cx="11064240" cy="27940"/>
           </a:xfrm>
           <a:prstGeom prst="rect">
@@ -3851,30 +3940,577 @@
           </a:p>
         </p:txBody>
       </p:sp>
-      <p:pic>
-        <p:nvPicPr>
-          <p:cNvPr id="5" name="Picture 4" descr="gwr_contrafactual_dif.png"/>
-          <p:cNvPicPr>
-            <a:picLocks noChangeAspect="1"/>
-          </p:cNvPicPr>
-          <p:nvPr/>
-        </p:nvPicPr>
-        <p:blipFill>
-          <a:blip r:embed="rId2"/>
-          <a:stretch>
-            <a:fillRect/>
-          </a:stretch>
-        </p:blipFill>
-        <p:spPr>
-          <a:xfrm>
-            <a:off x="902970" y="1691640"/>
-            <a:ext cx="5143500" cy="4572000"/>
-          </a:xfrm>
-          <a:prstGeom prst="rect">
-            <a:avLst/>
-          </a:prstGeom>
-        </p:spPr>
-      </p:pic>
+      <p:graphicFrame>
+        <p:nvGraphicFramePr>
+          <p:cNvPr id="5" name="Table 4"/>
+          <p:cNvGraphicFramePr>
+            <a:graphicFrameLocks noGrp="1"/>
+          </p:cNvGraphicFramePr>
+          <p:nvPr/>
+        </p:nvGraphicFramePr>
+        <p:xfrm>
+          <a:off x="548640" y="1691640"/>
+          <a:ext cx="6035040" cy="4206240"/>
+        </p:xfrm>
+        <a:graphic>
+          <a:graphicData uri="http://schemas.openxmlformats.org/drawingml/2006/table">
+            <a:tbl>
+              <a:tblPr firstRow="1" bandRow="1">
+                <a:tableStyleId>{5C22544A-7EE6-4342-B048-85BDC9FD1C3A}</a:tableStyleId>
+              </a:tblPr>
+              <a:tblGrid>
+                <a:gridCol w="2011680"/>
+                <a:gridCol w="2011680"/>
+                <a:gridCol w="2011680"/>
+              </a:tblGrid>
+              <a:tr h="525780">
+                <a:tc>
+                  <a:txBody>
+                    <a:bodyPr/>
+                    <a:lstStyle/>
+                    <a:p>
+                      <a:pPr algn="ctr"/>
+                      <a:r>
+                        <a:rPr b="1" sz="1400">
+                          <a:solidFill>
+                            <a:srgbClr val="FFFFFF"/>
+                          </a:solidFill>
+                        </a:rPr>
+                        <a:t>Métrica</a:t>
+                      </a:r>
+                    </a:p>
+                  </a:txBody>
+                  <a:tcPr>
+                    <a:solidFill>
+                      <a:srgbClr val="1F4E79"/>
+                    </a:solidFill>
+                  </a:tcPr>
+                </a:tc>
+                <a:tc>
+                  <a:txBody>
+                    <a:bodyPr/>
+                    <a:lstStyle/>
+                    <a:p>
+                      <a:pPr algn="ctr"/>
+                      <a:r>
+                        <a:rPr b="1" sz="1400">
+                          <a:solidFill>
+                            <a:srgbClr val="FFFFFF"/>
+                          </a:solidFill>
+                        </a:rPr>
+                        <a:t>São Paulo</a:t>
+                      </a:r>
+                    </a:p>
+                  </a:txBody>
+                  <a:tcPr>
+                    <a:solidFill>
+                      <a:srgbClr val="1F4E79"/>
+                    </a:solidFill>
+                  </a:tcPr>
+                </a:tc>
+                <a:tc>
+                  <a:txBody>
+                    <a:bodyPr/>
+                    <a:lstStyle/>
+                    <a:p>
+                      <a:pPr algn="ctr"/>
+                      <a:r>
+                        <a:rPr b="1" sz="1400">
+                          <a:solidFill>
+                            <a:srgbClr val="FFFFFF"/>
+                          </a:solidFill>
+                        </a:rPr>
+                        <a:t>Mongaguá</a:t>
+                      </a:r>
+                    </a:p>
+                  </a:txBody>
+                  <a:tcPr>
+                    <a:solidFill>
+                      <a:srgbClr val="1F4E79"/>
+                    </a:solidFill>
+                  </a:tcPr>
+                </a:tc>
+              </a:tr>
+              <a:tr h="525780">
+                <a:tc>
+                  <a:txBody>
+                    <a:bodyPr/>
+                    <a:lstStyle/>
+                    <a:p>
+                      <a:pPr algn="ctr"/>
+                      <a:r>
+                        <a:rPr sz="1300" b="0">
+                          <a:solidFill>
+                            <a:srgbClr val="1A1A1A"/>
+                          </a:solidFill>
+                        </a:rPr>
+                        <a:t>Renda</a:t>
+                      </a:r>
+                    </a:p>
+                  </a:txBody>
+                  <a:tcPr>
+                    <a:solidFill>
+                      <a:srgbClr val="FFFFFF"/>
+                    </a:solidFill>
+                  </a:tcPr>
+                </a:tc>
+                <a:tc>
+                  <a:txBody>
+                    <a:bodyPr/>
+                    <a:lstStyle/>
+                    <a:p>
+                      <a:pPr algn="ctr"/>
+                      <a:r>
+                        <a:rPr sz="1300" b="0">
+                          <a:solidFill>
+                            <a:srgbClr val="1A1A1A"/>
+                          </a:solidFill>
+                        </a:rPr>
+                        <a:t>R$ 4.547,62</a:t>
+                      </a:r>
+                    </a:p>
+                  </a:txBody>
+                  <a:tcPr>
+                    <a:solidFill>
+                      <a:srgbClr val="FFFFFF"/>
+                    </a:solidFill>
+                  </a:tcPr>
+                </a:tc>
+                <a:tc>
+                  <a:txBody>
+                    <a:bodyPr/>
+                    <a:lstStyle/>
+                    <a:p>
+                      <a:pPr algn="ctr"/>
+                      <a:r>
+                        <a:rPr sz="1300" b="0">
+                          <a:solidFill>
+                            <a:srgbClr val="1A1A1A"/>
+                          </a:solidFill>
+                        </a:rPr>
+                        <a:t>R$ 2.138,21</a:t>
+                      </a:r>
+                    </a:p>
+                  </a:txBody>
+                  <a:tcPr>
+                    <a:solidFill>
+                      <a:srgbClr val="FFFFFF"/>
+                    </a:solidFill>
+                  </a:tcPr>
+                </a:tc>
+              </a:tr>
+              <a:tr h="525780">
+                <a:tc>
+                  <a:txBody>
+                    <a:bodyPr/>
+                    <a:lstStyle/>
+                    <a:p>
+                      <a:pPr algn="ctr"/>
+                      <a:r>
+                        <a:rPr sz="1300" b="0">
+                          <a:solidFill>
+                            <a:srgbClr val="1A1A1A"/>
+                          </a:solidFill>
+                        </a:rPr>
+                        <a:t>Banda (GWR)</a:t>
+                      </a:r>
+                    </a:p>
+                  </a:txBody>
+                  <a:tcPr>
+                    <a:solidFill>
+                      <a:srgbClr val="F2F2F2"/>
+                    </a:solidFill>
+                  </a:tcPr>
+                </a:tc>
+                <a:tc>
+                  <a:txBody>
+                    <a:bodyPr/>
+                    <a:lstStyle/>
+                    <a:p>
+                      <a:pPr algn="ctr"/>
+                      <a:r>
+                        <a:rPr sz="1300" b="0">
+                          <a:solidFill>
+                            <a:srgbClr val="1A1A1A"/>
+                          </a:solidFill>
+                        </a:rPr>
+                        <a:t>23,6 km</a:t>
+                      </a:r>
+                    </a:p>
+                  </a:txBody>
+                  <a:tcPr>
+                    <a:solidFill>
+                      <a:srgbClr val="F2F2F2"/>
+                    </a:solidFill>
+                  </a:tcPr>
+                </a:tc>
+                <a:tc>
+                  <a:txBody>
+                    <a:bodyPr/>
+                    <a:lstStyle/>
+                    <a:p>
+                      <a:pPr algn="ctr"/>
+                      <a:r>
+                        <a:rPr sz="1300" b="0">
+                          <a:solidFill>
+                            <a:srgbClr val="1A1A1A"/>
+                          </a:solidFill>
+                        </a:rPr>
+                        <a:t>41,9 km</a:t>
+                      </a:r>
+                    </a:p>
+                  </a:txBody>
+                  <a:tcPr>
+                    <a:solidFill>
+                      <a:srgbClr val="F2F2F2"/>
+                    </a:solidFill>
+                  </a:tcPr>
+                </a:tc>
+              </a:tr>
+              <a:tr h="525780">
+                <a:tc>
+                  <a:txBody>
+                    <a:bodyPr/>
+                    <a:lstStyle/>
+                    <a:p>
+                      <a:pPr algn="ctr"/>
+                      <a:r>
+                        <a:rPr sz="1300" b="0">
+                          <a:solidFill>
+                            <a:srgbClr val="1A1A1A"/>
+                          </a:solidFill>
+                        </a:rPr>
+                        <a:t>β renda</a:t>
+                      </a:r>
+                    </a:p>
+                  </a:txBody>
+                  <a:tcPr>
+                    <a:solidFill>
+                      <a:srgbClr val="FFFFFF"/>
+                    </a:solidFill>
+                  </a:tcPr>
+                </a:tc>
+                <a:tc>
+                  <a:txBody>
+                    <a:bodyPr/>
+                    <a:lstStyle/>
+                    <a:p>
+                      <a:pPr algn="ctr"/>
+                      <a:r>
+                        <a:rPr sz="1300" b="0">
+                          <a:solidFill>
+                            <a:srgbClr val="1A1A1A"/>
+                          </a:solidFill>
+                        </a:rPr>
+                        <a:t>0,00156</a:t>
+                      </a:r>
+                    </a:p>
+                  </a:txBody>
+                  <a:tcPr>
+                    <a:solidFill>
+                      <a:srgbClr val="FFFFFF"/>
+                    </a:solidFill>
+                  </a:tcPr>
+                </a:tc>
+                <a:tc>
+                  <a:txBody>
+                    <a:bodyPr/>
+                    <a:lstStyle/>
+                    <a:p>
+                      <a:pPr algn="ctr"/>
+                      <a:r>
+                        <a:rPr sz="1300" b="0">
+                          <a:solidFill>
+                            <a:srgbClr val="1A1A1A"/>
+                          </a:solidFill>
+                        </a:rPr>
+                        <a:t>0,00019</a:t>
+                      </a:r>
+                    </a:p>
+                  </a:txBody>
+                  <a:tcPr>
+                    <a:solidFill>
+                      <a:srgbClr val="FFFFFF"/>
+                    </a:solidFill>
+                  </a:tcPr>
+                </a:tc>
+              </a:tr>
+              <a:tr h="525780">
+                <a:tc>
+                  <a:txBody>
+                    <a:bodyPr/>
+                    <a:lstStyle/>
+                    <a:p>
+                      <a:pPr algn="ctr"/>
+                      <a:r>
+                        <a:rPr sz="1300" b="0">
+                          <a:solidFill>
+                            <a:srgbClr val="1A1A1A"/>
+                          </a:solidFill>
+                        </a:rPr>
+                        <a:t>t (signif.)</a:t>
+                      </a:r>
+                    </a:p>
+                  </a:txBody>
+                  <a:tcPr>
+                    <a:solidFill>
+                      <a:srgbClr val="F2F2F2"/>
+                    </a:solidFill>
+                  </a:tcPr>
+                </a:tc>
+                <a:tc>
+                  <a:txBody>
+                    <a:bodyPr/>
+                    <a:lstStyle/>
+                    <a:p>
+                      <a:pPr algn="ctr"/>
+                      <a:r>
+                        <a:rPr sz="1300" b="0">
+                          <a:solidFill>
+                            <a:srgbClr val="1A1A1A"/>
+                          </a:solidFill>
+                        </a:rPr>
+                        <a:t>3,28 (significativo)</a:t>
+                      </a:r>
+                    </a:p>
+                  </a:txBody>
+                  <a:tcPr>
+                    <a:solidFill>
+                      <a:srgbClr val="F2F2F2"/>
+                    </a:solidFill>
+                  </a:tcPr>
+                </a:tc>
+                <a:tc>
+                  <a:txBody>
+                    <a:bodyPr/>
+                    <a:lstStyle/>
+                    <a:p>
+                      <a:pPr algn="ctr"/>
+                      <a:r>
+                        <a:rPr sz="1300" b="0">
+                          <a:solidFill>
+                            <a:srgbClr val="1A1A1A"/>
+                          </a:solidFill>
+                        </a:rPr>
+                        <a:t>0,46 (não significativo)</a:t>
+                      </a:r>
+                    </a:p>
+                  </a:txBody>
+                  <a:tcPr>
+                    <a:solidFill>
+                      <a:srgbClr val="F2F2F2"/>
+                    </a:solidFill>
+                  </a:tcPr>
+                </a:tc>
+              </a:tr>
+              <a:tr h="525780">
+                <a:tc>
+                  <a:txBody>
+                    <a:bodyPr/>
+                    <a:lstStyle/>
+                    <a:p>
+                      <a:pPr algn="ctr"/>
+                      <a:r>
+                        <a:rPr sz="1300" b="0">
+                          <a:solidFill>
+                            <a:srgbClr val="1A1A1A"/>
+                          </a:solidFill>
+                        </a:rPr>
+                        <a:t>R² local</a:t>
+                      </a:r>
+                    </a:p>
+                  </a:txBody>
+                  <a:tcPr>
+                    <a:solidFill>
+                      <a:srgbClr val="FFFFFF"/>
+                    </a:solidFill>
+                  </a:tcPr>
+                </a:tc>
+                <a:tc>
+                  <a:txBody>
+                    <a:bodyPr/>
+                    <a:lstStyle/>
+                    <a:p>
+                      <a:pPr algn="ctr"/>
+                      <a:r>
+                        <a:rPr sz="1300" b="0">
+                          <a:solidFill>
+                            <a:srgbClr val="1A1A1A"/>
+                          </a:solidFill>
+                        </a:rPr>
+                        <a:t>0,31</a:t>
+                      </a:r>
+                    </a:p>
+                  </a:txBody>
+                  <a:tcPr>
+                    <a:solidFill>
+                      <a:srgbClr val="FFFFFF"/>
+                    </a:solidFill>
+                  </a:tcPr>
+                </a:tc>
+                <a:tc>
+                  <a:txBody>
+                    <a:bodyPr/>
+                    <a:lstStyle/>
+                    <a:p>
+                      <a:pPr algn="ctr"/>
+                      <a:r>
+                        <a:rPr sz="1300" b="0">
+                          <a:solidFill>
+                            <a:srgbClr val="1A1A1A"/>
+                          </a:solidFill>
+                        </a:rPr>
+                        <a:t>0,18</a:t>
+                      </a:r>
+                    </a:p>
+                  </a:txBody>
+                  <a:tcPr>
+                    <a:solidFill>
+                      <a:srgbClr val="FFFFFF"/>
+                    </a:solidFill>
+                  </a:tcPr>
+                </a:tc>
+              </a:tr>
+              <a:tr h="525780">
+                <a:tc>
+                  <a:txBody>
+                    <a:bodyPr/>
+                    <a:lstStyle/>
+                    <a:p>
+                      <a:pPr algn="ctr"/>
+                      <a:r>
+                        <a:rPr sz="1300" b="0">
+                          <a:solidFill>
+                            <a:srgbClr val="1A1A1A"/>
+                          </a:solidFill>
+                        </a:rPr>
+                        <a:t>Furto previsto</a:t>
+                      </a:r>
+                    </a:p>
+                  </a:txBody>
+                  <a:tcPr>
+                    <a:solidFill>
+                      <a:srgbClr val="F2F2F2"/>
+                    </a:solidFill>
+                  </a:tcPr>
+                </a:tc>
+                <a:tc>
+                  <a:txBody>
+                    <a:bodyPr/>
+                    <a:lstStyle/>
+                    <a:p>
+                      <a:pPr algn="ctr"/>
+                      <a:r>
+                        <a:rPr sz="1300" b="0">
+                          <a:solidFill>
+                            <a:srgbClr val="1A1A1A"/>
+                          </a:solidFill>
+                        </a:rPr>
+                        <a:t>13,7</a:t>
+                      </a:r>
+                    </a:p>
+                  </a:txBody>
+                  <a:tcPr>
+                    <a:solidFill>
+                      <a:srgbClr val="F2F2F2"/>
+                    </a:solidFill>
+                  </a:tcPr>
+                </a:tc>
+                <a:tc>
+                  <a:txBody>
+                    <a:bodyPr/>
+                    <a:lstStyle/>
+                    <a:p>
+                      <a:pPr algn="ctr"/>
+                      <a:r>
+                        <a:rPr sz="1300" b="0">
+                          <a:solidFill>
+                            <a:srgbClr val="1A1A1A"/>
+                          </a:solidFill>
+                        </a:rPr>
+                        <a:t>13,2</a:t>
+                      </a:r>
+                    </a:p>
+                  </a:txBody>
+                  <a:tcPr>
+                    <a:solidFill>
+                      <a:srgbClr val="F2F2F2"/>
+                    </a:solidFill>
+                  </a:tcPr>
+                </a:tc>
+              </a:tr>
+              <a:tr h="525780">
+                <a:tc>
+                  <a:txBody>
+                    <a:bodyPr/>
+                    <a:lstStyle/>
+                    <a:p>
+                      <a:pPr algn="ctr"/>
+                      <a:r>
+                        <a:rPr sz="1300" b="0">
+                          <a:solidFill>
+                            <a:srgbClr val="1A1A1A"/>
+                          </a:solidFill>
+                        </a:rPr>
+                        <a:t>Resíduo</a:t>
+                      </a:r>
+                    </a:p>
+                  </a:txBody>
+                  <a:tcPr>
+                    <a:solidFill>
+                      <a:srgbClr val="FFFFFF"/>
+                    </a:solidFill>
+                  </a:tcPr>
+                </a:tc>
+                <a:tc>
+                  <a:txBody>
+                    <a:bodyPr/>
+                    <a:lstStyle/>
+                    <a:p>
+                      <a:pPr algn="ctr"/>
+                      <a:r>
+                        <a:rPr sz="1300" b="0">
+                          <a:solidFill>
+                            <a:srgbClr val="1A1A1A"/>
+                          </a:solidFill>
+                        </a:rPr>
+                        <a:t>+11,5</a:t>
+                      </a:r>
+                    </a:p>
+                  </a:txBody>
+                  <a:tcPr>
+                    <a:solidFill>
+                      <a:srgbClr val="FFFFFF"/>
+                    </a:solidFill>
+                  </a:tcPr>
+                </a:tc>
+                <a:tc>
+                  <a:txBody>
+                    <a:bodyPr/>
+                    <a:lstStyle/>
+                    <a:p>
+                      <a:pPr algn="ctr"/>
+                      <a:r>
+                        <a:rPr sz="1300" b="0">
+                          <a:solidFill>
+                            <a:srgbClr val="1A1A1A"/>
+                          </a:solidFill>
+                        </a:rPr>
+                        <a:t>+21,0</a:t>
+                      </a:r>
+                    </a:p>
+                  </a:txBody>
+                  <a:tcPr>
+                    <a:solidFill>
+                      <a:srgbClr val="FFFFFF"/>
+                    </a:solidFill>
+                  </a:tcPr>
+                </a:tc>
+              </a:tr>
+            </a:tbl>
+          </a:graphicData>
+        </a:graphic>
+      </p:graphicFrame>
       <p:sp>
         <p:nvSpPr>
           <p:cNvPr id="6" name="TextBox 5"/>
@@ -3883,8 +4519,8 @@
         </p:nvSpPr>
         <p:spPr>
           <a:xfrm>
-            <a:off x="6675120" y="1828800"/>
-            <a:ext cx="4937760" cy="4114800"/>
+            <a:off x="6858000" y="1828800"/>
+            <a:ext cx="4754880" cy="3840480"/>
           </a:xfrm>
           <a:prstGeom prst="rect">
             <a:avLst/>
@@ -3902,18 +4538,17 @@
                 <a:spcPct val="115000"/>
               </a:lnSpc>
               <a:spcAft>
-                <a:spcPts val="1600"/>
+                <a:spcPts val="1400"/>
               </a:spcAft>
             </a:pPr>
             <a:r>
-              <a:rPr sz="1500">
+              <a:rPr sz="1400">
                 <a:solidFill>
                   <a:srgbClr val="333333"/>
                 </a:solidFill>
                 <a:latin typeface="Calibri"/>
               </a:rPr>
-              <a:t>—  Mantendo os coeficientes locais do GWR, zeramos a variável
-litoral e recalculamos a predição.</a:t>
+              <a:t>—  Em São Paulo e Mongaguá, a previsão do furto é parecida (~13 a 14) — mas só em São Paulo o coeficiente da renda é confiável (t=3,28).</a:t>
             </a:r>
           </a:p>
           <a:p>
@@ -3922,18 +4557,17 @@
                 <a:spcPct val="115000"/>
               </a:lnSpc>
               <a:spcAft>
-                <a:spcPts val="1600"/>
+                <a:spcPts val="1400"/>
               </a:spcAft>
             </a:pPr>
             <a:r>
-              <a:rPr sz="1500">
+              <a:rPr sz="1400">
                 <a:solidFill>
                   <a:srgbClr val="333333"/>
                 </a:solidFill>
                 <a:latin typeface="Calibri"/>
               </a:rPr>
-              <a:t>—  Diferença entre predição real e contrafactual — até 12
-furtos/1.000 hab. — concentra-se inteiramente na faixa costeira.</a:t>
+              <a:t>—  Em Mongaguá, t=0,46 diz que a renda local não explica o crime. O resíduo de +21 é quase todo população turística flutuante.</a:t>
             </a:r>
           </a:p>
           <a:p>
@@ -3942,19 +4576,17 @@
                 <a:spcPct val="115000"/>
               </a:lnSpc>
               <a:spcAft>
-                <a:spcPts val="1600"/>
+                <a:spcPts val="1400"/>
               </a:spcAft>
             </a:pPr>
             <a:r>
-              <a:rPr sz="1500">
+              <a:rPr sz="1400">
                 <a:solidFill>
                   <a:srgbClr val="333333"/>
                 </a:solidFill>
                 <a:latin typeface="Calibri"/>
               </a:rPr>
-              <a:t>—  Regime separado: no interior, furto cresce com a renda (R²=0,19);
-no litoral, reta praticamente plana e num patamar bem mais alto
-(R²=0,008) — a renda não explica a variação lá dentro.</a:t>
+              <a:t>—  Deixar a renda variar no espaço faz o R² saltar de 0,13 (global) para 0,46 (GWR local): não é só "quanto" de renda existe, é "onde" ela está.</a:t>
             </a:r>
           </a:p>
         </p:txBody>
@@ -4072,7 +4704,7 @@
         <p:spPr>
           <a:xfrm>
             <a:off x="548640" y="320040"/>
-            <a:ext cx="7315200" cy="365760"/>
+            <a:ext cx="8229600" cy="365760"/>
           </a:xfrm>
           <a:prstGeom prst="rect">
             <a:avLst/>
@@ -4130,13 +4762,13 @@
               </a:lnSpc>
             </a:pPr>
             <a:r>
-              <a:rPr sz="3000" b="1" i="0">
+              <a:rPr sz="2800" b="1" i="0">
                 <a:solidFill>
                   <a:srgbClr val="1A1A1A"/>
                 </a:solidFill>
                 <a:latin typeface="Calibri"/>
               </a:rPr>
-              <a:t>Resíduos confirmam o mecanismo</a:t>
+              <a:t>Comparação final dos modelos</a:t>
             </a:r>
           </a:p>
         </p:txBody>
@@ -4149,7 +4781,7 @@
         </p:nvSpPr>
         <p:spPr>
           <a:xfrm>
-            <a:off x="548640" y="1325880"/>
+            <a:off x="548640" y="1280160"/>
             <a:ext cx="11064240" cy="27940"/>
           </a:xfrm>
           <a:prstGeom prst="rect">
@@ -4185,30 +4817,394 @@
           </a:p>
         </p:txBody>
       </p:sp>
-      <p:pic>
-        <p:nvPicPr>
-          <p:cNvPr id="5" name="Picture 4" descr="residuos_litoral_boxplot.png"/>
-          <p:cNvPicPr>
-            <a:picLocks noChangeAspect="1"/>
-          </p:cNvPicPr>
-          <p:nvPr/>
-        </p:nvPicPr>
-        <p:blipFill>
-          <a:blip r:embed="rId2"/>
-          <a:stretch>
-            <a:fillRect/>
-          </a:stretch>
-        </p:blipFill>
-        <p:spPr>
-          <a:xfrm>
-            <a:off x="548640" y="1892808"/>
-            <a:ext cx="6949440" cy="4169664"/>
-          </a:xfrm>
-          <a:prstGeom prst="rect">
-            <a:avLst/>
-          </a:prstGeom>
-        </p:spPr>
-      </p:pic>
+      <p:graphicFrame>
+        <p:nvGraphicFramePr>
+          <p:cNvPr id="5" name="Table 4"/>
+          <p:cNvGraphicFramePr>
+            <a:graphicFrameLocks noGrp="1"/>
+          </p:cNvGraphicFramePr>
+          <p:nvPr/>
+        </p:nvGraphicFramePr>
+        <p:xfrm>
+          <a:off x="1737360" y="2011680"/>
+          <a:ext cx="8686800" cy="2011680"/>
+        </p:xfrm>
+        <a:graphic>
+          <a:graphicData uri="http://schemas.openxmlformats.org/drawingml/2006/table">
+            <a:tbl>
+              <a:tblPr firstRow="1" bandRow="1">
+                <a:tableStyleId>{5C22544A-7EE6-4342-B048-85BDC9FD1C3A}</a:tableStyleId>
+              </a:tblPr>
+              <a:tblGrid>
+                <a:gridCol w="3017520"/>
+                <a:gridCol w="2011680"/>
+                <a:gridCol w="2011680"/>
+                <a:gridCol w="1645920"/>
+              </a:tblGrid>
+              <a:tr h="502920">
+                <a:tc>
+                  <a:txBody>
+                    <a:bodyPr/>
+                    <a:lstStyle/>
+                    <a:p>
+                      <a:pPr algn="ctr"/>
+                      <a:r>
+                        <a:rPr b="1" sz="1600">
+                          <a:solidFill>
+                            <a:srgbClr val="FFFFFF"/>
+                          </a:solidFill>
+                        </a:rPr>
+                        <a:t>Modelo</a:t>
+                      </a:r>
+                    </a:p>
+                  </a:txBody>
+                  <a:tcPr>
+                    <a:solidFill>
+                      <a:srgbClr val="1F4E79"/>
+                    </a:solidFill>
+                  </a:tcPr>
+                </a:tc>
+                <a:tc>
+                  <a:txBody>
+                    <a:bodyPr/>
+                    <a:lstStyle/>
+                    <a:p>
+                      <a:pPr algn="ctr"/>
+                      <a:r>
+                        <a:rPr b="1" sz="1600">
+                          <a:solidFill>
+                            <a:srgbClr val="FFFFFF"/>
+                          </a:solidFill>
+                        </a:rPr>
+                        <a:t>Sem litoral</a:t>
+                      </a:r>
+                    </a:p>
+                  </a:txBody>
+                  <a:tcPr>
+                    <a:solidFill>
+                      <a:srgbClr val="1F4E79"/>
+                    </a:solidFill>
+                  </a:tcPr>
+                </a:tc>
+                <a:tc>
+                  <a:txBody>
+                    <a:bodyPr/>
+                    <a:lstStyle/>
+                    <a:p>
+                      <a:pPr algn="ctr"/>
+                      <a:r>
+                        <a:rPr b="1" sz="1600">
+                          <a:solidFill>
+                            <a:srgbClr val="FFFFFF"/>
+                          </a:solidFill>
+                        </a:rPr>
+                        <a:t>Com litoral</a:t>
+                      </a:r>
+                    </a:p>
+                  </a:txBody>
+                  <a:tcPr>
+                    <a:solidFill>
+                      <a:srgbClr val="1F4E79"/>
+                    </a:solidFill>
+                  </a:tcPr>
+                </a:tc>
+                <a:tc>
+                  <a:txBody>
+                    <a:bodyPr/>
+                    <a:lstStyle/>
+                    <a:p>
+                      <a:pPr algn="ctr"/>
+                      <a:r>
+                        <a:rPr b="1" sz="1600">
+                          <a:solidFill>
+                            <a:srgbClr val="FFFFFF"/>
+                          </a:solidFill>
+                        </a:rPr>
+                        <a:t>Δ</a:t>
+                      </a:r>
+                    </a:p>
+                  </a:txBody>
+                  <a:tcPr>
+                    <a:solidFill>
+                      <a:srgbClr val="1F4E79"/>
+                    </a:solidFill>
+                  </a:tcPr>
+                </a:tc>
+              </a:tr>
+              <a:tr h="502920">
+                <a:tc>
+                  <a:txBody>
+                    <a:bodyPr/>
+                    <a:lstStyle/>
+                    <a:p>
+                      <a:pPr algn="ctr"/>
+                      <a:r>
+                        <a:rPr sz="1700" b="0">
+                          <a:solidFill>
+                            <a:srgbClr val="1A1A1A"/>
+                          </a:solidFill>
+                        </a:rPr>
+                        <a:t>OLS</a:t>
+                      </a:r>
+                    </a:p>
+                  </a:txBody>
+                  <a:tcPr>
+                    <a:solidFill>
+                      <a:srgbClr val="FFFFFF"/>
+                    </a:solidFill>
+                  </a:tcPr>
+                </a:tc>
+                <a:tc>
+                  <a:txBody>
+                    <a:bodyPr/>
+                    <a:lstStyle/>
+                    <a:p>
+                      <a:pPr algn="ctr"/>
+                      <a:r>
+                        <a:rPr sz="1700" b="0">
+                          <a:solidFill>
+                            <a:srgbClr val="1A1A1A"/>
+                          </a:solidFill>
+                        </a:rPr>
+                        <a:t>0,129</a:t>
+                      </a:r>
+                    </a:p>
+                  </a:txBody>
+                  <a:tcPr>
+                    <a:solidFill>
+                      <a:srgbClr val="FFFFFF"/>
+                    </a:solidFill>
+                  </a:tcPr>
+                </a:tc>
+                <a:tc>
+                  <a:txBody>
+                    <a:bodyPr/>
+                    <a:lstStyle/>
+                    <a:p>
+                      <a:pPr algn="ctr"/>
+                      <a:r>
+                        <a:rPr sz="1700" b="0">
+                          <a:solidFill>
+                            <a:srgbClr val="1A1A1A"/>
+                          </a:solidFill>
+                        </a:rPr>
+                        <a:t>0,357</a:t>
+                      </a:r>
+                    </a:p>
+                  </a:txBody>
+                  <a:tcPr>
+                    <a:solidFill>
+                      <a:srgbClr val="FFFFFF"/>
+                    </a:solidFill>
+                  </a:tcPr>
+                </a:tc>
+                <a:tc>
+                  <a:txBody>
+                    <a:bodyPr/>
+                    <a:lstStyle/>
+                    <a:p>
+                      <a:pPr algn="ctr"/>
+                      <a:r>
+                        <a:rPr sz="1700" b="0">
+                          <a:solidFill>
+                            <a:srgbClr val="1A1A1A"/>
+                          </a:solidFill>
+                        </a:rPr>
+                        <a:t>+0,228</a:t>
+                      </a:r>
+                    </a:p>
+                  </a:txBody>
+                  <a:tcPr>
+                    <a:solidFill>
+                      <a:srgbClr val="FFFFFF"/>
+                    </a:solidFill>
+                  </a:tcPr>
+                </a:tc>
+              </a:tr>
+              <a:tr h="502920">
+                <a:tc>
+                  <a:txBody>
+                    <a:bodyPr/>
+                    <a:lstStyle/>
+                    <a:p>
+                      <a:pPr algn="ctr"/>
+                      <a:r>
+                        <a:rPr sz="1700" b="0">
+                          <a:solidFill>
+                            <a:srgbClr val="1A1A1A"/>
+                          </a:solidFill>
+                        </a:rPr>
+                        <a:t>Spatial Error</a:t>
+                      </a:r>
+                    </a:p>
+                  </a:txBody>
+                  <a:tcPr>
+                    <a:solidFill>
+                      <a:srgbClr val="F2F2F2"/>
+                    </a:solidFill>
+                  </a:tcPr>
+                </a:tc>
+                <a:tc>
+                  <a:txBody>
+                    <a:bodyPr/>
+                    <a:lstStyle/>
+                    <a:p>
+                      <a:pPr algn="ctr"/>
+                      <a:r>
+                        <a:rPr sz="1700" b="0">
+                          <a:solidFill>
+                            <a:srgbClr val="1A1A1A"/>
+                          </a:solidFill>
+                        </a:rPr>
+                        <a:t>0,392</a:t>
+                      </a:r>
+                    </a:p>
+                  </a:txBody>
+                  <a:tcPr>
+                    <a:solidFill>
+                      <a:srgbClr val="F2F2F2"/>
+                    </a:solidFill>
+                  </a:tcPr>
+                </a:tc>
+                <a:tc>
+                  <a:txBody>
+                    <a:bodyPr/>
+                    <a:lstStyle/>
+                    <a:p>
+                      <a:pPr algn="ctr"/>
+                      <a:r>
+                        <a:rPr sz="1700" b="0">
+                          <a:solidFill>
+                            <a:srgbClr val="1A1A1A"/>
+                          </a:solidFill>
+                        </a:rPr>
+                        <a:t>0,444</a:t>
+                      </a:r>
+                    </a:p>
+                  </a:txBody>
+                  <a:tcPr>
+                    <a:solidFill>
+                      <a:srgbClr val="F2F2F2"/>
+                    </a:solidFill>
+                  </a:tcPr>
+                </a:tc>
+                <a:tc>
+                  <a:txBody>
+                    <a:bodyPr/>
+                    <a:lstStyle/>
+                    <a:p>
+                      <a:pPr algn="ctr"/>
+                      <a:r>
+                        <a:rPr sz="1700" b="0">
+                          <a:solidFill>
+                            <a:srgbClr val="1A1A1A"/>
+                          </a:solidFill>
+                        </a:rPr>
+                        <a:t>+0,052</a:t>
+                      </a:r>
+                    </a:p>
+                  </a:txBody>
+                  <a:tcPr>
+                    <a:solidFill>
+                      <a:srgbClr val="F2F2F2"/>
+                    </a:solidFill>
+                  </a:tcPr>
+                </a:tc>
+              </a:tr>
+              <a:tr h="502920">
+                <a:tc>
+                  <a:txBody>
+                    <a:bodyPr/>
+                    <a:lstStyle/>
+                    <a:p>
+                      <a:pPr algn="ctr"/>
+                      <a:r>
+                        <a:rPr sz="1700" b="1">
+                          <a:solidFill>
+                            <a:srgbClr val="1A1A1A"/>
+                          </a:solidFill>
+                        </a:rPr>
+                        <a:t>GWR</a:t>
+                      </a:r>
+                    </a:p>
+                  </a:txBody>
+                  <a:tcPr>
+                    <a:solidFill>
+                      <a:srgbClr val="E2EFDA"/>
+                    </a:solidFill>
+                  </a:tcPr>
+                </a:tc>
+                <a:tc>
+                  <a:txBody>
+                    <a:bodyPr/>
+                    <a:lstStyle/>
+                    <a:p>
+                      <a:pPr algn="ctr"/>
+                      <a:r>
+                        <a:rPr sz="1700" b="1">
+                          <a:solidFill>
+                            <a:srgbClr val="1A1A1A"/>
+                          </a:solidFill>
+                        </a:rPr>
+                        <a:t>0,458</a:t>
+                      </a:r>
+                    </a:p>
+                  </a:txBody>
+                  <a:tcPr>
+                    <a:solidFill>
+                      <a:srgbClr val="E2EFDA"/>
+                    </a:solidFill>
+                  </a:tcPr>
+                </a:tc>
+                <a:tc>
+                  <a:txBody>
+                    <a:bodyPr/>
+                    <a:lstStyle/>
+                    <a:p>
+                      <a:pPr algn="ctr"/>
+                      <a:r>
+                        <a:rPr sz="1700" b="1">
+                          <a:solidFill>
+                            <a:srgbClr val="1A1A1A"/>
+                          </a:solidFill>
+                        </a:rPr>
+                        <a:t>0,532</a:t>
+                      </a:r>
+                    </a:p>
+                  </a:txBody>
+                  <a:tcPr>
+                    <a:solidFill>
+                      <a:srgbClr val="E2EFDA"/>
+                    </a:solidFill>
+                  </a:tcPr>
+                </a:tc>
+                <a:tc>
+                  <a:txBody>
+                    <a:bodyPr/>
+                    <a:lstStyle/>
+                    <a:p>
+                      <a:pPr algn="ctr"/>
+                      <a:r>
+                        <a:rPr sz="1700" b="1">
+                          <a:solidFill>
+                            <a:srgbClr val="1A1A1A"/>
+                          </a:solidFill>
+                        </a:rPr>
+                        <a:t>+0,074</a:t>
+                      </a:r>
+                    </a:p>
+                  </a:txBody>
+                  <a:tcPr>
+                    <a:solidFill>
+                      <a:srgbClr val="E2EFDA"/>
+                    </a:solidFill>
+                  </a:tcPr>
+                </a:tc>
+              </a:tr>
+            </a:tbl>
+          </a:graphicData>
+        </a:graphic>
+      </p:graphicFrame>
       <p:sp>
         <p:nvSpPr>
           <p:cNvPr id="6" name="TextBox 5"/>
@@ -4217,8 +5213,8 @@
         </p:nvSpPr>
         <p:spPr>
           <a:xfrm>
-            <a:off x="7772400" y="1920240"/>
-            <a:ext cx="3840480" cy="4114800"/>
+            <a:off x="1737360" y="4480560"/>
+            <a:ext cx="8686800" cy="1280160"/>
           </a:xfrm>
           <a:prstGeom prst="rect">
             <a:avLst/>
@@ -4226,65 +5222,24 @@
           <a:noFill/>
         </p:spPr>
         <p:txBody>
-          <a:bodyPr wrap="square">
+          <a:bodyPr wrap="square" anchor="t">
             <a:spAutoFit/>
           </a:bodyPr>
           <a:lstStyle/>
           <a:p>
-            <a:pPr>
+            <a:pPr algn="ctr">
               <a:lnSpc>
                 <a:spcPct val="115000"/>
               </a:lnSpc>
-              <a:spcAft>
-                <a:spcPts val="1600"/>
-              </a:spcAft>
             </a:pPr>
             <a:r>
-              <a:rPr sz="1500">
-                <a:solidFill>
-                  <a:srgbClr val="333333"/>
+              <a:rPr sz="1500" b="0" i="0">
+                <a:solidFill>
+                  <a:srgbClr val="595959"/>
                 </a:solidFill>
                 <a:latin typeface="Calibri"/>
               </a:rPr>
-              <a:t>—  Sem litoral: resíduo médio +10,68 (litorâneos) vs. −0,27 (demais).</a:t>
-            </a:r>
-          </a:p>
-          <a:p>
-            <a:pPr>
-              <a:lnSpc>
-                <a:spcPct val="115000"/>
-              </a:lnSpc>
-              <a:spcAft>
-                <a:spcPts val="1600"/>
-              </a:spcAft>
-            </a:pPr>
-            <a:r>
-              <a:rPr sz="1500">
-                <a:solidFill>
-                  <a:srgbClr val="333333"/>
-                </a:solidFill>
-                <a:latin typeface="Calibri"/>
-              </a:rPr>
-              <a:t>—  Com litoral: os dois grupos centram em zero.</a:t>
-            </a:r>
-          </a:p>
-          <a:p>
-            <a:pPr>
-              <a:lnSpc>
-                <a:spcPct val="115000"/>
-              </a:lnSpc>
-              <a:spcAft>
-                <a:spcPts val="1600"/>
-              </a:spcAft>
-            </a:pPr>
-            <a:r>
-              <a:rPr sz="1500">
-                <a:solidFill>
-                  <a:srgbClr val="333333"/>
-                </a:solidFill>
-                <a:latin typeface="Calibri"/>
-              </a:rPr>
-              <a:t>—  Correlação resíduo × litoral cai de 0,51 para 0,00.</a:t>
+              <a:t>O ganho do litoral é maior no modelo mais simples (OLS, +0,228) e menor nos modelos espaciais (+0,052 no spatial error, +0,074 no GWR) — sinal de que eles já capturavam parte do padrão litorâneo implicitamente, pela geografia.</a:t>
             </a:r>
           </a:p>
         </p:txBody>
@@ -4395,92 +5350,14 @@
       <p:grpSpPr/>
       <p:sp>
         <p:nvSpPr>
-          <p:cNvPr id="2" name="TextBox 1"/>
-          <p:cNvSpPr txBox="1"/>
-          <p:nvPr/>
-        </p:nvSpPr>
-        <p:spPr>
-          <a:xfrm>
-            <a:off x="548640" y="320040"/>
-            <a:ext cx="7315200" cy="365760"/>
-          </a:xfrm>
-          <a:prstGeom prst="rect">
-            <a:avLst/>
-          </a:prstGeom>
-          <a:noFill/>
-        </p:spPr>
-        <p:txBody>
-          <a:bodyPr wrap="square" anchor="t">
-            <a:spAutoFit/>
-          </a:bodyPr>
-          <a:lstStyle/>
-          <a:p>
-            <a:pPr algn="l">
-              <a:lnSpc>
-                <a:spcPct val="115000"/>
-              </a:lnSpc>
-            </a:pPr>
-            <a:r>
-              <a:rPr sz="1300" b="1" i="0">
-                <a:solidFill>
-                  <a:srgbClr val="1F4E79"/>
-                </a:solidFill>
-                <a:latin typeface="Calibri"/>
-              </a:rPr>
-              <a:t>DESENVOLVIMENTO E RESULTADOS</a:t>
-            </a:r>
-          </a:p>
-        </p:txBody>
-      </p:sp>
-      <p:sp>
-        <p:nvSpPr>
-          <p:cNvPr id="3" name="TextBox 2"/>
-          <p:cNvSpPr txBox="1"/>
-          <p:nvPr/>
-        </p:nvSpPr>
-        <p:spPr>
-          <a:xfrm>
-            <a:off x="548640" y="594360"/>
-            <a:ext cx="11064240" cy="822960"/>
-          </a:xfrm>
-          <a:prstGeom prst="rect">
-            <a:avLst/>
-          </a:prstGeom>
-          <a:noFill/>
-        </p:spPr>
-        <p:txBody>
-          <a:bodyPr wrap="square" anchor="t">
-            <a:spAutoFit/>
-          </a:bodyPr>
-          <a:lstStyle/>
-          <a:p>
-            <a:pPr algn="l">
-              <a:lnSpc>
-                <a:spcPct val="115000"/>
-              </a:lnSpc>
-            </a:pPr>
-            <a:r>
-              <a:rPr sz="3000" b="1" i="0">
-                <a:solidFill>
-                  <a:srgbClr val="1A1A1A"/>
-                </a:solidFill>
-                <a:latin typeface="Calibri"/>
-              </a:rPr>
-              <a:t>Comparação final dos modelos</a:t>
-            </a:r>
-          </a:p>
-        </p:txBody>
-      </p:sp>
-      <p:sp>
-        <p:nvSpPr>
-          <p:cNvPr id="4" name="Rectangle 3"/>
+          <p:cNvPr id="2" name="Rectangle 1"/>
           <p:cNvSpPr/>
           <p:nvPr/>
         </p:nvSpPr>
         <p:spPr>
           <a:xfrm>
-            <a:off x="548640" y="1325880"/>
-            <a:ext cx="11064240" cy="27940"/>
+            <a:off x="0" y="6693408"/>
+            <a:ext cx="12191695" cy="164592"/>
           </a:xfrm>
           <a:prstGeom prst="rect">
             <a:avLst/>
@@ -4515,404 +5392,16 @@
           </a:p>
         </p:txBody>
       </p:sp>
-      <p:graphicFrame>
-        <p:nvGraphicFramePr>
-          <p:cNvPr id="5" name="Table 4"/>
-          <p:cNvGraphicFramePr>
-            <a:graphicFrameLocks noGrp="1"/>
-          </p:cNvGraphicFramePr>
-          <p:nvPr/>
-        </p:nvGraphicFramePr>
-        <p:xfrm>
-          <a:off x="1280160" y="2011680"/>
-          <a:ext cx="6766560" cy="2011680"/>
-        </p:xfrm>
-        <a:graphic>
-          <a:graphicData uri="http://schemas.openxmlformats.org/drawingml/2006/table">
-            <a:tbl>
-              <a:tblPr firstRow="1" bandRow="1">
-                <a:tableStyleId>{5C22544A-7EE6-4342-B048-85BDC9FD1C3A}</a:tableStyleId>
-              </a:tblPr>
-              <a:tblGrid>
-                <a:gridCol w="2194560"/>
-                <a:gridCol w="1645920"/>
-                <a:gridCol w="1645920"/>
-                <a:gridCol w="1280160"/>
-              </a:tblGrid>
-              <a:tr h="502920">
-                <a:tc>
-                  <a:txBody>
-                    <a:bodyPr/>
-                    <a:lstStyle/>
-                    <a:p>
-                      <a:pPr algn="ctr"/>
-                      <a:r>
-                        <a:rPr b="1" sz="1500">
-                          <a:solidFill>
-                            <a:srgbClr val="FFFFFF"/>
-                          </a:solidFill>
-                        </a:rPr>
-                        <a:t>Modelo</a:t>
-                      </a:r>
-                    </a:p>
-                  </a:txBody>
-                  <a:tcPr>
-                    <a:solidFill>
-                      <a:srgbClr val="1F4E79"/>
-                    </a:solidFill>
-                  </a:tcPr>
-                </a:tc>
-                <a:tc>
-                  <a:txBody>
-                    <a:bodyPr/>
-                    <a:lstStyle/>
-                    <a:p>
-                      <a:pPr algn="ctr"/>
-                      <a:r>
-                        <a:rPr b="1" sz="1500">
-                          <a:solidFill>
-                            <a:srgbClr val="FFFFFF"/>
-                          </a:solidFill>
-                        </a:rPr>
-                        <a:t>Sem litoral</a:t>
-                      </a:r>
-                    </a:p>
-                  </a:txBody>
-                  <a:tcPr>
-                    <a:solidFill>
-                      <a:srgbClr val="1F4E79"/>
-                    </a:solidFill>
-                  </a:tcPr>
-                </a:tc>
-                <a:tc>
-                  <a:txBody>
-                    <a:bodyPr/>
-                    <a:lstStyle/>
-                    <a:p>
-                      <a:pPr algn="ctr"/>
-                      <a:r>
-                        <a:rPr b="1" sz="1500">
-                          <a:solidFill>
-                            <a:srgbClr val="FFFFFF"/>
-                          </a:solidFill>
-                        </a:rPr>
-                        <a:t>Com litoral</a:t>
-                      </a:r>
-                    </a:p>
-                  </a:txBody>
-                  <a:tcPr>
-                    <a:solidFill>
-                      <a:srgbClr val="1F4E79"/>
-                    </a:solidFill>
-                  </a:tcPr>
-                </a:tc>
-                <a:tc>
-                  <a:txBody>
-                    <a:bodyPr/>
-                    <a:lstStyle/>
-                    <a:p>
-                      <a:pPr algn="ctr"/>
-                      <a:r>
-                        <a:rPr b="1" sz="1500">
-                          <a:solidFill>
-                            <a:srgbClr val="FFFFFF"/>
-                          </a:solidFill>
-                        </a:rPr>
-                        <a:t>Δ</a:t>
-                      </a:r>
-                    </a:p>
-                  </a:txBody>
-                  <a:tcPr>
-                    <a:solidFill>
-                      <a:srgbClr val="1F4E79"/>
-                    </a:solidFill>
-                  </a:tcPr>
-                </a:tc>
-              </a:tr>
-              <a:tr h="502920">
-                <a:tc>
-                  <a:txBody>
-                    <a:bodyPr/>
-                    <a:lstStyle/>
-                    <a:p>
-                      <a:pPr algn="ctr"/>
-                      <a:r>
-                        <a:rPr sz="1600" b="0">
-                          <a:solidFill>
-                            <a:srgbClr val="1A1A1A"/>
-                          </a:solidFill>
-                        </a:rPr>
-                        <a:t>OLS</a:t>
-                      </a:r>
-                    </a:p>
-                  </a:txBody>
-                  <a:tcPr>
-                    <a:solidFill>
-                      <a:srgbClr val="FFFFFF"/>
-                    </a:solidFill>
-                  </a:tcPr>
-                </a:tc>
-                <a:tc>
-                  <a:txBody>
-                    <a:bodyPr/>
-                    <a:lstStyle/>
-                    <a:p>
-                      <a:pPr algn="ctr"/>
-                      <a:r>
-                        <a:rPr sz="1600" b="0">
-                          <a:solidFill>
-                            <a:srgbClr val="1A1A1A"/>
-                          </a:solidFill>
-                        </a:rPr>
-                        <a:t>0,129</a:t>
-                      </a:r>
-                    </a:p>
-                  </a:txBody>
-                  <a:tcPr>
-                    <a:solidFill>
-                      <a:srgbClr val="FFFFFF"/>
-                    </a:solidFill>
-                  </a:tcPr>
-                </a:tc>
-                <a:tc>
-                  <a:txBody>
-                    <a:bodyPr/>
-                    <a:lstStyle/>
-                    <a:p>
-                      <a:pPr algn="ctr"/>
-                      <a:r>
-                        <a:rPr sz="1600" b="0">
-                          <a:solidFill>
-                            <a:srgbClr val="1A1A1A"/>
-                          </a:solidFill>
-                        </a:rPr>
-                        <a:t>0,357</a:t>
-                      </a:r>
-                    </a:p>
-                  </a:txBody>
-                  <a:tcPr>
-                    <a:solidFill>
-                      <a:srgbClr val="FFFFFF"/>
-                    </a:solidFill>
-                  </a:tcPr>
-                </a:tc>
-                <a:tc>
-                  <a:txBody>
-                    <a:bodyPr/>
-                    <a:lstStyle/>
-                    <a:p>
-                      <a:pPr algn="ctr"/>
-                      <a:r>
-                        <a:rPr sz="1600" b="0">
-                          <a:solidFill>
-                            <a:srgbClr val="1A1A1A"/>
-                          </a:solidFill>
-                        </a:rPr>
-                        <a:t>+0,228</a:t>
-                      </a:r>
-                    </a:p>
-                  </a:txBody>
-                  <a:tcPr>
-                    <a:solidFill>
-                      <a:srgbClr val="FFFFFF"/>
-                    </a:solidFill>
-                  </a:tcPr>
-                </a:tc>
-              </a:tr>
-              <a:tr h="502920">
-                <a:tc>
-                  <a:txBody>
-                    <a:bodyPr/>
-                    <a:lstStyle/>
-                    <a:p>
-                      <a:pPr algn="ctr"/>
-                      <a:r>
-                        <a:rPr sz="1600" b="0">
-                          <a:solidFill>
-                            <a:srgbClr val="1A1A1A"/>
-                          </a:solidFill>
-                        </a:rPr>
-                        <a:t>Spatial Error</a:t>
-                      </a:r>
-                    </a:p>
-                  </a:txBody>
-                  <a:tcPr>
-                    <a:solidFill>
-                      <a:srgbClr val="F2F2F2"/>
-                    </a:solidFill>
-                  </a:tcPr>
-                </a:tc>
-                <a:tc>
-                  <a:txBody>
-                    <a:bodyPr/>
-                    <a:lstStyle/>
-                    <a:p>
-                      <a:pPr algn="ctr"/>
-                      <a:r>
-                        <a:rPr sz="1600" b="0">
-                          <a:solidFill>
-                            <a:srgbClr val="1A1A1A"/>
-                          </a:solidFill>
-                        </a:rPr>
-                        <a:t>0,392</a:t>
-                      </a:r>
-                    </a:p>
-                  </a:txBody>
-                  <a:tcPr>
-                    <a:solidFill>
-                      <a:srgbClr val="F2F2F2"/>
-                    </a:solidFill>
-                  </a:tcPr>
-                </a:tc>
-                <a:tc>
-                  <a:txBody>
-                    <a:bodyPr/>
-                    <a:lstStyle/>
-                    <a:p>
-                      <a:pPr algn="ctr"/>
-                      <a:r>
-                        <a:rPr sz="1600" b="0">
-                          <a:solidFill>
-                            <a:srgbClr val="1A1A1A"/>
-                          </a:solidFill>
-                        </a:rPr>
-                        <a:t>0,444</a:t>
-                      </a:r>
-                    </a:p>
-                  </a:txBody>
-                  <a:tcPr>
-                    <a:solidFill>
-                      <a:srgbClr val="F2F2F2"/>
-                    </a:solidFill>
-                  </a:tcPr>
-                </a:tc>
-                <a:tc>
-                  <a:txBody>
-                    <a:bodyPr/>
-                    <a:lstStyle/>
-                    <a:p>
-                      <a:pPr algn="ctr"/>
-                      <a:r>
-                        <a:rPr sz="1600" b="0">
-                          <a:solidFill>
-                            <a:srgbClr val="1A1A1A"/>
-                          </a:solidFill>
-                        </a:rPr>
-                        <a:t>+0,052</a:t>
-                      </a:r>
-                    </a:p>
-                  </a:txBody>
-                  <a:tcPr>
-                    <a:solidFill>
-                      <a:srgbClr val="F2F2F2"/>
-                    </a:solidFill>
-                  </a:tcPr>
-                </a:tc>
-              </a:tr>
-              <a:tr h="502920">
-                <a:tc>
-                  <a:txBody>
-                    <a:bodyPr/>
-                    <a:lstStyle/>
-                    <a:p>
-                      <a:pPr algn="ctr"/>
-                      <a:r>
-                        <a:rPr sz="1600" b="1">
-                          <a:solidFill>
-                            <a:srgbClr val="1A1A1A"/>
-                          </a:solidFill>
-                        </a:rPr>
-                        <a:t>GWR</a:t>
-                      </a:r>
-                    </a:p>
-                  </a:txBody>
-                  <a:tcPr>
-                    <a:solidFill>
-                      <a:srgbClr val="E2EFDA"/>
-                    </a:solidFill>
-                  </a:tcPr>
-                </a:tc>
-                <a:tc>
-                  <a:txBody>
-                    <a:bodyPr/>
-                    <a:lstStyle/>
-                    <a:p>
-                      <a:pPr algn="ctr"/>
-                      <a:r>
-                        <a:rPr sz="1600" b="1">
-                          <a:solidFill>
-                            <a:srgbClr val="1A1A1A"/>
-                          </a:solidFill>
-                        </a:rPr>
-                        <a:t>0,458</a:t>
-                      </a:r>
-                    </a:p>
-                  </a:txBody>
-                  <a:tcPr>
-                    <a:solidFill>
-                      <a:srgbClr val="E2EFDA"/>
-                    </a:solidFill>
-                  </a:tcPr>
-                </a:tc>
-                <a:tc>
-                  <a:txBody>
-                    <a:bodyPr/>
-                    <a:lstStyle/>
-                    <a:p>
-                      <a:pPr algn="ctr"/>
-                      <a:r>
-                        <a:rPr sz="1600" b="1">
-                          <a:solidFill>
-                            <a:srgbClr val="1A1A1A"/>
-                          </a:solidFill>
-                        </a:rPr>
-                        <a:t>0,532</a:t>
-                      </a:r>
-                    </a:p>
-                  </a:txBody>
-                  <a:tcPr>
-                    <a:solidFill>
-                      <a:srgbClr val="E2EFDA"/>
-                    </a:solidFill>
-                  </a:tcPr>
-                </a:tc>
-                <a:tc>
-                  <a:txBody>
-                    <a:bodyPr/>
-                    <a:lstStyle/>
-                    <a:p>
-                      <a:pPr algn="ctr"/>
-                      <a:r>
-                        <a:rPr sz="1600" b="1">
-                          <a:solidFill>
-                            <a:srgbClr val="1A1A1A"/>
-                          </a:solidFill>
-                        </a:rPr>
-                        <a:t>+0,074</a:t>
-                      </a:r>
-                    </a:p>
-                  </a:txBody>
-                  <a:tcPr>
-                    <a:solidFill>
-                      <a:srgbClr val="E2EFDA"/>
-                    </a:solidFill>
-                  </a:tcPr>
-                </a:tc>
-              </a:tr>
-            </a:tbl>
-          </a:graphicData>
-        </a:graphic>
-      </p:graphicFrame>
-      <p:sp>
-        <p:nvSpPr>
-          <p:cNvPr id="6" name="TextBox 5"/>
+      <p:sp>
+        <p:nvSpPr>
+          <p:cNvPr id="3" name="TextBox 2"/>
           <p:cNvSpPr txBox="1"/>
           <p:nvPr/>
         </p:nvSpPr>
         <p:spPr>
           <a:xfrm>
-            <a:off x="1280160" y="4297680"/>
-            <a:ext cx="9692640" cy="1280160"/>
+            <a:off x="548640" y="320040"/>
+            <a:ext cx="8229600" cy="365760"/>
           </a:xfrm>
           <a:prstGeom prst="rect">
             <a:avLst/>
@@ -4931,35 +5420,72 @@
               </a:lnSpc>
             </a:pPr>
             <a:r>
-              <a:rPr sz="1500" b="0" i="0">
-                <a:solidFill>
-                  <a:srgbClr val="595959"/>
+              <a:rPr sz="1300" b="1" i="0">
+                <a:solidFill>
+                  <a:srgbClr val="1F4E79"/>
                 </a:solidFill>
                 <a:latin typeface="Calibri"/>
               </a:rPr>
-              <a:t>O ganho da variável litoral é maior no modelo mais simples (OLS, +0,228) e menor nos modelos espaciais (+0,052 no spatial error, +0,074 no GWR) — sinal de que os modelos espaciais já capturavam parte do padrão litorâneo implicitamente.</a:t>
-            </a:r>
-          </a:p>
-        </p:txBody>
-      </p:sp>
-      <p:sp>
-        <p:nvSpPr>
-          <p:cNvPr id="7" name="Rounded Rectangle 6"/>
+              <a:t>CONCLUSÃO</a:t>
+            </a:r>
+          </a:p>
+        </p:txBody>
+      </p:sp>
+      <p:sp>
+        <p:nvSpPr>
+          <p:cNvPr id="4" name="TextBox 3"/>
+          <p:cNvSpPr txBox="1"/>
+          <p:nvPr/>
+        </p:nvSpPr>
+        <p:spPr>
+          <a:xfrm>
+            <a:off x="548640" y="594360"/>
+            <a:ext cx="11064240" cy="822960"/>
+          </a:xfrm>
+          <a:prstGeom prst="rect">
+            <a:avLst/>
+          </a:prstGeom>
+          <a:noFill/>
+        </p:spPr>
+        <p:txBody>
+          <a:bodyPr wrap="square" anchor="t">
+            <a:spAutoFit/>
+          </a:bodyPr>
+          <a:lstStyle/>
+          <a:p>
+            <a:pPr algn="l">
+              <a:lnSpc>
+                <a:spcPct val="115000"/>
+              </a:lnSpc>
+            </a:pPr>
+            <a:r>
+              <a:rPr sz="2800" b="1" i="0">
+                <a:solidFill>
+                  <a:srgbClr val="1A1A1A"/>
+                </a:solidFill>
+                <a:latin typeface="Calibri"/>
+              </a:rPr>
+              <a:t>Conclusão: não é pobreza. É território.</a:t>
+            </a:r>
+          </a:p>
+        </p:txBody>
+      </p:sp>
+      <p:sp>
+        <p:nvSpPr>
+          <p:cNvPr id="5" name="Rectangle 4"/>
           <p:cNvSpPr/>
           <p:nvPr/>
         </p:nvSpPr>
         <p:spPr>
           <a:xfrm>
-            <a:off x="8686800" y="2011680"/>
-            <a:ext cx="2743200" cy="2011680"/>
-          </a:xfrm>
-          <a:prstGeom prst="roundRect">
-            <a:avLst>
-              <a:gd name="adj" fmla="val 8000"/>
-            </a:avLst>
+            <a:off x="548640" y="1280160"/>
+            <a:ext cx="11064240" cy="27940"/>
+          </a:xfrm>
+          <a:prstGeom prst="rect">
+            <a:avLst/>
           </a:prstGeom>
           <a:solidFill>
-            <a:srgbClr val="F2F2F2"/>
+            <a:srgbClr val="1F4E79"/>
           </a:solidFill>
           <a:ln>
             <a:noFill/>
@@ -4981,230 +5507,25 @@
           </a:fontRef>
         </p:style>
         <p:txBody>
-          <a:bodyPr rtlCol="0" anchor="ctr" wrap="square" lIns="137160" rIns="137160"/>
+          <a:bodyPr rtlCol="0" anchor="ctr"/>
           <a:lstStyle/>
           <a:p>
             <a:pPr algn="ctr"/>
-            <a:r>
-              <a:rPr sz="2600" b="1">
-                <a:solidFill>
-                  <a:srgbClr val="2E7D32"/>
-                </a:solidFill>
-                <a:latin typeface="Calibri"/>
-              </a:rPr>
-              <a:t>R² = 0,532</a:t>
-            </a:r>
-          </a:p>
-          <a:p>
-            <a:pPr algn="ctr"/>
-            <a:r>
-              <a:rPr sz="1200">
-                <a:solidFill>
-                  <a:srgbClr val="595959"/>
-                </a:solidFill>
-                <a:latin typeface="Calibri"/>
-              </a:rPr>
-              <a:t>melhor modelo:
-GWR renda + litoral
-(menor AIC: 3027,4)</a:t>
-            </a:r>
-          </a:p>
-        </p:txBody>
-      </p:sp>
-      <p:sp>
-        <p:nvSpPr>
-          <p:cNvPr id="8" name="TextBox 7"/>
-          <p:cNvSpPr txBox="1"/>
-          <p:nvPr/>
-        </p:nvSpPr>
-        <p:spPr>
-          <a:xfrm>
-            <a:off x="548640" y="6510528"/>
-            <a:ext cx="7315200" cy="274320"/>
-          </a:xfrm>
-          <a:prstGeom prst="rect">
-            <a:avLst/>
-          </a:prstGeom>
-          <a:noFill/>
-        </p:spPr>
-        <p:txBody>
-          <a:bodyPr wrap="square" anchor="t">
-            <a:spAutoFit/>
-          </a:bodyPr>
-          <a:lstStyle/>
-          <a:p>
-            <a:pPr algn="l">
-              <a:lnSpc>
-                <a:spcPct val="115000"/>
-              </a:lnSpc>
-            </a:pPr>
-            <a:r>
-              <a:rPr sz="1000" b="0" i="0">
-                <a:solidFill>
-                  <a:srgbClr val="595959"/>
-                </a:solidFill>
-                <a:latin typeface="Calibri"/>
-              </a:rPr>
-              <a:t>Furto, Renda e Território — UFABC</a:t>
-            </a:r>
-          </a:p>
-        </p:txBody>
-      </p:sp>
-      <p:sp>
-        <p:nvSpPr>
-          <p:cNvPr id="9" name="TextBox 8"/>
-          <p:cNvSpPr txBox="1"/>
-          <p:nvPr/>
-        </p:nvSpPr>
-        <p:spPr>
-          <a:xfrm>
-            <a:off x="10972800" y="6510528"/>
-            <a:ext cx="731520" cy="274320"/>
-          </a:xfrm>
-          <a:prstGeom prst="rect">
-            <a:avLst/>
-          </a:prstGeom>
-          <a:noFill/>
-        </p:spPr>
-        <p:txBody>
-          <a:bodyPr wrap="square" anchor="t">
-            <a:spAutoFit/>
-          </a:bodyPr>
-          <a:lstStyle/>
-          <a:p>
-            <a:pPr algn="r">
-              <a:lnSpc>
-                <a:spcPct val="115000"/>
-              </a:lnSpc>
-            </a:pPr>
-            <a:r>
-              <a:rPr sz="1000" b="0" i="0">
-                <a:solidFill>
-                  <a:srgbClr val="595959"/>
-                </a:solidFill>
-                <a:latin typeface="Calibri"/>
-              </a:rPr>
-              <a:t>13</a:t>
-            </a:r>
-          </a:p>
-        </p:txBody>
-      </p:sp>
-    </p:spTree>
-  </p:cSld>
-  <p:clrMapOvr>
-    <a:masterClrMapping/>
-  </p:clrMapOvr>
-</p:sld>
-</file>
-
-<file path=ppt/slides/slide14.xml><?xml version="1.0" encoding="utf-8"?>
-<p:sld xmlns:a="http://schemas.openxmlformats.org/drawingml/2006/main" xmlns:p="http://schemas.openxmlformats.org/presentationml/2006/main" xmlns:r="http://schemas.openxmlformats.org/officeDocument/2006/relationships">
-  <p:cSld>
-    <p:bg>
-      <p:bgPr>
-        <a:solidFill>
-          <a:srgbClr val="FFFFFF"/>
-        </a:solidFill>
-        <a:effectLst/>
-      </p:bgPr>
-    </p:bg>
-    <p:spTree>
-      <p:nvGrpSpPr>
-        <p:cNvPr id="1" name=""/>
-        <p:cNvGrpSpPr/>
-        <p:nvPr/>
-      </p:nvGrpSpPr>
-      <p:grpSpPr/>
-      <p:sp>
-        <p:nvSpPr>
-          <p:cNvPr id="2" name="TextBox 1"/>
-          <p:cNvSpPr txBox="1"/>
-          <p:nvPr/>
-        </p:nvSpPr>
-        <p:spPr>
-          <a:xfrm>
-            <a:off x="548640" y="320040"/>
-            <a:ext cx="7315200" cy="365760"/>
-          </a:xfrm>
-          <a:prstGeom prst="rect">
-            <a:avLst/>
-          </a:prstGeom>
-          <a:noFill/>
-        </p:spPr>
-        <p:txBody>
-          <a:bodyPr wrap="square" anchor="t">
-            <a:spAutoFit/>
-          </a:bodyPr>
-          <a:lstStyle/>
-          <a:p>
-            <a:pPr algn="l">
-              <a:lnSpc>
-                <a:spcPct val="115000"/>
-              </a:lnSpc>
-            </a:pPr>
-            <a:r>
-              <a:rPr sz="1300" b="1" i="0">
-                <a:solidFill>
-                  <a:srgbClr val="1F4E79"/>
-                </a:solidFill>
-                <a:latin typeface="Calibri"/>
-              </a:rPr>
-              <a:t>CONCLUSÃO</a:t>
-            </a:r>
-          </a:p>
-        </p:txBody>
-      </p:sp>
-      <p:sp>
-        <p:nvSpPr>
-          <p:cNvPr id="3" name="TextBox 2"/>
-          <p:cNvSpPr txBox="1"/>
-          <p:nvPr/>
-        </p:nvSpPr>
-        <p:spPr>
-          <a:xfrm>
-            <a:off x="548640" y="594360"/>
-            <a:ext cx="11064240" cy="822960"/>
-          </a:xfrm>
-          <a:prstGeom prst="rect">
-            <a:avLst/>
-          </a:prstGeom>
-          <a:noFill/>
-        </p:spPr>
-        <p:txBody>
-          <a:bodyPr wrap="square" anchor="t">
-            <a:spAutoFit/>
-          </a:bodyPr>
-          <a:lstStyle/>
-          <a:p>
-            <a:pPr algn="l">
-              <a:lnSpc>
-                <a:spcPct val="115000"/>
-              </a:lnSpc>
-            </a:pPr>
-            <a:r>
-              <a:rPr sz="3000" b="1" i="0">
-                <a:solidFill>
-                  <a:srgbClr val="1A1A1A"/>
-                </a:solidFill>
-                <a:latin typeface="Calibri"/>
-              </a:rPr>
-              <a:t>H1 não se sustenta; H2 explica o padrão observado</a:t>
-            </a:r>
-          </a:p>
-        </p:txBody>
-      </p:sp>
-      <p:sp>
-        <p:nvSpPr>
-          <p:cNvPr id="4" name="Rectangle 3"/>
+          </a:p>
+        </p:txBody>
+      </p:sp>
+      <p:sp>
+        <p:nvSpPr>
+          <p:cNvPr id="6" name="Oval 5"/>
           <p:cNvSpPr/>
           <p:nvPr/>
         </p:nvSpPr>
         <p:spPr>
           <a:xfrm>
-            <a:off x="548640" y="1325880"/>
-            <a:ext cx="11064240" cy="27940"/>
-          </a:xfrm>
-          <a:prstGeom prst="rect">
+            <a:off x="548640" y="1691640"/>
+            <a:ext cx="502920" cy="502920"/>
+          </a:xfrm>
+          <a:prstGeom prst="ellipse">
             <a:avLst/>
           </a:prstGeom>
           <a:solidFill>
@@ -5234,104 +5555,27 @@
           <a:lstStyle/>
           <a:p>
             <a:pPr algn="ctr"/>
-          </a:p>
-        </p:txBody>
-      </p:sp>
-      <p:sp>
-        <p:nvSpPr>
-          <p:cNvPr id="5" name="TextBox 4"/>
+            <a:r>
+              <a:rPr sz="1600" b="1">
+                <a:solidFill>
+                  <a:srgbClr val="FFFFFF"/>
+                </a:solidFill>
+              </a:rPr>
+              <a:t>1</a:t>
+            </a:r>
+          </a:p>
+        </p:txBody>
+      </p:sp>
+      <p:sp>
+        <p:nvSpPr>
+          <p:cNvPr id="7" name="TextBox 6"/>
           <p:cNvSpPr txBox="1"/>
           <p:nvPr/>
         </p:nvSpPr>
         <p:spPr>
           <a:xfrm>
-            <a:off x="548640" y="1737360"/>
-            <a:ext cx="11064240" cy="4206240"/>
-          </a:xfrm>
-          <a:prstGeom prst="rect">
-            <a:avLst/>
-          </a:prstGeom>
-          <a:noFill/>
-        </p:spPr>
-        <p:txBody>
-          <a:bodyPr wrap="square">
-            <a:spAutoFit/>
-          </a:bodyPr>
-          <a:lstStyle/>
-          <a:p>
-            <a:pPr>
-              <a:lnSpc>
-                <a:spcPct val="115000"/>
-              </a:lnSpc>
-              <a:spcAft>
-                <a:spcPts val="1800"/>
-              </a:spcAft>
-            </a:pPr>
-            <a:r>
-              <a:rPr sz="1700">
-                <a:solidFill>
-                  <a:srgbClr val="333333"/>
-                </a:solidFill>
-                <a:latin typeface="Calibri"/>
-              </a:rPr>
-              <a:t>—  A relação entre renda e taxa de furto é positiva, não negativa — em toda
-correlação simples e em todos os modelos de regressão testados.</a:t>
-            </a:r>
-          </a:p>
-          <a:p>
-            <a:pPr>
-              <a:lnSpc>
-                <a:spcPct val="115000"/>
-              </a:lnSpc>
-              <a:spcAft>
-                <a:spcPts val="1800"/>
-              </a:spcAft>
-            </a:pPr>
-            <a:r>
-              <a:rPr sz="1700">
-                <a:solidFill>
-                  <a:srgbClr val="333333"/>
-                </a:solidFill>
-                <a:latin typeface="Calibri"/>
-              </a:rPr>
-              <a:t>—  Três camadas do fenômeno: (i) a renda sozinha deixa estrutura espacial não
-explicada nos resíduos; (ii) essa estrutura é majoritariamente absorvida pela
-condição litorânea; (iii) mesmo controlando por ela, a relação renda–furto
-não é estacionária — forte no interior, quase nula no litoral.</a:t>
-            </a:r>
-          </a:p>
-          <a:p>
-            <a:pPr>
-              <a:lnSpc>
-                <a:spcPct val="115000"/>
-              </a:lnSpc>
-              <a:spcAft>
-                <a:spcPts val="1800"/>
-              </a:spcAft>
-            </a:pPr>
-            <a:r>
-              <a:rPr sz="1700">
-                <a:solidFill>
-                  <a:srgbClr val="333333"/>
-                </a:solidFill>
-                <a:latin typeface="Calibri"/>
-              </a:rPr>
-              <a:t>—  Mecanismo mais consistente com a evidência: população flutuante de verão
-infla o numerador (ocorrências) sobre um denominador de população residente.</a:t>
-            </a:r>
-          </a:p>
-        </p:txBody>
-      </p:sp>
-      <p:sp>
-        <p:nvSpPr>
-          <p:cNvPr id="6" name="TextBox 5"/>
-          <p:cNvSpPr txBox="1"/>
-          <p:nvPr/>
-        </p:nvSpPr>
-        <p:spPr>
-          <a:xfrm>
-            <a:off x="548640" y="6510528"/>
-            <a:ext cx="7315200" cy="274320"/>
+            <a:off x="1234440" y="1673352"/>
+            <a:ext cx="10424160" cy="777240"/>
           </a:xfrm>
           <a:prstGeom prst="rect">
             <a:avLst/>
@@ -5350,94 +5594,29 @@
               </a:lnSpc>
             </a:pPr>
             <a:r>
-              <a:rPr sz="1000" b="0" i="0">
-                <a:solidFill>
-                  <a:srgbClr val="595959"/>
+              <a:rPr sz="1450" b="0" i="0">
+                <a:solidFill>
+                  <a:srgbClr val="1A1A1A"/>
                 </a:solidFill>
                 <a:latin typeface="Calibri"/>
               </a:rPr>
-              <a:t>Furto, Renda e Território — UFABC</a:t>
-            </a:r>
-          </a:p>
-        </p:txBody>
-      </p:sp>
-      <p:sp>
-        <p:nvSpPr>
-          <p:cNvPr id="7" name="TextBox 6"/>
-          <p:cNvSpPr txBox="1"/>
-          <p:nvPr/>
-        </p:nvSpPr>
-        <p:spPr>
-          <a:xfrm>
-            <a:off x="10972800" y="6510528"/>
-            <a:ext cx="731520" cy="274320"/>
-          </a:xfrm>
-          <a:prstGeom prst="rect">
-            <a:avLst/>
-          </a:prstGeom>
-          <a:noFill/>
-        </p:spPr>
-        <p:txBody>
-          <a:bodyPr wrap="square" anchor="t">
-            <a:spAutoFit/>
-          </a:bodyPr>
-          <a:lstStyle/>
-          <a:p>
-            <a:pPr algn="r">
-              <a:lnSpc>
-                <a:spcPct val="115000"/>
-              </a:lnSpc>
-            </a:pPr>
-            <a:r>
-              <a:rPr sz="1000" b="0" i="0">
-                <a:solidFill>
-                  <a:srgbClr val="595959"/>
-                </a:solidFill>
-                <a:latin typeface="Calibri"/>
-              </a:rPr>
-              <a:t>14</a:t>
-            </a:r>
-          </a:p>
-        </p:txBody>
-      </p:sp>
-    </p:spTree>
-  </p:cSld>
-  <p:clrMapOvr>
-    <a:masterClrMapping/>
-  </p:clrMapOvr>
-</p:sld>
-</file>
-
-<file path=ppt/slides/slide15.xml><?xml version="1.0" encoding="utf-8"?>
-<p:sld xmlns:a="http://schemas.openxmlformats.org/drawingml/2006/main" xmlns:p="http://schemas.openxmlformats.org/presentationml/2006/main" xmlns:r="http://schemas.openxmlformats.org/officeDocument/2006/relationships">
-  <p:cSld>
-    <p:bg>
-      <p:bgPr>
-        <a:solidFill>
-          <a:srgbClr val="FFFFFF"/>
-        </a:solidFill>
-        <a:effectLst/>
-      </p:bgPr>
-    </p:bg>
-    <p:spTree>
-      <p:nvGrpSpPr>
-        <p:cNvPr id="1" name=""/>
-        <p:cNvGrpSpPr/>
-        <p:nvPr/>
-      </p:nvGrpSpPr>
-      <p:grpSpPr/>
-      <p:sp>
-        <p:nvSpPr>
-          <p:cNvPr id="2" name="Rectangle 1"/>
+              <a:t>A hipótese inicial (H1) não se sustenta: a relação entre renda e furto é positiva em todos os modelos testados, não negativa.</a:t>
+            </a:r>
+          </a:p>
+        </p:txBody>
+      </p:sp>
+      <p:sp>
+        <p:nvSpPr>
+          <p:cNvPr id="8" name="Oval 7"/>
           <p:cNvSpPr/>
           <p:nvPr/>
         </p:nvSpPr>
         <p:spPr>
           <a:xfrm>
-            <a:off x="0" y="6693408"/>
-            <a:ext cx="12191695" cy="164592"/>
-          </a:xfrm>
-          <a:prstGeom prst="rect">
+            <a:off x="548640" y="2532888"/>
+            <a:ext cx="502920" cy="502920"/>
+          </a:xfrm>
+          <a:prstGeom prst="ellipse">
             <a:avLst/>
           </a:prstGeom>
           <a:solidFill>
@@ -5467,19 +5646,27 @@
           <a:lstStyle/>
           <a:p>
             <a:pPr algn="ctr"/>
-          </a:p>
-        </p:txBody>
-      </p:sp>
-      <p:sp>
-        <p:nvSpPr>
-          <p:cNvPr id="3" name="TextBox 2"/>
+            <a:r>
+              <a:rPr sz="1600" b="1">
+                <a:solidFill>
+                  <a:srgbClr val="FFFFFF"/>
+                </a:solidFill>
+              </a:rPr>
+              <a:t>2</a:t>
+            </a:r>
+          </a:p>
+        </p:txBody>
+      </p:sp>
+      <p:sp>
+        <p:nvSpPr>
+          <p:cNvPr id="9" name="TextBox 8"/>
           <p:cNvSpPr txBox="1"/>
           <p:nvPr/>
         </p:nvSpPr>
         <p:spPr>
           <a:xfrm>
-            <a:off x="548640" y="320040"/>
-            <a:ext cx="7315200" cy="365760"/>
+            <a:off x="1234440" y="2514600"/>
+            <a:ext cx="10424160" cy="777240"/>
           </a:xfrm>
           <a:prstGeom prst="rect">
             <a:avLst/>
@@ -5498,68 +5685,29 @@
               </a:lnSpc>
             </a:pPr>
             <a:r>
-              <a:rPr sz="1300" b="1" i="0">
-                <a:solidFill>
-                  <a:srgbClr val="1F4E79"/>
+              <a:rPr sz="1450" b="0" i="0">
+                <a:solidFill>
+                  <a:srgbClr val="1A1A1A"/>
                 </a:solidFill>
                 <a:latin typeface="Calibri"/>
               </a:rPr>
-              <a:t>CONCLUSÃO</a:t>
-            </a:r>
-          </a:p>
-        </p:txBody>
-      </p:sp>
-      <p:sp>
-        <p:nvSpPr>
-          <p:cNvPr id="4" name="TextBox 3"/>
-          <p:cNvSpPr txBox="1"/>
-          <p:nvPr/>
-        </p:nvSpPr>
-        <p:spPr>
-          <a:xfrm>
-            <a:off x="548640" y="594360"/>
-            <a:ext cx="11064240" cy="822960"/>
-          </a:xfrm>
-          <a:prstGeom prst="rect">
-            <a:avLst/>
-          </a:prstGeom>
-          <a:noFill/>
-        </p:spPr>
-        <p:txBody>
-          <a:bodyPr wrap="square" anchor="t">
-            <a:spAutoFit/>
-          </a:bodyPr>
-          <a:lstStyle/>
-          <a:p>
-            <a:pPr algn="l">
-              <a:lnSpc>
-                <a:spcPct val="115000"/>
-              </a:lnSpc>
-            </a:pPr>
-            <a:r>
-              <a:rPr sz="3000" b="1" i="0">
-                <a:solidFill>
-                  <a:srgbClr val="1A1A1A"/>
-                </a:solidFill>
-                <a:latin typeface="Calibri"/>
-              </a:rPr>
-              <a:t>Direção futura e agradecimentos</a:t>
-            </a:r>
-          </a:p>
-        </p:txBody>
-      </p:sp>
-      <p:sp>
-        <p:nvSpPr>
-          <p:cNvPr id="5" name="Rectangle 4"/>
+              <a:t>A renda sozinha explica pouco (R²=0,13) e deixa forte autocorrelação espacial nos resíduos clássicos.</a:t>
+            </a:r>
+          </a:p>
+        </p:txBody>
+      </p:sp>
+      <p:sp>
+        <p:nvSpPr>
+          <p:cNvPr id="10" name="Oval 9"/>
           <p:cNvSpPr/>
           <p:nvPr/>
         </p:nvSpPr>
         <p:spPr>
           <a:xfrm>
-            <a:off x="548640" y="1325880"/>
-            <a:ext cx="11064240" cy="27940"/>
-          </a:xfrm>
-          <a:prstGeom prst="rect">
+            <a:off x="548640" y="3374136"/>
+            <a:ext cx="502920" cy="502920"/>
+          </a:xfrm>
+          <a:prstGeom prst="ellipse">
             <a:avLst/>
           </a:prstGeom>
           <a:solidFill>
@@ -5589,63 +5737,27 @@
           <a:lstStyle/>
           <a:p>
             <a:pPr algn="ctr"/>
-          </a:p>
-        </p:txBody>
-      </p:sp>
-      <p:sp>
-        <p:nvSpPr>
-          <p:cNvPr id="6" name="TextBox 5"/>
+            <a:r>
+              <a:rPr sz="1600" b="1">
+                <a:solidFill>
+                  <a:srgbClr val="FFFFFF"/>
+                </a:solidFill>
+              </a:rPr>
+              <a:t>3</a:t>
+            </a:r>
+          </a:p>
+        </p:txBody>
+      </p:sp>
+      <p:sp>
+        <p:nvSpPr>
+          <p:cNvPr id="11" name="TextBox 10"/>
           <p:cNvSpPr txBox="1"/>
           <p:nvPr/>
         </p:nvSpPr>
         <p:spPr>
           <a:xfrm>
-            <a:off x="548640" y="1737360"/>
-            <a:ext cx="11064240" cy="2011680"/>
-          </a:xfrm>
-          <a:prstGeom prst="rect">
-            <a:avLst/>
-          </a:prstGeom>
-          <a:noFill/>
-        </p:spPr>
-        <p:txBody>
-          <a:bodyPr wrap="square">
-            <a:spAutoFit/>
-          </a:bodyPr>
-          <a:lstStyle/>
-          <a:p>
-            <a:pPr>
-              <a:lnSpc>
-                <a:spcPct val="115000"/>
-              </a:lnSpc>
-              <a:spcAft>
-                <a:spcPts val="1600"/>
-              </a:spcAft>
-            </a:pPr>
-            <a:r>
-              <a:rPr sz="1700">
-                <a:solidFill>
-                  <a:srgbClr val="333333"/>
-                </a:solidFill>
-                <a:latin typeface="Calibri"/>
-              </a:rPr>
-              <a:t>—  Incluir uma medida direta de fluxo turístico (hospedagem, pedágios, dados
-de telefonia) para testar o mecanismo diretamente, hoje capturado só
-indiretamente pela dummy litorânea/turística.</a:t>
-            </a:r>
-          </a:p>
-        </p:txBody>
-      </p:sp>
-      <p:sp>
-        <p:nvSpPr>
-          <p:cNvPr id="7" name="TextBox 6"/>
-          <p:cNvSpPr txBox="1"/>
-          <p:nvPr/>
-        </p:nvSpPr>
-        <p:spPr>
-          <a:xfrm>
-            <a:off x="548640" y="4206240"/>
-            <a:ext cx="11064240" cy="1463040"/>
+            <a:off x="1234440" y="3355848"/>
+            <a:ext cx="10424160" cy="777240"/>
           </a:xfrm>
           <a:prstGeom prst="rect">
             <a:avLst/>
@@ -5664,27 +5776,79 @@
               </a:lnSpc>
             </a:pPr>
             <a:r>
-              <a:rPr sz="1800" b="0" i="1">
-                <a:solidFill>
-                  <a:srgbClr val="1F4E79"/>
+              <a:rPr sz="1450" b="0" i="0">
+                <a:solidFill>
+                  <a:srgbClr val="1A1A1A"/>
                 </a:solidFill>
                 <a:latin typeface="Calibri"/>
               </a:rPr>
-              <a:t>Agradecemos à Prof.ª Flávia da Fonseca Feitosa pela orientação ao longo da disciplina de Análise de Dados para Planejamento Territorial.</a:t>
-            </a:r>
-          </a:p>
-        </p:txBody>
-      </p:sp>
-      <p:sp>
-        <p:nvSpPr>
-          <p:cNvPr id="8" name="TextBox 7"/>
+              <a:t>Essa estrutura é majoritariamente explicada pela condição litorânea/turística — a população flutuante infla a taxa sobre um denominador de residentes fixos.</a:t>
+            </a:r>
+          </a:p>
+        </p:txBody>
+      </p:sp>
+      <p:sp>
+        <p:nvSpPr>
+          <p:cNvPr id="12" name="Oval 11"/>
+          <p:cNvSpPr/>
+          <p:nvPr/>
+        </p:nvSpPr>
+        <p:spPr>
+          <a:xfrm>
+            <a:off x="548640" y="4215384"/>
+            <a:ext cx="502920" cy="502920"/>
+          </a:xfrm>
+          <a:prstGeom prst="ellipse">
+            <a:avLst/>
+          </a:prstGeom>
+          <a:solidFill>
+            <a:srgbClr val="1F4E79"/>
+          </a:solidFill>
+          <a:ln>
+            <a:noFill/>
+          </a:ln>
+          <a:effectLst/>
+        </p:spPr>
+        <p:style>
+          <a:lnRef idx="1">
+            <a:schemeClr val="accent1"/>
+          </a:lnRef>
+          <a:fillRef idx="3">
+            <a:schemeClr val="accent1"/>
+          </a:fillRef>
+          <a:effectRef idx="2">
+            <a:schemeClr val="accent1"/>
+          </a:effectRef>
+          <a:fontRef idx="minor">
+            <a:schemeClr val="lt1"/>
+          </a:fontRef>
+        </p:style>
+        <p:txBody>
+          <a:bodyPr rtlCol="0" anchor="ctr"/>
+          <a:lstStyle/>
+          <a:p>
+            <a:pPr algn="ctr"/>
+            <a:r>
+              <a:rPr sz="1600" b="1">
+                <a:solidFill>
+                  <a:srgbClr val="FFFFFF"/>
+                </a:solidFill>
+              </a:rPr>
+              <a:t>4</a:t>
+            </a:r>
+          </a:p>
+        </p:txBody>
+      </p:sp>
+      <p:sp>
+        <p:nvSpPr>
+          <p:cNvPr id="13" name="TextBox 12"/>
           <p:cNvSpPr txBox="1"/>
           <p:nvPr/>
         </p:nvSpPr>
         <p:spPr>
           <a:xfrm>
-            <a:off x="548640" y="5760720"/>
-            <a:ext cx="11064240" cy="548640"/>
+            <a:off x="1234440" y="4197096"/>
+            <a:ext cx="10424160" cy="777240"/>
           </a:xfrm>
           <a:prstGeom prst="rect">
             <a:avLst/>
@@ -5703,13 +5867,182 @@
               </a:lnSpc>
             </a:pPr>
             <a:r>
-              <a:rPr sz="1500" b="0" i="0">
+              <a:rPr sz="1450" b="0" i="0">
+                <a:solidFill>
+                  <a:srgbClr val="1A1A1A"/>
+                </a:solidFill>
+                <a:latin typeface="Calibri"/>
+              </a:rPr>
+              <a:t>A própria relação renda–furto não é estacionária: forte no interior, quase nula no litoral, como o GWR demonstra.</a:t>
+            </a:r>
+          </a:p>
+        </p:txBody>
+      </p:sp>
+      <p:sp>
+        <p:nvSpPr>
+          <p:cNvPr id="14" name="Oval 13"/>
+          <p:cNvSpPr/>
+          <p:nvPr/>
+        </p:nvSpPr>
+        <p:spPr>
+          <a:xfrm>
+            <a:off x="548640" y="5056632"/>
+            <a:ext cx="502920" cy="502920"/>
+          </a:xfrm>
+          <a:prstGeom prst="ellipse">
+            <a:avLst/>
+          </a:prstGeom>
+          <a:solidFill>
+            <a:srgbClr val="2E7D32"/>
+          </a:solidFill>
+          <a:ln>
+            <a:noFill/>
+          </a:ln>
+          <a:effectLst/>
+        </p:spPr>
+        <p:style>
+          <a:lnRef idx="1">
+            <a:schemeClr val="accent1"/>
+          </a:lnRef>
+          <a:fillRef idx="3">
+            <a:schemeClr val="accent1"/>
+          </a:fillRef>
+          <a:effectRef idx="2">
+            <a:schemeClr val="accent1"/>
+          </a:effectRef>
+          <a:fontRef idx="minor">
+            <a:schemeClr val="lt1"/>
+          </a:fontRef>
+        </p:style>
+        <p:txBody>
+          <a:bodyPr rtlCol="0" anchor="ctr"/>
+          <a:lstStyle/>
+          <a:p>
+            <a:pPr algn="ctr"/>
+            <a:r>
+              <a:rPr sz="1600" b="1">
+                <a:solidFill>
+                  <a:srgbClr val="FFFFFF"/>
+                </a:solidFill>
+              </a:rPr>
+              <a:t>5</a:t>
+            </a:r>
+          </a:p>
+        </p:txBody>
+      </p:sp>
+      <p:sp>
+        <p:nvSpPr>
+          <p:cNvPr id="15" name="TextBox 14"/>
+          <p:cNvSpPr txBox="1"/>
+          <p:nvPr/>
+        </p:nvSpPr>
+        <p:spPr>
+          <a:xfrm>
+            <a:off x="1234440" y="5038344"/>
+            <a:ext cx="10424160" cy="777240"/>
+          </a:xfrm>
+          <a:prstGeom prst="rect">
+            <a:avLst/>
+          </a:prstGeom>
+          <a:noFill/>
+        </p:spPr>
+        <p:txBody>
+          <a:bodyPr wrap="square" anchor="t">
+            <a:spAutoFit/>
+          </a:bodyPr>
+          <a:lstStyle/>
+          <a:p>
+            <a:pPr algn="l">
+              <a:lnSpc>
+                <a:spcPct val="115000"/>
+              </a:lnSpc>
+            </a:pPr>
+            <a:r>
+              <a:rPr sz="1450" b="1" i="0">
+                <a:solidFill>
+                  <a:srgbClr val="2E7D32"/>
+                </a:solidFill>
+                <a:latin typeface="Calibri"/>
+              </a:rPr>
+              <a:t>Modelo vencedor: GWR com renda e litoral, R²=0,532 — o melhor ajuste entre todos os testados.</a:t>
+            </a:r>
+          </a:p>
+        </p:txBody>
+      </p:sp>
+      <p:sp>
+        <p:nvSpPr>
+          <p:cNvPr id="16" name="TextBox 15"/>
+          <p:cNvSpPr txBox="1"/>
+          <p:nvPr/>
+        </p:nvSpPr>
+        <p:spPr>
+          <a:xfrm>
+            <a:off x="548640" y="6510528"/>
+            <a:ext cx="7315200" cy="274320"/>
+          </a:xfrm>
+          <a:prstGeom prst="rect">
+            <a:avLst/>
+          </a:prstGeom>
+          <a:noFill/>
+        </p:spPr>
+        <p:txBody>
+          <a:bodyPr wrap="square" anchor="t">
+            <a:spAutoFit/>
+          </a:bodyPr>
+          <a:lstStyle/>
+          <a:p>
+            <a:pPr algn="l">
+              <a:lnSpc>
+                <a:spcPct val="115000"/>
+              </a:lnSpc>
+            </a:pPr>
+            <a:r>
+              <a:rPr sz="1000" b="0" i="0">
                 <a:solidFill>
                   <a:srgbClr val="595959"/>
                 </a:solidFill>
                 <a:latin typeface="Calibri"/>
               </a:rPr>
-              <a:t>João Vitor Oliveira · Julio Cesar Salvino · Lucas Amorim — UFABC</a:t>
+              <a:t>Furto, Renda e Território — UFABC</a:t>
+            </a:r>
+          </a:p>
+        </p:txBody>
+      </p:sp>
+      <p:sp>
+        <p:nvSpPr>
+          <p:cNvPr id="17" name="TextBox 16"/>
+          <p:cNvSpPr txBox="1"/>
+          <p:nvPr/>
+        </p:nvSpPr>
+        <p:spPr>
+          <a:xfrm>
+            <a:off x="10972800" y="6510528"/>
+            <a:ext cx="731520" cy="274320"/>
+          </a:xfrm>
+          <a:prstGeom prst="rect">
+            <a:avLst/>
+          </a:prstGeom>
+          <a:noFill/>
+        </p:spPr>
+        <p:txBody>
+          <a:bodyPr wrap="square" anchor="t">
+            <a:spAutoFit/>
+          </a:bodyPr>
+          <a:lstStyle/>
+          <a:p>
+            <a:pPr algn="r">
+              <a:lnSpc>
+                <a:spcPct val="115000"/>
+              </a:lnSpc>
+            </a:pPr>
+            <a:r>
+              <a:rPr sz="1000" b="0" i="0">
+                <a:solidFill>
+                  <a:srgbClr val="595959"/>
+                </a:solidFill>
+                <a:latin typeface="Calibri"/>
+              </a:rPr>
+              <a:t>13</a:t>
             </a:r>
           </a:p>
         </p:txBody>
@@ -5749,7 +6082,7 @@
         <p:spPr>
           <a:xfrm>
             <a:off x="548640" y="320040"/>
-            <a:ext cx="7315200" cy="365760"/>
+            <a:ext cx="8229600" cy="365760"/>
           </a:xfrm>
           <a:prstGeom prst="rect">
             <a:avLst/>
@@ -5807,13 +6140,13 @@
               </a:lnSpc>
             </a:pPr>
             <a:r>
-              <a:rPr sz="3000" b="1" i="0">
+              <a:rPr sz="2800" b="1" i="0">
                 <a:solidFill>
                   <a:srgbClr val="1A1A1A"/>
                 </a:solidFill>
                 <a:latin typeface="Calibri"/>
               </a:rPr>
-              <a:t>Acontecem mais crimes nas cidades mais pobres?</a:t>
+              <a:t>Motivação: a pergunta que originou o trabalho</a:t>
             </a:r>
           </a:p>
         </p:txBody>
@@ -5826,7 +6159,7 @@
         </p:nvSpPr>
         <p:spPr>
           <a:xfrm>
-            <a:off x="548640" y="1325880"/>
+            <a:off x="548640" y="1280160"/>
             <a:ext cx="11064240" cy="27940"/>
           </a:xfrm>
           <a:prstGeom prst="rect">
@@ -5870,8 +6203,102 @@
         </p:nvSpPr>
         <p:spPr>
           <a:xfrm>
-            <a:off x="548640" y="1691640"/>
-            <a:ext cx="6126480" cy="4206240"/>
+            <a:off x="548640" y="1600200"/>
+            <a:ext cx="6126480" cy="822960"/>
+          </a:xfrm>
+          <a:prstGeom prst="rect">
+            <a:avLst/>
+          </a:prstGeom>
+          <a:noFill/>
+        </p:spPr>
+        <p:txBody>
+          <a:bodyPr wrap="square" anchor="t">
+            <a:spAutoFit/>
+          </a:bodyPr>
+          <a:lstStyle/>
+          <a:p>
+            <a:pPr algn="l">
+              <a:lnSpc>
+                <a:spcPct val="115000"/>
+              </a:lnSpc>
+            </a:pPr>
+            <a:r>
+              <a:rPr sz="2400" b="1" i="0">
+                <a:solidFill>
+                  <a:srgbClr val="1A1A1A"/>
+                </a:solidFill>
+                <a:latin typeface="Calibri"/>
+              </a:rPr>
+              <a:t>"Acontecem mais crimes nas</a:t>
+            </a:r>
+          </a:p>
+          <a:p>
+            <a:pPr algn="l">
+              <a:lnSpc>
+                <a:spcPct val="115000"/>
+              </a:lnSpc>
+            </a:pPr>
+            <a:r>
+              <a:rPr sz="2400" b="1" i="0">
+                <a:solidFill>
+                  <a:srgbClr val="1A1A1A"/>
+                </a:solidFill>
+                <a:latin typeface="Calibri"/>
+              </a:rPr>
+              <a:t>cidades mais pobres?"</a:t>
+            </a:r>
+          </a:p>
+        </p:txBody>
+      </p:sp>
+      <p:sp>
+        <p:nvSpPr>
+          <p:cNvPr id="6" name="TextBox 5"/>
+          <p:cNvSpPr txBox="1"/>
+          <p:nvPr/>
+        </p:nvSpPr>
+        <p:spPr>
+          <a:xfrm>
+            <a:off x="548640" y="2514600"/>
+            <a:ext cx="6126480" cy="640080"/>
+          </a:xfrm>
+          <a:prstGeom prst="rect">
+            <a:avLst/>
+          </a:prstGeom>
+          <a:noFill/>
+        </p:spPr>
+        <p:txBody>
+          <a:bodyPr wrap="square" anchor="t">
+            <a:spAutoFit/>
+          </a:bodyPr>
+          <a:lstStyle/>
+          <a:p>
+            <a:pPr algn="l">
+              <a:lnSpc>
+                <a:spcPct val="115000"/>
+              </a:lnSpc>
+            </a:pPr>
+            <a:r>
+              <a:rPr sz="1600" b="1" i="0">
+                <a:solidFill>
+                  <a:srgbClr val="1F4E79"/>
+                </a:solidFill>
+                <a:latin typeface="Calibri"/>
+              </a:rPr>
+              <a:t>Hipótese inicial (H1): cidades mais pobres registram mais crimes patrimoniais.</a:t>
+            </a:r>
+          </a:p>
+        </p:txBody>
+      </p:sp>
+      <p:sp>
+        <p:nvSpPr>
+          <p:cNvPr id="7" name="TextBox 6"/>
+          <p:cNvSpPr txBox="1"/>
+          <p:nvPr/>
+        </p:nvSpPr>
+        <p:spPr>
+          <a:xfrm>
+            <a:off x="548640" y="3246120"/>
+            <a:ext cx="6126480" cy="1645920"/>
           </a:xfrm>
           <a:prstGeom prst="rect">
             <a:avLst/>
@@ -5889,17 +6316,17 @@
                 <a:spcPct val="115000"/>
               </a:lnSpc>
               <a:spcAft>
-                <a:spcPts val="1600"/>
+                <a:spcPts val="1000"/>
               </a:spcAft>
             </a:pPr>
             <a:r>
-              <a:rPr sz="1700">
+              <a:rPr sz="1600">
                 <a:solidFill>
                   <a:srgbClr val="333333"/>
                 </a:solidFill>
                 <a:latin typeface="Calibri"/>
               </a:rPr>
-              <a:t>—  Hipótese de senso comum sobre criminalidade (H1): renda baixa → mais crime.</a:t>
+              <a:t>—  Ocorrências criminais — SSP-SP, 2025 (roubo, furto e lesão corporal).</a:t>
             </a:r>
           </a:p>
           <a:p>
@@ -5908,18 +6335,17 @@
                 <a:spcPct val="115000"/>
               </a:lnSpc>
               <a:spcAft>
-                <a:spcPts val="1600"/>
+                <a:spcPts val="1000"/>
               </a:spcAft>
             </a:pPr>
             <a:r>
-              <a:rPr sz="1700">
+              <a:rPr sz="1600">
                 <a:solidFill>
                   <a:srgbClr val="333333"/>
                 </a:solidFill>
                 <a:latin typeface="Calibri"/>
               </a:rPr>
-              <a:t>—  Testada com a taxa de furto (art. 155) por 1.000 hab. nos 645 municípios de SP,
-contra a renda média per capita (Censo IBGE 2022).</a:t>
+              <a:t>—  Renda média per capita — Censo IBGE 2022.</a:t>
             </a:r>
           </a:p>
           <a:p>
@@ -5928,51 +6354,31 @@
                 <a:spcPct val="115000"/>
               </a:lnSpc>
               <a:spcAft>
-                <a:spcPts val="1600"/>
+                <a:spcPts val="1000"/>
               </a:spcAft>
             </a:pPr>
             <a:r>
-              <a:rPr sz="1700">
+              <a:rPr sz="1600">
                 <a:solidFill>
                   <a:srgbClr val="333333"/>
                 </a:solidFill>
                 <a:latin typeface="Calibri"/>
               </a:rPr>
-              <a:t>—  Por que taxa e não contagem? A contagem bruta acompanha o tamanho da
-população — qualquer mapa de contagem destaca só as cidades grandes.</a:t>
-            </a:r>
-          </a:p>
-          <a:p>
-            <a:pPr>
-              <a:lnSpc>
-                <a:spcPct val="115000"/>
-              </a:lnSpc>
-              <a:spcAft>
-                <a:spcPts val="1600"/>
-              </a:spcAft>
-            </a:pPr>
-            <a:r>
-              <a:rPr sz="1700">
-                <a:solidFill>
-                  <a:srgbClr val="333333"/>
-                </a:solidFill>
-                <a:latin typeface="Calibri"/>
-              </a:rPr>
-              <a:t>—  Fontes: SSP-SP (ocorrências, 2025) e IBGE (renda e população, Censo 2022).</a:t>
-            </a:r>
-          </a:p>
-        </p:txBody>
-      </p:sp>
-      <p:sp>
-        <p:nvSpPr>
-          <p:cNvPr id="6" name="Rounded Rectangle 5"/>
+              <a:t>—  645 municípios — todo o estado de São Paulo.</a:t>
+            </a:r>
+          </a:p>
+        </p:txBody>
+      </p:sp>
+      <p:sp>
+        <p:nvSpPr>
+          <p:cNvPr id="8" name="Rounded Rectangle 7"/>
           <p:cNvSpPr/>
           <p:nvPr/>
         </p:nvSpPr>
         <p:spPr>
           <a:xfrm>
-            <a:off x="7040880" y="1828800"/>
-            <a:ext cx="4480560" cy="1188720"/>
+            <a:off x="548640" y="5029200"/>
+            <a:ext cx="6126480" cy="1234440"/>
           </a:xfrm>
           <a:prstGeom prst="roundRect">
             <a:avLst>
@@ -5980,10 +6386,12 @@
             </a:avLst>
           </a:prstGeom>
           <a:solidFill>
-            <a:srgbClr val="F2F2F2"/>
+            <a:srgbClr val="FDEEE3"/>
           </a:solidFill>
-          <a:ln>
-            <a:noFill/>
+          <a:ln w="12700">
+            <a:solidFill>
+              <a:srgbClr val="ED7D31"/>
+            </a:solidFill>
           </a:ln>
           <a:effectLst/>
         </p:spPr>
@@ -6002,173 +6410,49 @@
           </a:fontRef>
         </p:style>
         <p:txBody>
-          <a:bodyPr rtlCol="0" anchor="ctr" wrap="square" lIns="137160" rIns="137160"/>
+          <a:bodyPr rtlCol="0" anchor="ctr" wrap="square" lIns="228600" rIns="228600"/>
           <a:lstStyle/>
           <a:p>
             <a:pPr algn="ctr"/>
             <a:r>
-              <a:rPr sz="2600" b="1">
-                <a:solidFill>
-                  <a:srgbClr val="1F4E79"/>
+              <a:rPr sz="1500">
+                <a:solidFill>
+                  <a:srgbClr val="663300"/>
                 </a:solidFill>
                 <a:latin typeface="Calibri"/>
               </a:rPr>
-              <a:t>645</a:t>
-            </a:r>
-          </a:p>
-          <a:p>
-            <a:pPr algn="ctr"/>
-            <a:r>
-              <a:rPr sz="1200">
-                <a:solidFill>
-                  <a:srgbClr val="595959"/>
-                </a:solidFill>
-                <a:latin typeface="Calibri"/>
-              </a:rPr>
-              <a:t>municípios de São Paulo</a:t>
-            </a:r>
-          </a:p>
-        </p:txBody>
-      </p:sp>
-      <p:sp>
-        <p:nvSpPr>
-          <p:cNvPr id="7" name="Rounded Rectangle 6"/>
-          <p:cNvSpPr/>
-          <p:nvPr/>
-        </p:nvSpPr>
-        <p:spPr>
-          <a:xfrm>
-            <a:off x="7040880" y="3200400"/>
-            <a:ext cx="4480560" cy="1188720"/>
-          </a:xfrm>
-          <a:prstGeom prst="roundRect">
-            <a:avLst>
-              <a:gd name="adj" fmla="val 8000"/>
-            </a:avLst>
-          </a:prstGeom>
-          <a:solidFill>
-            <a:srgbClr val="F2F2F2"/>
-          </a:solidFill>
-          <a:ln>
-            <a:noFill/>
-          </a:ln>
-          <a:effectLst/>
-        </p:spPr>
-        <p:style>
-          <a:lnRef idx="1">
-            <a:schemeClr val="accent1"/>
-          </a:lnRef>
-          <a:fillRef idx="3">
-            <a:schemeClr val="accent1"/>
-          </a:fillRef>
-          <a:effectRef idx="2">
-            <a:schemeClr val="accent1"/>
-          </a:effectRef>
-          <a:fontRef idx="minor">
-            <a:schemeClr val="lt1"/>
-          </a:fontRef>
-        </p:style>
-        <p:txBody>
-          <a:bodyPr rtlCol="0" anchor="ctr" wrap="square" lIns="137160" rIns="137160"/>
-          <a:lstStyle/>
-          <a:p>
-            <a:pPr algn="ctr"/>
-            <a:r>
-              <a:rPr sz="2600" b="1">
-                <a:solidFill>
-                  <a:srgbClr val="1F4E79"/>
-                </a:solidFill>
-                <a:latin typeface="Calibri"/>
-              </a:rPr>
-              <a:t>3</a:t>
-            </a:r>
-          </a:p>
-          <a:p>
-            <a:pPr algn="ctr"/>
-            <a:r>
-              <a:rPr sz="1200">
-                <a:solidFill>
-                  <a:srgbClr val="595959"/>
-                </a:solidFill>
-                <a:latin typeface="Calibri"/>
-              </a:rPr>
-              <a:t>crimes analisados:
-roubo · furto · lesão corporal</a:t>
-            </a:r>
-          </a:p>
-        </p:txBody>
-      </p:sp>
-      <p:sp>
-        <p:nvSpPr>
-          <p:cNvPr id="8" name="Rounded Rectangle 7"/>
-          <p:cNvSpPr/>
-          <p:nvPr/>
-        </p:nvSpPr>
-        <p:spPr>
-          <a:xfrm>
-            <a:off x="7040880" y="4572000"/>
-            <a:ext cx="4480560" cy="1188720"/>
-          </a:xfrm>
-          <a:prstGeom prst="roundRect">
-            <a:avLst>
-              <a:gd name="adj" fmla="val 8000"/>
-            </a:avLst>
-          </a:prstGeom>
-          <a:solidFill>
-            <a:srgbClr val="F2F2F2"/>
-          </a:solidFill>
-          <a:ln>
-            <a:noFill/>
-          </a:ln>
-          <a:effectLst/>
-        </p:spPr>
-        <p:style>
-          <a:lnRef idx="1">
-            <a:schemeClr val="accent1"/>
-          </a:lnRef>
-          <a:fillRef idx="3">
-            <a:schemeClr val="accent1"/>
-          </a:fillRef>
-          <a:effectRef idx="2">
-            <a:schemeClr val="accent1"/>
-          </a:effectRef>
-          <a:fontRef idx="minor">
-            <a:schemeClr val="lt1"/>
-          </a:fontRef>
-        </p:style>
-        <p:txBody>
-          <a:bodyPr rtlCol="0" anchor="ctr" wrap="square" lIns="137160" rIns="137160"/>
-          <a:lstStyle/>
-          <a:p>
-            <a:pPr algn="ctr"/>
-            <a:r>
-              <a:rPr sz="2600" b="1">
-                <a:solidFill>
-                  <a:srgbClr val="1F4E79"/>
-                </a:solidFill>
-                <a:latin typeface="Calibri"/>
-              </a:rPr>
-              <a:t>por 1.000 hab.</a:t>
-            </a:r>
-          </a:p>
-          <a:p>
-            <a:pPr algn="ctr"/>
-            <a:r>
-              <a:rPr sz="1200">
-                <a:solidFill>
-                  <a:srgbClr val="595959"/>
-                </a:solidFill>
-                <a:latin typeface="Calibri"/>
-              </a:rPr>
-              <a:t>unidade de análise
-(comparável entre municípios)</a:t>
-            </a:r>
-          </a:p>
-        </p:txBody>
-      </p:sp>
-      <p:sp>
-        <p:nvSpPr>
-          <p:cNvPr id="9" name="TextBox 8"/>
+              <a:t>Observação inicial: a taxa de furto (por 1.000 hab.) mostra concentração aparente na macrometrópole e no litoral — não no interior mais pobre.</a:t>
+            </a:r>
+          </a:p>
+        </p:txBody>
+      </p:sp>
+      <p:pic>
+        <p:nvPicPr>
+          <p:cNvPr id="9" name="Picture 8" descr="mapa_taxa_furto.png"/>
+          <p:cNvPicPr>
+            <a:picLocks noChangeAspect="1"/>
+          </p:cNvPicPr>
+          <p:nvPr/>
+        </p:nvPicPr>
+        <p:blipFill>
+          <a:blip r:embed="rId2"/>
+          <a:stretch>
+            <a:fillRect/>
+          </a:stretch>
+        </p:blipFill>
+        <p:spPr>
+          <a:xfrm>
+            <a:off x="7040880" y="1940560"/>
+            <a:ext cx="4480560" cy="3982720"/>
+          </a:xfrm>
+          <a:prstGeom prst="rect">
+            <a:avLst/>
+          </a:prstGeom>
+        </p:spPr>
+      </p:pic>
+      <p:sp>
+        <p:nvSpPr>
+          <p:cNvPr id="10" name="TextBox 9"/>
           <p:cNvSpPr txBox="1"/>
           <p:nvPr/>
         </p:nvSpPr>
@@ -6207,7 +6491,7 @@
       </p:sp>
       <p:sp>
         <p:nvSpPr>
-          <p:cNvPr id="10" name="TextBox 9"/>
+          <p:cNvPr id="11" name="TextBox 10"/>
           <p:cNvSpPr txBox="1"/>
           <p:nvPr/>
         </p:nvSpPr>
@@ -6279,7 +6563,7 @@
         <p:spPr>
           <a:xfrm>
             <a:off x="548640" y="320040"/>
-            <a:ext cx="7315200" cy="365760"/>
+            <a:ext cx="8229600" cy="365760"/>
           </a:xfrm>
           <a:prstGeom prst="rect">
             <a:avLst/>
@@ -6304,7 +6588,7 @@
                 </a:solidFill>
                 <a:latin typeface="Calibri"/>
               </a:rPr>
-              <a:t>HIPÓTESE E MOTIVAÇÃO</a:t>
+              <a:t>DADOS E VARIÁVEIS</a:t>
             </a:r>
           </a:p>
         </p:txBody>
@@ -6337,13 +6621,13 @@
               </a:lnSpc>
             </a:pPr>
             <a:r>
-              <a:rPr sz="3000" b="1" i="0">
+              <a:rPr sz="2800" b="1" i="0">
                 <a:solidFill>
                   <a:srgbClr val="1A1A1A"/>
                 </a:solidFill>
                 <a:latin typeface="Calibri"/>
               </a:rPr>
-              <a:t>A correlação é positiva — o oposto de H1</a:t>
+              <a:t>Dados e variáveis</a:t>
             </a:r>
           </a:p>
         </p:txBody>
@@ -6356,7 +6640,7 @@
         </p:nvSpPr>
         <p:spPr>
           <a:xfrm>
-            <a:off x="548640" y="1325880"/>
+            <a:off x="548640" y="1280160"/>
             <a:ext cx="11064240" cy="27940"/>
           </a:xfrm>
           <a:prstGeom prst="rect">
@@ -6392,16 +6676,498 @@
           </a:p>
         </p:txBody>
       </p:sp>
-      <p:sp>
-        <p:nvSpPr>
-          <p:cNvPr id="5" name="TextBox 4"/>
+      <p:graphicFrame>
+        <p:nvGraphicFramePr>
+          <p:cNvPr id="5" name="Table 4"/>
+          <p:cNvGraphicFramePr>
+            <a:graphicFrameLocks noGrp="1"/>
+          </p:cNvGraphicFramePr>
+          <p:nvPr/>
+        </p:nvGraphicFramePr>
+        <p:xfrm>
+          <a:off x="548640" y="1600200"/>
+          <a:ext cx="11064240" cy="3291840"/>
+        </p:xfrm>
+        <a:graphic>
+          <a:graphicData uri="http://schemas.openxmlformats.org/drawingml/2006/table">
+            <a:tbl>
+              <a:tblPr firstRow="1" bandRow="1">
+                <a:tableStyleId>{5C22544A-7EE6-4342-B048-85BDC9FD1C3A}</a:tableStyleId>
+              </a:tblPr>
+              <a:tblGrid>
+                <a:gridCol w="3108960"/>
+                <a:gridCol w="2194560"/>
+                <a:gridCol w="5760720"/>
+              </a:tblGrid>
+              <a:tr h="470262">
+                <a:tc>
+                  <a:txBody>
+                    <a:bodyPr/>
+                    <a:lstStyle/>
+                    <a:p>
+                      <a:r>
+                        <a:rPr b="1" sz="1400">
+                          <a:solidFill>
+                            <a:srgbClr val="FFFFFF"/>
+                          </a:solidFill>
+                        </a:rPr>
+                        <a:t>Variável</a:t>
+                      </a:r>
+                    </a:p>
+                  </a:txBody>
+                  <a:tcPr>
+                    <a:solidFill>
+                      <a:srgbClr val="1F4E79"/>
+                    </a:solidFill>
+                  </a:tcPr>
+                </a:tc>
+                <a:tc>
+                  <a:txBody>
+                    <a:bodyPr/>
+                    <a:lstStyle/>
+                    <a:p>
+                      <a:r>
+                        <a:rPr b="1" sz="1400">
+                          <a:solidFill>
+                            <a:srgbClr val="FFFFFF"/>
+                          </a:solidFill>
+                        </a:rPr>
+                        <a:t>Fonte</a:t>
+                      </a:r>
+                    </a:p>
+                  </a:txBody>
+                  <a:tcPr>
+                    <a:solidFill>
+                      <a:srgbClr val="1F4E79"/>
+                    </a:solidFill>
+                  </a:tcPr>
+                </a:tc>
+                <a:tc>
+                  <a:txBody>
+                    <a:bodyPr/>
+                    <a:lstStyle/>
+                    <a:p>
+                      <a:r>
+                        <a:rPr b="1" sz="1400">
+                          <a:solidFill>
+                            <a:srgbClr val="FFFFFF"/>
+                          </a:solidFill>
+                        </a:rPr>
+                        <a:t>Descrição</a:t>
+                      </a:r>
+                    </a:p>
+                  </a:txBody>
+                  <a:tcPr>
+                    <a:solidFill>
+                      <a:srgbClr val="1F4E79"/>
+                    </a:solidFill>
+                  </a:tcPr>
+                </a:tc>
+              </a:tr>
+              <a:tr h="470262">
+                <a:tc>
+                  <a:txBody>
+                    <a:bodyPr/>
+                    <a:lstStyle/>
+                    <a:p>
+                      <a:r>
+                        <a:rPr sz="1300" b="0">
+                          <a:solidFill>
+                            <a:srgbClr val="1A1A1A"/>
+                          </a:solidFill>
+                        </a:rPr>
+                        <a:t>Taxa de roubo (art. 157)</a:t>
+                      </a:r>
+                    </a:p>
+                  </a:txBody>
+                  <a:tcPr>
+                    <a:solidFill>
+                      <a:srgbClr val="FFFFFF"/>
+                    </a:solidFill>
+                  </a:tcPr>
+                </a:tc>
+                <a:tc>
+                  <a:txBody>
+                    <a:bodyPr/>
+                    <a:lstStyle/>
+                    <a:p>
+                      <a:r>
+                        <a:rPr sz="1300" b="0">
+                          <a:solidFill>
+                            <a:srgbClr val="1A1A1A"/>
+                          </a:solidFill>
+                        </a:rPr>
+                        <a:t>SSP-SP, 2025</a:t>
+                      </a:r>
+                    </a:p>
+                  </a:txBody>
+                  <a:tcPr>
+                    <a:solidFill>
+                      <a:srgbClr val="FFFFFF"/>
+                    </a:solidFill>
+                  </a:tcPr>
+                </a:tc>
+                <a:tc>
+                  <a:txBody>
+                    <a:bodyPr/>
+                    <a:lstStyle/>
+                    <a:p>
+                      <a:r>
+                        <a:rPr sz="1300" b="0">
+                          <a:solidFill>
+                            <a:srgbClr val="1A1A1A"/>
+                          </a:solidFill>
+                        </a:rPr>
+                        <a:t>Ocorrências / 1.000 hab.</a:t>
+                      </a:r>
+                    </a:p>
+                  </a:txBody>
+                  <a:tcPr>
+                    <a:solidFill>
+                      <a:srgbClr val="FFFFFF"/>
+                    </a:solidFill>
+                  </a:tcPr>
+                </a:tc>
+              </a:tr>
+              <a:tr h="470262">
+                <a:tc>
+                  <a:txBody>
+                    <a:bodyPr/>
+                    <a:lstStyle/>
+                    <a:p>
+                      <a:r>
+                        <a:rPr sz="1300" b="0">
+                          <a:solidFill>
+                            <a:srgbClr val="1A1A1A"/>
+                          </a:solidFill>
+                        </a:rPr>
+                        <a:t>Taxa de furto (art. 155)</a:t>
+                      </a:r>
+                    </a:p>
+                  </a:txBody>
+                  <a:tcPr>
+                    <a:solidFill>
+                      <a:srgbClr val="F2F2F2"/>
+                    </a:solidFill>
+                  </a:tcPr>
+                </a:tc>
+                <a:tc>
+                  <a:txBody>
+                    <a:bodyPr/>
+                    <a:lstStyle/>
+                    <a:p>
+                      <a:r>
+                        <a:rPr sz="1300" b="0">
+                          <a:solidFill>
+                            <a:srgbClr val="1A1A1A"/>
+                          </a:solidFill>
+                        </a:rPr>
+                        <a:t>SSP-SP, 2025</a:t>
+                      </a:r>
+                    </a:p>
+                  </a:txBody>
+                  <a:tcPr>
+                    <a:solidFill>
+                      <a:srgbClr val="F2F2F2"/>
+                    </a:solidFill>
+                  </a:tcPr>
+                </a:tc>
+                <a:tc>
+                  <a:txBody>
+                    <a:bodyPr/>
+                    <a:lstStyle/>
+                    <a:p>
+                      <a:r>
+                        <a:rPr sz="1300" b="0">
+                          <a:solidFill>
+                            <a:srgbClr val="1A1A1A"/>
+                          </a:solidFill>
+                        </a:rPr>
+                        <a:t>Ocorrências / 1.000 hab. — variável dependente principal</a:t>
+                      </a:r>
+                    </a:p>
+                  </a:txBody>
+                  <a:tcPr>
+                    <a:solidFill>
+                      <a:srgbClr val="F2F2F2"/>
+                    </a:solidFill>
+                  </a:tcPr>
+                </a:tc>
+              </a:tr>
+              <a:tr h="470262">
+                <a:tc>
+                  <a:txBody>
+                    <a:bodyPr/>
+                    <a:lstStyle/>
+                    <a:p>
+                      <a:r>
+                        <a:rPr sz="1300" b="0">
+                          <a:solidFill>
+                            <a:srgbClr val="1A1A1A"/>
+                          </a:solidFill>
+                        </a:rPr>
+                        <a:t>Taxa de lesão corporal (art. 129)</a:t>
+                      </a:r>
+                    </a:p>
+                  </a:txBody>
+                  <a:tcPr>
+                    <a:solidFill>
+                      <a:srgbClr val="FFFFFF"/>
+                    </a:solidFill>
+                  </a:tcPr>
+                </a:tc>
+                <a:tc>
+                  <a:txBody>
+                    <a:bodyPr/>
+                    <a:lstStyle/>
+                    <a:p>
+                      <a:r>
+                        <a:rPr sz="1300" b="0">
+                          <a:solidFill>
+                            <a:srgbClr val="1A1A1A"/>
+                          </a:solidFill>
+                        </a:rPr>
+                        <a:t>SSP-SP, 2025</a:t>
+                      </a:r>
+                    </a:p>
+                  </a:txBody>
+                  <a:tcPr>
+                    <a:solidFill>
+                      <a:srgbClr val="FFFFFF"/>
+                    </a:solidFill>
+                  </a:tcPr>
+                </a:tc>
+                <a:tc>
+                  <a:txBody>
+                    <a:bodyPr/>
+                    <a:lstStyle/>
+                    <a:p>
+                      <a:r>
+                        <a:rPr sz="1300" b="0">
+                          <a:solidFill>
+                            <a:srgbClr val="1A1A1A"/>
+                          </a:solidFill>
+                        </a:rPr>
+                        <a:t>Ocorrências / 1.000 hab.</a:t>
+                      </a:r>
+                    </a:p>
+                  </a:txBody>
+                  <a:tcPr>
+                    <a:solidFill>
+                      <a:srgbClr val="FFFFFF"/>
+                    </a:solidFill>
+                  </a:tcPr>
+                </a:tc>
+              </a:tr>
+              <a:tr h="470262">
+                <a:tc>
+                  <a:txBody>
+                    <a:bodyPr/>
+                    <a:lstStyle/>
+                    <a:p>
+                      <a:r>
+                        <a:rPr sz="1300" b="0">
+                          <a:solidFill>
+                            <a:srgbClr val="1A1A1A"/>
+                          </a:solidFill>
+                        </a:rPr>
+                        <a:t>Renda média per capita</a:t>
+                      </a:r>
+                    </a:p>
+                  </a:txBody>
+                  <a:tcPr>
+                    <a:solidFill>
+                      <a:srgbClr val="F2F2F2"/>
+                    </a:solidFill>
+                  </a:tcPr>
+                </a:tc>
+                <a:tc>
+                  <a:txBody>
+                    <a:bodyPr/>
+                    <a:lstStyle/>
+                    <a:p>
+                      <a:r>
+                        <a:rPr sz="1300" b="0">
+                          <a:solidFill>
+                            <a:srgbClr val="1A1A1A"/>
+                          </a:solidFill>
+                        </a:rPr>
+                        <a:t>IBGE, Censo 2022</a:t>
+                      </a:r>
+                    </a:p>
+                  </a:txBody>
+                  <a:tcPr>
+                    <a:solidFill>
+                      <a:srgbClr val="F2F2F2"/>
+                    </a:solidFill>
+                  </a:tcPr>
+                </a:tc>
+                <a:tc>
+                  <a:txBody>
+                    <a:bodyPr/>
+                    <a:lstStyle/>
+                    <a:p>
+                      <a:r>
+                        <a:rPr sz="1300" b="0">
+                          <a:solidFill>
+                            <a:srgbClr val="1A1A1A"/>
+                          </a:solidFill>
+                        </a:rPr>
+                        <a:t>R$ por habitante</a:t>
+                      </a:r>
+                    </a:p>
+                  </a:txBody>
+                  <a:tcPr>
+                    <a:solidFill>
+                      <a:srgbClr val="F2F2F2"/>
+                    </a:solidFill>
+                  </a:tcPr>
+                </a:tc>
+              </a:tr>
+              <a:tr h="470262">
+                <a:tc>
+                  <a:txBody>
+                    <a:bodyPr/>
+                    <a:lstStyle/>
+                    <a:p>
+                      <a:r>
+                        <a:rPr sz="1300" b="0">
+                          <a:solidFill>
+                            <a:srgbClr val="1A1A1A"/>
+                          </a:solidFill>
+                        </a:rPr>
+                        <a:t>População</a:t>
+                      </a:r>
+                    </a:p>
+                  </a:txBody>
+                  <a:tcPr>
+                    <a:solidFill>
+                      <a:srgbClr val="FFFFFF"/>
+                    </a:solidFill>
+                  </a:tcPr>
+                </a:tc>
+                <a:tc>
+                  <a:txBody>
+                    <a:bodyPr/>
+                    <a:lstStyle/>
+                    <a:p>
+                      <a:r>
+                        <a:rPr sz="1300" b="0">
+                          <a:solidFill>
+                            <a:srgbClr val="1A1A1A"/>
+                          </a:solidFill>
+                        </a:rPr>
+                        <a:t>IBGE, Tabela 4709</a:t>
+                      </a:r>
+                    </a:p>
+                  </a:txBody>
+                  <a:tcPr>
+                    <a:solidFill>
+                      <a:srgbClr val="FFFFFF"/>
+                    </a:solidFill>
+                  </a:tcPr>
+                </a:tc>
+                <a:tc>
+                  <a:txBody>
+                    <a:bodyPr/>
+                    <a:lstStyle/>
+                    <a:p>
+                      <a:r>
+                        <a:rPr sz="1300" b="0">
+                          <a:solidFill>
+                            <a:srgbClr val="1A1A1A"/>
+                          </a:solidFill>
+                        </a:rPr>
+                        <a:t>Denominador das taxas</a:t>
+                      </a:r>
+                    </a:p>
+                  </a:txBody>
+                  <a:tcPr>
+                    <a:solidFill>
+                      <a:srgbClr val="FFFFFF"/>
+                    </a:solidFill>
+                  </a:tcPr>
+                </a:tc>
+              </a:tr>
+              <a:tr h="470268">
+                <a:tc>
+                  <a:txBody>
+                    <a:bodyPr/>
+                    <a:lstStyle/>
+                    <a:p>
+                      <a:r>
+                        <a:rPr sz="1300" b="0">
+                          <a:solidFill>
+                            <a:srgbClr val="1A1A1A"/>
+                          </a:solidFill>
+                        </a:rPr>
+                        <a:t>Litorâneo / turístico</a:t>
+                      </a:r>
+                    </a:p>
+                  </a:txBody>
+                  <a:tcPr>
+                    <a:solidFill>
+                      <a:srgbClr val="F2F2F2"/>
+                    </a:solidFill>
+                  </a:tcPr>
+                </a:tc>
+                <a:tc>
+                  <a:txBody>
+                    <a:bodyPr/>
+                    <a:lstStyle/>
+                    <a:p>
+                      <a:r>
+                        <a:rPr sz="1300" b="0">
+                          <a:solidFill>
+                            <a:srgbClr val="1A1A1A"/>
+                          </a:solidFill>
+                        </a:rPr>
+                        <a:t>Classificação do grupo</a:t>
+                      </a:r>
+                    </a:p>
+                  </a:txBody>
+                  <a:tcPr>
+                    <a:solidFill>
+                      <a:srgbClr val="F2F2F2"/>
+                    </a:solidFill>
+                  </a:tcPr>
+                </a:tc>
+                <a:tc>
+                  <a:txBody>
+                    <a:bodyPr/>
+                    <a:lstStyle/>
+                    <a:p>
+                      <a:r>
+                        <a:rPr sz="1300" b="0">
+                          <a:solidFill>
+                            <a:srgbClr val="1A1A1A"/>
+                          </a:solidFill>
+                        </a:rPr>
+                        <a:t>Dummy (1/0) — 16 municípios da costa</a:t>
+                      </a:r>
+                    </a:p>
+                  </a:txBody>
+                  <a:tcPr>
+                    <a:solidFill>
+                      <a:srgbClr val="F2F2F2"/>
+                    </a:solidFill>
+                  </a:tcPr>
+                </a:tc>
+              </a:tr>
+            </a:tbl>
+          </a:graphicData>
+        </a:graphic>
+      </p:graphicFrame>
+      <p:sp>
+        <p:nvSpPr>
+          <p:cNvPr id="6" name="TextBox 5"/>
           <p:cNvSpPr txBox="1"/>
           <p:nvPr/>
         </p:nvSpPr>
         <p:spPr>
           <a:xfrm>
-            <a:off x="548640" y="1691640"/>
-            <a:ext cx="6126480" cy="2377440"/>
+            <a:off x="548640" y="5212080"/>
+            <a:ext cx="11064240" cy="1097280"/>
           </a:xfrm>
           <a:prstGeom prst="rect">
             <a:avLst/>
@@ -6419,69 +7185,31 @@
                 <a:spcPct val="115000"/>
               </a:lnSpc>
               <a:spcAft>
-                <a:spcPts val="1400"/>
+                <a:spcPts val="1200"/>
               </a:spcAft>
             </a:pPr>
             <a:r>
-              <a:rPr sz="1700">
-                <a:solidFill>
-                  <a:srgbClr val="333333"/>
+              <a:rPr sz="1500">
+                <a:solidFill>
+                  <a:srgbClr val="595959"/>
                 </a:solidFill>
                 <a:latin typeface="Calibri"/>
               </a:rPr>
-              <a:t>—  Renda × furto: Pearson = 0,359, Spearman = 0,380 — positivo e significativo.</a:t>
-            </a:r>
-          </a:p>
-          <a:p>
-            <a:pPr>
-              <a:lnSpc>
-                <a:spcPct val="115000"/>
-              </a:lnSpc>
-              <a:spcAft>
-                <a:spcPts val="1400"/>
-              </a:spcAft>
-            </a:pPr>
-            <a:r>
-              <a:rPr sz="1700">
-                <a:solidFill>
-                  <a:srgbClr val="333333"/>
-                </a:solidFill>
-                <a:latin typeface="Calibri"/>
-              </a:rPr>
-              <a:t>—  Renda × roubo: também positivo (0,302 / 0,389).</a:t>
-            </a:r>
-          </a:p>
-          <a:p>
-            <a:pPr>
-              <a:lnSpc>
-                <a:spcPct val="115000"/>
-              </a:lnSpc>
-              <a:spcAft>
-                <a:spcPts val="1400"/>
-              </a:spcAft>
-            </a:pPr>
-            <a:r>
-              <a:rPr sz="1700">
-                <a:solidFill>
-                  <a:srgbClr val="333333"/>
-                </a:solidFill>
-                <a:latin typeface="Calibri"/>
-              </a:rPr>
-              <a:t>—  Só a lesão corporal correlaciona negativamente, e fraco (−0,19).</a:t>
-            </a:r>
-          </a:p>
-        </p:txBody>
-      </p:sp>
-      <p:sp>
-        <p:nvSpPr>
-          <p:cNvPr id="6" name="TextBox 5"/>
+              <a:t>—  Chave de junção: código IBGE de 7 dígitos — nunca o nome (a SSP abrevia, ex. "S BARBARA D OESTE"), o que perderia observações na junção.</a:t>
+            </a:r>
+          </a:p>
+        </p:txBody>
+      </p:sp>
+      <p:sp>
+        <p:nvSpPr>
+          <p:cNvPr id="7" name="TextBox 6"/>
           <p:cNvSpPr txBox="1"/>
           <p:nvPr/>
         </p:nvSpPr>
         <p:spPr>
           <a:xfrm>
-            <a:off x="548640" y="3977639"/>
-            <a:ext cx="6126480" cy="457200"/>
+            <a:off x="548640" y="6510528"/>
+            <a:ext cx="7315200" cy="274320"/>
           </a:xfrm>
           <a:prstGeom prst="rect">
             <a:avLst/>
@@ -6500,132 +7228,12 @@
               </a:lnSpc>
             </a:pPr>
             <a:r>
-              <a:rPr sz="1700" b="1" i="0">
-                <a:solidFill>
-                  <a:srgbClr val="1F4E79"/>
+              <a:rPr sz="1000" b="0" i="0">
+                <a:solidFill>
+                  <a:srgbClr val="595959"/>
                 </a:solidFill>
                 <a:latin typeface="Calibri"/>
               </a:rPr>
-              <a:t>Isso abriu espaço para uma segunda hipótese, exploratória:</a:t>
-            </a:r>
-          </a:p>
-        </p:txBody>
-      </p:sp>
-      <p:sp>
-        <p:nvSpPr>
-          <p:cNvPr id="7" name="Rounded Rectangle 6"/>
-          <p:cNvSpPr/>
-          <p:nvPr/>
-        </p:nvSpPr>
-        <p:spPr>
-          <a:xfrm>
-            <a:off x="548640" y="4480560"/>
-            <a:ext cx="6126480" cy="1737360"/>
-          </a:xfrm>
-          <a:prstGeom prst="roundRect">
-            <a:avLst>
-              <a:gd name="adj" fmla="val 6000"/>
-            </a:avLst>
-          </a:prstGeom>
-          <a:solidFill>
-            <a:srgbClr val="FDEEE3"/>
-          </a:solidFill>
-          <a:ln w="12700">
-            <a:solidFill>
-              <a:srgbClr val="ED7D31"/>
-            </a:solidFill>
-          </a:ln>
-          <a:effectLst/>
-        </p:spPr>
-        <p:style>
-          <a:lnRef idx="1">
-            <a:schemeClr val="accent1"/>
-          </a:lnRef>
-          <a:fillRef idx="3">
-            <a:schemeClr val="accent1"/>
-          </a:fillRef>
-          <a:effectRef idx="2">
-            <a:schemeClr val="accent1"/>
-          </a:effectRef>
-          <a:fontRef idx="minor">
-            <a:schemeClr val="lt1"/>
-          </a:fontRef>
-        </p:style>
-        <p:txBody>
-          <a:bodyPr rtlCol="0" anchor="ctr" wrap="square" lIns="228600" rIns="228600"/>
-          <a:lstStyle/>
-          <a:p>
-            <a:pPr algn="ctr"/>
-            <a:r>
-              <a:rPr sz="1600">
-                <a:solidFill>
-                  <a:srgbClr val="663300"/>
-                </a:solidFill>
-                <a:latin typeface="Calibri"/>
-              </a:rPr>
-              <a:t>H2 — municípios litorâneos/turísticos concentram taxas mais altas: a população flutuante de verão infla o numerador (ocorrências) sobre um denominador que mede só a população residente.</a:t>
-            </a:r>
-          </a:p>
-        </p:txBody>
-      </p:sp>
-      <p:pic>
-        <p:nvPicPr>
-          <p:cNvPr id="8" name="Picture 7" descr="mapa_taxa_furto.png"/>
-          <p:cNvPicPr>
-            <a:picLocks noChangeAspect="1"/>
-          </p:cNvPicPr>
-          <p:nvPr/>
-        </p:nvPicPr>
-        <p:blipFill>
-          <a:blip r:embed="rId2"/>
-          <a:stretch>
-            <a:fillRect/>
-          </a:stretch>
-        </p:blipFill>
-        <p:spPr>
-          <a:xfrm>
-            <a:off x="7040880" y="1963420"/>
-            <a:ext cx="4480560" cy="3982720"/>
-          </a:xfrm>
-          <a:prstGeom prst="rect">
-            <a:avLst/>
-          </a:prstGeom>
-        </p:spPr>
-      </p:pic>
-      <p:sp>
-        <p:nvSpPr>
-          <p:cNvPr id="9" name="TextBox 8"/>
-          <p:cNvSpPr txBox="1"/>
-          <p:nvPr/>
-        </p:nvSpPr>
-        <p:spPr>
-          <a:xfrm>
-            <a:off x="548640" y="6510528"/>
-            <a:ext cx="7315200" cy="274320"/>
-          </a:xfrm>
-          <a:prstGeom prst="rect">
-            <a:avLst/>
-          </a:prstGeom>
-          <a:noFill/>
-        </p:spPr>
-        <p:txBody>
-          <a:bodyPr wrap="square" anchor="t">
-            <a:spAutoFit/>
-          </a:bodyPr>
-          <a:lstStyle/>
-          <a:p>
-            <a:pPr algn="l">
-              <a:lnSpc>
-                <a:spcPct val="115000"/>
-              </a:lnSpc>
-            </a:pPr>
-            <a:r>
-              <a:rPr sz="1000" b="0" i="0">
-                <a:solidFill>
-                  <a:srgbClr val="595959"/>
-                </a:solidFill>
-                <a:latin typeface="Calibri"/>
-              </a:rPr>
               <a:t>Furto, Renda e Território — UFABC</a:t>
             </a:r>
           </a:p>
@@ -6633,7 +7241,7 @@
       </p:sp>
       <p:sp>
         <p:nvSpPr>
-          <p:cNvPr id="10" name="TextBox 9"/>
+          <p:cNvPr id="8" name="TextBox 7"/>
           <p:cNvSpPr txBox="1"/>
           <p:nvPr/>
         </p:nvSpPr>
@@ -6705,7 +7313,7 @@
         <p:spPr>
           <a:xfrm>
             <a:off x="548640" y="320040"/>
-            <a:ext cx="7315200" cy="365760"/>
+            <a:ext cx="8229600" cy="365760"/>
           </a:xfrm>
           <a:prstGeom prst="rect">
             <a:avLst/>
@@ -6763,13 +7371,13 @@
               </a:lnSpc>
             </a:pPr>
             <a:r>
-              <a:rPr sz="3000" b="1" i="0">
+              <a:rPr sz="2800" b="1" i="0">
                 <a:solidFill>
                   <a:srgbClr val="1A1A1A"/>
                 </a:solidFill>
                 <a:latin typeface="Calibri"/>
               </a:rPr>
-              <a:t>Bases, chave de junção e variáveis</a:t>
+              <a:t>Por que o furto: cada crime tem seus outliers</a:t>
             </a:r>
           </a:p>
         </p:txBody>
@@ -6782,7 +7390,7 @@
         </p:nvSpPr>
         <p:spPr>
           <a:xfrm>
-            <a:off x="548640" y="1325880"/>
+            <a:off x="548640" y="1280160"/>
             <a:ext cx="11064240" cy="27940"/>
           </a:xfrm>
           <a:prstGeom prst="rect">
@@ -6818,488 +7426,30 @@
           </a:p>
         </p:txBody>
       </p:sp>
-      <p:graphicFrame>
-        <p:nvGraphicFramePr>
-          <p:cNvPr id="5" name="Table 4"/>
-          <p:cNvGraphicFramePr>
-            <a:graphicFrameLocks noGrp="1"/>
-          </p:cNvGraphicFramePr>
-          <p:nvPr/>
-        </p:nvGraphicFramePr>
-        <p:xfrm>
-          <a:off x="548640" y="1691640"/>
-          <a:ext cx="8412480" cy="3108960"/>
-        </p:xfrm>
-        <a:graphic>
-          <a:graphicData uri="http://schemas.openxmlformats.org/drawingml/2006/table">
-            <a:tbl>
-              <a:tblPr firstRow="1" bandRow="1">
-                <a:tableStyleId>{5C22544A-7EE6-4342-B048-85BDC9FD1C3A}</a:tableStyleId>
-              </a:tblPr>
-              <a:tblGrid>
-                <a:gridCol w="3291840"/>
-                <a:gridCol w="2194560"/>
-                <a:gridCol w="2926080"/>
-              </a:tblGrid>
-              <a:tr h="444137">
-                <a:tc>
-                  <a:txBody>
-                    <a:bodyPr/>
-                    <a:lstStyle/>
-                    <a:p>
-                      <a:r>
-                        <a:rPr b="1" sz="1300">
-                          <a:solidFill>
-                            <a:srgbClr val="FFFFFF"/>
-                          </a:solidFill>
-                        </a:rPr>
-                        <a:t>Variável</a:t>
-                      </a:r>
-                    </a:p>
-                  </a:txBody>
-                  <a:tcPr>
-                    <a:solidFill>
-                      <a:srgbClr val="1F4E79"/>
-                    </a:solidFill>
-                  </a:tcPr>
-                </a:tc>
-                <a:tc>
-                  <a:txBody>
-                    <a:bodyPr/>
-                    <a:lstStyle/>
-                    <a:p>
-                      <a:r>
-                        <a:rPr b="1" sz="1300">
-                          <a:solidFill>
-                            <a:srgbClr val="FFFFFF"/>
-                          </a:solidFill>
-                        </a:rPr>
-                        <a:t>Fonte</a:t>
-                      </a:r>
-                    </a:p>
-                  </a:txBody>
-                  <a:tcPr>
-                    <a:solidFill>
-                      <a:srgbClr val="1F4E79"/>
-                    </a:solidFill>
-                  </a:tcPr>
-                </a:tc>
-                <a:tc>
-                  <a:txBody>
-                    <a:bodyPr/>
-                    <a:lstStyle/>
-                    <a:p>
-                      <a:r>
-                        <a:rPr b="1" sz="1300">
-                          <a:solidFill>
-                            <a:srgbClr val="FFFFFF"/>
-                          </a:solidFill>
-                        </a:rPr>
-                        <a:t>Descrição</a:t>
-                      </a:r>
-                    </a:p>
-                  </a:txBody>
-                  <a:tcPr>
-                    <a:solidFill>
-                      <a:srgbClr val="1F4E79"/>
-                    </a:solidFill>
-                  </a:tcPr>
-                </a:tc>
-              </a:tr>
-              <a:tr h="444137">
-                <a:tc>
-                  <a:txBody>
-                    <a:bodyPr/>
-                    <a:lstStyle/>
-                    <a:p>
-                      <a:r>
-                        <a:rPr sz="1200">
-                          <a:solidFill>
-                            <a:srgbClr val="333333"/>
-                          </a:solidFill>
-                        </a:rPr>
-                        <a:t>Taxa de roubo (art. 157)</a:t>
-                      </a:r>
-                    </a:p>
-                  </a:txBody>
-                  <a:tcPr>
-                    <a:solidFill>
-                      <a:srgbClr val="FFFFFF"/>
-                    </a:solidFill>
-                  </a:tcPr>
-                </a:tc>
-                <a:tc>
-                  <a:txBody>
-                    <a:bodyPr/>
-                    <a:lstStyle/>
-                    <a:p>
-                      <a:r>
-                        <a:rPr sz="1200">
-                          <a:solidFill>
-                            <a:srgbClr val="333333"/>
-                          </a:solidFill>
-                        </a:rPr>
-                        <a:t>SSP-SP, 2025</a:t>
-                      </a:r>
-                    </a:p>
-                  </a:txBody>
-                  <a:tcPr>
-                    <a:solidFill>
-                      <a:srgbClr val="FFFFFF"/>
-                    </a:solidFill>
-                  </a:tcPr>
-                </a:tc>
-                <a:tc>
-                  <a:txBody>
-                    <a:bodyPr/>
-                    <a:lstStyle/>
-                    <a:p>
-                      <a:r>
-                        <a:rPr sz="1200">
-                          <a:solidFill>
-                            <a:srgbClr val="333333"/>
-                          </a:solidFill>
-                        </a:rPr>
-                        <a:t>Ocorrências / 1.000 hab.</a:t>
-                      </a:r>
-                    </a:p>
-                  </a:txBody>
-                  <a:tcPr>
-                    <a:solidFill>
-                      <a:srgbClr val="FFFFFF"/>
-                    </a:solidFill>
-                  </a:tcPr>
-                </a:tc>
-              </a:tr>
-              <a:tr h="444137">
-                <a:tc>
-                  <a:txBody>
-                    <a:bodyPr/>
-                    <a:lstStyle/>
-                    <a:p>
-                      <a:r>
-                        <a:rPr sz="1200">
-                          <a:solidFill>
-                            <a:srgbClr val="333333"/>
-                          </a:solidFill>
-                        </a:rPr>
-                        <a:t>Taxa de furto (art. 155)</a:t>
-                      </a:r>
-                    </a:p>
-                  </a:txBody>
-                  <a:tcPr>
-                    <a:solidFill>
-                      <a:srgbClr val="F2F2F2"/>
-                    </a:solidFill>
-                  </a:tcPr>
-                </a:tc>
-                <a:tc>
-                  <a:txBody>
-                    <a:bodyPr/>
-                    <a:lstStyle/>
-                    <a:p>
-                      <a:r>
-                        <a:rPr sz="1200">
-                          <a:solidFill>
-                            <a:srgbClr val="333333"/>
-                          </a:solidFill>
-                        </a:rPr>
-                        <a:t>SSP-SP, 2025</a:t>
-                      </a:r>
-                    </a:p>
-                  </a:txBody>
-                  <a:tcPr>
-                    <a:solidFill>
-                      <a:srgbClr val="F2F2F2"/>
-                    </a:solidFill>
-                  </a:tcPr>
-                </a:tc>
-                <a:tc>
-                  <a:txBody>
-                    <a:bodyPr/>
-                    <a:lstStyle/>
-                    <a:p>
-                      <a:r>
-                        <a:rPr sz="1200">
-                          <a:solidFill>
-                            <a:srgbClr val="333333"/>
-                          </a:solidFill>
-                        </a:rPr>
-                        <a:t>Ocorrências / 1.000 hab.</a:t>
-                      </a:r>
-                    </a:p>
-                  </a:txBody>
-                  <a:tcPr>
-                    <a:solidFill>
-                      <a:srgbClr val="F2F2F2"/>
-                    </a:solidFill>
-                  </a:tcPr>
-                </a:tc>
-              </a:tr>
-              <a:tr h="444137">
-                <a:tc>
-                  <a:txBody>
-                    <a:bodyPr/>
-                    <a:lstStyle/>
-                    <a:p>
-                      <a:r>
-                        <a:rPr sz="1200">
-                          <a:solidFill>
-                            <a:srgbClr val="333333"/>
-                          </a:solidFill>
-                        </a:rPr>
-                        <a:t>Taxa de lesão corporal (art. 129)</a:t>
-                      </a:r>
-                    </a:p>
-                  </a:txBody>
-                  <a:tcPr>
-                    <a:solidFill>
-                      <a:srgbClr val="FFFFFF"/>
-                    </a:solidFill>
-                  </a:tcPr>
-                </a:tc>
-                <a:tc>
-                  <a:txBody>
-                    <a:bodyPr/>
-                    <a:lstStyle/>
-                    <a:p>
-                      <a:r>
-                        <a:rPr sz="1200">
-                          <a:solidFill>
-                            <a:srgbClr val="333333"/>
-                          </a:solidFill>
-                        </a:rPr>
-                        <a:t>SSP-SP, 2025</a:t>
-                      </a:r>
-                    </a:p>
-                  </a:txBody>
-                  <a:tcPr>
-                    <a:solidFill>
-                      <a:srgbClr val="FFFFFF"/>
-                    </a:solidFill>
-                  </a:tcPr>
-                </a:tc>
-                <a:tc>
-                  <a:txBody>
-                    <a:bodyPr/>
-                    <a:lstStyle/>
-                    <a:p>
-                      <a:r>
-                        <a:rPr sz="1200">
-                          <a:solidFill>
-                            <a:srgbClr val="333333"/>
-                          </a:solidFill>
-                        </a:rPr>
-                        <a:t>Ocorrências / 1.000 hab.</a:t>
-                      </a:r>
-                    </a:p>
-                  </a:txBody>
-                  <a:tcPr>
-                    <a:solidFill>
-                      <a:srgbClr val="FFFFFF"/>
-                    </a:solidFill>
-                  </a:tcPr>
-                </a:tc>
-              </a:tr>
-              <a:tr h="444137">
-                <a:tc>
-                  <a:txBody>
-                    <a:bodyPr/>
-                    <a:lstStyle/>
-                    <a:p>
-                      <a:r>
-                        <a:rPr sz="1200">
-                          <a:solidFill>
-                            <a:srgbClr val="333333"/>
-                          </a:solidFill>
-                        </a:rPr>
-                        <a:t>Renda média</a:t>
-                      </a:r>
-                    </a:p>
-                  </a:txBody>
-                  <a:tcPr>
-                    <a:solidFill>
-                      <a:srgbClr val="F2F2F2"/>
-                    </a:solidFill>
-                  </a:tcPr>
-                </a:tc>
-                <a:tc>
-                  <a:txBody>
-                    <a:bodyPr/>
-                    <a:lstStyle/>
-                    <a:p>
-                      <a:r>
-                        <a:rPr sz="1200">
-                          <a:solidFill>
-                            <a:srgbClr val="333333"/>
-                          </a:solidFill>
-                        </a:rPr>
-                        <a:t>IBGE, Censo 2022</a:t>
-                      </a:r>
-                    </a:p>
-                  </a:txBody>
-                  <a:tcPr>
-                    <a:solidFill>
-                      <a:srgbClr val="F2F2F2"/>
-                    </a:solidFill>
-                  </a:tcPr>
-                </a:tc>
-                <a:tc>
-                  <a:txBody>
-                    <a:bodyPr/>
-                    <a:lstStyle/>
-                    <a:p>
-                      <a:r>
-                        <a:rPr sz="1200">
-                          <a:solidFill>
-                            <a:srgbClr val="333333"/>
-                          </a:solidFill>
-                        </a:rPr>
-                        <a:t>Renda per capita em R$</a:t>
-                      </a:r>
-                    </a:p>
-                  </a:txBody>
-                  <a:tcPr>
-                    <a:solidFill>
-                      <a:srgbClr val="F2F2F2"/>
-                    </a:solidFill>
-                  </a:tcPr>
-                </a:tc>
-              </a:tr>
-              <a:tr h="444137">
-                <a:tc>
-                  <a:txBody>
-                    <a:bodyPr/>
-                    <a:lstStyle/>
-                    <a:p>
-                      <a:r>
-                        <a:rPr sz="1200">
-                          <a:solidFill>
-                            <a:srgbClr val="333333"/>
-                          </a:solidFill>
-                        </a:rPr>
-                        <a:t>População</a:t>
-                      </a:r>
-                    </a:p>
-                  </a:txBody>
-                  <a:tcPr>
-                    <a:solidFill>
-                      <a:srgbClr val="FFFFFF"/>
-                    </a:solidFill>
-                  </a:tcPr>
-                </a:tc>
-                <a:tc>
-                  <a:txBody>
-                    <a:bodyPr/>
-                    <a:lstStyle/>
-                    <a:p>
-                      <a:r>
-                        <a:rPr sz="1200">
-                          <a:solidFill>
-                            <a:srgbClr val="333333"/>
-                          </a:solidFill>
-                        </a:rPr>
-                        <a:t>IBGE, Tabela 4709</a:t>
-                      </a:r>
-                    </a:p>
-                  </a:txBody>
-                  <a:tcPr>
-                    <a:solidFill>
-                      <a:srgbClr val="FFFFFF"/>
-                    </a:solidFill>
-                  </a:tcPr>
-                </a:tc>
-                <a:tc>
-                  <a:txBody>
-                    <a:bodyPr/>
-                    <a:lstStyle/>
-                    <a:p>
-                      <a:r>
-                        <a:rPr sz="1200">
-                          <a:solidFill>
-                            <a:srgbClr val="333333"/>
-                          </a:solidFill>
-                        </a:rPr>
-                        <a:t>Denominador das taxas</a:t>
-                      </a:r>
-                    </a:p>
-                  </a:txBody>
-                  <a:tcPr>
-                    <a:solidFill>
-                      <a:srgbClr val="FFFFFF"/>
-                    </a:solidFill>
-                  </a:tcPr>
-                </a:tc>
-              </a:tr>
-              <a:tr h="444138">
-                <a:tc>
-                  <a:txBody>
-                    <a:bodyPr/>
-                    <a:lstStyle/>
-                    <a:p>
-                      <a:r>
-                        <a:rPr sz="1200">
-                          <a:solidFill>
-                            <a:srgbClr val="333333"/>
-                          </a:solidFill>
-                        </a:rPr>
-                        <a:t>Litorâneo/turístico</a:t>
-                      </a:r>
-                    </a:p>
-                  </a:txBody>
-                  <a:tcPr>
-                    <a:solidFill>
-                      <a:srgbClr val="F2F2F2"/>
-                    </a:solidFill>
-                  </a:tcPr>
-                </a:tc>
-                <a:tc>
-                  <a:txBody>
-                    <a:bodyPr/>
-                    <a:lstStyle/>
-                    <a:p>
-                      <a:r>
-                        <a:rPr sz="1200">
-                          <a:solidFill>
-                            <a:srgbClr val="333333"/>
-                          </a:solidFill>
-                        </a:rPr>
-                        <a:t>Classificação do grupo</a:t>
-                      </a:r>
-                    </a:p>
-                  </a:txBody>
-                  <a:tcPr>
-                    <a:solidFill>
-                      <a:srgbClr val="F2F2F2"/>
-                    </a:solidFill>
-                  </a:tcPr>
-                </a:tc>
-                <a:tc>
-                  <a:txBody>
-                    <a:bodyPr/>
-                    <a:lstStyle/>
-                    <a:p>
-                      <a:r>
-                        <a:rPr sz="1200">
-                          <a:solidFill>
-                            <a:srgbClr val="333333"/>
-                          </a:solidFill>
-                        </a:rPr>
-                        <a:t>Dummy (1/0), 16 municípios da costa</a:t>
-                      </a:r>
-                    </a:p>
-                  </a:txBody>
-                  <a:tcPr>
-                    <a:solidFill>
-                      <a:srgbClr val="F2F2F2"/>
-                    </a:solidFill>
-                  </a:tcPr>
-                </a:tc>
-              </a:tr>
-            </a:tbl>
-          </a:graphicData>
-        </a:graphic>
-      </p:graphicFrame>
+      <p:pic>
+        <p:nvPicPr>
+          <p:cNvPr id="5" name="Picture 4" descr="image.png"/>
+          <p:cNvPicPr>
+            <a:picLocks noChangeAspect="1"/>
+          </p:cNvPicPr>
+          <p:nvPr/>
+        </p:nvPicPr>
+        <p:blipFill>
+          <a:blip r:embed="rId2"/>
+          <a:stretch>
+            <a:fillRect/>
+          </a:stretch>
+        </p:blipFill>
+        <p:spPr>
+          <a:xfrm>
+            <a:off x="1464798" y="1554480"/>
+            <a:ext cx="9231923" cy="3200400"/>
+          </a:xfrm>
+          <a:prstGeom prst="rect">
+            <a:avLst/>
+          </a:prstGeom>
+        </p:spPr>
+      </p:pic>
       <p:sp>
         <p:nvSpPr>
           <p:cNvPr id="6" name="TextBox 5"/>
@@ -7308,8 +7458,8 @@
         </p:nvSpPr>
         <p:spPr>
           <a:xfrm>
-            <a:off x="548640" y="5074920"/>
-            <a:ext cx="8412480" cy="1280160"/>
+            <a:off x="548640" y="4892040"/>
+            <a:ext cx="11064240" cy="1737360"/>
           </a:xfrm>
           <a:prstGeom prst="rect">
             <a:avLst/>
@@ -7327,18 +7477,55 @@
                 <a:spcPct val="115000"/>
               </a:lnSpc>
               <a:spcAft>
-                <a:spcPts val="1000"/>
+                <a:spcPts val="800"/>
               </a:spcAft>
             </a:pPr>
             <a:r>
               <a:rPr sz="1400">
                 <a:solidFill>
-                  <a:srgbClr val="595959"/>
+                  <a:srgbClr val="333333"/>
                 </a:solidFill>
                 <a:latin typeface="Calibri"/>
               </a:rPr>
-              <a:t>—  Chave de junção: código IBGE de 7 dígitos (nunca o nome — a SSP abrevia,
-ex. "S BARBARA D OESTE"): correspondência exata → abreviações → distância de edição ≤ 1.</a:t>
+              <a:t>—  Roubo: o outlier mais extremo é de um município não-litorâneo; os litorâneos (laranja) aparecem elevados, mas não dominam o topo.</a:t>
+            </a:r>
+          </a:p>
+          <a:p>
+            <a:pPr>
+              <a:lnSpc>
+                <a:spcPct val="115000"/>
+              </a:lnSpc>
+              <a:spcAft>
+                <a:spcPts val="800"/>
+              </a:spcAft>
+            </a:pPr>
+            <a:r>
+              <a:rPr sz="1400">
+                <a:solidFill>
+                  <a:srgbClr val="333333"/>
+                </a:solidFill>
+                <a:latin typeface="Calibri"/>
+              </a:rPr>
+              <a:t>—  Furto: os outliers extremos são quase todos litorâneos — Mongaguá e outros municípios da costa aparecem bem acima da nuvem geral de pontos.</a:t>
+            </a:r>
+          </a:p>
+          <a:p>
+            <a:pPr>
+              <a:lnSpc>
+                <a:spcPct val="115000"/>
+              </a:lnSpc>
+              <a:spcAft>
+                <a:spcPts val="800"/>
+              </a:spcAft>
+            </a:pPr>
+            <a:r>
+              <a:rPr sz="1400">
+                <a:solidFill>
+                  <a:srgbClr val="333333"/>
+                </a:solidFill>
+                <a:latin typeface="Calibri"/>
+              </a:rPr>
+              <a:t>—  Lesão corporal: o outlier extremo é de renda baixíssima e não-litorâneo; os litorâneos ficam perdidos no meio da distribuição.</a:t>
             </a:r>
           </a:p>
         </p:txBody>
@@ -7456,7 +7643,7 @@
         <p:spPr>
           <a:xfrm>
             <a:off x="548640" y="320040"/>
-            <a:ext cx="7315200" cy="365760"/>
+            <a:ext cx="8229600" cy="365760"/>
           </a:xfrm>
           <a:prstGeom prst="rect">
             <a:avLst/>
@@ -7514,13 +7701,13 @@
               </a:lnSpc>
             </a:pPr>
             <a:r>
-              <a:rPr sz="3000" b="1" i="0">
+              <a:rPr sz="2800" b="1" i="0">
                 <a:solidFill>
                   <a:srgbClr val="1A1A1A"/>
                 </a:solidFill>
                 <a:latin typeface="Calibri"/>
               </a:rPr>
-              <a:t>Metodologia: quatro etapas progressivas</a:t>
+              <a:t>A renda correlaciona positivamente com o furto</a:t>
             </a:r>
           </a:p>
         </p:txBody>
@@ -7533,7 +7720,7 @@
         </p:nvSpPr>
         <p:spPr>
           <a:xfrm>
-            <a:off x="548640" y="1325880"/>
+            <a:off x="548640" y="1280160"/>
             <a:ext cx="11064240" cy="27940"/>
           </a:xfrm>
           <a:prstGeom prst="rect">
@@ -7569,16 +7756,303 @@
           </a:p>
         </p:txBody>
       </p:sp>
-      <p:sp>
-        <p:nvSpPr>
-          <p:cNvPr id="5" name="TextBox 4"/>
+      <p:graphicFrame>
+        <p:nvGraphicFramePr>
+          <p:cNvPr id="5" name="Table 4"/>
+          <p:cNvGraphicFramePr>
+            <a:graphicFrameLocks noGrp="1"/>
+          </p:cNvGraphicFramePr>
+          <p:nvPr/>
+        </p:nvGraphicFramePr>
+        <p:xfrm>
+          <a:off x="548640" y="1737360"/>
+          <a:ext cx="5852160" cy="1737360"/>
+        </p:xfrm>
+        <a:graphic>
+          <a:graphicData uri="http://schemas.openxmlformats.org/drawingml/2006/table">
+            <a:tbl>
+              <a:tblPr firstRow="1" bandRow="1">
+                <a:tableStyleId>{5C22544A-7EE6-4342-B048-85BDC9FD1C3A}</a:tableStyleId>
+              </a:tblPr>
+              <a:tblGrid>
+                <a:gridCol w="2926080"/>
+                <a:gridCol w="1463040"/>
+                <a:gridCol w="1463040"/>
+              </a:tblGrid>
+              <a:tr h="434340">
+                <a:tc>
+                  <a:txBody>
+                    <a:bodyPr/>
+                    <a:lstStyle/>
+                    <a:p>
+                      <a:r>
+                        <a:rPr b="1" sz="1400">
+                          <a:solidFill>
+                            <a:srgbClr val="FFFFFF"/>
+                          </a:solidFill>
+                        </a:rPr>
+                        <a:t>Par</a:t>
+                      </a:r>
+                    </a:p>
+                  </a:txBody>
+                  <a:tcPr>
+                    <a:solidFill>
+                      <a:srgbClr val="1F4E79"/>
+                    </a:solidFill>
+                  </a:tcPr>
+                </a:tc>
+                <a:tc>
+                  <a:txBody>
+                    <a:bodyPr/>
+                    <a:lstStyle/>
+                    <a:p>
+                      <a:r>
+                        <a:rPr b="1" sz="1400">
+                          <a:solidFill>
+                            <a:srgbClr val="FFFFFF"/>
+                          </a:solidFill>
+                        </a:rPr>
+                        <a:t>Pearson</a:t>
+                      </a:r>
+                    </a:p>
+                  </a:txBody>
+                  <a:tcPr>
+                    <a:solidFill>
+                      <a:srgbClr val="1F4E79"/>
+                    </a:solidFill>
+                  </a:tcPr>
+                </a:tc>
+                <a:tc>
+                  <a:txBody>
+                    <a:bodyPr/>
+                    <a:lstStyle/>
+                    <a:p>
+                      <a:r>
+                        <a:rPr b="1" sz="1400">
+                          <a:solidFill>
+                            <a:srgbClr val="FFFFFF"/>
+                          </a:solidFill>
+                        </a:rPr>
+                        <a:t>Spearman</a:t>
+                      </a:r>
+                    </a:p>
+                  </a:txBody>
+                  <a:tcPr>
+                    <a:solidFill>
+                      <a:srgbClr val="1F4E79"/>
+                    </a:solidFill>
+                  </a:tcPr>
+                </a:tc>
+              </a:tr>
+              <a:tr h="434340">
+                <a:tc>
+                  <a:txBody>
+                    <a:bodyPr/>
+                    <a:lstStyle/>
+                    <a:p>
+                      <a:r>
+                        <a:rPr sz="1400" b="0">
+                          <a:solidFill>
+                            <a:srgbClr val="1A1A1A"/>
+                          </a:solidFill>
+                        </a:rPr>
+                        <a:t>Roubo × Renda</a:t>
+                      </a:r>
+                    </a:p>
+                  </a:txBody>
+                  <a:tcPr>
+                    <a:solidFill>
+                      <a:srgbClr val="FFFFFF"/>
+                    </a:solidFill>
+                  </a:tcPr>
+                </a:tc>
+                <a:tc>
+                  <a:txBody>
+                    <a:bodyPr/>
+                    <a:lstStyle/>
+                    <a:p>
+                      <a:r>
+                        <a:rPr sz="1400" b="0">
+                          <a:solidFill>
+                            <a:srgbClr val="1A1A1A"/>
+                          </a:solidFill>
+                        </a:rPr>
+                        <a:t>0,302</a:t>
+                      </a:r>
+                    </a:p>
+                  </a:txBody>
+                  <a:tcPr>
+                    <a:solidFill>
+                      <a:srgbClr val="FFFFFF"/>
+                    </a:solidFill>
+                  </a:tcPr>
+                </a:tc>
+                <a:tc>
+                  <a:txBody>
+                    <a:bodyPr/>
+                    <a:lstStyle/>
+                    <a:p>
+                      <a:r>
+                        <a:rPr sz="1400" b="0">
+                          <a:solidFill>
+                            <a:srgbClr val="1A1A1A"/>
+                          </a:solidFill>
+                        </a:rPr>
+                        <a:t>0,389</a:t>
+                      </a:r>
+                    </a:p>
+                  </a:txBody>
+                  <a:tcPr>
+                    <a:solidFill>
+                      <a:srgbClr val="FFFFFF"/>
+                    </a:solidFill>
+                  </a:tcPr>
+                </a:tc>
+              </a:tr>
+              <a:tr h="434340">
+                <a:tc>
+                  <a:txBody>
+                    <a:bodyPr/>
+                    <a:lstStyle/>
+                    <a:p>
+                      <a:r>
+                        <a:rPr sz="1400" b="0">
+                          <a:solidFill>
+                            <a:srgbClr val="1A1A1A"/>
+                          </a:solidFill>
+                        </a:rPr>
+                        <a:t>Furto × Renda</a:t>
+                      </a:r>
+                    </a:p>
+                  </a:txBody>
+                  <a:tcPr>
+                    <a:solidFill>
+                      <a:srgbClr val="F2F2F2"/>
+                    </a:solidFill>
+                  </a:tcPr>
+                </a:tc>
+                <a:tc>
+                  <a:txBody>
+                    <a:bodyPr/>
+                    <a:lstStyle/>
+                    <a:p>
+                      <a:r>
+                        <a:rPr sz="1400" b="0">
+                          <a:solidFill>
+                            <a:srgbClr val="1A1A1A"/>
+                          </a:solidFill>
+                        </a:rPr>
+                        <a:t>0,359</a:t>
+                      </a:r>
+                    </a:p>
+                  </a:txBody>
+                  <a:tcPr>
+                    <a:solidFill>
+                      <a:srgbClr val="F2F2F2"/>
+                    </a:solidFill>
+                  </a:tcPr>
+                </a:tc>
+                <a:tc>
+                  <a:txBody>
+                    <a:bodyPr/>
+                    <a:lstStyle/>
+                    <a:p>
+                      <a:r>
+                        <a:rPr sz="1400" b="0">
+                          <a:solidFill>
+                            <a:srgbClr val="1A1A1A"/>
+                          </a:solidFill>
+                        </a:rPr>
+                        <a:t>0,380</a:t>
+                      </a:r>
+                    </a:p>
+                  </a:txBody>
+                  <a:tcPr>
+                    <a:solidFill>
+                      <a:srgbClr val="F2F2F2"/>
+                    </a:solidFill>
+                  </a:tcPr>
+                </a:tc>
+              </a:tr>
+              <a:tr h="434340">
+                <a:tc>
+                  <a:txBody>
+                    <a:bodyPr/>
+                    <a:lstStyle/>
+                    <a:p>
+                      <a:r>
+                        <a:rPr sz="1400" b="0">
+                          <a:solidFill>
+                            <a:srgbClr val="1A1A1A"/>
+                          </a:solidFill>
+                        </a:rPr>
+                        <a:t>Lesão corporal × Renda</a:t>
+                      </a:r>
+                    </a:p>
+                  </a:txBody>
+                  <a:tcPr>
+                    <a:solidFill>
+                      <a:srgbClr val="FFFFFF"/>
+                    </a:solidFill>
+                  </a:tcPr>
+                </a:tc>
+                <a:tc>
+                  <a:txBody>
+                    <a:bodyPr/>
+                    <a:lstStyle/>
+                    <a:p>
+                      <a:r>
+                        <a:rPr sz="1400" b="0">
+                          <a:solidFill>
+                            <a:srgbClr val="1A1A1A"/>
+                          </a:solidFill>
+                        </a:rPr>
+                        <a:t>−0,190</a:t>
+                      </a:r>
+                    </a:p>
+                  </a:txBody>
+                  <a:tcPr>
+                    <a:solidFill>
+                      <a:srgbClr val="FFFFFF"/>
+                    </a:solidFill>
+                  </a:tcPr>
+                </a:tc>
+                <a:tc>
+                  <a:txBody>
+                    <a:bodyPr/>
+                    <a:lstStyle/>
+                    <a:p>
+                      <a:r>
+                        <a:rPr sz="1400" b="0">
+                          <a:solidFill>
+                            <a:srgbClr val="1A1A1A"/>
+                          </a:solidFill>
+                        </a:rPr>
+                        <a:t>−0,166</a:t>
+                      </a:r>
+                    </a:p>
+                  </a:txBody>
+                  <a:tcPr>
+                    <a:solidFill>
+                      <a:srgbClr val="FFFFFF"/>
+                    </a:solidFill>
+                  </a:tcPr>
+                </a:tc>
+              </a:tr>
+            </a:tbl>
+          </a:graphicData>
+        </a:graphic>
+      </p:graphicFrame>
+      <p:sp>
+        <p:nvSpPr>
+          <p:cNvPr id="6" name="TextBox 5"/>
           <p:cNvSpPr txBox="1"/>
           <p:nvPr/>
         </p:nvSpPr>
         <p:spPr>
           <a:xfrm>
-            <a:off x="548640" y="1600200"/>
-            <a:ext cx="11064240" cy="457200"/>
+            <a:off x="548640" y="3749039"/>
+            <a:ext cx="5852160" cy="914400"/>
           </a:xfrm>
           <a:prstGeom prst="rect">
             <a:avLst/>
@@ -7597,33 +8071,35 @@
               </a:lnSpc>
             </a:pPr>
             <a:r>
-              <a:rPr sz="1400" b="0" i="1">
-                <a:solidFill>
-                  <a:srgbClr val="595959"/>
+              <a:rPr sz="1600" b="0" i="0">
+                <a:solidFill>
+                  <a:srgbClr val="333333"/>
                 </a:solidFill>
                 <a:latin typeface="Calibri"/>
               </a:rPr>
-              <a:t>Vizinhança espacial: contiguidade queen de ordem 1, pesos row-standardized (645 municípios, média 5,50 vizinhos; Ilhabela sem vizinhos)</a:t>
-            </a:r>
-          </a:p>
-        </p:txBody>
-      </p:sp>
-      <p:sp>
-        <p:nvSpPr>
-          <p:cNvPr id="6" name="Oval 5"/>
+              <a:t>Roubo e furto sobem junto com a renda — o oposto do que H1 previa. Só a lesão corporal cai, e fraco.</a:t>
+            </a:r>
+          </a:p>
+        </p:txBody>
+      </p:sp>
+      <p:sp>
+        <p:nvSpPr>
+          <p:cNvPr id="7" name="Rounded Rectangle 6"/>
           <p:cNvSpPr/>
           <p:nvPr/>
         </p:nvSpPr>
         <p:spPr>
           <a:xfrm>
-            <a:off x="548640" y="2286000"/>
-            <a:ext cx="640080" cy="640080"/>
-          </a:xfrm>
-          <a:prstGeom prst="ellipse">
-            <a:avLst/>
+            <a:off x="548640" y="4846320"/>
+            <a:ext cx="5852160" cy="1371600"/>
+          </a:xfrm>
+          <a:prstGeom prst="roundRect">
+            <a:avLst>
+              <a:gd name="adj" fmla="val 8000"/>
+            </a:avLst>
           </a:prstGeom>
           <a:solidFill>
-            <a:srgbClr val="1F4E79"/>
+            <a:srgbClr val="F2F2F2"/>
           </a:solidFill>
           <a:ln>
             <a:noFill/>
@@ -7645,31 +8121,55 @@
           </a:fontRef>
         </p:style>
         <p:txBody>
-          <a:bodyPr rtlCol="0" anchor="ctr"/>
+          <a:bodyPr rtlCol="0" anchor="ctr" wrap="square" lIns="182880" rIns="182880"/>
           <a:lstStyle/>
           <a:p>
             <a:pPr algn="ctr"/>
             <a:r>
-              <a:rPr sz="2000" b="1">
-                <a:solidFill>
-                  <a:srgbClr val="FFFFFF"/>
-                </a:solidFill>
-              </a:rPr>
-              <a:t>1</a:t>
-            </a:r>
-          </a:p>
-        </p:txBody>
-      </p:sp>
-      <p:sp>
-        <p:nvSpPr>
-          <p:cNvPr id="7" name="TextBox 6"/>
+              <a:rPr sz="1300" i="1">
+                <a:solidFill>
+                  <a:srgbClr val="595959"/>
+                </a:solidFill>
+              </a:rPr>
+              <a:t>Correlação não implica causalidade — mas já contraria H1 para roubo e furto, e os municípios litorâneos puxam boa parte desse padrão, motivando a investigação espacial que segue.</a:t>
+            </a:r>
+          </a:p>
+        </p:txBody>
+      </p:sp>
+      <p:pic>
+        <p:nvPicPr>
+          <p:cNvPr id="8" name="Picture 7" descr="correlacao_matriz.png"/>
+          <p:cNvPicPr>
+            <a:picLocks noChangeAspect="1"/>
+          </p:cNvPicPr>
+          <p:nvPr/>
+        </p:nvPicPr>
+        <p:blipFill>
+          <a:blip r:embed="rId2"/>
+          <a:stretch>
+            <a:fillRect/>
+          </a:stretch>
+        </p:blipFill>
+        <p:spPr>
+          <a:xfrm>
+            <a:off x="6675120" y="1771650"/>
+            <a:ext cx="4937760" cy="4320540"/>
+          </a:xfrm>
+          <a:prstGeom prst="rect">
+            <a:avLst/>
+          </a:prstGeom>
+        </p:spPr>
+      </p:pic>
+      <p:sp>
+        <p:nvSpPr>
+          <p:cNvPr id="9" name="TextBox 8"/>
           <p:cNvSpPr txBox="1"/>
           <p:nvPr/>
         </p:nvSpPr>
         <p:spPr>
           <a:xfrm>
-            <a:off x="1417320" y="2258568"/>
-            <a:ext cx="9875520" cy="365760"/>
+            <a:off x="548640" y="6510528"/>
+            <a:ext cx="7315200" cy="274320"/>
           </a:xfrm>
           <a:prstGeom prst="rect">
             <a:avLst/>
@@ -7688,104 +8188,13 @@
               </a:lnSpc>
             </a:pPr>
             <a:r>
-              <a:rPr sz="1800" b="1" i="0">
-                <a:solidFill>
-                  <a:srgbClr val="1A1A1A"/>
+              <a:rPr sz="1000" b="0" i="0">
+                <a:solidFill>
+                  <a:srgbClr val="595959"/>
                 </a:solidFill>
                 <a:latin typeface="Calibri"/>
               </a:rPr>
-              <a:t>Correlação e autocorrelação espacial</a:t>
-            </a:r>
-          </a:p>
-        </p:txBody>
-      </p:sp>
-      <p:sp>
-        <p:nvSpPr>
-          <p:cNvPr id="8" name="TextBox 7"/>
-          <p:cNvSpPr txBox="1"/>
-          <p:nvPr/>
-        </p:nvSpPr>
-        <p:spPr>
-          <a:xfrm>
-            <a:off x="1417320" y="2606040"/>
-            <a:ext cx="9875520" cy="457200"/>
-          </a:xfrm>
-          <a:prstGeom prst="rect">
-            <a:avLst/>
-          </a:prstGeom>
-          <a:noFill/>
-        </p:spPr>
-        <p:txBody>
-          <a:bodyPr wrap="square" anchor="t">
-            <a:spAutoFit/>
-          </a:bodyPr>
-          <a:lstStyle/>
-          <a:p>
-            <a:pPr algn="l">
-              <a:lnSpc>
-                <a:spcPct val="115000"/>
-              </a:lnSpc>
-            </a:pPr>
-            <a:r>
-              <a:rPr sz="1300" b="0" i="0">
-                <a:solidFill>
-                  <a:srgbClr val="595959"/>
-                </a:solidFill>
-                <a:latin typeface="Calibri"/>
-              </a:rPr>
-              <a:t>Pearson/Spearman; Moran's I global e LISA (permutação condicional, 999 simulações)</a:t>
-            </a:r>
-          </a:p>
-        </p:txBody>
-      </p:sp>
-      <p:sp>
-        <p:nvSpPr>
-          <p:cNvPr id="9" name="Oval 8"/>
-          <p:cNvSpPr/>
-          <p:nvPr/>
-        </p:nvSpPr>
-        <p:spPr>
-          <a:xfrm>
-            <a:off x="548640" y="3291840"/>
-            <a:ext cx="640080" cy="640080"/>
-          </a:xfrm>
-          <a:prstGeom prst="ellipse">
-            <a:avLst/>
-          </a:prstGeom>
-          <a:solidFill>
-            <a:srgbClr val="1F4E79"/>
-          </a:solidFill>
-          <a:ln>
-            <a:noFill/>
-          </a:ln>
-          <a:effectLst/>
-        </p:spPr>
-        <p:style>
-          <a:lnRef idx="1">
-            <a:schemeClr val="accent1"/>
-          </a:lnRef>
-          <a:fillRef idx="3">
-            <a:schemeClr val="accent1"/>
-          </a:fillRef>
-          <a:effectRef idx="2">
-            <a:schemeClr val="accent1"/>
-          </a:effectRef>
-          <a:fontRef idx="minor">
-            <a:schemeClr val="lt1"/>
-          </a:fontRef>
-        </p:style>
-        <p:txBody>
-          <a:bodyPr rtlCol="0" anchor="ctr"/>
-          <a:lstStyle/>
-          <a:p>
-            <a:pPr algn="ctr"/>
-            <a:r>
-              <a:rPr sz="2000" b="1">
-                <a:solidFill>
-                  <a:srgbClr val="FFFFFF"/>
-                </a:solidFill>
-              </a:rPr>
-              <a:t>2</a:t>
+              <a:t>Furto, Renda e Território — UFABC</a:t>
             </a:r>
           </a:p>
         </p:txBody>
@@ -7793,383 +8202,6 @@
       <p:sp>
         <p:nvSpPr>
           <p:cNvPr id="10" name="TextBox 9"/>
-          <p:cNvSpPr txBox="1"/>
-          <p:nvPr/>
-        </p:nvSpPr>
-        <p:spPr>
-          <a:xfrm>
-            <a:off x="1417320" y="3264408"/>
-            <a:ext cx="9875520" cy="365760"/>
-          </a:xfrm>
-          <a:prstGeom prst="rect">
-            <a:avLst/>
-          </a:prstGeom>
-          <a:noFill/>
-        </p:spPr>
-        <p:txBody>
-          <a:bodyPr wrap="square" anchor="t">
-            <a:spAutoFit/>
-          </a:bodyPr>
-          <a:lstStyle/>
-          <a:p>
-            <a:pPr algn="l">
-              <a:lnSpc>
-                <a:spcPct val="115000"/>
-              </a:lnSpc>
-            </a:pPr>
-            <a:r>
-              <a:rPr sz="1800" b="1" i="0">
-                <a:solidFill>
-                  <a:srgbClr val="1A1A1A"/>
-                </a:solidFill>
-                <a:latin typeface="Calibri"/>
-              </a:rPr>
-              <a:t>Regressão linear clássica (OLS)</a:t>
-            </a:r>
-          </a:p>
-        </p:txBody>
-      </p:sp>
-      <p:sp>
-        <p:nvSpPr>
-          <p:cNvPr id="11" name="TextBox 10"/>
-          <p:cNvSpPr txBox="1"/>
-          <p:nvPr/>
-        </p:nvSpPr>
-        <p:spPr>
-          <a:xfrm>
-            <a:off x="1417320" y="3611880"/>
-            <a:ext cx="9875520" cy="457200"/>
-          </a:xfrm>
-          <a:prstGeom prst="rect">
-            <a:avLst/>
-          </a:prstGeom>
-          <a:noFill/>
-        </p:spPr>
-        <p:txBody>
-          <a:bodyPr wrap="square" anchor="t">
-            <a:spAutoFit/>
-          </a:bodyPr>
-          <a:lstStyle/>
-          <a:p>
-            <a:pPr algn="l">
-              <a:lnSpc>
-                <a:spcPct val="115000"/>
-              </a:lnSpc>
-            </a:pPr>
-            <a:r>
-              <a:rPr sz="1300" b="0" i="0">
-                <a:solidFill>
-                  <a:srgbClr val="595959"/>
-                </a:solidFill>
-                <a:latin typeface="Calibri"/>
-              </a:rPr>
-              <a:t>taxa ~ renda e taxa ~ renda + litoral, com diagnóstico de resíduos</a:t>
-            </a:r>
-          </a:p>
-        </p:txBody>
-      </p:sp>
-      <p:sp>
-        <p:nvSpPr>
-          <p:cNvPr id="12" name="Oval 11"/>
-          <p:cNvSpPr/>
-          <p:nvPr/>
-        </p:nvSpPr>
-        <p:spPr>
-          <a:xfrm>
-            <a:off x="548640" y="4297680"/>
-            <a:ext cx="640080" cy="640080"/>
-          </a:xfrm>
-          <a:prstGeom prst="ellipse">
-            <a:avLst/>
-          </a:prstGeom>
-          <a:solidFill>
-            <a:srgbClr val="1F4E79"/>
-          </a:solidFill>
-          <a:ln>
-            <a:noFill/>
-          </a:ln>
-          <a:effectLst/>
-        </p:spPr>
-        <p:style>
-          <a:lnRef idx="1">
-            <a:schemeClr val="accent1"/>
-          </a:lnRef>
-          <a:fillRef idx="3">
-            <a:schemeClr val="accent1"/>
-          </a:fillRef>
-          <a:effectRef idx="2">
-            <a:schemeClr val="accent1"/>
-          </a:effectRef>
-          <a:fontRef idx="minor">
-            <a:schemeClr val="lt1"/>
-          </a:fontRef>
-        </p:style>
-        <p:txBody>
-          <a:bodyPr rtlCol="0" anchor="ctr"/>
-          <a:lstStyle/>
-          <a:p>
-            <a:pPr algn="ctr"/>
-            <a:r>
-              <a:rPr sz="2000" b="1">
-                <a:solidFill>
-                  <a:srgbClr val="FFFFFF"/>
-                </a:solidFill>
-              </a:rPr>
-              <a:t>3</a:t>
-            </a:r>
-          </a:p>
-        </p:txBody>
-      </p:sp>
-      <p:sp>
-        <p:nvSpPr>
-          <p:cNvPr id="13" name="TextBox 12"/>
-          <p:cNvSpPr txBox="1"/>
-          <p:nvPr/>
-        </p:nvSpPr>
-        <p:spPr>
-          <a:xfrm>
-            <a:off x="1417320" y="4270248"/>
-            <a:ext cx="9875520" cy="365760"/>
-          </a:xfrm>
-          <a:prstGeom prst="rect">
-            <a:avLst/>
-          </a:prstGeom>
-          <a:noFill/>
-        </p:spPr>
-        <p:txBody>
-          <a:bodyPr wrap="square" anchor="t">
-            <a:spAutoFit/>
-          </a:bodyPr>
-          <a:lstStyle/>
-          <a:p>
-            <a:pPr algn="l">
-              <a:lnSpc>
-                <a:spcPct val="115000"/>
-              </a:lnSpc>
-            </a:pPr>
-            <a:r>
-              <a:rPr sz="1800" b="1" i="0">
-                <a:solidFill>
-                  <a:srgbClr val="1A1A1A"/>
-                </a:solidFill>
-                <a:latin typeface="Calibri"/>
-              </a:rPr>
-              <a:t>Regressão espacial global</a:t>
-            </a:r>
-          </a:p>
-        </p:txBody>
-      </p:sp>
-      <p:sp>
-        <p:nvSpPr>
-          <p:cNvPr id="14" name="TextBox 13"/>
-          <p:cNvSpPr txBox="1"/>
-          <p:nvPr/>
-        </p:nvSpPr>
-        <p:spPr>
-          <a:xfrm>
-            <a:off x="1417320" y="4617720"/>
-            <a:ext cx="9875520" cy="457200"/>
-          </a:xfrm>
-          <a:prstGeom prst="rect">
-            <a:avLst/>
-          </a:prstGeom>
-          <a:noFill/>
-        </p:spPr>
-        <p:txBody>
-          <a:bodyPr wrap="square" anchor="t">
-            <a:spAutoFit/>
-          </a:bodyPr>
-          <a:lstStyle/>
-          <a:p>
-            <a:pPr algn="l">
-              <a:lnSpc>
-                <a:spcPct val="115000"/>
-              </a:lnSpc>
-            </a:pPr>
-            <a:r>
-              <a:rPr sz="1300" b="0" i="0">
-                <a:solidFill>
-                  <a:srgbClr val="595959"/>
-                </a:solidFill>
-                <a:latin typeface="Calibri"/>
-              </a:rPr>
-              <a:t>Testes de Multiplicadores de Lagrange → spatial lag (ρ) vs. spatial error (λ)</a:t>
-            </a:r>
-          </a:p>
-        </p:txBody>
-      </p:sp>
-      <p:sp>
-        <p:nvSpPr>
-          <p:cNvPr id="15" name="Oval 14"/>
-          <p:cNvSpPr/>
-          <p:nvPr/>
-        </p:nvSpPr>
-        <p:spPr>
-          <a:xfrm>
-            <a:off x="548640" y="5303520"/>
-            <a:ext cx="640080" cy="640080"/>
-          </a:xfrm>
-          <a:prstGeom prst="ellipse">
-            <a:avLst/>
-          </a:prstGeom>
-          <a:solidFill>
-            <a:srgbClr val="1F4E79"/>
-          </a:solidFill>
-          <a:ln>
-            <a:noFill/>
-          </a:ln>
-          <a:effectLst/>
-        </p:spPr>
-        <p:style>
-          <a:lnRef idx="1">
-            <a:schemeClr val="accent1"/>
-          </a:lnRef>
-          <a:fillRef idx="3">
-            <a:schemeClr val="accent1"/>
-          </a:fillRef>
-          <a:effectRef idx="2">
-            <a:schemeClr val="accent1"/>
-          </a:effectRef>
-          <a:fontRef idx="minor">
-            <a:schemeClr val="lt1"/>
-          </a:fontRef>
-        </p:style>
-        <p:txBody>
-          <a:bodyPr rtlCol="0" anchor="ctr"/>
-          <a:lstStyle/>
-          <a:p>
-            <a:pPr algn="ctr"/>
-            <a:r>
-              <a:rPr sz="2000" b="1">
-                <a:solidFill>
-                  <a:srgbClr val="FFFFFF"/>
-                </a:solidFill>
-              </a:rPr>
-              <a:t>4</a:t>
-            </a:r>
-          </a:p>
-        </p:txBody>
-      </p:sp>
-      <p:sp>
-        <p:nvSpPr>
-          <p:cNvPr id="16" name="TextBox 15"/>
-          <p:cNvSpPr txBox="1"/>
-          <p:nvPr/>
-        </p:nvSpPr>
-        <p:spPr>
-          <a:xfrm>
-            <a:off x="1417320" y="5276088"/>
-            <a:ext cx="9875520" cy="365760"/>
-          </a:xfrm>
-          <a:prstGeom prst="rect">
-            <a:avLst/>
-          </a:prstGeom>
-          <a:noFill/>
-        </p:spPr>
-        <p:txBody>
-          <a:bodyPr wrap="square" anchor="t">
-            <a:spAutoFit/>
-          </a:bodyPr>
-          <a:lstStyle/>
-          <a:p>
-            <a:pPr algn="l">
-              <a:lnSpc>
-                <a:spcPct val="115000"/>
-              </a:lnSpc>
-            </a:pPr>
-            <a:r>
-              <a:rPr sz="1800" b="1" i="0">
-                <a:solidFill>
-                  <a:srgbClr val="1A1A1A"/>
-                </a:solidFill>
-                <a:latin typeface="Calibri"/>
-              </a:rPr>
-              <a:t>GWR — Regressão Geograficamente Ponderada</a:t>
-            </a:r>
-          </a:p>
-        </p:txBody>
-      </p:sp>
-      <p:sp>
-        <p:nvSpPr>
-          <p:cNvPr id="17" name="TextBox 16"/>
-          <p:cNvSpPr txBox="1"/>
-          <p:nvPr/>
-        </p:nvSpPr>
-        <p:spPr>
-          <a:xfrm>
-            <a:off x="1417320" y="5623560"/>
-            <a:ext cx="9875520" cy="457200"/>
-          </a:xfrm>
-          <a:prstGeom prst="rect">
-            <a:avLst/>
-          </a:prstGeom>
-          <a:noFill/>
-        </p:spPr>
-        <p:txBody>
-          <a:bodyPr wrap="square" anchor="t">
-            <a:spAutoFit/>
-          </a:bodyPr>
-          <a:lstStyle/>
-          <a:p>
-            <a:pPr algn="l">
-              <a:lnSpc>
-                <a:spcPct val="115000"/>
-              </a:lnSpc>
-            </a:pPr>
-            <a:r>
-              <a:rPr sz="1300" b="0" i="0">
-                <a:solidFill>
-                  <a:srgbClr val="595959"/>
-                </a:solidFill>
-                <a:latin typeface="Calibri"/>
-              </a:rPr>
-              <a:t>Regressão local por município, núcleo gaussiano, banda adaptativa (k ≈ 10)</a:t>
-            </a:r>
-          </a:p>
-        </p:txBody>
-      </p:sp>
-      <p:sp>
-        <p:nvSpPr>
-          <p:cNvPr id="18" name="TextBox 17"/>
-          <p:cNvSpPr txBox="1"/>
-          <p:nvPr/>
-        </p:nvSpPr>
-        <p:spPr>
-          <a:xfrm>
-            <a:off x="548640" y="6510528"/>
-            <a:ext cx="7315200" cy="274320"/>
-          </a:xfrm>
-          <a:prstGeom prst="rect">
-            <a:avLst/>
-          </a:prstGeom>
-          <a:noFill/>
-        </p:spPr>
-        <p:txBody>
-          <a:bodyPr wrap="square" anchor="t">
-            <a:spAutoFit/>
-          </a:bodyPr>
-          <a:lstStyle/>
-          <a:p>
-            <a:pPr algn="l">
-              <a:lnSpc>
-                <a:spcPct val="115000"/>
-              </a:lnSpc>
-            </a:pPr>
-            <a:r>
-              <a:rPr sz="1000" b="0" i="0">
-                <a:solidFill>
-                  <a:srgbClr val="595959"/>
-                </a:solidFill>
-                <a:latin typeface="Calibri"/>
-              </a:rPr>
-              <a:t>Furto, Renda e Território — UFABC</a:t>
-            </a:r>
-          </a:p>
-        </p:txBody>
-      </p:sp>
-      <p:sp>
-        <p:nvSpPr>
-          <p:cNvPr id="19" name="TextBox 18"/>
           <p:cNvSpPr txBox="1"/>
           <p:nvPr/>
         </p:nvSpPr>
@@ -8241,7 +8273,7 @@
         <p:spPr>
           <a:xfrm>
             <a:off x="548640" y="320040"/>
-            <a:ext cx="7315200" cy="365760"/>
+            <a:ext cx="8229600" cy="365760"/>
           </a:xfrm>
           <a:prstGeom prst="rect">
             <a:avLst/>
@@ -8299,13 +8331,13 @@
               </a:lnSpc>
             </a:pPr>
             <a:r>
-              <a:rPr sz="3000" b="1" i="0">
+              <a:rPr sz="2800" b="1" i="0">
                 <a:solidFill>
                   <a:srgbClr val="1A1A1A"/>
                 </a:solidFill>
                 <a:latin typeface="Calibri"/>
               </a:rPr>
-              <a:t>Autocorrelação espacial: Moran's I e LISA</a:t>
+              <a:t>O crime tem endereço: autocorrelação espacial</a:t>
             </a:r>
           </a:p>
         </p:txBody>
@@ -8318,7 +8350,7 @@
         </p:nvSpPr>
         <p:spPr>
           <a:xfrm>
-            <a:off x="548640" y="1325880"/>
+            <a:off x="548640" y="1280160"/>
             <a:ext cx="11064240" cy="27940"/>
           </a:xfrm>
           <a:prstGeom prst="rect">
@@ -8370,8 +8402,8 @@
         </p:blipFill>
         <p:spPr>
           <a:xfrm>
-            <a:off x="1131570" y="1691640"/>
-            <a:ext cx="5143500" cy="4572000"/>
+            <a:off x="1080135" y="1600200"/>
+            <a:ext cx="5246370" cy="4663440"/>
           </a:xfrm>
           <a:prstGeom prst="rect">
             <a:avLst/>
@@ -8386,8 +8418,8 @@
         </p:nvSpPr>
         <p:spPr>
           <a:xfrm>
-            <a:off x="7132320" y="1737360"/>
-            <a:ext cx="4389120" cy="960120"/>
+            <a:off x="7132320" y="1645920"/>
+            <a:ext cx="4389120" cy="914400"/>
           </a:xfrm>
           <a:prstGeom prst="roundRect">
             <a:avLst>
@@ -8453,8 +8485,8 @@
         </p:nvSpPr>
         <p:spPr>
           <a:xfrm>
-            <a:off x="7132320" y="2834640"/>
-            <a:ext cx="4389120" cy="960120"/>
+            <a:off x="7132320" y="2697480"/>
+            <a:ext cx="4389120" cy="914400"/>
           </a:xfrm>
           <a:prstGeom prst="roundRect">
             <a:avLst>
@@ -8520,8 +8552,8 @@
         </p:nvSpPr>
         <p:spPr>
           <a:xfrm>
-            <a:off x="7132320" y="3931920"/>
-            <a:ext cx="4389120" cy="960120"/>
+            <a:off x="7132320" y="3749039"/>
+            <a:ext cx="4389120" cy="914400"/>
           </a:xfrm>
           <a:prstGeom prst="roundRect">
             <a:avLst>
@@ -8587,8 +8619,8 @@
         </p:nvSpPr>
         <p:spPr>
           <a:xfrm>
-            <a:off x="7132320" y="5074920"/>
-            <a:ext cx="4389120" cy="1188720"/>
+            <a:off x="7132320" y="4846320"/>
+            <a:ext cx="4389120" cy="1463040"/>
           </a:xfrm>
           <a:prstGeom prst="rect">
             <a:avLst/>
@@ -8613,7 +8645,7 @@
                 </a:solidFill>
                 <a:latin typeface="Calibri"/>
               </a:rPr>
-              <a:t>LISA (furto): 36 municípios em cluster Alto-Alto ao longo do litoral (36% litorâneos/turísticos) e 45 Baixo-Baixo no oeste/centro-sul — todos significativos a p = 0,001 (999 permutações).</a:t>
+              <a:t>Todos significativos a p = 0,001 (999 permutações): o crime não está distribuído ao acaso. LISA (furto): 36 municípios em cluster Alto-Alto acompanham o litoral (36% já são litorâneos/turísticos) — primeira pista quantitativa da H2.</a:t>
             </a:r>
           </a:p>
         </p:txBody>
@@ -8731,7 +8763,7 @@
         <p:spPr>
           <a:xfrm>
             <a:off x="548640" y="320040"/>
-            <a:ext cx="7315200" cy="365760"/>
+            <a:ext cx="8229600" cy="365760"/>
           </a:xfrm>
           <a:prstGeom prst="rect">
             <a:avLst/>
@@ -8789,13 +8821,13 @@
               </a:lnSpc>
             </a:pPr>
             <a:r>
-              <a:rPr sz="3000" b="1" i="0">
+              <a:rPr sz="2800" b="1" i="0">
                 <a:solidFill>
                   <a:srgbClr val="1A1A1A"/>
                 </a:solidFill>
                 <a:latin typeface="Calibri"/>
               </a:rPr>
-              <a:t>Regressão linear clássica: renda explica pouco sozinha</a:t>
+              <a:t>Regressão clássica: a renda sozinha não basta</a:t>
             </a:r>
           </a:p>
         </p:txBody>
@@ -8808,7 +8840,7 @@
         </p:nvSpPr>
         <p:spPr>
           <a:xfrm>
-            <a:off x="548640" y="1325880"/>
+            <a:off x="548640" y="1280160"/>
             <a:ext cx="11064240" cy="27940"/>
           </a:xfrm>
           <a:prstGeom prst="rect">
@@ -8860,7 +8892,7 @@
         </p:blipFill>
         <p:spPr>
           <a:xfrm>
-            <a:off x="548640" y="1844040"/>
+            <a:off x="548640" y="1798320"/>
             <a:ext cx="6400800" cy="4267200"/>
           </a:xfrm>
           <a:prstGeom prst="rect">
@@ -8876,8 +8908,8 @@
         </p:nvSpPr>
         <p:spPr>
           <a:xfrm>
-            <a:off x="7223760" y="1783080"/>
-            <a:ext cx="4297680" cy="2926080"/>
+            <a:off x="7223760" y="1691640"/>
+            <a:ext cx="4297680" cy="2743200"/>
           </a:xfrm>
           <a:prstGeom prst="rect">
             <a:avLst/>
@@ -8895,7 +8927,7 @@
                 <a:spcPct val="115000"/>
               </a:lnSpc>
               <a:spcAft>
-                <a:spcPts val="1400"/>
+                <a:spcPts val="1200"/>
               </a:spcAft>
             </a:pPr>
             <a:r>
@@ -8914,7 +8946,7 @@
                 <a:spcPct val="115000"/>
               </a:lnSpc>
               <a:spcAft>
-                <a:spcPts val="1400"/>
+                <a:spcPts val="1200"/>
               </a:spcAft>
             </a:pPr>
             <a:r>
@@ -8924,7 +8956,7 @@
                 </a:solidFill>
                 <a:latin typeface="Calibri"/>
               </a:rPr>
-              <a:t>—  Com litoral: taxa = 1,036 + 0,00233·renda + 10,969·litoral   R² = 0,357</a:t>
+              <a:t>—  Com litoral: taxa = 1,036 + 0,00233·renda + 10,97·litoral   R² = 0,357</a:t>
             </a:r>
           </a:p>
           <a:p>
@@ -8933,7 +8965,7 @@
                 <a:spcPct val="115000"/>
               </a:lnSpc>
               <a:spcAft>
-                <a:spcPts val="1400"/>
+                <a:spcPts val="1200"/>
               </a:spcAft>
             </a:pPr>
             <a:r>
@@ -8943,8 +8975,7 @@
                 </a:solidFill>
                 <a:latin typeface="Calibri"/>
               </a:rPr>
-              <a:t>—  Litoral soma ~11 furtos/1.000 hab., equivalente a
-+R$4.700 de renda.</a:t>
+              <a:t>—  O litoral soma ~11 furtos/1.000 hab., equivalente a +R$4.700 de renda.</a:t>
             </a:r>
           </a:p>
         </p:txBody>
@@ -8957,8 +8988,8 @@
         </p:nvSpPr>
         <p:spPr>
           <a:xfrm>
-            <a:off x="7223760" y="4892040"/>
-            <a:ext cx="4297680" cy="1280160"/>
+            <a:off x="7223760" y="4572000"/>
+            <a:ext cx="4297680" cy="1737360"/>
           </a:xfrm>
           <a:prstGeom prst="rect">
             <a:avLst/>
@@ -8983,39 +9014,7 @@
                 </a:solidFill>
                 <a:latin typeface="Calibri"/>
               </a:rPr>
-              <a:t>Resíduos não normais e heterocedásticos (Shapiro-Wilk, ncvTest</a:t>
-            </a:r>
-          </a:p>
-          <a:p>
-            <a:pPr algn="l">
-              <a:lnSpc>
-                <a:spcPct val="115000"/>
-              </a:lnSpc>
-            </a:pPr>
-            <a:r>
-              <a:rPr sz="1300" b="0" i="0">
-                <a:solidFill>
-                  <a:srgbClr val="595959"/>
-                </a:solidFill>
-                <a:latin typeface="Calibri"/>
-              </a:rPr>
-              <a:t>p&lt;0,001) e Moran's I dos resíduos = 0,38 → estrutura espacial</a:t>
-            </a:r>
-          </a:p>
-          <a:p>
-            <a:pPr algn="l">
-              <a:lnSpc>
-                <a:spcPct val="115000"/>
-              </a:lnSpc>
-            </a:pPr>
-            <a:r>
-              <a:rPr sz="1300" b="0" i="0">
-                <a:solidFill>
-                  <a:srgbClr val="595959"/>
-                </a:solidFill>
-                <a:latin typeface="Calibri"/>
-              </a:rPr>
-              <a:t>não explicada motiva os modelos espaciais.</a:t>
+              <a:t>Distância de Cook: 29 municípios influentes, 8 deles litorâneos — 50% dos 16 municípios do litoral. O padrão litorâneo não é efeito de poucos pontos: é estrutural.</a:t>
             </a:r>
           </a:p>
         </p:txBody>
@@ -9133,7 +9132,7 @@
         <p:spPr>
           <a:xfrm>
             <a:off x="548640" y="320040"/>
-            <a:ext cx="7315200" cy="365760"/>
+            <a:ext cx="8229600" cy="365760"/>
           </a:xfrm>
           <a:prstGeom prst="rect">
             <a:avLst/>
@@ -9191,13 +9190,13 @@
               </a:lnSpc>
             </a:pPr>
             <a:r>
-              <a:rPr sz="3000" b="1" i="0">
+              <a:rPr sz="2800" b="1" i="0">
                 <a:solidFill>
                   <a:srgbClr val="1A1A1A"/>
                 </a:solidFill>
                 <a:latin typeface="Calibri"/>
               </a:rPr>
-              <a:t>Regressão espacial global: spatial error vence</a:t>
+              <a:t>O espaço importa: do global ao local</a:t>
             </a:r>
           </a:p>
         </p:txBody>
@@ -9210,7 +9209,7 @@
         </p:nvSpPr>
         <p:spPr>
           <a:xfrm>
-            <a:off x="548640" y="1325880"/>
+            <a:off x="548640" y="1280160"/>
             <a:ext cx="11064240" cy="27940"/>
           </a:xfrm>
           <a:prstGeom prst="rect">
@@ -9254,8 +9253,8 @@
         </p:nvSpPr>
         <p:spPr>
           <a:xfrm>
-            <a:off x="548640" y="1737360"/>
-            <a:ext cx="5486400" cy="3291840"/>
+            <a:off x="548640" y="1600200"/>
+            <a:ext cx="11064240" cy="548640"/>
           </a:xfrm>
           <a:prstGeom prst="rect">
             <a:avLst/>
@@ -9263,92 +9262,49 @@
           <a:noFill/>
         </p:spPr>
         <p:txBody>
-          <a:bodyPr wrap="square">
+          <a:bodyPr wrap="square" anchor="t">
             <a:spAutoFit/>
           </a:bodyPr>
           <a:lstStyle/>
           <a:p>
-            <a:pPr>
+            <a:pPr algn="l">
               <a:lnSpc>
                 <a:spcPct val="115000"/>
               </a:lnSpc>
-              <a:spcAft>
-                <a:spcPts val="1600"/>
-              </a:spcAft>
             </a:pPr>
             <a:r>
-              <a:rPr sz="1600">
+              <a:rPr sz="1500" b="0" i="0">
                 <a:solidFill>
                   <a:srgbClr val="333333"/>
                 </a:solidFill>
                 <a:latin typeface="Calibri"/>
               </a:rPr>
-              <a:t>—  Testes de Lagrange (robustos): LM error significativo (p&lt;0,001),
-LM lag não significativo (p=0,267) → spatial error é o modelo indicado.</a:t>
-            </a:r>
-          </a:p>
-          <a:p>
-            <a:pPr>
-              <a:lnSpc>
-                <a:spcPct val="115000"/>
-              </a:lnSpc>
-              <a:spcAft>
-                <a:spcPts val="1600"/>
-              </a:spcAft>
-            </a:pPr>
-            <a:r>
-              <a:rPr sz="1600">
-                <a:solidFill>
-                  <a:srgbClr val="333333"/>
-                </a:solidFill>
-                <a:latin typeface="Calibri"/>
-              </a:rPr>
-              <a:t>—  λ = 0,588, R² = 0,392, AIC = 3220,6.</a:t>
-            </a:r>
-          </a:p>
-          <a:p>
-            <a:pPr>
-              <a:lnSpc>
-                <a:spcPct val="115000"/>
-              </a:lnSpc>
-              <a:spcAft>
-                <a:spcPts val="1600"/>
-              </a:spcAft>
-            </a:pPr>
-            <a:r>
-              <a:rPr sz="1600">
-                <a:solidFill>
-                  <a:srgbClr val="333333"/>
-                </a:solidFill>
-                <a:latin typeface="Calibri"/>
-              </a:rPr>
-              <a:t>—  Moran's I dos resíduos cai de 0,38 para −0,03 — autocorrelação
-espacial praticamente eliminada.</a:t>
-            </a:r>
-          </a:p>
-        </p:txBody>
-      </p:sp>
-      <p:sp>
-        <p:nvSpPr>
-          <p:cNvPr id="6" name="Rounded Rectangle 5"/>
+              <a:t>Os resíduos do modelo clássico têm Moran's I = 0,38 (p&lt;0,001): a dependência espacial é ignorada pelo OLS. Como resolvemos isso?</a:t>
+            </a:r>
+          </a:p>
+        </p:txBody>
+      </p:sp>
+      <p:sp>
+        <p:nvSpPr>
+          <p:cNvPr id="6" name="Rectangle 5"/>
           <p:cNvSpPr/>
           <p:nvPr/>
         </p:nvSpPr>
         <p:spPr>
           <a:xfrm>
-            <a:off x="548640" y="5029200"/>
-            <a:ext cx="5486400" cy="1188720"/>
-          </a:xfrm>
-          <a:prstGeom prst="roundRect">
-            <a:avLst>
-              <a:gd name="adj" fmla="val 8000"/>
-            </a:avLst>
+            <a:off x="548640" y="2331720"/>
+            <a:ext cx="3566160" cy="1828800"/>
+          </a:xfrm>
+          <a:prstGeom prst="rect">
+            <a:avLst/>
           </a:prstGeom>
           <a:solidFill>
-            <a:srgbClr val="F2F2F2"/>
+            <a:srgbClr val="FFFFFF"/>
           </a:solidFill>
-          <a:ln>
-            <a:noFill/>
+          <a:ln w="12700">
+            <a:solidFill>
+              <a:srgbClr val="1F4E79"/>
+            </a:solidFill>
           </a:ln>
           <a:effectLst/>
         </p:spPr>
@@ -9367,24 +9323,726 @@
           </a:fontRef>
         </p:style>
         <p:txBody>
-          <a:bodyPr rtlCol="0" anchor="ctr" wrap="square" lIns="182880" rIns="182880"/>
+          <a:bodyPr rtlCol="0" anchor="ctr"/>
           <a:lstStyle/>
           <a:p>
             <a:pPr algn="ctr"/>
-            <a:r>
-              <a:rPr sz="1300" i="1">
+          </a:p>
+        </p:txBody>
+      </p:sp>
+      <p:sp>
+        <p:nvSpPr>
+          <p:cNvPr id="7" name="Rectangle 6"/>
+          <p:cNvSpPr/>
+          <p:nvPr/>
+        </p:nvSpPr>
+        <p:spPr>
+          <a:xfrm>
+            <a:off x="548640" y="2331720"/>
+            <a:ext cx="3566160" cy="38100"/>
+          </a:xfrm>
+          <a:prstGeom prst="rect">
+            <a:avLst/>
+          </a:prstGeom>
+          <a:solidFill>
+            <a:srgbClr val="ED7D31"/>
+          </a:solidFill>
+          <a:ln>
+            <a:noFill/>
+          </a:ln>
+          <a:effectLst/>
+        </p:spPr>
+        <p:style>
+          <a:lnRef idx="1">
+            <a:schemeClr val="accent1"/>
+          </a:lnRef>
+          <a:fillRef idx="3">
+            <a:schemeClr val="accent1"/>
+          </a:fillRef>
+          <a:effectRef idx="2">
+            <a:schemeClr val="accent1"/>
+          </a:effectRef>
+          <a:fontRef idx="minor">
+            <a:schemeClr val="lt1"/>
+          </a:fontRef>
+        </p:style>
+        <p:txBody>
+          <a:bodyPr rtlCol="0" anchor="ctr"/>
+          <a:lstStyle/>
+          <a:p>
+            <a:pPr algn="ctr"/>
+          </a:p>
+        </p:txBody>
+      </p:sp>
+      <p:sp>
+        <p:nvSpPr>
+          <p:cNvPr id="8" name="TextBox 7"/>
+          <p:cNvSpPr txBox="1"/>
+          <p:nvPr/>
+        </p:nvSpPr>
+        <p:spPr>
+          <a:xfrm>
+            <a:off x="777240" y="2514600"/>
+            <a:ext cx="3108960" cy="365760"/>
+          </a:xfrm>
+          <a:prstGeom prst="rect">
+            <a:avLst/>
+          </a:prstGeom>
+          <a:noFill/>
+        </p:spPr>
+        <p:txBody>
+          <a:bodyPr wrap="square" anchor="t">
+            <a:spAutoFit/>
+          </a:bodyPr>
+          <a:lstStyle/>
+          <a:p>
+            <a:pPr algn="l">
+              <a:lnSpc>
+                <a:spcPct val="115000"/>
+              </a:lnSpc>
+            </a:pPr>
+            <a:r>
+              <a:rPr sz="1500" b="1" i="0">
+                <a:solidFill>
+                  <a:srgbClr val="1A1A1A"/>
+                </a:solidFill>
+                <a:latin typeface="Calibri"/>
+              </a:rPr>
+              <a:t>1. Spatial Error (global)</a:t>
+            </a:r>
+          </a:p>
+        </p:txBody>
+      </p:sp>
+      <p:sp>
+        <p:nvSpPr>
+          <p:cNvPr id="9" name="TextBox 8"/>
+          <p:cNvSpPr txBox="1"/>
+          <p:nvPr/>
+        </p:nvSpPr>
+        <p:spPr>
+          <a:xfrm>
+            <a:off x="777240" y="2926080"/>
+            <a:ext cx="3108960" cy="457200"/>
+          </a:xfrm>
+          <a:prstGeom prst="rect">
+            <a:avLst/>
+          </a:prstGeom>
+          <a:noFill/>
+        </p:spPr>
+        <p:txBody>
+          <a:bodyPr wrap="square" anchor="t">
+            <a:spAutoFit/>
+          </a:bodyPr>
+          <a:lstStyle/>
+          <a:p>
+            <a:pPr algn="l">
+              <a:lnSpc>
+                <a:spcPct val="115000"/>
+              </a:lnSpc>
+            </a:pPr>
+            <a:r>
+              <a:rPr sz="1250" b="0" i="0">
                 <a:solidFill>
                   <a:srgbClr val="595959"/>
                 </a:solidFill>
-              </a:rPr>
-              <a:t>Leitura: a dependência espacial está no erro — coerente com uma variável omitida e espacialmente agrupada, como a condição litorânea.</a:t>
+                <a:latin typeface="Calibri"/>
+              </a:rPr>
+              <a:t>Testes de Lagrange apontam este</a:t>
+            </a:r>
+          </a:p>
+          <a:p>
+            <a:pPr algn="l">
+              <a:lnSpc>
+                <a:spcPct val="115000"/>
+              </a:lnSpc>
+            </a:pPr>
+            <a:r>
+              <a:rPr sz="1250" b="0" i="0">
+                <a:solidFill>
+                  <a:srgbClr val="595959"/>
+                </a:solidFill>
+                <a:latin typeface="Calibri"/>
+              </a:rPr>
+              <a:t>modelo como mais adequado.</a:t>
+            </a:r>
+          </a:p>
+          <a:p>
+            <a:pPr algn="l">
+              <a:lnSpc>
+                <a:spcPct val="115000"/>
+              </a:lnSpc>
+            </a:pPr>
+            <a:r>
+              <a:rPr sz="1250" b="0" i="0">
+                <a:solidFill>
+                  <a:srgbClr val="595959"/>
+                </a:solidFill>
+                <a:latin typeface="Calibri"/>
+              </a:rPr>
+              <a:t>λ = 0,588 — resíduo cai a −0,03</a:t>
+            </a:r>
+          </a:p>
+        </p:txBody>
+      </p:sp>
+      <p:sp>
+        <p:nvSpPr>
+          <p:cNvPr id="10" name="TextBox 9"/>
+          <p:cNvSpPr txBox="1"/>
+          <p:nvPr/>
+        </p:nvSpPr>
+        <p:spPr>
+          <a:xfrm>
+            <a:off x="777240" y="3474720"/>
+            <a:ext cx="3108960" cy="548640"/>
+          </a:xfrm>
+          <a:prstGeom prst="rect">
+            <a:avLst/>
+          </a:prstGeom>
+          <a:noFill/>
+        </p:spPr>
+        <p:txBody>
+          <a:bodyPr wrap="square" anchor="t">
+            <a:spAutoFit/>
+          </a:bodyPr>
+          <a:lstStyle/>
+          <a:p>
+            <a:pPr algn="r">
+              <a:lnSpc>
+                <a:spcPct val="115000"/>
+              </a:lnSpc>
+            </a:pPr>
+            <a:r>
+              <a:rPr sz="2200" b="1" i="0">
+                <a:solidFill>
+                  <a:srgbClr val="ED7D31"/>
+                </a:solidFill>
+                <a:latin typeface="Calibri"/>
+              </a:rPr>
+              <a:t>R² = 0,392</a:t>
+            </a:r>
+          </a:p>
+        </p:txBody>
+      </p:sp>
+      <p:sp>
+        <p:nvSpPr>
+          <p:cNvPr id="11" name="Rectangle 10"/>
+          <p:cNvSpPr/>
+          <p:nvPr/>
+        </p:nvSpPr>
+        <p:spPr>
+          <a:xfrm>
+            <a:off x="4297680" y="2331720"/>
+            <a:ext cx="3566160" cy="1828800"/>
+          </a:xfrm>
+          <a:prstGeom prst="rect">
+            <a:avLst/>
+          </a:prstGeom>
+          <a:solidFill>
+            <a:srgbClr val="FFFFFF"/>
+          </a:solidFill>
+          <a:ln w="12700">
+            <a:solidFill>
+              <a:srgbClr val="1F4E79"/>
+            </a:solidFill>
+          </a:ln>
+          <a:effectLst/>
+        </p:spPr>
+        <p:style>
+          <a:lnRef idx="1">
+            <a:schemeClr val="accent1"/>
+          </a:lnRef>
+          <a:fillRef idx="3">
+            <a:schemeClr val="accent1"/>
+          </a:fillRef>
+          <a:effectRef idx="2">
+            <a:schemeClr val="accent1"/>
+          </a:effectRef>
+          <a:fontRef idx="minor">
+            <a:schemeClr val="lt1"/>
+          </a:fontRef>
+        </p:style>
+        <p:txBody>
+          <a:bodyPr rtlCol="0" anchor="ctr"/>
+          <a:lstStyle/>
+          <a:p>
+            <a:pPr algn="ctr"/>
+          </a:p>
+        </p:txBody>
+      </p:sp>
+      <p:sp>
+        <p:nvSpPr>
+          <p:cNvPr id="12" name="Rectangle 11"/>
+          <p:cNvSpPr/>
+          <p:nvPr/>
+        </p:nvSpPr>
+        <p:spPr>
+          <a:xfrm>
+            <a:off x="4297680" y="2331720"/>
+            <a:ext cx="3566160" cy="38100"/>
+          </a:xfrm>
+          <a:prstGeom prst="rect">
+            <a:avLst/>
+          </a:prstGeom>
+          <a:solidFill>
+            <a:srgbClr val="ED7D31"/>
+          </a:solidFill>
+          <a:ln>
+            <a:noFill/>
+          </a:ln>
+          <a:effectLst/>
+        </p:spPr>
+        <p:style>
+          <a:lnRef idx="1">
+            <a:schemeClr val="accent1"/>
+          </a:lnRef>
+          <a:fillRef idx="3">
+            <a:schemeClr val="accent1"/>
+          </a:fillRef>
+          <a:effectRef idx="2">
+            <a:schemeClr val="accent1"/>
+          </a:effectRef>
+          <a:fontRef idx="minor">
+            <a:schemeClr val="lt1"/>
+          </a:fontRef>
+        </p:style>
+        <p:txBody>
+          <a:bodyPr rtlCol="0" anchor="ctr"/>
+          <a:lstStyle/>
+          <a:p>
+            <a:pPr algn="ctr"/>
+          </a:p>
+        </p:txBody>
+      </p:sp>
+      <p:sp>
+        <p:nvSpPr>
+          <p:cNvPr id="13" name="TextBox 12"/>
+          <p:cNvSpPr txBox="1"/>
+          <p:nvPr/>
+        </p:nvSpPr>
+        <p:spPr>
+          <a:xfrm>
+            <a:off x="4526280" y="2514600"/>
+            <a:ext cx="3108960" cy="365760"/>
+          </a:xfrm>
+          <a:prstGeom prst="rect">
+            <a:avLst/>
+          </a:prstGeom>
+          <a:noFill/>
+        </p:spPr>
+        <p:txBody>
+          <a:bodyPr wrap="square" anchor="t">
+            <a:spAutoFit/>
+          </a:bodyPr>
+          <a:lstStyle/>
+          <a:p>
+            <a:pPr algn="l">
+              <a:lnSpc>
+                <a:spcPct val="115000"/>
+              </a:lnSpc>
+            </a:pPr>
+            <a:r>
+              <a:rPr sz="1500" b="1" i="0">
+                <a:solidFill>
+                  <a:srgbClr val="1A1A1A"/>
+                </a:solidFill>
+                <a:latin typeface="Calibri"/>
+              </a:rPr>
+              <a:t>2. GWR (renda)</a:t>
+            </a:r>
+          </a:p>
+        </p:txBody>
+      </p:sp>
+      <p:sp>
+        <p:nvSpPr>
+          <p:cNvPr id="14" name="TextBox 13"/>
+          <p:cNvSpPr txBox="1"/>
+          <p:nvPr/>
+        </p:nvSpPr>
+        <p:spPr>
+          <a:xfrm>
+            <a:off x="4526280" y="2926080"/>
+            <a:ext cx="3108960" cy="457200"/>
+          </a:xfrm>
+          <a:prstGeom prst="rect">
+            <a:avLst/>
+          </a:prstGeom>
+          <a:noFill/>
+        </p:spPr>
+        <p:txBody>
+          <a:bodyPr wrap="square" anchor="t">
+            <a:spAutoFit/>
+          </a:bodyPr>
+          <a:lstStyle/>
+          <a:p>
+            <a:pPr algn="l">
+              <a:lnSpc>
+                <a:spcPct val="115000"/>
+              </a:lnSpc>
+            </a:pPr>
+            <a:r>
+              <a:rPr sz="1250" b="0" i="0">
+                <a:solidFill>
+                  <a:srgbClr val="595959"/>
+                </a:solidFill>
+                <a:latin typeface="Calibri"/>
+              </a:rPr>
+              <a:t>Banda adaptativa (~10 vizinhos).</a:t>
+            </a:r>
+          </a:p>
+          <a:p>
+            <a:pPr algn="l">
+              <a:lnSpc>
+                <a:spcPct val="115000"/>
+              </a:lnSpc>
+            </a:pPr>
+            <a:r>
+              <a:rPr sz="1250" b="0" i="0">
+                <a:solidFill>
+                  <a:srgbClr val="595959"/>
+                </a:solidFill>
+                <a:latin typeface="Calibri"/>
+              </a:rPr>
+              <a:t>O coeficiente da renda passa a</a:t>
+            </a:r>
+          </a:p>
+          <a:p>
+            <a:pPr algn="l">
+              <a:lnSpc>
+                <a:spcPct val="115000"/>
+              </a:lnSpc>
+            </a:pPr>
+            <a:r>
+              <a:rPr sz="1250" b="0" i="0">
+                <a:solidFill>
+                  <a:srgbClr val="595959"/>
+                </a:solidFill>
+                <a:latin typeface="Calibri"/>
+              </a:rPr>
+              <a:t>variar livremente no espaço.</a:t>
+            </a:r>
+          </a:p>
+        </p:txBody>
+      </p:sp>
+      <p:sp>
+        <p:nvSpPr>
+          <p:cNvPr id="15" name="TextBox 14"/>
+          <p:cNvSpPr txBox="1"/>
+          <p:nvPr/>
+        </p:nvSpPr>
+        <p:spPr>
+          <a:xfrm>
+            <a:off x="4526280" y="3474720"/>
+            <a:ext cx="3108960" cy="548640"/>
+          </a:xfrm>
+          <a:prstGeom prst="rect">
+            <a:avLst/>
+          </a:prstGeom>
+          <a:noFill/>
+        </p:spPr>
+        <p:txBody>
+          <a:bodyPr wrap="square" anchor="t">
+            <a:spAutoFit/>
+          </a:bodyPr>
+          <a:lstStyle/>
+          <a:p>
+            <a:pPr algn="r">
+              <a:lnSpc>
+                <a:spcPct val="115000"/>
+              </a:lnSpc>
+            </a:pPr>
+            <a:r>
+              <a:rPr sz="2200" b="1" i="0">
+                <a:solidFill>
+                  <a:srgbClr val="ED7D31"/>
+                </a:solidFill>
+                <a:latin typeface="Calibri"/>
+              </a:rPr>
+              <a:t>R² = 0,458</a:t>
+            </a:r>
+          </a:p>
+        </p:txBody>
+      </p:sp>
+      <p:sp>
+        <p:nvSpPr>
+          <p:cNvPr id="16" name="Rectangle 15"/>
+          <p:cNvSpPr/>
+          <p:nvPr/>
+        </p:nvSpPr>
+        <p:spPr>
+          <a:xfrm>
+            <a:off x="8046720" y="2331720"/>
+            <a:ext cx="3566160" cy="1828800"/>
+          </a:xfrm>
+          <a:prstGeom prst="rect">
+            <a:avLst/>
+          </a:prstGeom>
+          <a:solidFill>
+            <a:srgbClr val="1F4E79"/>
+          </a:solidFill>
+          <a:ln>
+            <a:solidFill>
+              <a:srgbClr val="1F4E79"/>
+            </a:solidFill>
+          </a:ln>
+          <a:effectLst/>
+        </p:spPr>
+        <p:style>
+          <a:lnRef idx="1">
+            <a:schemeClr val="accent1"/>
+          </a:lnRef>
+          <a:fillRef idx="3">
+            <a:schemeClr val="accent1"/>
+          </a:fillRef>
+          <a:effectRef idx="2">
+            <a:schemeClr val="accent1"/>
+          </a:effectRef>
+          <a:fontRef idx="minor">
+            <a:schemeClr val="lt1"/>
+          </a:fontRef>
+        </p:style>
+        <p:txBody>
+          <a:bodyPr rtlCol="0" anchor="ctr"/>
+          <a:lstStyle/>
+          <a:p>
+            <a:pPr algn="ctr"/>
+          </a:p>
+        </p:txBody>
+      </p:sp>
+      <p:sp>
+        <p:nvSpPr>
+          <p:cNvPr id="17" name="Rectangle 16"/>
+          <p:cNvSpPr/>
+          <p:nvPr/>
+        </p:nvSpPr>
+        <p:spPr>
+          <a:xfrm>
+            <a:off x="8046720" y="2331720"/>
+            <a:ext cx="3566160" cy="38100"/>
+          </a:xfrm>
+          <a:prstGeom prst="rect">
+            <a:avLst/>
+          </a:prstGeom>
+          <a:solidFill>
+            <a:srgbClr val="FFFFFF"/>
+          </a:solidFill>
+          <a:ln>
+            <a:noFill/>
+          </a:ln>
+          <a:effectLst/>
+        </p:spPr>
+        <p:style>
+          <a:lnRef idx="1">
+            <a:schemeClr val="accent1"/>
+          </a:lnRef>
+          <a:fillRef idx="3">
+            <a:schemeClr val="accent1"/>
+          </a:fillRef>
+          <a:effectRef idx="2">
+            <a:schemeClr val="accent1"/>
+          </a:effectRef>
+          <a:fontRef idx="minor">
+            <a:schemeClr val="lt1"/>
+          </a:fontRef>
+        </p:style>
+        <p:txBody>
+          <a:bodyPr rtlCol="0" anchor="ctr"/>
+          <a:lstStyle/>
+          <a:p>
+            <a:pPr algn="ctr"/>
+          </a:p>
+        </p:txBody>
+      </p:sp>
+      <p:sp>
+        <p:nvSpPr>
+          <p:cNvPr id="18" name="TextBox 17"/>
+          <p:cNvSpPr txBox="1"/>
+          <p:nvPr/>
+        </p:nvSpPr>
+        <p:spPr>
+          <a:xfrm>
+            <a:off x="8275320" y="2514600"/>
+            <a:ext cx="3108960" cy="365760"/>
+          </a:xfrm>
+          <a:prstGeom prst="rect">
+            <a:avLst/>
+          </a:prstGeom>
+          <a:noFill/>
+        </p:spPr>
+        <p:txBody>
+          <a:bodyPr wrap="square" anchor="t">
+            <a:spAutoFit/>
+          </a:bodyPr>
+          <a:lstStyle/>
+          <a:p>
+            <a:pPr algn="l">
+              <a:lnSpc>
+                <a:spcPct val="115000"/>
+              </a:lnSpc>
+            </a:pPr>
+            <a:r>
+              <a:rPr sz="1500" b="1" i="0">
+                <a:solidFill>
+                  <a:srgbClr val="FFFFFF"/>
+                </a:solidFill>
+                <a:latin typeface="Calibri"/>
+              </a:rPr>
+              <a:t>3. GWR + litoral</a:t>
+            </a:r>
+          </a:p>
+        </p:txBody>
+      </p:sp>
+      <p:sp>
+        <p:nvSpPr>
+          <p:cNvPr id="19" name="TextBox 18"/>
+          <p:cNvSpPr txBox="1"/>
+          <p:nvPr/>
+        </p:nvSpPr>
+        <p:spPr>
+          <a:xfrm>
+            <a:off x="8275320" y="2926080"/>
+            <a:ext cx="3108960" cy="457200"/>
+          </a:xfrm>
+          <a:prstGeom prst="rect">
+            <a:avLst/>
+          </a:prstGeom>
+          <a:noFill/>
+        </p:spPr>
+        <p:txBody>
+          <a:bodyPr wrap="square" anchor="t">
+            <a:spAutoFit/>
+          </a:bodyPr>
+          <a:lstStyle/>
+          <a:p>
+            <a:pPr algn="l">
+              <a:lnSpc>
+                <a:spcPct val="115000"/>
+              </a:lnSpc>
+            </a:pPr>
+            <a:r>
+              <a:rPr sz="1250" b="0" i="0">
+                <a:solidFill>
+                  <a:srgbClr val="DDE6F0"/>
+                </a:solidFill>
+                <a:latin typeface="Calibri"/>
+              </a:rPr>
+              <a:t>Banda adaptativa incorporando</a:t>
+            </a:r>
+          </a:p>
+          <a:p>
+            <a:pPr algn="l">
+              <a:lnSpc>
+                <a:spcPct val="115000"/>
+              </a:lnSpc>
+            </a:pPr>
+            <a:r>
+              <a:rPr sz="1250" b="0" i="0">
+                <a:solidFill>
+                  <a:srgbClr val="DDE6F0"/>
+                </a:solidFill>
+                <a:latin typeface="Calibri"/>
+              </a:rPr>
+              <a:t>renda e a condição litorânea/</a:t>
+            </a:r>
+          </a:p>
+          <a:p>
+            <a:pPr algn="l">
+              <a:lnSpc>
+                <a:spcPct val="115000"/>
+              </a:lnSpc>
+            </a:pPr>
+            <a:r>
+              <a:rPr sz="1250" b="0" i="0">
+                <a:solidFill>
+                  <a:srgbClr val="DDE6F0"/>
+                </a:solidFill>
+                <a:latin typeface="Calibri"/>
+              </a:rPr>
+              <a:t>turística, localmente.</a:t>
+            </a:r>
+          </a:p>
+        </p:txBody>
+      </p:sp>
+      <p:sp>
+        <p:nvSpPr>
+          <p:cNvPr id="20" name="TextBox 19"/>
+          <p:cNvSpPr txBox="1"/>
+          <p:nvPr/>
+        </p:nvSpPr>
+        <p:spPr>
+          <a:xfrm>
+            <a:off x="8275320" y="3474720"/>
+            <a:ext cx="3108960" cy="548640"/>
+          </a:xfrm>
+          <a:prstGeom prst="rect">
+            <a:avLst/>
+          </a:prstGeom>
+          <a:noFill/>
+        </p:spPr>
+        <p:txBody>
+          <a:bodyPr wrap="square" anchor="t">
+            <a:spAutoFit/>
+          </a:bodyPr>
+          <a:lstStyle/>
+          <a:p>
+            <a:pPr algn="r">
+              <a:lnSpc>
+                <a:spcPct val="115000"/>
+              </a:lnSpc>
+            </a:pPr>
+            <a:r>
+              <a:rPr sz="2200" b="1" i="0">
+                <a:solidFill>
+                  <a:srgbClr val="FFFFFF"/>
+                </a:solidFill>
+                <a:latin typeface="Calibri"/>
+              </a:rPr>
+              <a:t>R² = 0,532</a:t>
+            </a:r>
+          </a:p>
+        </p:txBody>
+      </p:sp>
+      <p:sp>
+        <p:nvSpPr>
+          <p:cNvPr id="21" name="TextBox 20"/>
+          <p:cNvSpPr txBox="1"/>
+          <p:nvPr/>
+        </p:nvSpPr>
+        <p:spPr>
+          <a:xfrm>
+            <a:off x="548640" y="4617720"/>
+            <a:ext cx="11064240" cy="548640"/>
+          </a:xfrm>
+          <a:prstGeom prst="rect">
+            <a:avLst/>
+          </a:prstGeom>
+          <a:noFill/>
+        </p:spPr>
+        <p:txBody>
+          <a:bodyPr wrap="square" anchor="t">
+            <a:spAutoFit/>
+          </a:bodyPr>
+          <a:lstStyle/>
+          <a:p>
+            <a:pPr algn="ctr">
+              <a:lnSpc>
+                <a:spcPct val="115000"/>
+              </a:lnSpc>
+            </a:pPr>
+            <a:r>
+              <a:rPr sz="1900" b="1" i="0">
+                <a:solidFill>
+                  <a:srgbClr val="1F4E79"/>
+                </a:solidFill>
+                <a:latin typeface="Calibri"/>
+              </a:rPr>
+              <a:t>Melhor ajuste entre todos os modelos testados — e o menor AIC (3027,4).</a:t>
             </a:r>
           </a:p>
         </p:txBody>
       </p:sp>
       <p:pic>
         <p:nvPicPr>
-          <p:cNvPr id="7" name="Picture 6" descr="reg_esp_residuos_ols.png"/>
+          <p:cNvPr id="22" name="Picture 21" descr="reg_esp_residuos_ols.png"/>
           <p:cNvPicPr>
             <a:picLocks noChangeAspect="1"/>
           </p:cNvPicPr>
@@ -9398,8 +10056,8 @@
         </p:blipFill>
         <p:spPr>
           <a:xfrm>
-            <a:off x="6389370" y="1691640"/>
-            <a:ext cx="5143500" cy="4572000"/>
+            <a:off x="5489257" y="5349240"/>
+            <a:ext cx="1183005" cy="1051560"/>
           </a:xfrm>
           <a:prstGeom prst="rect">
             <a:avLst/>
@@ -9408,7 +10066,46 @@
       </p:pic>
       <p:sp>
         <p:nvSpPr>
-          <p:cNvPr id="8" name="TextBox 7"/>
+          <p:cNvPr id="23" name="TextBox 22"/>
+          <p:cNvSpPr txBox="1"/>
+          <p:nvPr/>
+        </p:nvSpPr>
+        <p:spPr>
+          <a:xfrm>
+            <a:off x="4297680" y="5230368"/>
+            <a:ext cx="3566160" cy="228600"/>
+          </a:xfrm>
+          <a:prstGeom prst="rect">
+            <a:avLst/>
+          </a:prstGeom>
+          <a:noFill/>
+        </p:spPr>
+        <p:txBody>
+          <a:bodyPr wrap="square" anchor="t">
+            <a:spAutoFit/>
+          </a:bodyPr>
+          <a:lstStyle/>
+          <a:p>
+            <a:pPr algn="ctr">
+              <a:lnSpc>
+                <a:spcPct val="115000"/>
+              </a:lnSpc>
+            </a:pPr>
+            <a:r>
+              <a:rPr sz="1050" b="0" i="1">
+                <a:solidFill>
+                  <a:srgbClr val="595959"/>
+                </a:solidFill>
+                <a:latin typeface="Calibri"/>
+              </a:rPr>
+              <a:t>resíduos do OLS: por que sair dele</a:t>
+            </a:r>
+          </a:p>
+        </p:txBody>
+      </p:sp>
+      <p:sp>
+        <p:nvSpPr>
+          <p:cNvPr id="24" name="TextBox 23"/>
           <p:cNvSpPr txBox="1"/>
           <p:nvPr/>
         </p:nvSpPr>
@@ -9447,7 +10144,7 @@
       </p:sp>
       <p:sp>
         <p:nvSpPr>
-          <p:cNvPr id="9" name="TextBox 8"/>
+          <p:cNvPr id="25" name="TextBox 24"/>
           <p:cNvSpPr txBox="1"/>
           <p:nvPr/>
         </p:nvSpPr>
@@ -9519,7 +10216,7 @@
         <p:spPr>
           <a:xfrm>
             <a:off x="548640" y="320040"/>
-            <a:ext cx="7315200" cy="365760"/>
+            <a:ext cx="8229600" cy="365760"/>
           </a:xfrm>
           <a:prstGeom prst="rect">
             <a:avLst/>
@@ -9577,13 +10274,13 @@
               </a:lnSpc>
             </a:pPr>
             <a:r>
-              <a:rPr sz="3000" b="1" i="0">
+              <a:rPr sz="2800" b="1" i="0">
                 <a:solidFill>
                   <a:srgbClr val="1A1A1A"/>
                 </a:solidFill>
                 <a:latin typeface="Calibri"/>
               </a:rPr>
-              <a:t>GWR: a relação renda–furto não é fixa no espaço</a:t>
+              <a:t>GWR + litoral: isolando o efeito turístico</a:t>
             </a:r>
           </a:p>
         </p:txBody>
@@ -9596,7 +10293,7 @@
         </p:nvSpPr>
         <p:spPr>
           <a:xfrm>
-            <a:off x="548640" y="1325880"/>
+            <a:off x="548640" y="1280160"/>
             <a:ext cx="11064240" cy="27940"/>
           </a:xfrm>
           <a:prstGeom prst="rect">
@@ -9634,7 +10331,7 @@
       </p:sp>
       <p:pic>
         <p:nvPicPr>
-          <p:cNvPr id="5" name="Picture 4" descr="reg_esp_gwr_r2.png"/>
+          <p:cNvPr id="5" name="Picture 4" descr="gwr_contrafactual_dif.png"/>
           <p:cNvPicPr>
             <a:picLocks noChangeAspect="1"/>
           </p:cNvPicPr>
@@ -9648,8 +10345,8 @@
         </p:blipFill>
         <p:spPr>
           <a:xfrm>
-            <a:off x="902970" y="1691640"/>
-            <a:ext cx="5143500" cy="4572000"/>
+            <a:off x="851535" y="1600200"/>
+            <a:ext cx="5246370" cy="4663440"/>
           </a:xfrm>
           <a:prstGeom prst="rect">
             <a:avLst/>
@@ -9664,8 +10361,47 @@
         </p:nvSpPr>
         <p:spPr>
           <a:xfrm>
-            <a:off x="6675120" y="1783080"/>
-            <a:ext cx="4937760" cy="3291840"/>
+            <a:off x="6675120" y="1737360"/>
+            <a:ext cx="4937760" cy="548640"/>
+          </a:xfrm>
+          <a:prstGeom prst="rect">
+            <a:avLst/>
+          </a:prstGeom>
+          <a:noFill/>
+        </p:spPr>
+        <p:txBody>
+          <a:bodyPr wrap="square" anchor="t">
+            <a:spAutoFit/>
+          </a:bodyPr>
+          <a:lstStyle/>
+          <a:p>
+            <a:pPr algn="l">
+              <a:lnSpc>
+                <a:spcPct val="115000"/>
+              </a:lnSpc>
+            </a:pPr>
+            <a:r>
+              <a:rPr sz="1700" b="1" i="0">
+                <a:solidFill>
+                  <a:srgbClr val="1F4E79"/>
+                </a:solidFill>
+                <a:latin typeface="Calibri"/>
+              </a:rPr>
+              <a:t>Cenário contrafactual</a:t>
+            </a:r>
+          </a:p>
+        </p:txBody>
+      </p:sp>
+      <p:sp>
+        <p:nvSpPr>
+          <p:cNvPr id="7" name="TextBox 6"/>
+          <p:cNvSpPr txBox="1"/>
+          <p:nvPr/>
+        </p:nvSpPr>
+        <p:spPr>
+          <a:xfrm>
+            <a:off x="6675120" y="2286000"/>
+            <a:ext cx="4937760" cy="1828800"/>
           </a:xfrm>
           <a:prstGeom prst="rect">
             <a:avLst/>
@@ -9683,18 +10419,17 @@
                 <a:spcPct val="115000"/>
               </a:lnSpc>
               <a:spcAft>
-                <a:spcPts val="1400"/>
+                <a:spcPts val="1200"/>
               </a:spcAft>
             </a:pPr>
             <a:r>
-              <a:rPr sz="1500">
+              <a:rPr sz="1400">
                 <a:solidFill>
                   <a:srgbClr val="333333"/>
                 </a:solidFill>
                 <a:latin typeface="Calibri"/>
               </a:rPr>
-              <a:t>—  Banda adaptativa (k ≈ 10 vizinhos) → R² quase-global sobe para 0,458,
-superando os modelos globais.</a:t>
+              <a:t>—  O que acontece se "zerarmos" a variável litoral no GWR e recalcularmos a predição?</a:t>
             </a:r>
           </a:p>
           <a:p>
@@ -9703,46 +10438,98 @@
                 <a:spcPct val="115000"/>
               </a:lnSpc>
               <a:spcAft>
-                <a:spcPts val="1400"/>
+                <a:spcPts val="1200"/>
               </a:spcAft>
             </a:pPr>
             <a:r>
-              <a:rPr sz="1500">
+              <a:rPr sz="1400">
                 <a:solidFill>
                   <a:srgbClr val="333333"/>
                 </a:solidFill>
                 <a:latin typeface="Calibri"/>
               </a:rPr>
-              <a:t>—  Coeficiente local da renda varia de −0,00216 a +0,00562 pelo estado;
-significativo (|t|&gt;1,96) em 72% dos municípios.</a:t>
-            </a:r>
-          </a:p>
-          <a:p>
-            <a:pPr>
-              <a:lnSpc>
-                <a:spcPct val="115000"/>
-              </a:lnSpc>
-              <a:spcAft>
-                <a:spcPts val="1400"/>
-              </a:spcAft>
-            </a:pPr>
-            <a:r>
-              <a:rPr sz="1500">
-                <a:solidFill>
-                  <a:srgbClr val="333333"/>
-                </a:solidFill>
-                <a:latin typeface="Calibri"/>
-              </a:rPr>
-              <a:t>—  R² local varia de 0,05 a 0,64: a renda explica bem o furto no
-centro-oeste e mal no litoral e na RMSP — onde H2 prevê que
-o turismo domina.</a:t>
-            </a:r>
-          </a:p>
-        </p:txBody>
-      </p:sp>
-      <p:sp>
-        <p:nvSpPr>
-          <p:cNvPr id="7" name="TextBox 6"/>
+              <a:t>—  A taxa cai em até 12 furtos/1.000 hab. — impacto concentrado inteiramente na faixa costeira.</a:t>
+            </a:r>
+          </a:p>
+        </p:txBody>
+      </p:sp>
+      <p:sp>
+        <p:nvSpPr>
+          <p:cNvPr id="8" name="Rounded Rectangle 7"/>
+          <p:cNvSpPr/>
+          <p:nvPr/>
+        </p:nvSpPr>
+        <p:spPr>
+          <a:xfrm>
+            <a:off x="6675120" y="4297680"/>
+            <a:ext cx="4937760" cy="1828800"/>
+          </a:xfrm>
+          <a:prstGeom prst="roundRect">
+            <a:avLst>
+              <a:gd name="adj" fmla="val 8000"/>
+            </a:avLst>
+          </a:prstGeom>
+          <a:solidFill>
+            <a:srgbClr val="F2F2F2"/>
+          </a:solidFill>
+          <a:ln>
+            <a:noFill/>
+          </a:ln>
+          <a:effectLst/>
+        </p:spPr>
+        <p:style>
+          <a:lnRef idx="1">
+            <a:schemeClr val="accent1"/>
+          </a:lnRef>
+          <a:fillRef idx="3">
+            <a:schemeClr val="accent1"/>
+          </a:fillRef>
+          <a:effectRef idx="2">
+            <a:schemeClr val="accent1"/>
+          </a:effectRef>
+          <a:fontRef idx="minor">
+            <a:schemeClr val="lt1"/>
+          </a:fontRef>
+        </p:style>
+        <p:txBody>
+          <a:bodyPr rtlCol="0" anchor="ctr" wrap="square" lIns="182880" rIns="182880"/>
+          <a:lstStyle/>
+          <a:p>
+            <a:pPr algn="ctr"/>
+            <a:r>
+              <a:rPr sz="1300">
+                <a:solidFill>
+                  <a:srgbClr val="595959"/>
+                </a:solidFill>
+              </a:rPr>
+              <a:t>Resíduo médio sem a variável litoral:</a:t>
+            </a:r>
+          </a:p>
+          <a:p>
+            <a:r>
+              <a:rPr sz="1400" b="1">
+                <a:solidFill>
+                  <a:srgbClr val="ED7D31"/>
+                </a:solidFill>
+              </a:rPr>
+              <a:t>+10,68 nos municípios litorâneos    −0,27 nos demais</a:t>
+            </a:r>
+          </a:p>
+          <a:p>
+            <a:r>
+              <a:rPr sz="1300">
+                <a:solidFill>
+                  <a:srgbClr val="595959"/>
+                </a:solidFill>
+              </a:rPr>
+              <a:t>Com a variável incluída, ambos os grupos centram em zero.</a:t>
+            </a:r>
+          </a:p>
+        </p:txBody>
+      </p:sp>
+      <p:sp>
+        <p:nvSpPr>
+          <p:cNvPr id="9" name="TextBox 8"/>
           <p:cNvSpPr txBox="1"/>
           <p:nvPr/>
         </p:nvSpPr>
@@ -9781,7 +10568,7 @@
       </p:sp>
       <p:sp>
         <p:nvSpPr>
-          <p:cNvPr id="8" name="TextBox 7"/>
+          <p:cNvPr id="10" name="TextBox 9"/>
           <p:cNvSpPr txBox="1"/>
           <p:nvPr/>
         </p:nvSpPr>

--- a/slides/apresentacao_final.pptx
+++ b/slides/apresentacao_final.pptx
@@ -18,6 +18,8 @@
     <p:sldId id="266" r:id="rId17"/>
     <p:sldId id="267" r:id="rId18"/>
     <p:sldId id="268" r:id="rId19"/>
+    <p:sldId id="269" r:id="rId20"/>
+    <p:sldId id="270" r:id="rId21"/>
   </p:sldIdLst>
   <p:sldSz cx="12191695" cy="6858000" type="screen4x3"/>
   <p:notesSz cx="6858000" cy="9144000"/>
@@ -3446,7 +3448,7 @@
                 </a:solidFill>
                 <a:latin typeface="Calibri"/>
               </a:rPr>
-              <a:t>Onde o modelo erra: o rastro da população flutuante</a:t>
+              <a:t>O espaço importa: do global ao local</a:t>
             </a:r>
           </a:p>
         </p:txBody>
@@ -3495,40 +3497,16 @@
           </a:p>
         </p:txBody>
       </p:sp>
-      <p:pic>
-        <p:nvPicPr>
-          <p:cNvPr id="5" name="Picture 4" descr="residuos_mapa_sem_litoral.png"/>
-          <p:cNvPicPr>
-            <a:picLocks noChangeAspect="1"/>
-          </p:cNvPicPr>
-          <p:nvPr/>
-        </p:nvPicPr>
-        <p:blipFill>
-          <a:blip r:embed="rId2"/>
-          <a:stretch>
-            <a:fillRect/>
-          </a:stretch>
-        </p:blipFill>
-        <p:spPr>
-          <a:xfrm>
-            <a:off x="851535" y="1600200"/>
-            <a:ext cx="5246370" cy="4663440"/>
-          </a:xfrm>
-          <a:prstGeom prst="rect">
-            <a:avLst/>
-          </a:prstGeom>
-        </p:spPr>
-      </p:pic>
-      <p:sp>
-        <p:nvSpPr>
-          <p:cNvPr id="6" name="TextBox 5"/>
+      <p:sp>
+        <p:nvSpPr>
+          <p:cNvPr id="5" name="TextBox 4"/>
           <p:cNvSpPr txBox="1"/>
           <p:nvPr/>
         </p:nvSpPr>
         <p:spPr>
           <a:xfrm>
-            <a:off x="6675120" y="1737360"/>
-            <a:ext cx="4937760" cy="822960"/>
+            <a:off x="548640" y="1645920"/>
+            <a:ext cx="11064240" cy="548640"/>
           </a:xfrm>
           <a:prstGeom prst="rect">
             <a:avLst/>
@@ -3547,139 +3525,37 @@
               </a:lnSpc>
             </a:pPr>
             <a:r>
-              <a:rPr sz="1400" b="0" i="0">
+              <a:rPr sz="1600" b="0" i="0">
                 <a:solidFill>
                   <a:srgbClr val="333333"/>
                 </a:solidFill>
                 <a:latin typeface="Calibri"/>
               </a:rPr>
-              <a:t>O modelo (sem litoral) subestima as ocorrências exatamente no litoral — a faixa costeira concentra a subestimação mais intensa do estado.</a:t>
-            </a:r>
-          </a:p>
-        </p:txBody>
-      </p:sp>
-      <p:sp>
-        <p:nvSpPr>
-          <p:cNvPr id="7" name="TextBox 6"/>
-          <p:cNvSpPr txBox="1"/>
-          <p:nvPr/>
-        </p:nvSpPr>
-        <p:spPr>
-          <a:xfrm>
-            <a:off x="6675120" y="2743200"/>
-            <a:ext cx="4937760" cy="365760"/>
-          </a:xfrm>
-          <a:prstGeom prst="rect">
-            <a:avLst/>
-          </a:prstGeom>
-          <a:noFill/>
-        </p:spPr>
-        <p:txBody>
-          <a:bodyPr wrap="square" anchor="t">
-            <a:spAutoFit/>
-          </a:bodyPr>
-          <a:lstStyle/>
-          <a:p>
-            <a:pPr algn="l">
-              <a:lnSpc>
-                <a:spcPct val="115000"/>
-              </a:lnSpc>
-            </a:pPr>
-            <a:r>
-              <a:rPr sz="1600" b="1" i="0">
-                <a:solidFill>
-                  <a:srgbClr val="1F4E79"/>
-                </a:solidFill>
-                <a:latin typeface="Calibri"/>
-              </a:rPr>
-              <a:t>O mecanismo numérico</a:t>
-            </a:r>
-          </a:p>
-        </p:txBody>
-      </p:sp>
-      <p:sp>
-        <p:nvSpPr>
-          <p:cNvPr id="8" name="TextBox 7"/>
-          <p:cNvSpPr txBox="1"/>
-          <p:nvPr/>
-        </p:nvSpPr>
-        <p:spPr>
-          <a:xfrm>
-            <a:off x="6675120" y="3200400"/>
-            <a:ext cx="4937760" cy="1645920"/>
-          </a:xfrm>
-          <a:prstGeom prst="rect">
-            <a:avLst/>
-          </a:prstGeom>
-          <a:noFill/>
-        </p:spPr>
-        <p:txBody>
-          <a:bodyPr wrap="square">
-            <a:spAutoFit/>
-          </a:bodyPr>
-          <a:lstStyle/>
-          <a:p>
-            <a:pPr>
-              <a:lnSpc>
-                <a:spcPct val="115000"/>
-              </a:lnSpc>
-              <a:spcAft>
-                <a:spcPts val="1000"/>
-              </a:spcAft>
-            </a:pPr>
-            <a:r>
-              <a:rPr sz="1400">
-                <a:solidFill>
-                  <a:srgbClr val="333333"/>
-                </a:solidFill>
-                <a:latin typeface="Calibri"/>
-              </a:rPr>
-              <a:t>—  Numerador (crimes): as ocorrências inflam com o fluxo de turistas no verão.</a:t>
-            </a:r>
-          </a:p>
-          <a:p>
-            <a:pPr>
-              <a:lnSpc>
-                <a:spcPct val="115000"/>
-              </a:lnSpc>
-              <a:spcAft>
-                <a:spcPts val="1000"/>
-              </a:spcAft>
-            </a:pPr>
-            <a:r>
-              <a:rPr sz="1400">
-                <a:solidFill>
-                  <a:srgbClr val="333333"/>
-                </a:solidFill>
-                <a:latin typeface="Calibri"/>
-              </a:rPr>
-              <a:t>—  Denominador (população): o modelo conta só a população residente medida pelo Censo IBGE.</a:t>
-            </a:r>
-          </a:p>
-        </p:txBody>
-      </p:sp>
-      <p:sp>
-        <p:nvSpPr>
-          <p:cNvPr id="9" name="Rounded Rectangle 8"/>
+              <a:t>Três formas de tratar a estrutura espacial que o OLS deixou de fora:</a:t>
+            </a:r>
+          </a:p>
+        </p:txBody>
+      </p:sp>
+      <p:sp>
+        <p:nvSpPr>
+          <p:cNvPr id="6" name="Rectangle 5"/>
           <p:cNvSpPr/>
           <p:nvPr/>
         </p:nvSpPr>
         <p:spPr>
           <a:xfrm>
-            <a:off x="6675120" y="5029200"/>
-            <a:ext cx="4937760" cy="1097280"/>
-          </a:xfrm>
-          <a:prstGeom prst="roundRect">
-            <a:avLst>
-              <a:gd name="adj" fmla="val 8000"/>
-            </a:avLst>
+            <a:off x="548640" y="2377440"/>
+            <a:ext cx="3566160" cy="3291840"/>
+          </a:xfrm>
+          <a:prstGeom prst="rect">
+            <a:avLst/>
           </a:prstGeom>
           <a:solidFill>
-            <a:srgbClr val="FDEEE3"/>
+            <a:srgbClr val="FFFFFF"/>
           </a:solidFill>
           <a:ln w="12700">
             <a:solidFill>
-              <a:srgbClr val="ED7D31"/>
+              <a:srgbClr val="1F4E79"/>
             </a:solidFill>
           </a:ln>
           <a:effectLst/>
@@ -3699,31 +3575,67 @@
           </a:fontRef>
         </p:style>
         <p:txBody>
-          <a:bodyPr rtlCol="0" anchor="ctr" wrap="square" lIns="182880" rIns="182880"/>
+          <a:bodyPr rtlCol="0" anchor="ctr"/>
           <a:lstStyle/>
           <a:p>
             <a:pPr algn="ctr"/>
-            <a:r>
-              <a:rPr sz="1300">
-                <a:solidFill>
-                  <a:srgbClr val="663300"/>
-                </a:solidFill>
-              </a:rPr>
-              <a:t>A taxa por 1.000 hab. superestima o risco real para quem mora lá — sem o dummy, o modelo sempre vai subestimar a taxa observada.</a:t>
-            </a:r>
-          </a:p>
-        </p:txBody>
-      </p:sp>
-      <p:sp>
-        <p:nvSpPr>
-          <p:cNvPr id="10" name="TextBox 9"/>
+          </a:p>
+        </p:txBody>
+      </p:sp>
+      <p:sp>
+        <p:nvSpPr>
+          <p:cNvPr id="7" name="Rectangle 6"/>
+          <p:cNvSpPr/>
+          <p:nvPr/>
+        </p:nvSpPr>
+        <p:spPr>
+          <a:xfrm>
+            <a:off x="548640" y="2377440"/>
+            <a:ext cx="3566160" cy="50800"/>
+          </a:xfrm>
+          <a:prstGeom prst="rect">
+            <a:avLst/>
+          </a:prstGeom>
+          <a:solidFill>
+            <a:srgbClr val="ED7D31"/>
+          </a:solidFill>
+          <a:ln>
+            <a:noFill/>
+          </a:ln>
+          <a:effectLst/>
+        </p:spPr>
+        <p:style>
+          <a:lnRef idx="1">
+            <a:schemeClr val="accent1"/>
+          </a:lnRef>
+          <a:fillRef idx="3">
+            <a:schemeClr val="accent1"/>
+          </a:fillRef>
+          <a:effectRef idx="2">
+            <a:schemeClr val="accent1"/>
+          </a:effectRef>
+          <a:fontRef idx="minor">
+            <a:schemeClr val="lt1"/>
+          </a:fontRef>
+        </p:style>
+        <p:txBody>
+          <a:bodyPr rtlCol="0" anchor="ctr"/>
+          <a:lstStyle/>
+          <a:p>
+            <a:pPr algn="ctr"/>
+          </a:p>
+        </p:txBody>
+      </p:sp>
+      <p:sp>
+        <p:nvSpPr>
+          <p:cNvPr id="8" name="TextBox 7"/>
           <p:cNvSpPr txBox="1"/>
           <p:nvPr/>
         </p:nvSpPr>
         <p:spPr>
           <a:xfrm>
-            <a:off x="548640" y="6510528"/>
-            <a:ext cx="7315200" cy="274320"/>
+            <a:off x="822960" y="2651760"/>
+            <a:ext cx="3017520" cy="457200"/>
           </a:xfrm>
           <a:prstGeom prst="rect">
             <a:avLst/>
@@ -3742,6 +3654,720 @@
               </a:lnSpc>
             </a:pPr>
             <a:r>
+              <a:rPr sz="1900" b="1" i="0">
+                <a:solidFill>
+                  <a:srgbClr val="1A1A1A"/>
+                </a:solidFill>
+                <a:latin typeface="Calibri"/>
+              </a:rPr>
+              <a:t>1. Spatial Error</a:t>
+            </a:r>
+          </a:p>
+        </p:txBody>
+      </p:sp>
+      <p:sp>
+        <p:nvSpPr>
+          <p:cNvPr id="9" name="TextBox 8"/>
+          <p:cNvSpPr txBox="1"/>
+          <p:nvPr/>
+        </p:nvSpPr>
+        <p:spPr>
+          <a:xfrm>
+            <a:off x="822960" y="3246120"/>
+            <a:ext cx="3017520" cy="1371600"/>
+          </a:xfrm>
+          <a:prstGeom prst="rect">
+            <a:avLst/>
+          </a:prstGeom>
+          <a:noFill/>
+        </p:spPr>
+        <p:txBody>
+          <a:bodyPr wrap="square" anchor="t">
+            <a:spAutoFit/>
+          </a:bodyPr>
+          <a:lstStyle/>
+          <a:p>
+            <a:pPr algn="l">
+              <a:lnSpc>
+                <a:spcPct val="130000"/>
+              </a:lnSpc>
+            </a:pPr>
+            <a:r>
+              <a:rPr sz="1500" b="0" i="0">
+                <a:solidFill>
+                  <a:srgbClr val="595959"/>
+                </a:solidFill>
+                <a:latin typeface="Calibri"/>
+              </a:rPr>
+              <a:t>Global. Testes de Lagrange</a:t>
+            </a:r>
+          </a:p>
+          <a:p>
+            <a:pPr algn="l">
+              <a:lnSpc>
+                <a:spcPct val="130000"/>
+              </a:lnSpc>
+            </a:pPr>
+            <a:r>
+              <a:rPr sz="1500" b="0" i="0">
+                <a:solidFill>
+                  <a:srgbClr val="595959"/>
+                </a:solidFill>
+                <a:latin typeface="Calibri"/>
+              </a:rPr>
+              <a:t>apontam este modelo como</a:t>
+            </a:r>
+          </a:p>
+          <a:p>
+            <a:pPr algn="l">
+              <a:lnSpc>
+                <a:spcPct val="130000"/>
+              </a:lnSpc>
+            </a:pPr>
+            <a:r>
+              <a:rPr sz="1500" b="0" i="0">
+                <a:solidFill>
+                  <a:srgbClr val="595959"/>
+                </a:solidFill>
+                <a:latin typeface="Calibri"/>
+              </a:rPr>
+              <a:t>mais adequado.</a:t>
+            </a:r>
+          </a:p>
+          <a:p>
+            <a:pPr algn="l">
+              <a:lnSpc>
+                <a:spcPct val="130000"/>
+              </a:lnSpc>
+            </a:pPr>
+            <a:r>
+              <a:rPr sz="1500" b="0" i="0">
+                <a:solidFill>
+                  <a:srgbClr val="595959"/>
+                </a:solidFill>
+                <a:latin typeface="Calibri"/>
+              </a:rPr>
+              <a:t>λ = 0,588 · resíduo: 0,38 → −0,03</a:t>
+            </a:r>
+          </a:p>
+        </p:txBody>
+      </p:sp>
+      <p:sp>
+        <p:nvSpPr>
+          <p:cNvPr id="10" name="TextBox 9"/>
+          <p:cNvSpPr txBox="1"/>
+          <p:nvPr/>
+        </p:nvSpPr>
+        <p:spPr>
+          <a:xfrm>
+            <a:off x="822960" y="4754880"/>
+            <a:ext cx="3017520" cy="731520"/>
+          </a:xfrm>
+          <a:prstGeom prst="rect">
+            <a:avLst/>
+          </a:prstGeom>
+          <a:noFill/>
+        </p:spPr>
+        <p:txBody>
+          <a:bodyPr wrap="square" anchor="t">
+            <a:spAutoFit/>
+          </a:bodyPr>
+          <a:lstStyle/>
+          <a:p>
+            <a:pPr algn="l">
+              <a:lnSpc>
+                <a:spcPct val="115000"/>
+              </a:lnSpc>
+            </a:pPr>
+            <a:r>
+              <a:rPr sz="3000" b="1" i="0">
+                <a:solidFill>
+                  <a:srgbClr val="ED7D31"/>
+                </a:solidFill>
+                <a:latin typeface="Calibri"/>
+              </a:rPr>
+              <a:t>R² = 0,392</a:t>
+            </a:r>
+          </a:p>
+        </p:txBody>
+      </p:sp>
+      <p:sp>
+        <p:nvSpPr>
+          <p:cNvPr id="11" name="Rectangle 10"/>
+          <p:cNvSpPr/>
+          <p:nvPr/>
+        </p:nvSpPr>
+        <p:spPr>
+          <a:xfrm>
+            <a:off x="4297680" y="2377440"/>
+            <a:ext cx="3566160" cy="3291840"/>
+          </a:xfrm>
+          <a:prstGeom prst="rect">
+            <a:avLst/>
+          </a:prstGeom>
+          <a:solidFill>
+            <a:srgbClr val="FFFFFF"/>
+          </a:solidFill>
+          <a:ln w="12700">
+            <a:solidFill>
+              <a:srgbClr val="1F4E79"/>
+            </a:solidFill>
+          </a:ln>
+          <a:effectLst/>
+        </p:spPr>
+        <p:style>
+          <a:lnRef idx="1">
+            <a:schemeClr val="accent1"/>
+          </a:lnRef>
+          <a:fillRef idx="3">
+            <a:schemeClr val="accent1"/>
+          </a:fillRef>
+          <a:effectRef idx="2">
+            <a:schemeClr val="accent1"/>
+          </a:effectRef>
+          <a:fontRef idx="minor">
+            <a:schemeClr val="lt1"/>
+          </a:fontRef>
+        </p:style>
+        <p:txBody>
+          <a:bodyPr rtlCol="0" anchor="ctr"/>
+          <a:lstStyle/>
+          <a:p>
+            <a:pPr algn="ctr"/>
+          </a:p>
+        </p:txBody>
+      </p:sp>
+      <p:sp>
+        <p:nvSpPr>
+          <p:cNvPr id="12" name="Rectangle 11"/>
+          <p:cNvSpPr/>
+          <p:nvPr/>
+        </p:nvSpPr>
+        <p:spPr>
+          <a:xfrm>
+            <a:off x="4297680" y="2377440"/>
+            <a:ext cx="3566160" cy="50800"/>
+          </a:xfrm>
+          <a:prstGeom prst="rect">
+            <a:avLst/>
+          </a:prstGeom>
+          <a:solidFill>
+            <a:srgbClr val="ED7D31"/>
+          </a:solidFill>
+          <a:ln>
+            <a:noFill/>
+          </a:ln>
+          <a:effectLst/>
+        </p:spPr>
+        <p:style>
+          <a:lnRef idx="1">
+            <a:schemeClr val="accent1"/>
+          </a:lnRef>
+          <a:fillRef idx="3">
+            <a:schemeClr val="accent1"/>
+          </a:fillRef>
+          <a:effectRef idx="2">
+            <a:schemeClr val="accent1"/>
+          </a:effectRef>
+          <a:fontRef idx="minor">
+            <a:schemeClr val="lt1"/>
+          </a:fontRef>
+        </p:style>
+        <p:txBody>
+          <a:bodyPr rtlCol="0" anchor="ctr"/>
+          <a:lstStyle/>
+          <a:p>
+            <a:pPr algn="ctr"/>
+          </a:p>
+        </p:txBody>
+      </p:sp>
+      <p:sp>
+        <p:nvSpPr>
+          <p:cNvPr id="13" name="TextBox 12"/>
+          <p:cNvSpPr txBox="1"/>
+          <p:nvPr/>
+        </p:nvSpPr>
+        <p:spPr>
+          <a:xfrm>
+            <a:off x="4572000" y="2651760"/>
+            <a:ext cx="3017520" cy="457200"/>
+          </a:xfrm>
+          <a:prstGeom prst="rect">
+            <a:avLst/>
+          </a:prstGeom>
+          <a:noFill/>
+        </p:spPr>
+        <p:txBody>
+          <a:bodyPr wrap="square" anchor="t">
+            <a:spAutoFit/>
+          </a:bodyPr>
+          <a:lstStyle/>
+          <a:p>
+            <a:pPr algn="l">
+              <a:lnSpc>
+                <a:spcPct val="115000"/>
+              </a:lnSpc>
+            </a:pPr>
+            <a:r>
+              <a:rPr sz="1900" b="1" i="0">
+                <a:solidFill>
+                  <a:srgbClr val="1A1A1A"/>
+                </a:solidFill>
+                <a:latin typeface="Calibri"/>
+              </a:rPr>
+              <a:t>2. GWR (renda)</a:t>
+            </a:r>
+          </a:p>
+        </p:txBody>
+      </p:sp>
+      <p:sp>
+        <p:nvSpPr>
+          <p:cNvPr id="14" name="TextBox 13"/>
+          <p:cNvSpPr txBox="1"/>
+          <p:nvPr/>
+        </p:nvSpPr>
+        <p:spPr>
+          <a:xfrm>
+            <a:off x="4572000" y="3246120"/>
+            <a:ext cx="3017520" cy="1371600"/>
+          </a:xfrm>
+          <a:prstGeom prst="rect">
+            <a:avLst/>
+          </a:prstGeom>
+          <a:noFill/>
+        </p:spPr>
+        <p:txBody>
+          <a:bodyPr wrap="square" anchor="t">
+            <a:spAutoFit/>
+          </a:bodyPr>
+          <a:lstStyle/>
+          <a:p>
+            <a:pPr algn="l">
+              <a:lnSpc>
+                <a:spcPct val="130000"/>
+              </a:lnSpc>
+            </a:pPr>
+            <a:r>
+              <a:rPr sz="1500" b="0" i="0">
+                <a:solidFill>
+                  <a:srgbClr val="595959"/>
+                </a:solidFill>
+                <a:latin typeface="Calibri"/>
+              </a:rPr>
+              <a:t>Local. Banda adaptativa</a:t>
+            </a:r>
+          </a:p>
+          <a:p>
+            <a:pPr algn="l">
+              <a:lnSpc>
+                <a:spcPct val="130000"/>
+              </a:lnSpc>
+            </a:pPr>
+            <a:r>
+              <a:rPr sz="1500" b="0" i="0">
+                <a:solidFill>
+                  <a:srgbClr val="595959"/>
+                </a:solidFill>
+                <a:latin typeface="Calibri"/>
+              </a:rPr>
+              <a:t>(~10 vizinhos) — o coeficiente</a:t>
+            </a:r>
+          </a:p>
+          <a:p>
+            <a:pPr algn="l">
+              <a:lnSpc>
+                <a:spcPct val="130000"/>
+              </a:lnSpc>
+            </a:pPr>
+            <a:r>
+              <a:rPr sz="1500" b="0" i="0">
+                <a:solidFill>
+                  <a:srgbClr val="595959"/>
+                </a:solidFill>
+                <a:latin typeface="Calibri"/>
+              </a:rPr>
+              <a:t>da renda passa a variar</a:t>
+            </a:r>
+          </a:p>
+          <a:p>
+            <a:pPr algn="l">
+              <a:lnSpc>
+                <a:spcPct val="130000"/>
+              </a:lnSpc>
+            </a:pPr>
+            <a:r>
+              <a:rPr sz="1500" b="0" i="0">
+                <a:solidFill>
+                  <a:srgbClr val="595959"/>
+                </a:solidFill>
+                <a:latin typeface="Calibri"/>
+              </a:rPr>
+              <a:t>livremente no espaço.</a:t>
+            </a:r>
+          </a:p>
+        </p:txBody>
+      </p:sp>
+      <p:sp>
+        <p:nvSpPr>
+          <p:cNvPr id="15" name="TextBox 14"/>
+          <p:cNvSpPr txBox="1"/>
+          <p:nvPr/>
+        </p:nvSpPr>
+        <p:spPr>
+          <a:xfrm>
+            <a:off x="4572000" y="4754880"/>
+            <a:ext cx="3017520" cy="731520"/>
+          </a:xfrm>
+          <a:prstGeom prst="rect">
+            <a:avLst/>
+          </a:prstGeom>
+          <a:noFill/>
+        </p:spPr>
+        <p:txBody>
+          <a:bodyPr wrap="square" anchor="t">
+            <a:spAutoFit/>
+          </a:bodyPr>
+          <a:lstStyle/>
+          <a:p>
+            <a:pPr algn="l">
+              <a:lnSpc>
+                <a:spcPct val="115000"/>
+              </a:lnSpc>
+            </a:pPr>
+            <a:r>
+              <a:rPr sz="3000" b="1" i="0">
+                <a:solidFill>
+                  <a:srgbClr val="ED7D31"/>
+                </a:solidFill>
+                <a:latin typeface="Calibri"/>
+              </a:rPr>
+              <a:t>R² = 0,458</a:t>
+            </a:r>
+          </a:p>
+        </p:txBody>
+      </p:sp>
+      <p:sp>
+        <p:nvSpPr>
+          <p:cNvPr id="16" name="Rectangle 15"/>
+          <p:cNvSpPr/>
+          <p:nvPr/>
+        </p:nvSpPr>
+        <p:spPr>
+          <a:xfrm>
+            <a:off x="8046720" y="2377440"/>
+            <a:ext cx="3566160" cy="3291840"/>
+          </a:xfrm>
+          <a:prstGeom prst="rect">
+            <a:avLst/>
+          </a:prstGeom>
+          <a:solidFill>
+            <a:srgbClr val="1F4E79"/>
+          </a:solidFill>
+          <a:ln>
+            <a:solidFill>
+              <a:srgbClr val="1F4E79"/>
+            </a:solidFill>
+          </a:ln>
+          <a:effectLst/>
+        </p:spPr>
+        <p:style>
+          <a:lnRef idx="1">
+            <a:schemeClr val="accent1"/>
+          </a:lnRef>
+          <a:fillRef idx="3">
+            <a:schemeClr val="accent1"/>
+          </a:fillRef>
+          <a:effectRef idx="2">
+            <a:schemeClr val="accent1"/>
+          </a:effectRef>
+          <a:fontRef idx="minor">
+            <a:schemeClr val="lt1"/>
+          </a:fontRef>
+        </p:style>
+        <p:txBody>
+          <a:bodyPr rtlCol="0" anchor="ctr"/>
+          <a:lstStyle/>
+          <a:p>
+            <a:pPr algn="ctr"/>
+          </a:p>
+        </p:txBody>
+      </p:sp>
+      <p:sp>
+        <p:nvSpPr>
+          <p:cNvPr id="17" name="Rectangle 16"/>
+          <p:cNvSpPr/>
+          <p:nvPr/>
+        </p:nvSpPr>
+        <p:spPr>
+          <a:xfrm>
+            <a:off x="8046720" y="2377440"/>
+            <a:ext cx="3566160" cy="50800"/>
+          </a:xfrm>
+          <a:prstGeom prst="rect">
+            <a:avLst/>
+          </a:prstGeom>
+          <a:solidFill>
+            <a:srgbClr val="FFFFFF"/>
+          </a:solidFill>
+          <a:ln>
+            <a:noFill/>
+          </a:ln>
+          <a:effectLst/>
+        </p:spPr>
+        <p:style>
+          <a:lnRef idx="1">
+            <a:schemeClr val="accent1"/>
+          </a:lnRef>
+          <a:fillRef idx="3">
+            <a:schemeClr val="accent1"/>
+          </a:fillRef>
+          <a:effectRef idx="2">
+            <a:schemeClr val="accent1"/>
+          </a:effectRef>
+          <a:fontRef idx="minor">
+            <a:schemeClr val="lt1"/>
+          </a:fontRef>
+        </p:style>
+        <p:txBody>
+          <a:bodyPr rtlCol="0" anchor="ctr"/>
+          <a:lstStyle/>
+          <a:p>
+            <a:pPr algn="ctr"/>
+          </a:p>
+        </p:txBody>
+      </p:sp>
+      <p:sp>
+        <p:nvSpPr>
+          <p:cNvPr id="18" name="TextBox 17"/>
+          <p:cNvSpPr txBox="1"/>
+          <p:nvPr/>
+        </p:nvSpPr>
+        <p:spPr>
+          <a:xfrm>
+            <a:off x="8321040" y="2651760"/>
+            <a:ext cx="3017520" cy="457200"/>
+          </a:xfrm>
+          <a:prstGeom prst="rect">
+            <a:avLst/>
+          </a:prstGeom>
+          <a:noFill/>
+        </p:spPr>
+        <p:txBody>
+          <a:bodyPr wrap="square" anchor="t">
+            <a:spAutoFit/>
+          </a:bodyPr>
+          <a:lstStyle/>
+          <a:p>
+            <a:pPr algn="l">
+              <a:lnSpc>
+                <a:spcPct val="115000"/>
+              </a:lnSpc>
+            </a:pPr>
+            <a:r>
+              <a:rPr sz="1900" b="1" i="0">
+                <a:solidFill>
+                  <a:srgbClr val="FFFFFF"/>
+                </a:solidFill>
+                <a:latin typeface="Calibri"/>
+              </a:rPr>
+              <a:t>3. GWR + litoral</a:t>
+            </a:r>
+          </a:p>
+        </p:txBody>
+      </p:sp>
+      <p:sp>
+        <p:nvSpPr>
+          <p:cNvPr id="19" name="TextBox 18"/>
+          <p:cNvSpPr txBox="1"/>
+          <p:nvPr/>
+        </p:nvSpPr>
+        <p:spPr>
+          <a:xfrm>
+            <a:off x="8321040" y="3246120"/>
+            <a:ext cx="3017520" cy="1371600"/>
+          </a:xfrm>
+          <a:prstGeom prst="rect">
+            <a:avLst/>
+          </a:prstGeom>
+          <a:noFill/>
+        </p:spPr>
+        <p:txBody>
+          <a:bodyPr wrap="square" anchor="t">
+            <a:spAutoFit/>
+          </a:bodyPr>
+          <a:lstStyle/>
+          <a:p>
+            <a:pPr algn="l">
+              <a:lnSpc>
+                <a:spcPct val="130000"/>
+              </a:lnSpc>
+            </a:pPr>
+            <a:r>
+              <a:rPr sz="1500" b="0" i="0">
+                <a:solidFill>
+                  <a:srgbClr val="DDE6F0"/>
+                </a:solidFill>
+                <a:latin typeface="Calibri"/>
+              </a:rPr>
+              <a:t>Local. Banda adaptativa</a:t>
+            </a:r>
+          </a:p>
+          <a:p>
+            <a:pPr algn="l">
+              <a:lnSpc>
+                <a:spcPct val="130000"/>
+              </a:lnSpc>
+            </a:pPr>
+            <a:r>
+              <a:rPr sz="1500" b="0" i="0">
+                <a:solidFill>
+                  <a:srgbClr val="DDE6F0"/>
+                </a:solidFill>
+                <a:latin typeface="Calibri"/>
+              </a:rPr>
+              <a:t>incorporando renda e a</a:t>
+            </a:r>
+          </a:p>
+          <a:p>
+            <a:pPr algn="l">
+              <a:lnSpc>
+                <a:spcPct val="130000"/>
+              </a:lnSpc>
+            </a:pPr>
+            <a:r>
+              <a:rPr sz="1500" b="0" i="0">
+                <a:solidFill>
+                  <a:srgbClr val="DDE6F0"/>
+                </a:solidFill>
+                <a:latin typeface="Calibri"/>
+              </a:rPr>
+              <a:t>condição litorânea/turística,</a:t>
+            </a:r>
+          </a:p>
+          <a:p>
+            <a:pPr algn="l">
+              <a:lnSpc>
+                <a:spcPct val="130000"/>
+              </a:lnSpc>
+            </a:pPr>
+            <a:r>
+              <a:rPr sz="1500" b="0" i="0">
+                <a:solidFill>
+                  <a:srgbClr val="DDE6F0"/>
+                </a:solidFill>
+                <a:latin typeface="Calibri"/>
+              </a:rPr>
+              <a:t>localmente.</a:t>
+            </a:r>
+          </a:p>
+        </p:txBody>
+      </p:sp>
+      <p:sp>
+        <p:nvSpPr>
+          <p:cNvPr id="20" name="TextBox 19"/>
+          <p:cNvSpPr txBox="1"/>
+          <p:nvPr/>
+        </p:nvSpPr>
+        <p:spPr>
+          <a:xfrm>
+            <a:off x="8321040" y="4754880"/>
+            <a:ext cx="3017520" cy="731520"/>
+          </a:xfrm>
+          <a:prstGeom prst="rect">
+            <a:avLst/>
+          </a:prstGeom>
+          <a:noFill/>
+        </p:spPr>
+        <p:txBody>
+          <a:bodyPr wrap="square" anchor="t">
+            <a:spAutoFit/>
+          </a:bodyPr>
+          <a:lstStyle/>
+          <a:p>
+            <a:pPr algn="l">
+              <a:lnSpc>
+                <a:spcPct val="115000"/>
+              </a:lnSpc>
+            </a:pPr>
+            <a:r>
+              <a:rPr sz="3000" b="1" i="0">
+                <a:solidFill>
+                  <a:srgbClr val="FFFFFF"/>
+                </a:solidFill>
+                <a:latin typeface="Calibri"/>
+              </a:rPr>
+              <a:t>R² = 0,532</a:t>
+            </a:r>
+          </a:p>
+        </p:txBody>
+      </p:sp>
+      <p:sp>
+        <p:nvSpPr>
+          <p:cNvPr id="21" name="TextBox 20"/>
+          <p:cNvSpPr txBox="1"/>
+          <p:nvPr/>
+        </p:nvSpPr>
+        <p:spPr>
+          <a:xfrm>
+            <a:off x="548640" y="5943600"/>
+            <a:ext cx="11064240" cy="457200"/>
+          </a:xfrm>
+          <a:prstGeom prst="rect">
+            <a:avLst/>
+          </a:prstGeom>
+          <a:noFill/>
+        </p:spPr>
+        <p:txBody>
+          <a:bodyPr wrap="square" anchor="t">
+            <a:spAutoFit/>
+          </a:bodyPr>
+          <a:lstStyle/>
+          <a:p>
+            <a:pPr algn="ctr">
+              <a:lnSpc>
+                <a:spcPct val="115000"/>
+              </a:lnSpc>
+            </a:pPr>
+            <a:r>
+              <a:rPr sz="1700" b="1" i="0">
+                <a:solidFill>
+                  <a:srgbClr val="1F4E79"/>
+                </a:solidFill>
+                <a:latin typeface="Calibri"/>
+              </a:rPr>
+              <a:t>Melhor ajuste entre todos os modelos testados — e o menor AIC (3027,4).</a:t>
+            </a:r>
+          </a:p>
+        </p:txBody>
+      </p:sp>
+      <p:sp>
+        <p:nvSpPr>
+          <p:cNvPr id="22" name="TextBox 21"/>
+          <p:cNvSpPr txBox="1"/>
+          <p:nvPr/>
+        </p:nvSpPr>
+        <p:spPr>
+          <a:xfrm>
+            <a:off x="548640" y="6510528"/>
+            <a:ext cx="7315200" cy="274320"/>
+          </a:xfrm>
+          <a:prstGeom prst="rect">
+            <a:avLst/>
+          </a:prstGeom>
+          <a:noFill/>
+        </p:spPr>
+        <p:txBody>
+          <a:bodyPr wrap="square" anchor="t">
+            <a:spAutoFit/>
+          </a:bodyPr>
+          <a:lstStyle/>
+          <a:p>
+            <a:pPr algn="l">
+              <a:lnSpc>
+                <a:spcPct val="115000"/>
+              </a:lnSpc>
+            </a:pPr>
+            <a:r>
               <a:rPr sz="1000" b="0" i="0">
                 <a:solidFill>
                   <a:srgbClr val="595959"/>
@@ -3755,7 +4381,7 @@
       </p:sp>
       <p:sp>
         <p:nvSpPr>
-          <p:cNvPr id="11" name="TextBox 10"/>
+          <p:cNvPr id="23" name="TextBox 22"/>
           <p:cNvSpPr txBox="1"/>
           <p:nvPr/>
         </p:nvSpPr>
@@ -3801,6 +4427,875 @@
 </file>
 
 <file path=ppt/slides/slide11.xml><?xml version="1.0" encoding="utf-8"?>
+<p:sld xmlns:a="http://schemas.openxmlformats.org/drawingml/2006/main" xmlns:p="http://schemas.openxmlformats.org/presentationml/2006/main" xmlns:r="http://schemas.openxmlformats.org/officeDocument/2006/relationships">
+  <p:cSld>
+    <p:bg>
+      <p:bgPr>
+        <a:solidFill>
+          <a:srgbClr val="FFFFFF"/>
+        </a:solidFill>
+        <a:effectLst/>
+      </p:bgPr>
+    </p:bg>
+    <p:spTree>
+      <p:nvGrpSpPr>
+        <p:cNvPr id="1" name=""/>
+        <p:cNvGrpSpPr/>
+        <p:nvPr/>
+      </p:nvGrpSpPr>
+      <p:grpSpPr/>
+      <p:sp>
+        <p:nvSpPr>
+          <p:cNvPr id="2" name="TextBox 1"/>
+          <p:cNvSpPr txBox="1"/>
+          <p:nvPr/>
+        </p:nvSpPr>
+        <p:spPr>
+          <a:xfrm>
+            <a:off x="548640" y="320040"/>
+            <a:ext cx="8229600" cy="365760"/>
+          </a:xfrm>
+          <a:prstGeom prst="rect">
+            <a:avLst/>
+          </a:prstGeom>
+          <a:noFill/>
+        </p:spPr>
+        <p:txBody>
+          <a:bodyPr wrap="square" anchor="t">
+            <a:spAutoFit/>
+          </a:bodyPr>
+          <a:lstStyle/>
+          <a:p>
+            <a:pPr algn="l">
+              <a:lnSpc>
+                <a:spcPct val="115000"/>
+              </a:lnSpc>
+            </a:pPr>
+            <a:r>
+              <a:rPr sz="1300" b="1" i="0">
+                <a:solidFill>
+                  <a:srgbClr val="1F4E79"/>
+                </a:solidFill>
+                <a:latin typeface="Calibri"/>
+              </a:rPr>
+              <a:t>DESENVOLVIMENTO E RESULTADOS</a:t>
+            </a:r>
+          </a:p>
+        </p:txBody>
+      </p:sp>
+      <p:sp>
+        <p:nvSpPr>
+          <p:cNvPr id="3" name="TextBox 2"/>
+          <p:cNvSpPr txBox="1"/>
+          <p:nvPr/>
+        </p:nvSpPr>
+        <p:spPr>
+          <a:xfrm>
+            <a:off x="548640" y="594360"/>
+            <a:ext cx="11064240" cy="822960"/>
+          </a:xfrm>
+          <a:prstGeom prst="rect">
+            <a:avLst/>
+          </a:prstGeom>
+          <a:noFill/>
+        </p:spPr>
+        <p:txBody>
+          <a:bodyPr wrap="square" anchor="t">
+            <a:spAutoFit/>
+          </a:bodyPr>
+          <a:lstStyle/>
+          <a:p>
+            <a:pPr algn="l">
+              <a:lnSpc>
+                <a:spcPct val="115000"/>
+              </a:lnSpc>
+            </a:pPr>
+            <a:r>
+              <a:rPr sz="2800" b="1" i="0">
+                <a:solidFill>
+                  <a:srgbClr val="1A1A1A"/>
+                </a:solidFill>
+                <a:latin typeface="Calibri"/>
+              </a:rPr>
+              <a:t>GWR + litoral: isolando o efeito turístico</a:t>
+            </a:r>
+          </a:p>
+        </p:txBody>
+      </p:sp>
+      <p:sp>
+        <p:nvSpPr>
+          <p:cNvPr id="4" name="Rectangle 3"/>
+          <p:cNvSpPr/>
+          <p:nvPr/>
+        </p:nvSpPr>
+        <p:spPr>
+          <a:xfrm>
+            <a:off x="548640" y="1280160"/>
+            <a:ext cx="11064240" cy="27940"/>
+          </a:xfrm>
+          <a:prstGeom prst="rect">
+            <a:avLst/>
+          </a:prstGeom>
+          <a:solidFill>
+            <a:srgbClr val="1F4E79"/>
+          </a:solidFill>
+          <a:ln>
+            <a:noFill/>
+          </a:ln>
+          <a:effectLst/>
+        </p:spPr>
+        <p:style>
+          <a:lnRef idx="1">
+            <a:schemeClr val="accent1"/>
+          </a:lnRef>
+          <a:fillRef idx="3">
+            <a:schemeClr val="accent1"/>
+          </a:fillRef>
+          <a:effectRef idx="2">
+            <a:schemeClr val="accent1"/>
+          </a:effectRef>
+          <a:fontRef idx="minor">
+            <a:schemeClr val="lt1"/>
+          </a:fontRef>
+        </p:style>
+        <p:txBody>
+          <a:bodyPr rtlCol="0" anchor="ctr"/>
+          <a:lstStyle/>
+          <a:p>
+            <a:pPr algn="ctr"/>
+          </a:p>
+        </p:txBody>
+      </p:sp>
+      <p:pic>
+        <p:nvPicPr>
+          <p:cNvPr id="5" name="Picture 4" descr="gwr_contrafactual_dif.png"/>
+          <p:cNvPicPr>
+            <a:picLocks noChangeAspect="1"/>
+          </p:cNvPicPr>
+          <p:nvPr/>
+        </p:nvPicPr>
+        <p:blipFill>
+          <a:blip r:embed="rId2"/>
+          <a:stretch>
+            <a:fillRect/>
+          </a:stretch>
+        </p:blipFill>
+        <p:spPr>
+          <a:xfrm>
+            <a:off x="851535" y="1600200"/>
+            <a:ext cx="5246370" cy="4663440"/>
+          </a:xfrm>
+          <a:prstGeom prst="rect">
+            <a:avLst/>
+          </a:prstGeom>
+        </p:spPr>
+      </p:pic>
+      <p:sp>
+        <p:nvSpPr>
+          <p:cNvPr id="6" name="TextBox 5"/>
+          <p:cNvSpPr txBox="1"/>
+          <p:nvPr/>
+        </p:nvSpPr>
+        <p:spPr>
+          <a:xfrm>
+            <a:off x="6675120" y="1737360"/>
+            <a:ext cx="4937760" cy="548640"/>
+          </a:xfrm>
+          <a:prstGeom prst="rect">
+            <a:avLst/>
+          </a:prstGeom>
+          <a:noFill/>
+        </p:spPr>
+        <p:txBody>
+          <a:bodyPr wrap="square" anchor="t">
+            <a:spAutoFit/>
+          </a:bodyPr>
+          <a:lstStyle/>
+          <a:p>
+            <a:pPr algn="l">
+              <a:lnSpc>
+                <a:spcPct val="115000"/>
+              </a:lnSpc>
+            </a:pPr>
+            <a:r>
+              <a:rPr sz="1700" b="1" i="0">
+                <a:solidFill>
+                  <a:srgbClr val="1F4E79"/>
+                </a:solidFill>
+                <a:latin typeface="Calibri"/>
+              </a:rPr>
+              <a:t>Cenário contrafactual</a:t>
+            </a:r>
+          </a:p>
+        </p:txBody>
+      </p:sp>
+      <p:sp>
+        <p:nvSpPr>
+          <p:cNvPr id="7" name="TextBox 6"/>
+          <p:cNvSpPr txBox="1"/>
+          <p:nvPr/>
+        </p:nvSpPr>
+        <p:spPr>
+          <a:xfrm>
+            <a:off x="6675120" y="2286000"/>
+            <a:ext cx="4937760" cy="1828800"/>
+          </a:xfrm>
+          <a:prstGeom prst="rect">
+            <a:avLst/>
+          </a:prstGeom>
+          <a:noFill/>
+        </p:spPr>
+        <p:txBody>
+          <a:bodyPr wrap="square">
+            <a:spAutoFit/>
+          </a:bodyPr>
+          <a:lstStyle/>
+          <a:p>
+            <a:pPr>
+              <a:lnSpc>
+                <a:spcPct val="115000"/>
+              </a:lnSpc>
+              <a:spcAft>
+                <a:spcPts val="1200"/>
+              </a:spcAft>
+            </a:pPr>
+            <a:r>
+              <a:rPr sz="1400">
+                <a:solidFill>
+                  <a:srgbClr val="333333"/>
+                </a:solidFill>
+                <a:latin typeface="Calibri"/>
+              </a:rPr>
+              <a:t>—  O que acontece se "zerarmos" a variável litoral no GWR e recalcularmos a predição?</a:t>
+            </a:r>
+          </a:p>
+          <a:p>
+            <a:pPr>
+              <a:lnSpc>
+                <a:spcPct val="115000"/>
+              </a:lnSpc>
+              <a:spcAft>
+                <a:spcPts val="1200"/>
+              </a:spcAft>
+            </a:pPr>
+            <a:r>
+              <a:rPr sz="1400">
+                <a:solidFill>
+                  <a:srgbClr val="333333"/>
+                </a:solidFill>
+                <a:latin typeface="Calibri"/>
+              </a:rPr>
+              <a:t>—  A taxa cai em até 12 furtos/1.000 hab. — impacto concentrado inteiramente na faixa costeira.</a:t>
+            </a:r>
+          </a:p>
+        </p:txBody>
+      </p:sp>
+      <p:sp>
+        <p:nvSpPr>
+          <p:cNvPr id="8" name="Rounded Rectangle 7"/>
+          <p:cNvSpPr/>
+          <p:nvPr/>
+        </p:nvSpPr>
+        <p:spPr>
+          <a:xfrm>
+            <a:off x="6675120" y="4297680"/>
+            <a:ext cx="4937760" cy="1828800"/>
+          </a:xfrm>
+          <a:prstGeom prst="roundRect">
+            <a:avLst>
+              <a:gd name="adj" fmla="val 8000"/>
+            </a:avLst>
+          </a:prstGeom>
+          <a:solidFill>
+            <a:srgbClr val="F2F2F2"/>
+          </a:solidFill>
+          <a:ln>
+            <a:noFill/>
+          </a:ln>
+          <a:effectLst/>
+        </p:spPr>
+        <p:style>
+          <a:lnRef idx="1">
+            <a:schemeClr val="accent1"/>
+          </a:lnRef>
+          <a:fillRef idx="3">
+            <a:schemeClr val="accent1"/>
+          </a:fillRef>
+          <a:effectRef idx="2">
+            <a:schemeClr val="accent1"/>
+          </a:effectRef>
+          <a:fontRef idx="minor">
+            <a:schemeClr val="lt1"/>
+          </a:fontRef>
+        </p:style>
+        <p:txBody>
+          <a:bodyPr rtlCol="0" anchor="ctr" wrap="square" lIns="182880" rIns="182880"/>
+          <a:lstStyle/>
+          <a:p>
+            <a:pPr algn="ctr"/>
+            <a:r>
+              <a:rPr sz="1300">
+                <a:solidFill>
+                  <a:srgbClr val="595959"/>
+                </a:solidFill>
+              </a:rPr>
+              <a:t>Resíduo médio sem a variável litoral:</a:t>
+            </a:r>
+          </a:p>
+          <a:p>
+            <a:r>
+              <a:rPr sz="1400" b="1">
+                <a:solidFill>
+                  <a:srgbClr val="ED7D31"/>
+                </a:solidFill>
+              </a:rPr>
+              <a:t>+10,68 nos municípios litorâneos    −0,27 nos demais</a:t>
+            </a:r>
+          </a:p>
+          <a:p>
+            <a:r>
+              <a:rPr sz="1300">
+                <a:solidFill>
+                  <a:srgbClr val="595959"/>
+                </a:solidFill>
+              </a:rPr>
+              <a:t>Com a variável incluída, ambos os grupos centram em zero.</a:t>
+            </a:r>
+          </a:p>
+        </p:txBody>
+      </p:sp>
+      <p:sp>
+        <p:nvSpPr>
+          <p:cNvPr id="9" name="TextBox 8"/>
+          <p:cNvSpPr txBox="1"/>
+          <p:nvPr/>
+        </p:nvSpPr>
+        <p:spPr>
+          <a:xfrm>
+            <a:off x="548640" y="6510528"/>
+            <a:ext cx="7315200" cy="274320"/>
+          </a:xfrm>
+          <a:prstGeom prst="rect">
+            <a:avLst/>
+          </a:prstGeom>
+          <a:noFill/>
+        </p:spPr>
+        <p:txBody>
+          <a:bodyPr wrap="square" anchor="t">
+            <a:spAutoFit/>
+          </a:bodyPr>
+          <a:lstStyle/>
+          <a:p>
+            <a:pPr algn="l">
+              <a:lnSpc>
+                <a:spcPct val="115000"/>
+              </a:lnSpc>
+            </a:pPr>
+            <a:r>
+              <a:rPr sz="1000" b="0" i="0">
+                <a:solidFill>
+                  <a:srgbClr val="595959"/>
+                </a:solidFill>
+                <a:latin typeface="Calibri"/>
+              </a:rPr>
+              <a:t>Furto, Renda e Território — UFABC</a:t>
+            </a:r>
+          </a:p>
+        </p:txBody>
+      </p:sp>
+      <p:sp>
+        <p:nvSpPr>
+          <p:cNvPr id="10" name="TextBox 9"/>
+          <p:cNvSpPr txBox="1"/>
+          <p:nvPr/>
+        </p:nvSpPr>
+        <p:spPr>
+          <a:xfrm>
+            <a:off x="10972800" y="6510528"/>
+            <a:ext cx="731520" cy="274320"/>
+          </a:xfrm>
+          <a:prstGeom prst="rect">
+            <a:avLst/>
+          </a:prstGeom>
+          <a:noFill/>
+        </p:spPr>
+        <p:txBody>
+          <a:bodyPr wrap="square" anchor="t">
+            <a:spAutoFit/>
+          </a:bodyPr>
+          <a:lstStyle/>
+          <a:p>
+            <a:pPr algn="r">
+              <a:lnSpc>
+                <a:spcPct val="115000"/>
+              </a:lnSpc>
+            </a:pPr>
+            <a:r>
+              <a:rPr sz="1000" b="0" i="0">
+                <a:solidFill>
+                  <a:srgbClr val="595959"/>
+                </a:solidFill>
+                <a:latin typeface="Calibri"/>
+              </a:rPr>
+              <a:t>11</a:t>
+            </a:r>
+          </a:p>
+        </p:txBody>
+      </p:sp>
+    </p:spTree>
+  </p:cSld>
+  <p:clrMapOvr>
+    <a:masterClrMapping/>
+  </p:clrMapOvr>
+</p:sld>
+</file>
+
+<file path=ppt/slides/slide12.xml><?xml version="1.0" encoding="utf-8"?>
+<p:sld xmlns:a="http://schemas.openxmlformats.org/drawingml/2006/main" xmlns:p="http://schemas.openxmlformats.org/presentationml/2006/main" xmlns:r="http://schemas.openxmlformats.org/officeDocument/2006/relationships">
+  <p:cSld>
+    <p:bg>
+      <p:bgPr>
+        <a:solidFill>
+          <a:srgbClr val="FFFFFF"/>
+        </a:solidFill>
+        <a:effectLst/>
+      </p:bgPr>
+    </p:bg>
+    <p:spTree>
+      <p:nvGrpSpPr>
+        <p:cNvPr id="1" name=""/>
+        <p:cNvGrpSpPr/>
+        <p:nvPr/>
+      </p:nvGrpSpPr>
+      <p:grpSpPr/>
+      <p:sp>
+        <p:nvSpPr>
+          <p:cNvPr id="2" name="TextBox 1"/>
+          <p:cNvSpPr txBox="1"/>
+          <p:nvPr/>
+        </p:nvSpPr>
+        <p:spPr>
+          <a:xfrm>
+            <a:off x="548640" y="320040"/>
+            <a:ext cx="8229600" cy="365760"/>
+          </a:xfrm>
+          <a:prstGeom prst="rect">
+            <a:avLst/>
+          </a:prstGeom>
+          <a:noFill/>
+        </p:spPr>
+        <p:txBody>
+          <a:bodyPr wrap="square" anchor="t">
+            <a:spAutoFit/>
+          </a:bodyPr>
+          <a:lstStyle/>
+          <a:p>
+            <a:pPr algn="l">
+              <a:lnSpc>
+                <a:spcPct val="115000"/>
+              </a:lnSpc>
+            </a:pPr>
+            <a:r>
+              <a:rPr sz="1300" b="1" i="0">
+                <a:solidFill>
+                  <a:srgbClr val="1F4E79"/>
+                </a:solidFill>
+                <a:latin typeface="Calibri"/>
+              </a:rPr>
+              <a:t>DESENVOLVIMENTO E RESULTADOS</a:t>
+            </a:r>
+          </a:p>
+        </p:txBody>
+      </p:sp>
+      <p:sp>
+        <p:nvSpPr>
+          <p:cNvPr id="3" name="TextBox 2"/>
+          <p:cNvSpPr txBox="1"/>
+          <p:nvPr/>
+        </p:nvSpPr>
+        <p:spPr>
+          <a:xfrm>
+            <a:off x="548640" y="594360"/>
+            <a:ext cx="11064240" cy="822960"/>
+          </a:xfrm>
+          <a:prstGeom prst="rect">
+            <a:avLst/>
+          </a:prstGeom>
+          <a:noFill/>
+        </p:spPr>
+        <p:txBody>
+          <a:bodyPr wrap="square" anchor="t">
+            <a:spAutoFit/>
+          </a:bodyPr>
+          <a:lstStyle/>
+          <a:p>
+            <a:pPr algn="l">
+              <a:lnSpc>
+                <a:spcPct val="115000"/>
+              </a:lnSpc>
+            </a:pPr>
+            <a:r>
+              <a:rPr sz="2800" b="1" i="0">
+                <a:solidFill>
+                  <a:srgbClr val="1A1A1A"/>
+                </a:solidFill>
+                <a:latin typeface="Calibri"/>
+              </a:rPr>
+              <a:t>Onde o modelo erra: o rastro da população flutuante</a:t>
+            </a:r>
+          </a:p>
+        </p:txBody>
+      </p:sp>
+      <p:sp>
+        <p:nvSpPr>
+          <p:cNvPr id="4" name="Rectangle 3"/>
+          <p:cNvSpPr/>
+          <p:nvPr/>
+        </p:nvSpPr>
+        <p:spPr>
+          <a:xfrm>
+            <a:off x="548640" y="1280160"/>
+            <a:ext cx="11064240" cy="27940"/>
+          </a:xfrm>
+          <a:prstGeom prst="rect">
+            <a:avLst/>
+          </a:prstGeom>
+          <a:solidFill>
+            <a:srgbClr val="1F4E79"/>
+          </a:solidFill>
+          <a:ln>
+            <a:noFill/>
+          </a:ln>
+          <a:effectLst/>
+        </p:spPr>
+        <p:style>
+          <a:lnRef idx="1">
+            <a:schemeClr val="accent1"/>
+          </a:lnRef>
+          <a:fillRef idx="3">
+            <a:schemeClr val="accent1"/>
+          </a:fillRef>
+          <a:effectRef idx="2">
+            <a:schemeClr val="accent1"/>
+          </a:effectRef>
+          <a:fontRef idx="minor">
+            <a:schemeClr val="lt1"/>
+          </a:fontRef>
+        </p:style>
+        <p:txBody>
+          <a:bodyPr rtlCol="0" anchor="ctr"/>
+          <a:lstStyle/>
+          <a:p>
+            <a:pPr algn="ctr"/>
+          </a:p>
+        </p:txBody>
+      </p:sp>
+      <p:pic>
+        <p:nvPicPr>
+          <p:cNvPr id="5" name="Picture 4" descr="residuos_mapa_sem_litoral.png"/>
+          <p:cNvPicPr>
+            <a:picLocks noChangeAspect="1"/>
+          </p:cNvPicPr>
+          <p:nvPr/>
+        </p:nvPicPr>
+        <p:blipFill>
+          <a:blip r:embed="rId2"/>
+          <a:stretch>
+            <a:fillRect/>
+          </a:stretch>
+        </p:blipFill>
+        <p:spPr>
+          <a:xfrm>
+            <a:off x="851535" y="1600200"/>
+            <a:ext cx="5246370" cy="4663440"/>
+          </a:xfrm>
+          <a:prstGeom prst="rect">
+            <a:avLst/>
+          </a:prstGeom>
+        </p:spPr>
+      </p:pic>
+      <p:sp>
+        <p:nvSpPr>
+          <p:cNvPr id="6" name="TextBox 5"/>
+          <p:cNvSpPr txBox="1"/>
+          <p:nvPr/>
+        </p:nvSpPr>
+        <p:spPr>
+          <a:xfrm>
+            <a:off x="6675120" y="1737360"/>
+            <a:ext cx="4937760" cy="822960"/>
+          </a:xfrm>
+          <a:prstGeom prst="rect">
+            <a:avLst/>
+          </a:prstGeom>
+          <a:noFill/>
+        </p:spPr>
+        <p:txBody>
+          <a:bodyPr wrap="square" anchor="t">
+            <a:spAutoFit/>
+          </a:bodyPr>
+          <a:lstStyle/>
+          <a:p>
+            <a:pPr algn="l">
+              <a:lnSpc>
+                <a:spcPct val="115000"/>
+              </a:lnSpc>
+            </a:pPr>
+            <a:r>
+              <a:rPr sz="1400" b="0" i="0">
+                <a:solidFill>
+                  <a:srgbClr val="333333"/>
+                </a:solidFill>
+                <a:latin typeface="Calibri"/>
+              </a:rPr>
+              <a:t>O modelo (sem litoral) subestima as ocorrências exatamente no litoral — a faixa costeira concentra a subestimação mais intensa do estado.</a:t>
+            </a:r>
+          </a:p>
+        </p:txBody>
+      </p:sp>
+      <p:sp>
+        <p:nvSpPr>
+          <p:cNvPr id="7" name="TextBox 6"/>
+          <p:cNvSpPr txBox="1"/>
+          <p:nvPr/>
+        </p:nvSpPr>
+        <p:spPr>
+          <a:xfrm>
+            <a:off x="6675120" y="2743200"/>
+            <a:ext cx="4937760" cy="365760"/>
+          </a:xfrm>
+          <a:prstGeom prst="rect">
+            <a:avLst/>
+          </a:prstGeom>
+          <a:noFill/>
+        </p:spPr>
+        <p:txBody>
+          <a:bodyPr wrap="square" anchor="t">
+            <a:spAutoFit/>
+          </a:bodyPr>
+          <a:lstStyle/>
+          <a:p>
+            <a:pPr algn="l">
+              <a:lnSpc>
+                <a:spcPct val="115000"/>
+              </a:lnSpc>
+            </a:pPr>
+            <a:r>
+              <a:rPr sz="1600" b="1" i="0">
+                <a:solidFill>
+                  <a:srgbClr val="1F4E79"/>
+                </a:solidFill>
+                <a:latin typeface="Calibri"/>
+              </a:rPr>
+              <a:t>O mecanismo numérico</a:t>
+            </a:r>
+          </a:p>
+        </p:txBody>
+      </p:sp>
+      <p:sp>
+        <p:nvSpPr>
+          <p:cNvPr id="8" name="TextBox 7"/>
+          <p:cNvSpPr txBox="1"/>
+          <p:nvPr/>
+        </p:nvSpPr>
+        <p:spPr>
+          <a:xfrm>
+            <a:off x="6675120" y="3200400"/>
+            <a:ext cx="4937760" cy="1645920"/>
+          </a:xfrm>
+          <a:prstGeom prst="rect">
+            <a:avLst/>
+          </a:prstGeom>
+          <a:noFill/>
+        </p:spPr>
+        <p:txBody>
+          <a:bodyPr wrap="square">
+            <a:spAutoFit/>
+          </a:bodyPr>
+          <a:lstStyle/>
+          <a:p>
+            <a:pPr>
+              <a:lnSpc>
+                <a:spcPct val="115000"/>
+              </a:lnSpc>
+              <a:spcAft>
+                <a:spcPts val="1000"/>
+              </a:spcAft>
+            </a:pPr>
+            <a:r>
+              <a:rPr sz="1400">
+                <a:solidFill>
+                  <a:srgbClr val="333333"/>
+                </a:solidFill>
+                <a:latin typeface="Calibri"/>
+              </a:rPr>
+              <a:t>—  Numerador (crimes): as ocorrências inflam com o fluxo de turistas no verão.</a:t>
+            </a:r>
+          </a:p>
+          <a:p>
+            <a:pPr>
+              <a:lnSpc>
+                <a:spcPct val="115000"/>
+              </a:lnSpc>
+              <a:spcAft>
+                <a:spcPts val="1000"/>
+              </a:spcAft>
+            </a:pPr>
+            <a:r>
+              <a:rPr sz="1400">
+                <a:solidFill>
+                  <a:srgbClr val="333333"/>
+                </a:solidFill>
+                <a:latin typeface="Calibri"/>
+              </a:rPr>
+              <a:t>—  Denominador (população): o modelo conta só a população residente medida pelo Censo IBGE.</a:t>
+            </a:r>
+          </a:p>
+        </p:txBody>
+      </p:sp>
+      <p:sp>
+        <p:nvSpPr>
+          <p:cNvPr id="9" name="Rounded Rectangle 8"/>
+          <p:cNvSpPr/>
+          <p:nvPr/>
+        </p:nvSpPr>
+        <p:spPr>
+          <a:xfrm>
+            <a:off x="6675120" y="5029200"/>
+            <a:ext cx="4937760" cy="1097280"/>
+          </a:xfrm>
+          <a:prstGeom prst="roundRect">
+            <a:avLst>
+              <a:gd name="adj" fmla="val 8000"/>
+            </a:avLst>
+          </a:prstGeom>
+          <a:solidFill>
+            <a:srgbClr val="FDEEE3"/>
+          </a:solidFill>
+          <a:ln w="12700">
+            <a:solidFill>
+              <a:srgbClr val="ED7D31"/>
+            </a:solidFill>
+          </a:ln>
+          <a:effectLst/>
+        </p:spPr>
+        <p:style>
+          <a:lnRef idx="1">
+            <a:schemeClr val="accent1"/>
+          </a:lnRef>
+          <a:fillRef idx="3">
+            <a:schemeClr val="accent1"/>
+          </a:fillRef>
+          <a:effectRef idx="2">
+            <a:schemeClr val="accent1"/>
+          </a:effectRef>
+          <a:fontRef idx="minor">
+            <a:schemeClr val="lt1"/>
+          </a:fontRef>
+        </p:style>
+        <p:txBody>
+          <a:bodyPr rtlCol="0" anchor="ctr" wrap="square" lIns="182880" rIns="182880"/>
+          <a:lstStyle/>
+          <a:p>
+            <a:pPr algn="ctr"/>
+            <a:r>
+              <a:rPr sz="1300">
+                <a:solidFill>
+                  <a:srgbClr val="663300"/>
+                </a:solidFill>
+              </a:rPr>
+              <a:t>A taxa por 1.000 hab. superestima o risco real para quem mora lá — sem o dummy, o modelo sempre vai subestimar a taxa observada.</a:t>
+            </a:r>
+          </a:p>
+        </p:txBody>
+      </p:sp>
+      <p:sp>
+        <p:nvSpPr>
+          <p:cNvPr id="10" name="TextBox 9"/>
+          <p:cNvSpPr txBox="1"/>
+          <p:nvPr/>
+        </p:nvSpPr>
+        <p:spPr>
+          <a:xfrm>
+            <a:off x="548640" y="6510528"/>
+            <a:ext cx="7315200" cy="274320"/>
+          </a:xfrm>
+          <a:prstGeom prst="rect">
+            <a:avLst/>
+          </a:prstGeom>
+          <a:noFill/>
+        </p:spPr>
+        <p:txBody>
+          <a:bodyPr wrap="square" anchor="t">
+            <a:spAutoFit/>
+          </a:bodyPr>
+          <a:lstStyle/>
+          <a:p>
+            <a:pPr algn="l">
+              <a:lnSpc>
+                <a:spcPct val="115000"/>
+              </a:lnSpc>
+            </a:pPr>
+            <a:r>
+              <a:rPr sz="1000" b="0" i="0">
+                <a:solidFill>
+                  <a:srgbClr val="595959"/>
+                </a:solidFill>
+                <a:latin typeface="Calibri"/>
+              </a:rPr>
+              <a:t>Furto, Renda e Território — UFABC</a:t>
+            </a:r>
+          </a:p>
+        </p:txBody>
+      </p:sp>
+      <p:sp>
+        <p:nvSpPr>
+          <p:cNvPr id="11" name="TextBox 10"/>
+          <p:cNvSpPr txBox="1"/>
+          <p:nvPr/>
+        </p:nvSpPr>
+        <p:spPr>
+          <a:xfrm>
+            <a:off x="10972800" y="6510528"/>
+            <a:ext cx="731520" cy="274320"/>
+          </a:xfrm>
+          <a:prstGeom prst="rect">
+            <a:avLst/>
+          </a:prstGeom>
+          <a:noFill/>
+        </p:spPr>
+        <p:txBody>
+          <a:bodyPr wrap="square" anchor="t">
+            <a:spAutoFit/>
+          </a:bodyPr>
+          <a:lstStyle/>
+          <a:p>
+            <a:pPr algn="r">
+              <a:lnSpc>
+                <a:spcPct val="115000"/>
+              </a:lnSpc>
+            </a:pPr>
+            <a:r>
+              <a:rPr sz="1000" b="0" i="0">
+                <a:solidFill>
+                  <a:srgbClr val="595959"/>
+                </a:solidFill>
+                <a:latin typeface="Calibri"/>
+              </a:rPr>
+              <a:t>12</a:t>
+            </a:r>
+          </a:p>
+        </p:txBody>
+      </p:sp>
+    </p:spTree>
+  </p:cSld>
+  <p:clrMapOvr>
+    <a:masterClrMapping/>
+  </p:clrMapOvr>
+</p:sld>
+</file>
+
+<file path=ppt/slides/slide13.xml><?xml version="1.0" encoding="utf-8"?>
 <p:sld xmlns:a="http://schemas.openxmlformats.org/drawingml/2006/main" xmlns:p="http://schemas.openxmlformats.org/presentationml/2006/main" xmlns:r="http://schemas.openxmlformats.org/officeDocument/2006/relationships">
   <p:cSld>
     <p:bg>
@@ -4664,7 +6159,7 @@
                 </a:solidFill>
                 <a:latin typeface="Calibri"/>
               </a:rPr>
-              <a:t>11</a:t>
+              <a:t>13</a:t>
             </a:r>
           </a:p>
         </p:txBody>
@@ -4677,7 +6172,7 @@
 </p:sld>
 </file>
 
-<file path=ppt/slides/slide12.xml><?xml version="1.0" encoding="utf-8"?>
+<file path=ppt/slides/slide14.xml><?xml version="1.0" encoding="utf-8"?>
 <p:sld xmlns:a="http://schemas.openxmlformats.org/drawingml/2006/main" xmlns:p="http://schemas.openxmlformats.org/presentationml/2006/main" xmlns:r="http://schemas.openxmlformats.org/officeDocument/2006/relationships">
   <p:cSld>
     <p:bg>
@@ -5317,7 +6812,7 @@
                 </a:solidFill>
                 <a:latin typeface="Calibri"/>
               </a:rPr>
-              <a:t>12</a:t>
+              <a:t>14</a:t>
             </a:r>
           </a:p>
         </p:txBody>
@@ -5330,7 +6825,7 @@
 </p:sld>
 </file>
 
-<file path=ppt/slides/slide13.xml><?xml version="1.0" encoding="utf-8"?>
+<file path=ppt/slides/slide15.xml><?xml version="1.0" encoding="utf-8"?>
 <p:sld xmlns:a="http://schemas.openxmlformats.org/drawingml/2006/main" xmlns:p="http://schemas.openxmlformats.org/presentationml/2006/main" xmlns:r="http://schemas.openxmlformats.org/officeDocument/2006/relationships">
   <p:cSld>
     <p:bg>
@@ -6042,7 +7537,7 @@
                 </a:solidFill>
                 <a:latin typeface="Calibri"/>
               </a:rPr>
-              <a:t>13</a:t>
+              <a:t>15</a:t>
             </a:r>
           </a:p>
         </p:txBody>
@@ -6107,7 +7602,7 @@
                 </a:solidFill>
                 <a:latin typeface="Calibri"/>
               </a:rPr>
-              <a:t>HIPÓTESE E MOTIVAÇÃO</a:t>
+              <a:t>HIPÓTESE</a:t>
             </a:r>
           </a:p>
         </p:txBody>
@@ -6146,7 +7641,7 @@
                 </a:solidFill>
                 <a:latin typeface="Calibri"/>
               </a:rPr>
-              <a:t>Motivação: a pergunta que originou o trabalho</a:t>
+              <a:t>A pergunta que originou o trabalho</a:t>
             </a:r>
           </a:p>
         </p:txBody>
@@ -6203,8 +7698,8 @@
         </p:nvSpPr>
         <p:spPr>
           <a:xfrm>
-            <a:off x="548640" y="1600200"/>
-            <a:ext cx="6126480" cy="822960"/>
+            <a:off x="548640" y="1828800"/>
+            <a:ext cx="11064240" cy="914400"/>
           </a:xfrm>
           <a:prstGeom prst="rect">
             <a:avLst/>
@@ -6217,68 +7712,52 @@
           </a:bodyPr>
           <a:lstStyle/>
           <a:p>
-            <a:pPr algn="l">
+            <a:pPr algn="ctr">
               <a:lnSpc>
                 <a:spcPct val="115000"/>
               </a:lnSpc>
             </a:pPr>
             <a:r>
-              <a:rPr sz="2400" b="1" i="0">
+              <a:rPr sz="3000" b="1" i="0">
                 <a:solidFill>
                   <a:srgbClr val="1A1A1A"/>
                 </a:solidFill>
                 <a:latin typeface="Calibri"/>
               </a:rPr>
-              <a:t>"Acontecem mais crimes nas</a:t>
-            </a:r>
-          </a:p>
-          <a:p>
-            <a:pPr algn="l">
+              <a:t>"Acontecem mais crimes nas cidades mais pobres?"</a:t>
+            </a:r>
+          </a:p>
+        </p:txBody>
+      </p:sp>
+      <p:sp>
+        <p:nvSpPr>
+          <p:cNvPr id="6" name="TextBox 5"/>
+          <p:cNvSpPr txBox="1"/>
+          <p:nvPr/>
+        </p:nvSpPr>
+        <p:spPr>
+          <a:xfrm>
+            <a:off x="1645920" y="2743200"/>
+            <a:ext cx="8869680" cy="548640"/>
+          </a:xfrm>
+          <a:prstGeom prst="rect">
+            <a:avLst/>
+          </a:prstGeom>
+          <a:noFill/>
+        </p:spPr>
+        <p:txBody>
+          <a:bodyPr wrap="square" anchor="t">
+            <a:spAutoFit/>
+          </a:bodyPr>
+          <a:lstStyle/>
+          <a:p>
+            <a:pPr algn="ctr">
               <a:lnSpc>
                 <a:spcPct val="115000"/>
               </a:lnSpc>
             </a:pPr>
             <a:r>
-              <a:rPr sz="2400" b="1" i="0">
-                <a:solidFill>
-                  <a:srgbClr val="1A1A1A"/>
-                </a:solidFill>
-                <a:latin typeface="Calibri"/>
-              </a:rPr>
-              <a:t>cidades mais pobres?"</a:t>
-            </a:r>
-          </a:p>
-        </p:txBody>
-      </p:sp>
-      <p:sp>
-        <p:nvSpPr>
-          <p:cNvPr id="6" name="TextBox 5"/>
-          <p:cNvSpPr txBox="1"/>
-          <p:nvPr/>
-        </p:nvSpPr>
-        <p:spPr>
-          <a:xfrm>
-            <a:off x="548640" y="2514600"/>
-            <a:ext cx="6126480" cy="640080"/>
-          </a:xfrm>
-          <a:prstGeom prst="rect">
-            <a:avLst/>
-          </a:prstGeom>
-          <a:noFill/>
-        </p:spPr>
-        <p:txBody>
-          <a:bodyPr wrap="square" anchor="t">
-            <a:spAutoFit/>
-          </a:bodyPr>
-          <a:lstStyle/>
-          <a:p>
-            <a:pPr algn="l">
-              <a:lnSpc>
-                <a:spcPct val="115000"/>
-              </a:lnSpc>
-            </a:pPr>
-            <a:r>
-              <a:rPr sz="1600" b="1" i="0">
+              <a:rPr sz="1800" b="1" i="0">
                 <a:solidFill>
                   <a:srgbClr val="1F4E79"/>
                 </a:solidFill>
@@ -6291,94 +7770,14 @@
       </p:sp>
       <p:sp>
         <p:nvSpPr>
-          <p:cNvPr id="7" name="TextBox 6"/>
-          <p:cNvSpPr txBox="1"/>
-          <p:nvPr/>
-        </p:nvSpPr>
-        <p:spPr>
-          <a:xfrm>
-            <a:off x="548640" y="3246120"/>
-            <a:ext cx="6126480" cy="1645920"/>
-          </a:xfrm>
-          <a:prstGeom prst="rect">
-            <a:avLst/>
-          </a:prstGeom>
-          <a:noFill/>
-        </p:spPr>
-        <p:txBody>
-          <a:bodyPr wrap="square">
-            <a:spAutoFit/>
-          </a:bodyPr>
-          <a:lstStyle/>
-          <a:p>
-            <a:pPr>
-              <a:lnSpc>
-                <a:spcPct val="115000"/>
-              </a:lnSpc>
-              <a:spcAft>
-                <a:spcPts val="1000"/>
-              </a:spcAft>
-            </a:pPr>
-            <a:r>
-              <a:rPr sz="1600">
-                <a:solidFill>
-                  <a:srgbClr val="333333"/>
-                </a:solidFill>
-                <a:latin typeface="Calibri"/>
-              </a:rPr>
-              <a:t>—  Ocorrências criminais — SSP-SP, 2025 (roubo, furto e lesão corporal).</a:t>
-            </a:r>
-          </a:p>
-          <a:p>
-            <a:pPr>
-              <a:lnSpc>
-                <a:spcPct val="115000"/>
-              </a:lnSpc>
-              <a:spcAft>
-                <a:spcPts val="1000"/>
-              </a:spcAft>
-            </a:pPr>
-            <a:r>
-              <a:rPr sz="1600">
-                <a:solidFill>
-                  <a:srgbClr val="333333"/>
-                </a:solidFill>
-                <a:latin typeface="Calibri"/>
-              </a:rPr>
-              <a:t>—  Renda média per capita — Censo IBGE 2022.</a:t>
-            </a:r>
-          </a:p>
-          <a:p>
-            <a:pPr>
-              <a:lnSpc>
-                <a:spcPct val="115000"/>
-              </a:lnSpc>
-              <a:spcAft>
-                <a:spcPts val="1000"/>
-              </a:spcAft>
-            </a:pPr>
-            <a:r>
-              <a:rPr sz="1600">
-                <a:solidFill>
-                  <a:srgbClr val="333333"/>
-                </a:solidFill>
-                <a:latin typeface="Calibri"/>
-              </a:rPr>
-              <a:t>—  645 municípios — todo o estado de São Paulo.</a:t>
-            </a:r>
-          </a:p>
-        </p:txBody>
-      </p:sp>
-      <p:sp>
-        <p:nvSpPr>
-          <p:cNvPr id="8" name="Rounded Rectangle 7"/>
+          <p:cNvPr id="7" name="Rounded Rectangle 6"/>
           <p:cNvSpPr/>
           <p:nvPr/>
         </p:nvSpPr>
         <p:spPr>
           <a:xfrm>
-            <a:off x="548640" y="5029200"/>
-            <a:ext cx="6126480" cy="1234440"/>
+            <a:off x="1645920" y="3840480"/>
+            <a:ext cx="2743200" cy="1371600"/>
           </a:xfrm>
           <a:prstGeom prst="roundRect">
             <a:avLst>
@@ -6386,12 +7785,10 @@
             </a:avLst>
           </a:prstGeom>
           <a:solidFill>
-            <a:srgbClr val="FDEEE3"/>
+            <a:srgbClr val="F2F2F2"/>
           </a:solidFill>
-          <a:ln w="12700">
-            <a:solidFill>
-              <a:srgbClr val="ED7D31"/>
-            </a:solidFill>
+          <a:ln>
+            <a:noFill/>
           </a:ln>
           <a:effectLst/>
         </p:spPr>
@@ -6410,46 +7807,170 @@
           </a:fontRef>
         </p:style>
         <p:txBody>
-          <a:bodyPr rtlCol="0" anchor="ctr" wrap="square" lIns="228600" rIns="228600"/>
+          <a:bodyPr rtlCol="0" anchor="ctr" wrap="square" lIns="137160" rIns="137160"/>
           <a:lstStyle/>
           <a:p>
             <a:pPr algn="ctr"/>
             <a:r>
-              <a:rPr sz="1500">
-                <a:solidFill>
-                  <a:srgbClr val="663300"/>
-                </a:solidFill>
-                <a:latin typeface="Calibri"/>
-              </a:rPr>
-              <a:t>Observação inicial: a taxa de furto (por 1.000 hab.) mostra concentração aparente na macrometrópole e no litoral — não no interior mais pobre.</a:t>
-            </a:r>
-          </a:p>
-        </p:txBody>
-      </p:sp>
-      <p:pic>
-        <p:nvPicPr>
-          <p:cNvPr id="9" name="Picture 8" descr="mapa_taxa_furto.png"/>
-          <p:cNvPicPr>
-            <a:picLocks noChangeAspect="1"/>
-          </p:cNvPicPr>
-          <p:nvPr/>
-        </p:nvPicPr>
-        <p:blipFill>
-          <a:blip r:embed="rId2"/>
-          <a:stretch>
-            <a:fillRect/>
-          </a:stretch>
-        </p:blipFill>
-        <p:spPr>
-          <a:xfrm>
-            <a:off x="7040880" y="1940560"/>
-            <a:ext cx="4480560" cy="3982720"/>
-          </a:xfrm>
-          <a:prstGeom prst="rect">
-            <a:avLst/>
-          </a:prstGeom>
-        </p:spPr>
-      </p:pic>
+              <a:rPr sz="2600" b="1">
+                <a:solidFill>
+                  <a:srgbClr val="1F4E79"/>
+                </a:solidFill>
+                <a:latin typeface="Calibri"/>
+              </a:rPr>
+              <a:t>645</a:t>
+            </a:r>
+          </a:p>
+          <a:p>
+            <a:pPr algn="ctr"/>
+            <a:r>
+              <a:rPr sz="1200">
+                <a:solidFill>
+                  <a:srgbClr val="595959"/>
+                </a:solidFill>
+                <a:latin typeface="Calibri"/>
+              </a:rPr>
+              <a:t>municípios de São Paulo</a:t>
+            </a:r>
+          </a:p>
+        </p:txBody>
+      </p:sp>
+      <p:sp>
+        <p:nvSpPr>
+          <p:cNvPr id="8" name="Rounded Rectangle 7"/>
+          <p:cNvSpPr/>
+          <p:nvPr/>
+        </p:nvSpPr>
+        <p:spPr>
+          <a:xfrm>
+            <a:off x="4709160" y="3840480"/>
+            <a:ext cx="2743200" cy="1371600"/>
+          </a:xfrm>
+          <a:prstGeom prst="roundRect">
+            <a:avLst>
+              <a:gd name="adj" fmla="val 8000"/>
+            </a:avLst>
+          </a:prstGeom>
+          <a:solidFill>
+            <a:srgbClr val="F2F2F2"/>
+          </a:solidFill>
+          <a:ln>
+            <a:noFill/>
+          </a:ln>
+          <a:effectLst/>
+        </p:spPr>
+        <p:style>
+          <a:lnRef idx="1">
+            <a:schemeClr val="accent1"/>
+          </a:lnRef>
+          <a:fillRef idx="3">
+            <a:schemeClr val="accent1"/>
+          </a:fillRef>
+          <a:effectRef idx="2">
+            <a:schemeClr val="accent1"/>
+          </a:effectRef>
+          <a:fontRef idx="minor">
+            <a:schemeClr val="lt1"/>
+          </a:fontRef>
+        </p:style>
+        <p:txBody>
+          <a:bodyPr rtlCol="0" anchor="ctr" wrap="square" lIns="137160" rIns="137160"/>
+          <a:lstStyle/>
+          <a:p>
+            <a:pPr algn="ctr"/>
+            <a:r>
+              <a:rPr sz="2600" b="1">
+                <a:solidFill>
+                  <a:srgbClr val="1F4E79"/>
+                </a:solidFill>
+                <a:latin typeface="Calibri"/>
+              </a:rPr>
+              <a:t>3</a:t>
+            </a:r>
+          </a:p>
+          <a:p>
+            <a:pPr algn="ctr"/>
+            <a:r>
+              <a:rPr sz="1200">
+                <a:solidFill>
+                  <a:srgbClr val="595959"/>
+                </a:solidFill>
+                <a:latin typeface="Calibri"/>
+              </a:rPr>
+              <a:t>crimes analisados:
+roubo · furto · lesão corporal</a:t>
+            </a:r>
+          </a:p>
+        </p:txBody>
+      </p:sp>
+      <p:sp>
+        <p:nvSpPr>
+          <p:cNvPr id="9" name="Rounded Rectangle 8"/>
+          <p:cNvSpPr/>
+          <p:nvPr/>
+        </p:nvSpPr>
+        <p:spPr>
+          <a:xfrm>
+            <a:off x="7772400" y="3840480"/>
+            <a:ext cx="2743200" cy="1371600"/>
+          </a:xfrm>
+          <a:prstGeom prst="roundRect">
+            <a:avLst>
+              <a:gd name="adj" fmla="val 8000"/>
+            </a:avLst>
+          </a:prstGeom>
+          <a:solidFill>
+            <a:srgbClr val="F2F2F2"/>
+          </a:solidFill>
+          <a:ln>
+            <a:noFill/>
+          </a:ln>
+          <a:effectLst/>
+        </p:spPr>
+        <p:style>
+          <a:lnRef idx="1">
+            <a:schemeClr val="accent1"/>
+          </a:lnRef>
+          <a:fillRef idx="3">
+            <a:schemeClr val="accent1"/>
+          </a:fillRef>
+          <a:effectRef idx="2">
+            <a:schemeClr val="accent1"/>
+          </a:effectRef>
+          <a:fontRef idx="minor">
+            <a:schemeClr val="lt1"/>
+          </a:fontRef>
+        </p:style>
+        <p:txBody>
+          <a:bodyPr rtlCol="0" anchor="ctr" wrap="square" lIns="137160" rIns="137160"/>
+          <a:lstStyle/>
+          <a:p>
+            <a:pPr algn="ctr"/>
+            <a:r>
+              <a:rPr sz="2600" b="1">
+                <a:solidFill>
+                  <a:srgbClr val="1F4E79"/>
+                </a:solidFill>
+                <a:latin typeface="Calibri"/>
+              </a:rPr>
+              <a:t>2</a:t>
+            </a:r>
+          </a:p>
+          <a:p>
+            <a:pPr algn="ctr"/>
+            <a:r>
+              <a:rPr sz="1200">
+                <a:solidFill>
+                  <a:srgbClr val="595959"/>
+                </a:solidFill>
+                <a:latin typeface="Calibri"/>
+              </a:rPr>
+              <a:t>fontes: SSP-SP (2025)
+e IBGE Censo 2022</a:t>
+            </a:r>
+          </a:p>
+        </p:txBody>
+      </p:sp>
       <p:sp>
         <p:nvSpPr>
           <p:cNvPr id="10" name="TextBox 9"/>
@@ -7338,7 +8859,7 @@
                 </a:solidFill>
                 <a:latin typeface="Calibri"/>
               </a:rPr>
-              <a:t>DADOS E VARIÁVEIS</a:t>
+              <a:t>TAXAS</a:t>
             </a:r>
           </a:p>
         </p:txBody>
@@ -7377,7 +8898,7 @@
                 </a:solidFill>
                 <a:latin typeface="Calibri"/>
               </a:rPr>
-              <a:t>Por que o furto: cada crime tem seus outliers</a:t>
+              <a:t>Como o crime se distribui no espaço</a:t>
             </a:r>
           </a:p>
         </p:txBody>
@@ -7428,7 +8949,7 @@
       </p:sp>
       <p:pic>
         <p:nvPicPr>
-          <p:cNvPr id="5" name="Picture 4" descr="image.png"/>
+          <p:cNvPr id="5" name="Picture 4" descr="mapa_taxa_roubo.png"/>
           <p:cNvPicPr>
             <a:picLocks noChangeAspect="1"/>
           </p:cNvPicPr>
@@ -7442,24 +8963,72 @@
         </p:blipFill>
         <p:spPr>
           <a:xfrm>
-            <a:off x="1464798" y="1554480"/>
-            <a:ext cx="9231923" cy="3200400"/>
+            <a:off x="365760" y="2174240"/>
+            <a:ext cx="3749039" cy="3332479"/>
           </a:xfrm>
           <a:prstGeom prst="rect">
             <a:avLst/>
           </a:prstGeom>
         </p:spPr>
       </p:pic>
-      <p:sp>
-        <p:nvSpPr>
-          <p:cNvPr id="6" name="TextBox 5"/>
+      <p:pic>
+        <p:nvPicPr>
+          <p:cNvPr id="6" name="Picture 5" descr="mapa_taxa_furto.png"/>
+          <p:cNvPicPr>
+            <a:picLocks noChangeAspect="1"/>
+          </p:cNvPicPr>
+          <p:nvPr/>
+        </p:nvPicPr>
+        <p:blipFill>
+          <a:blip r:embed="rId3"/>
+          <a:stretch>
+            <a:fillRect/>
+          </a:stretch>
+        </p:blipFill>
+        <p:spPr>
+          <a:xfrm>
+            <a:off x="4206240" y="2174240"/>
+            <a:ext cx="3749039" cy="3332479"/>
+          </a:xfrm>
+          <a:prstGeom prst="rect">
+            <a:avLst/>
+          </a:prstGeom>
+        </p:spPr>
+      </p:pic>
+      <p:pic>
+        <p:nvPicPr>
+          <p:cNvPr id="7" name="Picture 6" descr="mapa_taxa_lesao.png"/>
+          <p:cNvPicPr>
+            <a:picLocks noChangeAspect="1"/>
+          </p:cNvPicPr>
+          <p:nvPr/>
+        </p:nvPicPr>
+        <p:blipFill>
+          <a:blip r:embed="rId4"/>
+          <a:stretch>
+            <a:fillRect/>
+          </a:stretch>
+        </p:blipFill>
+        <p:spPr>
+          <a:xfrm>
+            <a:off x="8046720" y="2174240"/>
+            <a:ext cx="3749039" cy="3332479"/>
+          </a:xfrm>
+          <a:prstGeom prst="rect">
+            <a:avLst/>
+          </a:prstGeom>
+        </p:spPr>
+      </p:pic>
+      <p:sp>
+        <p:nvSpPr>
+          <p:cNvPr id="8" name="TextBox 7"/>
           <p:cNvSpPr txBox="1"/>
           <p:nvPr/>
         </p:nvSpPr>
         <p:spPr>
           <a:xfrm>
-            <a:off x="548640" y="4892040"/>
-            <a:ext cx="11064240" cy="1737360"/>
+            <a:off x="548640" y="6172200"/>
+            <a:ext cx="11064240" cy="365760"/>
           </a:xfrm>
           <a:prstGeom prst="rect">
             <a:avLst/>
@@ -7467,72 +9036,31 @@
           <a:noFill/>
         </p:spPr>
         <p:txBody>
-          <a:bodyPr wrap="square">
+          <a:bodyPr wrap="square" anchor="t">
             <a:spAutoFit/>
           </a:bodyPr>
           <a:lstStyle/>
           <a:p>
-            <a:pPr>
+            <a:pPr algn="ctr">
               <a:lnSpc>
                 <a:spcPct val="115000"/>
               </a:lnSpc>
-              <a:spcAft>
-                <a:spcPts val="800"/>
-              </a:spcAft>
             </a:pPr>
             <a:r>
-              <a:rPr sz="1400">
-                <a:solidFill>
-                  <a:srgbClr val="333333"/>
-                </a:solidFill>
-                <a:latin typeface="Calibri"/>
-              </a:rPr>
-              <a:t>—  Roubo: o outlier mais extremo é de um município não-litorâneo; os litorâneos (laranja) aparecem elevados, mas não dominam o topo.</a:t>
-            </a:r>
-          </a:p>
-          <a:p>
-            <a:pPr>
-              <a:lnSpc>
-                <a:spcPct val="115000"/>
-              </a:lnSpc>
-              <a:spcAft>
-                <a:spcPts val="800"/>
-              </a:spcAft>
-            </a:pPr>
-            <a:r>
-              <a:rPr sz="1400">
-                <a:solidFill>
-                  <a:srgbClr val="333333"/>
-                </a:solidFill>
-                <a:latin typeface="Calibri"/>
-              </a:rPr>
-              <a:t>—  Furto: os outliers extremos são quase todos litorâneos — Mongaguá e outros municípios da costa aparecem bem acima da nuvem geral de pontos.</a:t>
-            </a:r>
-          </a:p>
-          <a:p>
-            <a:pPr>
-              <a:lnSpc>
-                <a:spcPct val="115000"/>
-              </a:lnSpc>
-              <a:spcAft>
-                <a:spcPts val="800"/>
-              </a:spcAft>
-            </a:pPr>
-            <a:r>
-              <a:rPr sz="1400">
-                <a:solidFill>
-                  <a:srgbClr val="333333"/>
-                </a:solidFill>
-                <a:latin typeface="Calibri"/>
-              </a:rPr>
-              <a:t>—  Lesão corporal: o outlier extremo é de renda baixíssima e não-litorâneo; os litorâneos ficam perdidos no meio da distribuição.</a:t>
-            </a:r>
-          </a:p>
-        </p:txBody>
-      </p:sp>
-      <p:sp>
-        <p:nvSpPr>
-          <p:cNvPr id="7" name="TextBox 6"/>
+              <a:rPr sz="1400" b="0" i="0">
+                <a:solidFill>
+                  <a:srgbClr val="595959"/>
+                </a:solidFill>
+                <a:latin typeface="Calibri"/>
+              </a:rPr>
+              <a:t>Roubo concentra na macrometrópole; furto acompanha o litoral inteiro; lesão corporal é o menos estruturado no espaço.</a:t>
+            </a:r>
+          </a:p>
+        </p:txBody>
+      </p:sp>
+      <p:sp>
+        <p:nvSpPr>
+          <p:cNvPr id="9" name="TextBox 8"/>
           <p:cNvSpPr txBox="1"/>
           <p:nvPr/>
         </p:nvSpPr>
@@ -7571,7 +9099,7 @@
       </p:sp>
       <p:sp>
         <p:nvSpPr>
-          <p:cNvPr id="8" name="TextBox 7"/>
+          <p:cNvPr id="10" name="TextBox 9"/>
           <p:cNvSpPr txBox="1"/>
           <p:nvPr/>
         </p:nvSpPr>
@@ -7668,7 +9196,337 @@
                 </a:solidFill>
                 <a:latin typeface="Calibri"/>
               </a:rPr>
-              <a:t>DADOS E VARIÁVEIS</a:t>
+              <a:t>TAXAS</a:t>
+            </a:r>
+          </a:p>
+        </p:txBody>
+      </p:sp>
+      <p:sp>
+        <p:nvSpPr>
+          <p:cNvPr id="3" name="TextBox 2"/>
+          <p:cNvSpPr txBox="1"/>
+          <p:nvPr/>
+        </p:nvSpPr>
+        <p:spPr>
+          <a:xfrm>
+            <a:off x="548640" y="594360"/>
+            <a:ext cx="11064240" cy="822960"/>
+          </a:xfrm>
+          <a:prstGeom prst="rect">
+            <a:avLst/>
+          </a:prstGeom>
+          <a:noFill/>
+        </p:spPr>
+        <p:txBody>
+          <a:bodyPr wrap="square" anchor="t">
+            <a:spAutoFit/>
+          </a:bodyPr>
+          <a:lstStyle/>
+          <a:p>
+            <a:pPr algn="l">
+              <a:lnSpc>
+                <a:spcPct val="115000"/>
+              </a:lnSpc>
+            </a:pPr>
+            <a:r>
+              <a:rPr sz="2800" b="1" i="0">
+                <a:solidFill>
+                  <a:srgbClr val="1A1A1A"/>
+                </a:solidFill>
+                <a:latin typeface="Calibri"/>
+              </a:rPr>
+              <a:t>Por que o furto: cada crime tem seus outliers</a:t>
+            </a:r>
+          </a:p>
+        </p:txBody>
+      </p:sp>
+      <p:sp>
+        <p:nvSpPr>
+          <p:cNvPr id="4" name="Rectangle 3"/>
+          <p:cNvSpPr/>
+          <p:nvPr/>
+        </p:nvSpPr>
+        <p:spPr>
+          <a:xfrm>
+            <a:off x="548640" y="1280160"/>
+            <a:ext cx="11064240" cy="27940"/>
+          </a:xfrm>
+          <a:prstGeom prst="rect">
+            <a:avLst/>
+          </a:prstGeom>
+          <a:solidFill>
+            <a:srgbClr val="1F4E79"/>
+          </a:solidFill>
+          <a:ln>
+            <a:noFill/>
+          </a:ln>
+          <a:effectLst/>
+        </p:spPr>
+        <p:style>
+          <a:lnRef idx="1">
+            <a:schemeClr val="accent1"/>
+          </a:lnRef>
+          <a:fillRef idx="3">
+            <a:schemeClr val="accent1"/>
+          </a:fillRef>
+          <a:effectRef idx="2">
+            <a:schemeClr val="accent1"/>
+          </a:effectRef>
+          <a:fontRef idx="minor">
+            <a:schemeClr val="lt1"/>
+          </a:fontRef>
+        </p:style>
+        <p:txBody>
+          <a:bodyPr rtlCol="0" anchor="ctr"/>
+          <a:lstStyle/>
+          <a:p>
+            <a:pPr algn="ctr"/>
+          </a:p>
+        </p:txBody>
+      </p:sp>
+      <p:pic>
+        <p:nvPicPr>
+          <p:cNvPr id="5" name="Picture 4" descr="image.png"/>
+          <p:cNvPicPr>
+            <a:picLocks noChangeAspect="1"/>
+          </p:cNvPicPr>
+          <p:nvPr/>
+        </p:nvPicPr>
+        <p:blipFill>
+          <a:blip r:embed="rId2"/>
+          <a:stretch>
+            <a:fillRect/>
+          </a:stretch>
+        </p:blipFill>
+        <p:spPr>
+          <a:xfrm>
+            <a:off x="1201029" y="1554480"/>
+            <a:ext cx="9759461" cy="3383280"/>
+          </a:xfrm>
+          <a:prstGeom prst="rect">
+            <a:avLst/>
+          </a:prstGeom>
+        </p:spPr>
+      </p:pic>
+      <p:sp>
+        <p:nvSpPr>
+          <p:cNvPr id="6" name="TextBox 5"/>
+          <p:cNvSpPr txBox="1"/>
+          <p:nvPr/>
+        </p:nvSpPr>
+        <p:spPr>
+          <a:xfrm>
+            <a:off x="548640" y="5029200"/>
+            <a:ext cx="11064240" cy="1737360"/>
+          </a:xfrm>
+          <a:prstGeom prst="rect">
+            <a:avLst/>
+          </a:prstGeom>
+          <a:noFill/>
+        </p:spPr>
+        <p:txBody>
+          <a:bodyPr wrap="square">
+            <a:spAutoFit/>
+          </a:bodyPr>
+          <a:lstStyle/>
+          <a:p>
+            <a:pPr>
+              <a:lnSpc>
+                <a:spcPct val="115000"/>
+              </a:lnSpc>
+              <a:spcAft>
+                <a:spcPts val="800"/>
+              </a:spcAft>
+            </a:pPr>
+            <a:r>
+              <a:rPr sz="1400">
+                <a:solidFill>
+                  <a:srgbClr val="333333"/>
+                </a:solidFill>
+                <a:latin typeface="Calibri"/>
+              </a:rPr>
+              <a:t>—  Roubo: o outlier mais extremo é de um município não-litorâneo; os litorâneos (laranja) aparecem elevados, mas não dominam o topo.</a:t>
+            </a:r>
+          </a:p>
+          <a:p>
+            <a:pPr>
+              <a:lnSpc>
+                <a:spcPct val="115000"/>
+              </a:lnSpc>
+              <a:spcAft>
+                <a:spcPts val="800"/>
+              </a:spcAft>
+            </a:pPr>
+            <a:r>
+              <a:rPr sz="1400">
+                <a:solidFill>
+                  <a:srgbClr val="333333"/>
+                </a:solidFill>
+                <a:latin typeface="Calibri"/>
+              </a:rPr>
+              <a:t>—  Furto: os outliers extremos são quase todos litorâneos — Mongaguá e outros municípios da costa aparecem bem acima da nuvem geral de pontos.</a:t>
+            </a:r>
+          </a:p>
+          <a:p>
+            <a:pPr>
+              <a:lnSpc>
+                <a:spcPct val="115000"/>
+              </a:lnSpc>
+              <a:spcAft>
+                <a:spcPts val="800"/>
+              </a:spcAft>
+            </a:pPr>
+            <a:r>
+              <a:rPr sz="1400">
+                <a:solidFill>
+                  <a:srgbClr val="333333"/>
+                </a:solidFill>
+                <a:latin typeface="Calibri"/>
+              </a:rPr>
+              <a:t>—  Lesão corporal: o outlier extremo é de renda baixíssima e não-litorâneo; os litorâneos ficam perdidos no meio da distribuição.</a:t>
+            </a:r>
+          </a:p>
+        </p:txBody>
+      </p:sp>
+      <p:sp>
+        <p:nvSpPr>
+          <p:cNvPr id="7" name="TextBox 6"/>
+          <p:cNvSpPr txBox="1"/>
+          <p:nvPr/>
+        </p:nvSpPr>
+        <p:spPr>
+          <a:xfrm>
+            <a:off x="548640" y="6510528"/>
+            <a:ext cx="7315200" cy="274320"/>
+          </a:xfrm>
+          <a:prstGeom prst="rect">
+            <a:avLst/>
+          </a:prstGeom>
+          <a:noFill/>
+        </p:spPr>
+        <p:txBody>
+          <a:bodyPr wrap="square" anchor="t">
+            <a:spAutoFit/>
+          </a:bodyPr>
+          <a:lstStyle/>
+          <a:p>
+            <a:pPr algn="l">
+              <a:lnSpc>
+                <a:spcPct val="115000"/>
+              </a:lnSpc>
+            </a:pPr>
+            <a:r>
+              <a:rPr sz="1000" b="0" i="0">
+                <a:solidFill>
+                  <a:srgbClr val="595959"/>
+                </a:solidFill>
+                <a:latin typeface="Calibri"/>
+              </a:rPr>
+              <a:t>Furto, Renda e Território — UFABC</a:t>
+            </a:r>
+          </a:p>
+        </p:txBody>
+      </p:sp>
+      <p:sp>
+        <p:nvSpPr>
+          <p:cNvPr id="8" name="TextBox 7"/>
+          <p:cNvSpPr txBox="1"/>
+          <p:nvPr/>
+        </p:nvSpPr>
+        <p:spPr>
+          <a:xfrm>
+            <a:off x="10972800" y="6510528"/>
+            <a:ext cx="731520" cy="274320"/>
+          </a:xfrm>
+          <a:prstGeom prst="rect">
+            <a:avLst/>
+          </a:prstGeom>
+          <a:noFill/>
+        </p:spPr>
+        <p:txBody>
+          <a:bodyPr wrap="square" anchor="t">
+            <a:spAutoFit/>
+          </a:bodyPr>
+          <a:lstStyle/>
+          <a:p>
+            <a:pPr algn="r">
+              <a:lnSpc>
+                <a:spcPct val="115000"/>
+              </a:lnSpc>
+            </a:pPr>
+            <a:r>
+              <a:rPr sz="1000" b="0" i="0">
+                <a:solidFill>
+                  <a:srgbClr val="595959"/>
+                </a:solidFill>
+                <a:latin typeface="Calibri"/>
+              </a:rPr>
+              <a:t>5</a:t>
+            </a:r>
+          </a:p>
+        </p:txBody>
+      </p:sp>
+    </p:spTree>
+  </p:cSld>
+  <p:clrMapOvr>
+    <a:masterClrMapping/>
+  </p:clrMapOvr>
+</p:sld>
+</file>
+
+<file path=ppt/slides/slide6.xml><?xml version="1.0" encoding="utf-8"?>
+<p:sld xmlns:a="http://schemas.openxmlformats.org/drawingml/2006/main" xmlns:p="http://schemas.openxmlformats.org/presentationml/2006/main" xmlns:r="http://schemas.openxmlformats.org/officeDocument/2006/relationships">
+  <p:cSld>
+    <p:bg>
+      <p:bgPr>
+        <a:solidFill>
+          <a:srgbClr val="FFFFFF"/>
+        </a:solidFill>
+        <a:effectLst/>
+      </p:bgPr>
+    </p:bg>
+    <p:spTree>
+      <p:nvGrpSpPr>
+        <p:cNvPr id="1" name=""/>
+        <p:cNvGrpSpPr/>
+        <p:nvPr/>
+      </p:nvGrpSpPr>
+      <p:grpSpPr/>
+      <p:sp>
+        <p:nvSpPr>
+          <p:cNvPr id="2" name="TextBox 1"/>
+          <p:cNvSpPr txBox="1"/>
+          <p:nvPr/>
+        </p:nvSpPr>
+        <p:spPr>
+          <a:xfrm>
+            <a:off x="548640" y="320040"/>
+            <a:ext cx="8229600" cy="365760"/>
+          </a:xfrm>
+          <a:prstGeom prst="rect">
+            <a:avLst/>
+          </a:prstGeom>
+          <a:noFill/>
+        </p:spPr>
+        <p:txBody>
+          <a:bodyPr wrap="square" anchor="t">
+            <a:spAutoFit/>
+          </a:bodyPr>
+          <a:lstStyle/>
+          <a:p>
+            <a:pPr algn="l">
+              <a:lnSpc>
+                <a:spcPct val="115000"/>
+              </a:lnSpc>
+            </a:pPr>
+            <a:r>
+              <a:rPr sz="1300" b="1" i="0">
+                <a:solidFill>
+                  <a:srgbClr val="1F4E79"/>
+                </a:solidFill>
+                <a:latin typeface="Calibri"/>
+              </a:rPr>
+              <a:t>CORRELAÇÃO</a:t>
             </a:r>
           </a:p>
         </p:txBody>
@@ -8131,7 +9989,7 @@
                   <a:srgbClr val="595959"/>
                 </a:solidFill>
               </a:rPr>
-              <a:t>Correlação não implica causalidade — mas já contraria H1 para roubo e furto, e os municípios litorâneos puxam boa parte desse padrão, motivando a investigação espacial que segue.</a:t>
+              <a:t>Somando os mapas e os outliers do slide anterior a essa correlação: o furto é o único crime em que renda, geografia e outliers litorâneos apontam juntos na mesma direção — por isso ele foi escolhido como variável dependente principal.</a:t>
             </a:r>
           </a:p>
         </p:txBody>
@@ -8202,496 +10060,6 @@
       <p:sp>
         <p:nvSpPr>
           <p:cNvPr id="10" name="TextBox 9"/>
-          <p:cNvSpPr txBox="1"/>
-          <p:nvPr/>
-        </p:nvSpPr>
-        <p:spPr>
-          <a:xfrm>
-            <a:off x="10972800" y="6510528"/>
-            <a:ext cx="731520" cy="274320"/>
-          </a:xfrm>
-          <a:prstGeom prst="rect">
-            <a:avLst/>
-          </a:prstGeom>
-          <a:noFill/>
-        </p:spPr>
-        <p:txBody>
-          <a:bodyPr wrap="square" anchor="t">
-            <a:spAutoFit/>
-          </a:bodyPr>
-          <a:lstStyle/>
-          <a:p>
-            <a:pPr algn="r">
-              <a:lnSpc>
-                <a:spcPct val="115000"/>
-              </a:lnSpc>
-            </a:pPr>
-            <a:r>
-              <a:rPr sz="1000" b="0" i="0">
-                <a:solidFill>
-                  <a:srgbClr val="595959"/>
-                </a:solidFill>
-                <a:latin typeface="Calibri"/>
-              </a:rPr>
-              <a:t>5</a:t>
-            </a:r>
-          </a:p>
-        </p:txBody>
-      </p:sp>
-    </p:spTree>
-  </p:cSld>
-  <p:clrMapOvr>
-    <a:masterClrMapping/>
-  </p:clrMapOvr>
-</p:sld>
-</file>
-
-<file path=ppt/slides/slide6.xml><?xml version="1.0" encoding="utf-8"?>
-<p:sld xmlns:a="http://schemas.openxmlformats.org/drawingml/2006/main" xmlns:p="http://schemas.openxmlformats.org/presentationml/2006/main" xmlns:r="http://schemas.openxmlformats.org/officeDocument/2006/relationships">
-  <p:cSld>
-    <p:bg>
-      <p:bgPr>
-        <a:solidFill>
-          <a:srgbClr val="FFFFFF"/>
-        </a:solidFill>
-        <a:effectLst/>
-      </p:bgPr>
-    </p:bg>
-    <p:spTree>
-      <p:nvGrpSpPr>
-        <p:cNvPr id="1" name=""/>
-        <p:cNvGrpSpPr/>
-        <p:nvPr/>
-      </p:nvGrpSpPr>
-      <p:grpSpPr/>
-      <p:sp>
-        <p:nvSpPr>
-          <p:cNvPr id="2" name="TextBox 1"/>
-          <p:cNvSpPr txBox="1"/>
-          <p:nvPr/>
-        </p:nvSpPr>
-        <p:spPr>
-          <a:xfrm>
-            <a:off x="548640" y="320040"/>
-            <a:ext cx="8229600" cy="365760"/>
-          </a:xfrm>
-          <a:prstGeom prst="rect">
-            <a:avLst/>
-          </a:prstGeom>
-          <a:noFill/>
-        </p:spPr>
-        <p:txBody>
-          <a:bodyPr wrap="square" anchor="t">
-            <a:spAutoFit/>
-          </a:bodyPr>
-          <a:lstStyle/>
-          <a:p>
-            <a:pPr algn="l">
-              <a:lnSpc>
-                <a:spcPct val="115000"/>
-              </a:lnSpc>
-            </a:pPr>
-            <a:r>
-              <a:rPr sz="1300" b="1" i="0">
-                <a:solidFill>
-                  <a:srgbClr val="1F4E79"/>
-                </a:solidFill>
-                <a:latin typeface="Calibri"/>
-              </a:rPr>
-              <a:t>DESENVOLVIMENTO E RESULTADOS</a:t>
-            </a:r>
-          </a:p>
-        </p:txBody>
-      </p:sp>
-      <p:sp>
-        <p:nvSpPr>
-          <p:cNvPr id="3" name="TextBox 2"/>
-          <p:cNvSpPr txBox="1"/>
-          <p:nvPr/>
-        </p:nvSpPr>
-        <p:spPr>
-          <a:xfrm>
-            <a:off x="548640" y="594360"/>
-            <a:ext cx="11064240" cy="822960"/>
-          </a:xfrm>
-          <a:prstGeom prst="rect">
-            <a:avLst/>
-          </a:prstGeom>
-          <a:noFill/>
-        </p:spPr>
-        <p:txBody>
-          <a:bodyPr wrap="square" anchor="t">
-            <a:spAutoFit/>
-          </a:bodyPr>
-          <a:lstStyle/>
-          <a:p>
-            <a:pPr algn="l">
-              <a:lnSpc>
-                <a:spcPct val="115000"/>
-              </a:lnSpc>
-            </a:pPr>
-            <a:r>
-              <a:rPr sz="2800" b="1" i="0">
-                <a:solidFill>
-                  <a:srgbClr val="1A1A1A"/>
-                </a:solidFill>
-                <a:latin typeface="Calibri"/>
-              </a:rPr>
-              <a:t>O crime tem endereço: autocorrelação espacial</a:t>
-            </a:r>
-          </a:p>
-        </p:txBody>
-      </p:sp>
-      <p:sp>
-        <p:nvSpPr>
-          <p:cNvPr id="4" name="Rectangle 3"/>
-          <p:cNvSpPr/>
-          <p:nvPr/>
-        </p:nvSpPr>
-        <p:spPr>
-          <a:xfrm>
-            <a:off x="548640" y="1280160"/>
-            <a:ext cx="11064240" cy="27940"/>
-          </a:xfrm>
-          <a:prstGeom prst="rect">
-            <a:avLst/>
-          </a:prstGeom>
-          <a:solidFill>
-            <a:srgbClr val="1F4E79"/>
-          </a:solidFill>
-          <a:ln>
-            <a:noFill/>
-          </a:ln>
-          <a:effectLst/>
-        </p:spPr>
-        <p:style>
-          <a:lnRef idx="1">
-            <a:schemeClr val="accent1"/>
-          </a:lnRef>
-          <a:fillRef idx="3">
-            <a:schemeClr val="accent1"/>
-          </a:fillRef>
-          <a:effectRef idx="2">
-            <a:schemeClr val="accent1"/>
-          </a:effectRef>
-          <a:fontRef idx="minor">
-            <a:schemeClr val="lt1"/>
-          </a:fontRef>
-        </p:style>
-        <p:txBody>
-          <a:bodyPr rtlCol="0" anchor="ctr"/>
-          <a:lstStyle/>
-          <a:p>
-            <a:pPr algn="ctr"/>
-          </a:p>
-        </p:txBody>
-      </p:sp>
-      <p:pic>
-        <p:nvPicPr>
-          <p:cNvPr id="5" name="Picture 4" descr="mapa_lisa_furto.png"/>
-          <p:cNvPicPr>
-            <a:picLocks noChangeAspect="1"/>
-          </p:cNvPicPr>
-          <p:nvPr/>
-        </p:nvPicPr>
-        <p:blipFill>
-          <a:blip r:embed="rId2"/>
-          <a:stretch>
-            <a:fillRect/>
-          </a:stretch>
-        </p:blipFill>
-        <p:spPr>
-          <a:xfrm>
-            <a:off x="1080135" y="1600200"/>
-            <a:ext cx="5246370" cy="4663440"/>
-          </a:xfrm>
-          <a:prstGeom prst="rect">
-            <a:avLst/>
-          </a:prstGeom>
-        </p:spPr>
-      </p:pic>
-      <p:sp>
-        <p:nvSpPr>
-          <p:cNvPr id="6" name="Rounded Rectangle 5"/>
-          <p:cNvSpPr/>
-          <p:nvPr/>
-        </p:nvSpPr>
-        <p:spPr>
-          <a:xfrm>
-            <a:off x="7132320" y="1645920"/>
-            <a:ext cx="4389120" cy="914400"/>
-          </a:xfrm>
-          <a:prstGeom prst="roundRect">
-            <a:avLst>
-              <a:gd name="adj" fmla="val 8000"/>
-            </a:avLst>
-          </a:prstGeom>
-          <a:solidFill>
-            <a:srgbClr val="F2F2F2"/>
-          </a:solidFill>
-          <a:ln>
-            <a:noFill/>
-          </a:ln>
-          <a:effectLst/>
-        </p:spPr>
-        <p:style>
-          <a:lnRef idx="1">
-            <a:schemeClr val="accent1"/>
-          </a:lnRef>
-          <a:fillRef idx="3">
-            <a:schemeClr val="accent1"/>
-          </a:fillRef>
-          <a:effectRef idx="2">
-            <a:schemeClr val="accent1"/>
-          </a:effectRef>
-          <a:fontRef idx="minor">
-            <a:schemeClr val="lt1"/>
-          </a:fontRef>
-        </p:style>
-        <p:txBody>
-          <a:bodyPr rtlCol="0" anchor="ctr" wrap="square" lIns="137160" rIns="137160"/>
-          <a:lstStyle/>
-          <a:p>
-            <a:pPr algn="ctr"/>
-            <a:r>
-              <a:rPr sz="2600" b="1">
-                <a:solidFill>
-                  <a:srgbClr val="1F4E79"/>
-                </a:solidFill>
-                <a:latin typeface="Calibri"/>
-              </a:rPr>
-              <a:t>I = 0,832</a:t>
-            </a:r>
-          </a:p>
-          <a:p>
-            <a:pPr algn="ctr"/>
-            <a:r>
-              <a:rPr sz="1200">
-                <a:solidFill>
-                  <a:srgbClr val="595959"/>
-                </a:solidFill>
-                <a:latin typeface="Calibri"/>
-              </a:rPr>
-              <a:t>Moran's I — taxa de roubo (forte)</a:t>
-            </a:r>
-          </a:p>
-        </p:txBody>
-      </p:sp>
-      <p:sp>
-        <p:nvSpPr>
-          <p:cNvPr id="7" name="Rounded Rectangle 6"/>
-          <p:cNvSpPr/>
-          <p:nvPr/>
-        </p:nvSpPr>
-        <p:spPr>
-          <a:xfrm>
-            <a:off x="7132320" y="2697480"/>
-            <a:ext cx="4389120" cy="914400"/>
-          </a:xfrm>
-          <a:prstGeom prst="roundRect">
-            <a:avLst>
-              <a:gd name="adj" fmla="val 8000"/>
-            </a:avLst>
-          </a:prstGeom>
-          <a:solidFill>
-            <a:srgbClr val="F2F2F2"/>
-          </a:solidFill>
-          <a:ln>
-            <a:noFill/>
-          </a:ln>
-          <a:effectLst/>
-        </p:spPr>
-        <p:style>
-          <a:lnRef idx="1">
-            <a:schemeClr val="accent1"/>
-          </a:lnRef>
-          <a:fillRef idx="3">
-            <a:schemeClr val="accent1"/>
-          </a:fillRef>
-          <a:effectRef idx="2">
-            <a:schemeClr val="accent1"/>
-          </a:effectRef>
-          <a:fontRef idx="minor">
-            <a:schemeClr val="lt1"/>
-          </a:fontRef>
-        </p:style>
-        <p:txBody>
-          <a:bodyPr rtlCol="0" anchor="ctr" wrap="square" lIns="137160" rIns="137160"/>
-          <a:lstStyle/>
-          <a:p>
-            <a:pPr algn="ctr"/>
-            <a:r>
-              <a:rPr sz="2600" b="1">
-                <a:solidFill>
-                  <a:srgbClr val="1F4E79"/>
-                </a:solidFill>
-                <a:latin typeface="Calibri"/>
-              </a:rPr>
-              <a:t>I = 0,422</a:t>
-            </a:r>
-          </a:p>
-          <a:p>
-            <a:pPr algn="ctr"/>
-            <a:r>
-              <a:rPr sz="1200">
-                <a:solidFill>
-                  <a:srgbClr val="595959"/>
-                </a:solidFill>
-                <a:latin typeface="Calibri"/>
-              </a:rPr>
-              <a:t>Moran's I — taxa de furto (moderada)</a:t>
-            </a:r>
-          </a:p>
-        </p:txBody>
-      </p:sp>
-      <p:sp>
-        <p:nvSpPr>
-          <p:cNvPr id="8" name="Rounded Rectangle 7"/>
-          <p:cNvSpPr/>
-          <p:nvPr/>
-        </p:nvSpPr>
-        <p:spPr>
-          <a:xfrm>
-            <a:off x="7132320" y="3749039"/>
-            <a:ext cx="4389120" cy="914400"/>
-          </a:xfrm>
-          <a:prstGeom prst="roundRect">
-            <a:avLst>
-              <a:gd name="adj" fmla="val 8000"/>
-            </a:avLst>
-          </a:prstGeom>
-          <a:solidFill>
-            <a:srgbClr val="F2F2F2"/>
-          </a:solidFill>
-          <a:ln>
-            <a:noFill/>
-          </a:ln>
-          <a:effectLst/>
-        </p:spPr>
-        <p:style>
-          <a:lnRef idx="1">
-            <a:schemeClr val="accent1"/>
-          </a:lnRef>
-          <a:fillRef idx="3">
-            <a:schemeClr val="accent1"/>
-          </a:fillRef>
-          <a:effectRef idx="2">
-            <a:schemeClr val="accent1"/>
-          </a:effectRef>
-          <a:fontRef idx="minor">
-            <a:schemeClr val="lt1"/>
-          </a:fontRef>
-        </p:style>
-        <p:txBody>
-          <a:bodyPr rtlCol="0" anchor="ctr" wrap="square" lIns="137160" rIns="137160"/>
-          <a:lstStyle/>
-          <a:p>
-            <a:pPr algn="ctr"/>
-            <a:r>
-              <a:rPr sz="2600" b="1">
-                <a:solidFill>
-                  <a:srgbClr val="1F4E79"/>
-                </a:solidFill>
-                <a:latin typeface="Calibri"/>
-              </a:rPr>
-              <a:t>I = 0,181</a:t>
-            </a:r>
-          </a:p>
-          <a:p>
-            <a:pPr algn="ctr"/>
-            <a:r>
-              <a:rPr sz="1200">
-                <a:solidFill>
-                  <a:srgbClr val="595959"/>
-                </a:solidFill>
-                <a:latin typeface="Calibri"/>
-              </a:rPr>
-              <a:t>Moran's I — lesão corporal (fraca)</a:t>
-            </a:r>
-          </a:p>
-        </p:txBody>
-      </p:sp>
-      <p:sp>
-        <p:nvSpPr>
-          <p:cNvPr id="9" name="TextBox 8"/>
-          <p:cNvSpPr txBox="1"/>
-          <p:nvPr/>
-        </p:nvSpPr>
-        <p:spPr>
-          <a:xfrm>
-            <a:off x="7132320" y="4846320"/>
-            <a:ext cx="4389120" cy="1463040"/>
-          </a:xfrm>
-          <a:prstGeom prst="rect">
-            <a:avLst/>
-          </a:prstGeom>
-          <a:noFill/>
-        </p:spPr>
-        <p:txBody>
-          <a:bodyPr wrap="square" anchor="t">
-            <a:spAutoFit/>
-          </a:bodyPr>
-          <a:lstStyle/>
-          <a:p>
-            <a:pPr algn="l">
-              <a:lnSpc>
-                <a:spcPct val="115000"/>
-              </a:lnSpc>
-            </a:pPr>
-            <a:r>
-              <a:rPr sz="1300" b="0" i="0">
-                <a:solidFill>
-                  <a:srgbClr val="595959"/>
-                </a:solidFill>
-                <a:latin typeface="Calibri"/>
-              </a:rPr>
-              <a:t>Todos significativos a p = 0,001 (999 permutações): o crime não está distribuído ao acaso. LISA (furto): 36 municípios em cluster Alto-Alto acompanham o litoral (36% já são litorâneos/turísticos) — primeira pista quantitativa da H2.</a:t>
-            </a:r>
-          </a:p>
-        </p:txBody>
-      </p:sp>
-      <p:sp>
-        <p:nvSpPr>
-          <p:cNvPr id="10" name="TextBox 9"/>
-          <p:cNvSpPr txBox="1"/>
-          <p:nvPr/>
-        </p:nvSpPr>
-        <p:spPr>
-          <a:xfrm>
-            <a:off x="548640" y="6510528"/>
-            <a:ext cx="7315200" cy="274320"/>
-          </a:xfrm>
-          <a:prstGeom prst="rect">
-            <a:avLst/>
-          </a:prstGeom>
-          <a:noFill/>
-        </p:spPr>
-        <p:txBody>
-          <a:bodyPr wrap="square" anchor="t">
-            <a:spAutoFit/>
-          </a:bodyPr>
-          <a:lstStyle/>
-          <a:p>
-            <a:pPr algn="l">
-              <a:lnSpc>
-                <a:spcPct val="115000"/>
-              </a:lnSpc>
-            </a:pPr>
-            <a:r>
-              <a:rPr sz="1000" b="0" i="0">
-                <a:solidFill>
-                  <a:srgbClr val="595959"/>
-                </a:solidFill>
-                <a:latin typeface="Calibri"/>
-              </a:rPr>
-              <a:t>Furto, Renda e Território — UFABC</a:t>
-            </a:r>
-          </a:p>
-        </p:txBody>
-      </p:sp>
-      <p:sp>
-        <p:nvSpPr>
-          <p:cNvPr id="11" name="TextBox 10"/>
           <p:cNvSpPr txBox="1"/>
           <p:nvPr/>
         </p:nvSpPr>
@@ -8827,7 +10195,7 @@
                 </a:solidFill>
                 <a:latin typeface="Calibri"/>
               </a:rPr>
-              <a:t>Regressão clássica: a renda sozinha não basta</a:t>
+              <a:t>O crime tem endereço: autocorrelação espacial</a:t>
             </a:r>
           </a:p>
         </p:txBody>
@@ -8878,7 +10246,7 @@
       </p:sp>
       <p:pic>
         <p:nvPicPr>
-          <p:cNvPr id="5" name="Picture 4" descr="reg_multipla.png"/>
+          <p:cNvPr id="5" name="Picture 4" descr="mapa_lisa_furto.png"/>
           <p:cNvPicPr>
             <a:picLocks noChangeAspect="1"/>
           </p:cNvPicPr>
@@ -8892,8 +10260,8 @@
         </p:blipFill>
         <p:spPr>
           <a:xfrm>
-            <a:off x="548640" y="1798320"/>
-            <a:ext cx="6400800" cy="4267200"/>
+            <a:off x="1080135" y="1600200"/>
+            <a:ext cx="5246370" cy="4663440"/>
           </a:xfrm>
           <a:prstGeom prst="rect">
             <a:avLst/>
@@ -8902,94 +10270,215 @@
       </p:pic>
       <p:sp>
         <p:nvSpPr>
-          <p:cNvPr id="6" name="TextBox 5"/>
+          <p:cNvPr id="6" name="Rounded Rectangle 5"/>
+          <p:cNvSpPr/>
+          <p:nvPr/>
+        </p:nvSpPr>
+        <p:spPr>
+          <a:xfrm>
+            <a:off x="7132320" y="1645920"/>
+            <a:ext cx="4389120" cy="914400"/>
+          </a:xfrm>
+          <a:prstGeom prst="roundRect">
+            <a:avLst>
+              <a:gd name="adj" fmla="val 8000"/>
+            </a:avLst>
+          </a:prstGeom>
+          <a:solidFill>
+            <a:srgbClr val="F2F2F2"/>
+          </a:solidFill>
+          <a:ln>
+            <a:noFill/>
+          </a:ln>
+          <a:effectLst/>
+        </p:spPr>
+        <p:style>
+          <a:lnRef idx="1">
+            <a:schemeClr val="accent1"/>
+          </a:lnRef>
+          <a:fillRef idx="3">
+            <a:schemeClr val="accent1"/>
+          </a:fillRef>
+          <a:effectRef idx="2">
+            <a:schemeClr val="accent1"/>
+          </a:effectRef>
+          <a:fontRef idx="minor">
+            <a:schemeClr val="lt1"/>
+          </a:fontRef>
+        </p:style>
+        <p:txBody>
+          <a:bodyPr rtlCol="0" anchor="ctr" wrap="square" lIns="137160" rIns="137160"/>
+          <a:lstStyle/>
+          <a:p>
+            <a:pPr algn="ctr"/>
+            <a:r>
+              <a:rPr sz="2600" b="1">
+                <a:solidFill>
+                  <a:srgbClr val="1F4E79"/>
+                </a:solidFill>
+                <a:latin typeface="Calibri"/>
+              </a:rPr>
+              <a:t>I = 0,832</a:t>
+            </a:r>
+          </a:p>
+          <a:p>
+            <a:pPr algn="ctr"/>
+            <a:r>
+              <a:rPr sz="1200">
+                <a:solidFill>
+                  <a:srgbClr val="595959"/>
+                </a:solidFill>
+                <a:latin typeface="Calibri"/>
+              </a:rPr>
+              <a:t>Moran's I — taxa de roubo (forte)</a:t>
+            </a:r>
+          </a:p>
+        </p:txBody>
+      </p:sp>
+      <p:sp>
+        <p:nvSpPr>
+          <p:cNvPr id="7" name="Rounded Rectangle 6"/>
+          <p:cNvSpPr/>
+          <p:nvPr/>
+        </p:nvSpPr>
+        <p:spPr>
+          <a:xfrm>
+            <a:off x="7132320" y="2697480"/>
+            <a:ext cx="4389120" cy="914400"/>
+          </a:xfrm>
+          <a:prstGeom prst="roundRect">
+            <a:avLst>
+              <a:gd name="adj" fmla="val 8000"/>
+            </a:avLst>
+          </a:prstGeom>
+          <a:solidFill>
+            <a:srgbClr val="F2F2F2"/>
+          </a:solidFill>
+          <a:ln>
+            <a:noFill/>
+          </a:ln>
+          <a:effectLst/>
+        </p:spPr>
+        <p:style>
+          <a:lnRef idx="1">
+            <a:schemeClr val="accent1"/>
+          </a:lnRef>
+          <a:fillRef idx="3">
+            <a:schemeClr val="accent1"/>
+          </a:fillRef>
+          <a:effectRef idx="2">
+            <a:schemeClr val="accent1"/>
+          </a:effectRef>
+          <a:fontRef idx="minor">
+            <a:schemeClr val="lt1"/>
+          </a:fontRef>
+        </p:style>
+        <p:txBody>
+          <a:bodyPr rtlCol="0" anchor="ctr" wrap="square" lIns="137160" rIns="137160"/>
+          <a:lstStyle/>
+          <a:p>
+            <a:pPr algn="ctr"/>
+            <a:r>
+              <a:rPr sz="2600" b="1">
+                <a:solidFill>
+                  <a:srgbClr val="1F4E79"/>
+                </a:solidFill>
+                <a:latin typeface="Calibri"/>
+              </a:rPr>
+              <a:t>I = 0,422</a:t>
+            </a:r>
+          </a:p>
+          <a:p>
+            <a:pPr algn="ctr"/>
+            <a:r>
+              <a:rPr sz="1200">
+                <a:solidFill>
+                  <a:srgbClr val="595959"/>
+                </a:solidFill>
+                <a:latin typeface="Calibri"/>
+              </a:rPr>
+              <a:t>Moran's I — taxa de furto (moderada)</a:t>
+            </a:r>
+          </a:p>
+        </p:txBody>
+      </p:sp>
+      <p:sp>
+        <p:nvSpPr>
+          <p:cNvPr id="8" name="Rounded Rectangle 7"/>
+          <p:cNvSpPr/>
+          <p:nvPr/>
+        </p:nvSpPr>
+        <p:spPr>
+          <a:xfrm>
+            <a:off x="7132320" y="3749039"/>
+            <a:ext cx="4389120" cy="914400"/>
+          </a:xfrm>
+          <a:prstGeom prst="roundRect">
+            <a:avLst>
+              <a:gd name="adj" fmla="val 8000"/>
+            </a:avLst>
+          </a:prstGeom>
+          <a:solidFill>
+            <a:srgbClr val="F2F2F2"/>
+          </a:solidFill>
+          <a:ln>
+            <a:noFill/>
+          </a:ln>
+          <a:effectLst/>
+        </p:spPr>
+        <p:style>
+          <a:lnRef idx="1">
+            <a:schemeClr val="accent1"/>
+          </a:lnRef>
+          <a:fillRef idx="3">
+            <a:schemeClr val="accent1"/>
+          </a:fillRef>
+          <a:effectRef idx="2">
+            <a:schemeClr val="accent1"/>
+          </a:effectRef>
+          <a:fontRef idx="minor">
+            <a:schemeClr val="lt1"/>
+          </a:fontRef>
+        </p:style>
+        <p:txBody>
+          <a:bodyPr rtlCol="0" anchor="ctr" wrap="square" lIns="137160" rIns="137160"/>
+          <a:lstStyle/>
+          <a:p>
+            <a:pPr algn="ctr"/>
+            <a:r>
+              <a:rPr sz="2600" b="1">
+                <a:solidFill>
+                  <a:srgbClr val="1F4E79"/>
+                </a:solidFill>
+                <a:latin typeface="Calibri"/>
+              </a:rPr>
+              <a:t>I = 0,181</a:t>
+            </a:r>
+          </a:p>
+          <a:p>
+            <a:pPr algn="ctr"/>
+            <a:r>
+              <a:rPr sz="1200">
+                <a:solidFill>
+                  <a:srgbClr val="595959"/>
+                </a:solidFill>
+                <a:latin typeface="Calibri"/>
+              </a:rPr>
+              <a:t>Moran's I — lesão corporal (fraca)</a:t>
+            </a:r>
+          </a:p>
+        </p:txBody>
+      </p:sp>
+      <p:sp>
+        <p:nvSpPr>
+          <p:cNvPr id="9" name="TextBox 8"/>
           <p:cNvSpPr txBox="1"/>
           <p:nvPr/>
         </p:nvSpPr>
         <p:spPr>
           <a:xfrm>
-            <a:off x="7223760" y="1691640"/>
-            <a:ext cx="4297680" cy="2743200"/>
-          </a:xfrm>
-          <a:prstGeom prst="rect">
-            <a:avLst/>
-          </a:prstGeom>
-          <a:noFill/>
-        </p:spPr>
-        <p:txBody>
-          <a:bodyPr wrap="square">
-            <a:spAutoFit/>
-          </a:bodyPr>
-          <a:lstStyle/>
-          <a:p>
-            <a:pPr>
-              <a:lnSpc>
-                <a:spcPct val="115000"/>
-              </a:lnSpc>
-              <a:spcAft>
-                <a:spcPts val="1200"/>
-              </a:spcAft>
-            </a:pPr>
-            <a:r>
-              <a:rPr sz="1400">
-                <a:solidFill>
-                  <a:srgbClr val="333333"/>
-                </a:solidFill>
-                <a:latin typeface="Calibri"/>
-              </a:rPr>
-              <a:t>—  Simples: taxa = 0,971 + 0,00247·renda   R² = 0,129</a:t>
-            </a:r>
-          </a:p>
-          <a:p>
-            <a:pPr>
-              <a:lnSpc>
-                <a:spcPct val="115000"/>
-              </a:lnSpc>
-              <a:spcAft>
-                <a:spcPts val="1200"/>
-              </a:spcAft>
-            </a:pPr>
-            <a:r>
-              <a:rPr sz="1400">
-                <a:solidFill>
-                  <a:srgbClr val="333333"/>
-                </a:solidFill>
-                <a:latin typeface="Calibri"/>
-              </a:rPr>
-              <a:t>—  Com litoral: taxa = 1,036 + 0,00233·renda + 10,97·litoral   R² = 0,357</a:t>
-            </a:r>
-          </a:p>
-          <a:p>
-            <a:pPr>
-              <a:lnSpc>
-                <a:spcPct val="115000"/>
-              </a:lnSpc>
-              <a:spcAft>
-                <a:spcPts val="1200"/>
-              </a:spcAft>
-            </a:pPr>
-            <a:r>
-              <a:rPr sz="1400">
-                <a:solidFill>
-                  <a:srgbClr val="333333"/>
-                </a:solidFill>
-                <a:latin typeface="Calibri"/>
-              </a:rPr>
-              <a:t>—  O litoral soma ~11 furtos/1.000 hab., equivalente a +R$4.700 de renda.</a:t>
-            </a:r>
-          </a:p>
-        </p:txBody>
-      </p:sp>
-      <p:sp>
-        <p:nvSpPr>
-          <p:cNvPr id="7" name="TextBox 6"/>
-          <p:cNvSpPr txBox="1"/>
-          <p:nvPr/>
-        </p:nvSpPr>
-        <p:spPr>
-          <a:xfrm>
-            <a:off x="7223760" y="4572000"/>
-            <a:ext cx="4297680" cy="1737360"/>
+            <a:off x="7132320" y="4846320"/>
+            <a:ext cx="4389120" cy="1463040"/>
           </a:xfrm>
           <a:prstGeom prst="rect">
             <a:avLst/>
@@ -9014,14 +10503,14 @@
                 </a:solidFill>
                 <a:latin typeface="Calibri"/>
               </a:rPr>
-              <a:t>Distância de Cook: 29 municípios influentes, 8 deles litorâneos — 50% dos 16 municípios do litoral. O padrão litorâneo não é efeito de poucos pontos: é estrutural.</a:t>
-            </a:r>
-          </a:p>
-        </p:txBody>
-      </p:sp>
-      <p:sp>
-        <p:nvSpPr>
-          <p:cNvPr id="8" name="TextBox 7"/>
+              <a:t>Todos significativos a p = 0,001 (999 permutações): o crime não está distribuído ao acaso. LISA (furto): 36 municípios em cluster Alto-Alto acompanham o litoral (36% já são litorâneos/turísticos) — primeira pista quantitativa da H2.</a:t>
+            </a:r>
+          </a:p>
+        </p:txBody>
+      </p:sp>
+      <p:sp>
+        <p:nvSpPr>
+          <p:cNvPr id="10" name="TextBox 9"/>
           <p:cNvSpPr txBox="1"/>
           <p:nvPr/>
         </p:nvSpPr>
@@ -9060,7 +10549,7 @@
       </p:sp>
       <p:sp>
         <p:nvSpPr>
-          <p:cNvPr id="9" name="TextBox 8"/>
+          <p:cNvPr id="11" name="TextBox 10"/>
           <p:cNvSpPr txBox="1"/>
           <p:nvPr/>
         </p:nvSpPr>
@@ -9196,7 +10685,7 @@
                 </a:solidFill>
                 <a:latin typeface="Calibri"/>
               </a:rPr>
-              <a:t>O espaço importa: do global ao local</a:t>
+              <a:t>Regressão clássica: a renda sozinha não basta</a:t>
             </a:r>
           </a:p>
         </p:txBody>
@@ -9245,804 +10734,9 @@
           </a:p>
         </p:txBody>
       </p:sp>
-      <p:sp>
-        <p:nvSpPr>
-          <p:cNvPr id="5" name="TextBox 4"/>
-          <p:cNvSpPr txBox="1"/>
-          <p:nvPr/>
-        </p:nvSpPr>
-        <p:spPr>
-          <a:xfrm>
-            <a:off x="548640" y="1600200"/>
-            <a:ext cx="11064240" cy="548640"/>
-          </a:xfrm>
-          <a:prstGeom prst="rect">
-            <a:avLst/>
-          </a:prstGeom>
-          <a:noFill/>
-        </p:spPr>
-        <p:txBody>
-          <a:bodyPr wrap="square" anchor="t">
-            <a:spAutoFit/>
-          </a:bodyPr>
-          <a:lstStyle/>
-          <a:p>
-            <a:pPr algn="l">
-              <a:lnSpc>
-                <a:spcPct val="115000"/>
-              </a:lnSpc>
-            </a:pPr>
-            <a:r>
-              <a:rPr sz="1500" b="0" i="0">
-                <a:solidFill>
-                  <a:srgbClr val="333333"/>
-                </a:solidFill>
-                <a:latin typeface="Calibri"/>
-              </a:rPr>
-              <a:t>Os resíduos do modelo clássico têm Moran's I = 0,38 (p&lt;0,001): a dependência espacial é ignorada pelo OLS. Como resolvemos isso?</a:t>
-            </a:r>
-          </a:p>
-        </p:txBody>
-      </p:sp>
-      <p:sp>
-        <p:nvSpPr>
-          <p:cNvPr id="6" name="Rectangle 5"/>
-          <p:cNvSpPr/>
-          <p:nvPr/>
-        </p:nvSpPr>
-        <p:spPr>
-          <a:xfrm>
-            <a:off x="548640" y="2331720"/>
-            <a:ext cx="3566160" cy="1828800"/>
-          </a:xfrm>
-          <a:prstGeom prst="rect">
-            <a:avLst/>
-          </a:prstGeom>
-          <a:solidFill>
-            <a:srgbClr val="FFFFFF"/>
-          </a:solidFill>
-          <a:ln w="12700">
-            <a:solidFill>
-              <a:srgbClr val="1F4E79"/>
-            </a:solidFill>
-          </a:ln>
-          <a:effectLst/>
-        </p:spPr>
-        <p:style>
-          <a:lnRef idx="1">
-            <a:schemeClr val="accent1"/>
-          </a:lnRef>
-          <a:fillRef idx="3">
-            <a:schemeClr val="accent1"/>
-          </a:fillRef>
-          <a:effectRef idx="2">
-            <a:schemeClr val="accent1"/>
-          </a:effectRef>
-          <a:fontRef idx="minor">
-            <a:schemeClr val="lt1"/>
-          </a:fontRef>
-        </p:style>
-        <p:txBody>
-          <a:bodyPr rtlCol="0" anchor="ctr"/>
-          <a:lstStyle/>
-          <a:p>
-            <a:pPr algn="ctr"/>
-          </a:p>
-        </p:txBody>
-      </p:sp>
-      <p:sp>
-        <p:nvSpPr>
-          <p:cNvPr id="7" name="Rectangle 6"/>
-          <p:cNvSpPr/>
-          <p:nvPr/>
-        </p:nvSpPr>
-        <p:spPr>
-          <a:xfrm>
-            <a:off x="548640" y="2331720"/>
-            <a:ext cx="3566160" cy="38100"/>
-          </a:xfrm>
-          <a:prstGeom prst="rect">
-            <a:avLst/>
-          </a:prstGeom>
-          <a:solidFill>
-            <a:srgbClr val="ED7D31"/>
-          </a:solidFill>
-          <a:ln>
-            <a:noFill/>
-          </a:ln>
-          <a:effectLst/>
-        </p:spPr>
-        <p:style>
-          <a:lnRef idx="1">
-            <a:schemeClr val="accent1"/>
-          </a:lnRef>
-          <a:fillRef idx="3">
-            <a:schemeClr val="accent1"/>
-          </a:fillRef>
-          <a:effectRef idx="2">
-            <a:schemeClr val="accent1"/>
-          </a:effectRef>
-          <a:fontRef idx="minor">
-            <a:schemeClr val="lt1"/>
-          </a:fontRef>
-        </p:style>
-        <p:txBody>
-          <a:bodyPr rtlCol="0" anchor="ctr"/>
-          <a:lstStyle/>
-          <a:p>
-            <a:pPr algn="ctr"/>
-          </a:p>
-        </p:txBody>
-      </p:sp>
-      <p:sp>
-        <p:nvSpPr>
-          <p:cNvPr id="8" name="TextBox 7"/>
-          <p:cNvSpPr txBox="1"/>
-          <p:nvPr/>
-        </p:nvSpPr>
-        <p:spPr>
-          <a:xfrm>
-            <a:off x="777240" y="2514600"/>
-            <a:ext cx="3108960" cy="365760"/>
-          </a:xfrm>
-          <a:prstGeom prst="rect">
-            <a:avLst/>
-          </a:prstGeom>
-          <a:noFill/>
-        </p:spPr>
-        <p:txBody>
-          <a:bodyPr wrap="square" anchor="t">
-            <a:spAutoFit/>
-          </a:bodyPr>
-          <a:lstStyle/>
-          <a:p>
-            <a:pPr algn="l">
-              <a:lnSpc>
-                <a:spcPct val="115000"/>
-              </a:lnSpc>
-            </a:pPr>
-            <a:r>
-              <a:rPr sz="1500" b="1" i="0">
-                <a:solidFill>
-                  <a:srgbClr val="1A1A1A"/>
-                </a:solidFill>
-                <a:latin typeface="Calibri"/>
-              </a:rPr>
-              <a:t>1. Spatial Error (global)</a:t>
-            </a:r>
-          </a:p>
-        </p:txBody>
-      </p:sp>
-      <p:sp>
-        <p:nvSpPr>
-          <p:cNvPr id="9" name="TextBox 8"/>
-          <p:cNvSpPr txBox="1"/>
-          <p:nvPr/>
-        </p:nvSpPr>
-        <p:spPr>
-          <a:xfrm>
-            <a:off x="777240" y="2926080"/>
-            <a:ext cx="3108960" cy="457200"/>
-          </a:xfrm>
-          <a:prstGeom prst="rect">
-            <a:avLst/>
-          </a:prstGeom>
-          <a:noFill/>
-        </p:spPr>
-        <p:txBody>
-          <a:bodyPr wrap="square" anchor="t">
-            <a:spAutoFit/>
-          </a:bodyPr>
-          <a:lstStyle/>
-          <a:p>
-            <a:pPr algn="l">
-              <a:lnSpc>
-                <a:spcPct val="115000"/>
-              </a:lnSpc>
-            </a:pPr>
-            <a:r>
-              <a:rPr sz="1250" b="0" i="0">
-                <a:solidFill>
-                  <a:srgbClr val="595959"/>
-                </a:solidFill>
-                <a:latin typeface="Calibri"/>
-              </a:rPr>
-              <a:t>Testes de Lagrange apontam este</a:t>
-            </a:r>
-          </a:p>
-          <a:p>
-            <a:pPr algn="l">
-              <a:lnSpc>
-                <a:spcPct val="115000"/>
-              </a:lnSpc>
-            </a:pPr>
-            <a:r>
-              <a:rPr sz="1250" b="0" i="0">
-                <a:solidFill>
-                  <a:srgbClr val="595959"/>
-                </a:solidFill>
-                <a:latin typeface="Calibri"/>
-              </a:rPr>
-              <a:t>modelo como mais adequado.</a:t>
-            </a:r>
-          </a:p>
-          <a:p>
-            <a:pPr algn="l">
-              <a:lnSpc>
-                <a:spcPct val="115000"/>
-              </a:lnSpc>
-            </a:pPr>
-            <a:r>
-              <a:rPr sz="1250" b="0" i="0">
-                <a:solidFill>
-                  <a:srgbClr val="595959"/>
-                </a:solidFill>
-                <a:latin typeface="Calibri"/>
-              </a:rPr>
-              <a:t>λ = 0,588 — resíduo cai a −0,03</a:t>
-            </a:r>
-          </a:p>
-        </p:txBody>
-      </p:sp>
-      <p:sp>
-        <p:nvSpPr>
-          <p:cNvPr id="10" name="TextBox 9"/>
-          <p:cNvSpPr txBox="1"/>
-          <p:nvPr/>
-        </p:nvSpPr>
-        <p:spPr>
-          <a:xfrm>
-            <a:off x="777240" y="3474720"/>
-            <a:ext cx="3108960" cy="548640"/>
-          </a:xfrm>
-          <a:prstGeom prst="rect">
-            <a:avLst/>
-          </a:prstGeom>
-          <a:noFill/>
-        </p:spPr>
-        <p:txBody>
-          <a:bodyPr wrap="square" anchor="t">
-            <a:spAutoFit/>
-          </a:bodyPr>
-          <a:lstStyle/>
-          <a:p>
-            <a:pPr algn="r">
-              <a:lnSpc>
-                <a:spcPct val="115000"/>
-              </a:lnSpc>
-            </a:pPr>
-            <a:r>
-              <a:rPr sz="2200" b="1" i="0">
-                <a:solidFill>
-                  <a:srgbClr val="ED7D31"/>
-                </a:solidFill>
-                <a:latin typeface="Calibri"/>
-              </a:rPr>
-              <a:t>R² = 0,392</a:t>
-            </a:r>
-          </a:p>
-        </p:txBody>
-      </p:sp>
-      <p:sp>
-        <p:nvSpPr>
-          <p:cNvPr id="11" name="Rectangle 10"/>
-          <p:cNvSpPr/>
-          <p:nvPr/>
-        </p:nvSpPr>
-        <p:spPr>
-          <a:xfrm>
-            <a:off x="4297680" y="2331720"/>
-            <a:ext cx="3566160" cy="1828800"/>
-          </a:xfrm>
-          <a:prstGeom prst="rect">
-            <a:avLst/>
-          </a:prstGeom>
-          <a:solidFill>
-            <a:srgbClr val="FFFFFF"/>
-          </a:solidFill>
-          <a:ln w="12700">
-            <a:solidFill>
-              <a:srgbClr val="1F4E79"/>
-            </a:solidFill>
-          </a:ln>
-          <a:effectLst/>
-        </p:spPr>
-        <p:style>
-          <a:lnRef idx="1">
-            <a:schemeClr val="accent1"/>
-          </a:lnRef>
-          <a:fillRef idx="3">
-            <a:schemeClr val="accent1"/>
-          </a:fillRef>
-          <a:effectRef idx="2">
-            <a:schemeClr val="accent1"/>
-          </a:effectRef>
-          <a:fontRef idx="minor">
-            <a:schemeClr val="lt1"/>
-          </a:fontRef>
-        </p:style>
-        <p:txBody>
-          <a:bodyPr rtlCol="0" anchor="ctr"/>
-          <a:lstStyle/>
-          <a:p>
-            <a:pPr algn="ctr"/>
-          </a:p>
-        </p:txBody>
-      </p:sp>
-      <p:sp>
-        <p:nvSpPr>
-          <p:cNvPr id="12" name="Rectangle 11"/>
-          <p:cNvSpPr/>
-          <p:nvPr/>
-        </p:nvSpPr>
-        <p:spPr>
-          <a:xfrm>
-            <a:off x="4297680" y="2331720"/>
-            <a:ext cx="3566160" cy="38100"/>
-          </a:xfrm>
-          <a:prstGeom prst="rect">
-            <a:avLst/>
-          </a:prstGeom>
-          <a:solidFill>
-            <a:srgbClr val="ED7D31"/>
-          </a:solidFill>
-          <a:ln>
-            <a:noFill/>
-          </a:ln>
-          <a:effectLst/>
-        </p:spPr>
-        <p:style>
-          <a:lnRef idx="1">
-            <a:schemeClr val="accent1"/>
-          </a:lnRef>
-          <a:fillRef idx="3">
-            <a:schemeClr val="accent1"/>
-          </a:fillRef>
-          <a:effectRef idx="2">
-            <a:schemeClr val="accent1"/>
-          </a:effectRef>
-          <a:fontRef idx="minor">
-            <a:schemeClr val="lt1"/>
-          </a:fontRef>
-        </p:style>
-        <p:txBody>
-          <a:bodyPr rtlCol="0" anchor="ctr"/>
-          <a:lstStyle/>
-          <a:p>
-            <a:pPr algn="ctr"/>
-          </a:p>
-        </p:txBody>
-      </p:sp>
-      <p:sp>
-        <p:nvSpPr>
-          <p:cNvPr id="13" name="TextBox 12"/>
-          <p:cNvSpPr txBox="1"/>
-          <p:nvPr/>
-        </p:nvSpPr>
-        <p:spPr>
-          <a:xfrm>
-            <a:off x="4526280" y="2514600"/>
-            <a:ext cx="3108960" cy="365760"/>
-          </a:xfrm>
-          <a:prstGeom prst="rect">
-            <a:avLst/>
-          </a:prstGeom>
-          <a:noFill/>
-        </p:spPr>
-        <p:txBody>
-          <a:bodyPr wrap="square" anchor="t">
-            <a:spAutoFit/>
-          </a:bodyPr>
-          <a:lstStyle/>
-          <a:p>
-            <a:pPr algn="l">
-              <a:lnSpc>
-                <a:spcPct val="115000"/>
-              </a:lnSpc>
-            </a:pPr>
-            <a:r>
-              <a:rPr sz="1500" b="1" i="0">
-                <a:solidFill>
-                  <a:srgbClr val="1A1A1A"/>
-                </a:solidFill>
-                <a:latin typeface="Calibri"/>
-              </a:rPr>
-              <a:t>2. GWR (renda)</a:t>
-            </a:r>
-          </a:p>
-        </p:txBody>
-      </p:sp>
-      <p:sp>
-        <p:nvSpPr>
-          <p:cNvPr id="14" name="TextBox 13"/>
-          <p:cNvSpPr txBox="1"/>
-          <p:nvPr/>
-        </p:nvSpPr>
-        <p:spPr>
-          <a:xfrm>
-            <a:off x="4526280" y="2926080"/>
-            <a:ext cx="3108960" cy="457200"/>
-          </a:xfrm>
-          <a:prstGeom prst="rect">
-            <a:avLst/>
-          </a:prstGeom>
-          <a:noFill/>
-        </p:spPr>
-        <p:txBody>
-          <a:bodyPr wrap="square" anchor="t">
-            <a:spAutoFit/>
-          </a:bodyPr>
-          <a:lstStyle/>
-          <a:p>
-            <a:pPr algn="l">
-              <a:lnSpc>
-                <a:spcPct val="115000"/>
-              </a:lnSpc>
-            </a:pPr>
-            <a:r>
-              <a:rPr sz="1250" b="0" i="0">
-                <a:solidFill>
-                  <a:srgbClr val="595959"/>
-                </a:solidFill>
-                <a:latin typeface="Calibri"/>
-              </a:rPr>
-              <a:t>Banda adaptativa (~10 vizinhos).</a:t>
-            </a:r>
-          </a:p>
-          <a:p>
-            <a:pPr algn="l">
-              <a:lnSpc>
-                <a:spcPct val="115000"/>
-              </a:lnSpc>
-            </a:pPr>
-            <a:r>
-              <a:rPr sz="1250" b="0" i="0">
-                <a:solidFill>
-                  <a:srgbClr val="595959"/>
-                </a:solidFill>
-                <a:latin typeface="Calibri"/>
-              </a:rPr>
-              <a:t>O coeficiente da renda passa a</a:t>
-            </a:r>
-          </a:p>
-          <a:p>
-            <a:pPr algn="l">
-              <a:lnSpc>
-                <a:spcPct val="115000"/>
-              </a:lnSpc>
-            </a:pPr>
-            <a:r>
-              <a:rPr sz="1250" b="0" i="0">
-                <a:solidFill>
-                  <a:srgbClr val="595959"/>
-                </a:solidFill>
-                <a:latin typeface="Calibri"/>
-              </a:rPr>
-              <a:t>variar livremente no espaço.</a:t>
-            </a:r>
-          </a:p>
-        </p:txBody>
-      </p:sp>
-      <p:sp>
-        <p:nvSpPr>
-          <p:cNvPr id="15" name="TextBox 14"/>
-          <p:cNvSpPr txBox="1"/>
-          <p:nvPr/>
-        </p:nvSpPr>
-        <p:spPr>
-          <a:xfrm>
-            <a:off x="4526280" y="3474720"/>
-            <a:ext cx="3108960" cy="548640"/>
-          </a:xfrm>
-          <a:prstGeom prst="rect">
-            <a:avLst/>
-          </a:prstGeom>
-          <a:noFill/>
-        </p:spPr>
-        <p:txBody>
-          <a:bodyPr wrap="square" anchor="t">
-            <a:spAutoFit/>
-          </a:bodyPr>
-          <a:lstStyle/>
-          <a:p>
-            <a:pPr algn="r">
-              <a:lnSpc>
-                <a:spcPct val="115000"/>
-              </a:lnSpc>
-            </a:pPr>
-            <a:r>
-              <a:rPr sz="2200" b="1" i="0">
-                <a:solidFill>
-                  <a:srgbClr val="ED7D31"/>
-                </a:solidFill>
-                <a:latin typeface="Calibri"/>
-              </a:rPr>
-              <a:t>R² = 0,458</a:t>
-            </a:r>
-          </a:p>
-        </p:txBody>
-      </p:sp>
-      <p:sp>
-        <p:nvSpPr>
-          <p:cNvPr id="16" name="Rectangle 15"/>
-          <p:cNvSpPr/>
-          <p:nvPr/>
-        </p:nvSpPr>
-        <p:spPr>
-          <a:xfrm>
-            <a:off x="8046720" y="2331720"/>
-            <a:ext cx="3566160" cy="1828800"/>
-          </a:xfrm>
-          <a:prstGeom prst="rect">
-            <a:avLst/>
-          </a:prstGeom>
-          <a:solidFill>
-            <a:srgbClr val="1F4E79"/>
-          </a:solidFill>
-          <a:ln>
-            <a:solidFill>
-              <a:srgbClr val="1F4E79"/>
-            </a:solidFill>
-          </a:ln>
-          <a:effectLst/>
-        </p:spPr>
-        <p:style>
-          <a:lnRef idx="1">
-            <a:schemeClr val="accent1"/>
-          </a:lnRef>
-          <a:fillRef idx="3">
-            <a:schemeClr val="accent1"/>
-          </a:fillRef>
-          <a:effectRef idx="2">
-            <a:schemeClr val="accent1"/>
-          </a:effectRef>
-          <a:fontRef idx="minor">
-            <a:schemeClr val="lt1"/>
-          </a:fontRef>
-        </p:style>
-        <p:txBody>
-          <a:bodyPr rtlCol="0" anchor="ctr"/>
-          <a:lstStyle/>
-          <a:p>
-            <a:pPr algn="ctr"/>
-          </a:p>
-        </p:txBody>
-      </p:sp>
-      <p:sp>
-        <p:nvSpPr>
-          <p:cNvPr id="17" name="Rectangle 16"/>
-          <p:cNvSpPr/>
-          <p:nvPr/>
-        </p:nvSpPr>
-        <p:spPr>
-          <a:xfrm>
-            <a:off x="8046720" y="2331720"/>
-            <a:ext cx="3566160" cy="38100"/>
-          </a:xfrm>
-          <a:prstGeom prst="rect">
-            <a:avLst/>
-          </a:prstGeom>
-          <a:solidFill>
-            <a:srgbClr val="FFFFFF"/>
-          </a:solidFill>
-          <a:ln>
-            <a:noFill/>
-          </a:ln>
-          <a:effectLst/>
-        </p:spPr>
-        <p:style>
-          <a:lnRef idx="1">
-            <a:schemeClr val="accent1"/>
-          </a:lnRef>
-          <a:fillRef idx="3">
-            <a:schemeClr val="accent1"/>
-          </a:fillRef>
-          <a:effectRef idx="2">
-            <a:schemeClr val="accent1"/>
-          </a:effectRef>
-          <a:fontRef idx="minor">
-            <a:schemeClr val="lt1"/>
-          </a:fontRef>
-        </p:style>
-        <p:txBody>
-          <a:bodyPr rtlCol="0" anchor="ctr"/>
-          <a:lstStyle/>
-          <a:p>
-            <a:pPr algn="ctr"/>
-          </a:p>
-        </p:txBody>
-      </p:sp>
-      <p:sp>
-        <p:nvSpPr>
-          <p:cNvPr id="18" name="TextBox 17"/>
-          <p:cNvSpPr txBox="1"/>
-          <p:nvPr/>
-        </p:nvSpPr>
-        <p:spPr>
-          <a:xfrm>
-            <a:off x="8275320" y="2514600"/>
-            <a:ext cx="3108960" cy="365760"/>
-          </a:xfrm>
-          <a:prstGeom prst="rect">
-            <a:avLst/>
-          </a:prstGeom>
-          <a:noFill/>
-        </p:spPr>
-        <p:txBody>
-          <a:bodyPr wrap="square" anchor="t">
-            <a:spAutoFit/>
-          </a:bodyPr>
-          <a:lstStyle/>
-          <a:p>
-            <a:pPr algn="l">
-              <a:lnSpc>
-                <a:spcPct val="115000"/>
-              </a:lnSpc>
-            </a:pPr>
-            <a:r>
-              <a:rPr sz="1500" b="1" i="0">
-                <a:solidFill>
-                  <a:srgbClr val="FFFFFF"/>
-                </a:solidFill>
-                <a:latin typeface="Calibri"/>
-              </a:rPr>
-              <a:t>3. GWR + litoral</a:t>
-            </a:r>
-          </a:p>
-        </p:txBody>
-      </p:sp>
-      <p:sp>
-        <p:nvSpPr>
-          <p:cNvPr id="19" name="TextBox 18"/>
-          <p:cNvSpPr txBox="1"/>
-          <p:nvPr/>
-        </p:nvSpPr>
-        <p:spPr>
-          <a:xfrm>
-            <a:off x="8275320" y="2926080"/>
-            <a:ext cx="3108960" cy="457200"/>
-          </a:xfrm>
-          <a:prstGeom prst="rect">
-            <a:avLst/>
-          </a:prstGeom>
-          <a:noFill/>
-        </p:spPr>
-        <p:txBody>
-          <a:bodyPr wrap="square" anchor="t">
-            <a:spAutoFit/>
-          </a:bodyPr>
-          <a:lstStyle/>
-          <a:p>
-            <a:pPr algn="l">
-              <a:lnSpc>
-                <a:spcPct val="115000"/>
-              </a:lnSpc>
-            </a:pPr>
-            <a:r>
-              <a:rPr sz="1250" b="0" i="0">
-                <a:solidFill>
-                  <a:srgbClr val="DDE6F0"/>
-                </a:solidFill>
-                <a:latin typeface="Calibri"/>
-              </a:rPr>
-              <a:t>Banda adaptativa incorporando</a:t>
-            </a:r>
-          </a:p>
-          <a:p>
-            <a:pPr algn="l">
-              <a:lnSpc>
-                <a:spcPct val="115000"/>
-              </a:lnSpc>
-            </a:pPr>
-            <a:r>
-              <a:rPr sz="1250" b="0" i="0">
-                <a:solidFill>
-                  <a:srgbClr val="DDE6F0"/>
-                </a:solidFill>
-                <a:latin typeface="Calibri"/>
-              </a:rPr>
-              <a:t>renda e a condição litorânea/</a:t>
-            </a:r>
-          </a:p>
-          <a:p>
-            <a:pPr algn="l">
-              <a:lnSpc>
-                <a:spcPct val="115000"/>
-              </a:lnSpc>
-            </a:pPr>
-            <a:r>
-              <a:rPr sz="1250" b="0" i="0">
-                <a:solidFill>
-                  <a:srgbClr val="DDE6F0"/>
-                </a:solidFill>
-                <a:latin typeface="Calibri"/>
-              </a:rPr>
-              <a:t>turística, localmente.</a:t>
-            </a:r>
-          </a:p>
-        </p:txBody>
-      </p:sp>
-      <p:sp>
-        <p:nvSpPr>
-          <p:cNvPr id="20" name="TextBox 19"/>
-          <p:cNvSpPr txBox="1"/>
-          <p:nvPr/>
-        </p:nvSpPr>
-        <p:spPr>
-          <a:xfrm>
-            <a:off x="8275320" y="3474720"/>
-            <a:ext cx="3108960" cy="548640"/>
-          </a:xfrm>
-          <a:prstGeom prst="rect">
-            <a:avLst/>
-          </a:prstGeom>
-          <a:noFill/>
-        </p:spPr>
-        <p:txBody>
-          <a:bodyPr wrap="square" anchor="t">
-            <a:spAutoFit/>
-          </a:bodyPr>
-          <a:lstStyle/>
-          <a:p>
-            <a:pPr algn="r">
-              <a:lnSpc>
-                <a:spcPct val="115000"/>
-              </a:lnSpc>
-            </a:pPr>
-            <a:r>
-              <a:rPr sz="2200" b="1" i="0">
-                <a:solidFill>
-                  <a:srgbClr val="FFFFFF"/>
-                </a:solidFill>
-                <a:latin typeface="Calibri"/>
-              </a:rPr>
-              <a:t>R² = 0,532</a:t>
-            </a:r>
-          </a:p>
-        </p:txBody>
-      </p:sp>
-      <p:sp>
-        <p:nvSpPr>
-          <p:cNvPr id="21" name="TextBox 20"/>
-          <p:cNvSpPr txBox="1"/>
-          <p:nvPr/>
-        </p:nvSpPr>
-        <p:spPr>
-          <a:xfrm>
-            <a:off x="548640" y="4617720"/>
-            <a:ext cx="11064240" cy="548640"/>
-          </a:xfrm>
-          <a:prstGeom prst="rect">
-            <a:avLst/>
-          </a:prstGeom>
-          <a:noFill/>
-        </p:spPr>
-        <p:txBody>
-          <a:bodyPr wrap="square" anchor="t">
-            <a:spAutoFit/>
-          </a:bodyPr>
-          <a:lstStyle/>
-          <a:p>
-            <a:pPr algn="ctr">
-              <a:lnSpc>
-                <a:spcPct val="115000"/>
-              </a:lnSpc>
-            </a:pPr>
-            <a:r>
-              <a:rPr sz="1900" b="1" i="0">
-                <a:solidFill>
-                  <a:srgbClr val="1F4E79"/>
-                </a:solidFill>
-                <a:latin typeface="Calibri"/>
-              </a:rPr>
-              <a:t>Melhor ajuste entre todos os modelos testados — e o menor AIC (3027,4).</a:t>
-            </a:r>
-          </a:p>
-        </p:txBody>
-      </p:sp>
       <p:pic>
         <p:nvPicPr>
-          <p:cNvPr id="22" name="Picture 21" descr="reg_esp_residuos_ols.png"/>
+          <p:cNvPr id="5" name="Picture 4" descr="reg_multipla.png"/>
           <p:cNvPicPr>
             <a:picLocks noChangeAspect="1"/>
           </p:cNvPicPr>
@@ -10056,8 +10750,8 @@
         </p:blipFill>
         <p:spPr>
           <a:xfrm>
-            <a:off x="5489257" y="5349240"/>
-            <a:ext cx="1183005" cy="1051560"/>
+            <a:off x="548640" y="1798320"/>
+            <a:ext cx="6400800" cy="4267200"/>
           </a:xfrm>
           <a:prstGeom prst="rect">
             <a:avLst/>
@@ -10066,14 +10760,14 @@
       </p:pic>
       <p:sp>
         <p:nvSpPr>
-          <p:cNvPr id="23" name="TextBox 22"/>
+          <p:cNvPr id="6" name="TextBox 5"/>
           <p:cNvSpPr txBox="1"/>
           <p:nvPr/>
         </p:nvSpPr>
         <p:spPr>
           <a:xfrm>
-            <a:off x="4297680" y="5230368"/>
-            <a:ext cx="3566160" cy="228600"/>
+            <a:off x="7223760" y="1691640"/>
+            <a:ext cx="4297680" cy="2743200"/>
           </a:xfrm>
           <a:prstGeom prst="rect">
             <a:avLst/>
@@ -10081,38 +10775,79 @@
           <a:noFill/>
         </p:spPr>
         <p:txBody>
-          <a:bodyPr wrap="square" anchor="t">
+          <a:bodyPr wrap="square">
             <a:spAutoFit/>
           </a:bodyPr>
           <a:lstStyle/>
           <a:p>
-            <a:pPr algn="ctr">
+            <a:pPr>
               <a:lnSpc>
                 <a:spcPct val="115000"/>
               </a:lnSpc>
+              <a:spcAft>
+                <a:spcPts val="1200"/>
+              </a:spcAft>
             </a:pPr>
             <a:r>
-              <a:rPr sz="1050" b="0" i="1">
-                <a:solidFill>
-                  <a:srgbClr val="595959"/>
-                </a:solidFill>
-                <a:latin typeface="Calibri"/>
-              </a:rPr>
-              <a:t>resíduos do OLS: por que sair dele</a:t>
-            </a:r>
-          </a:p>
-        </p:txBody>
-      </p:sp>
-      <p:sp>
-        <p:nvSpPr>
-          <p:cNvPr id="24" name="TextBox 23"/>
+              <a:rPr sz="1400">
+                <a:solidFill>
+                  <a:srgbClr val="333333"/>
+                </a:solidFill>
+                <a:latin typeface="Calibri"/>
+              </a:rPr>
+              <a:t>—  Simples: taxa = 0,971 + 0,00247·renda   R² = 0,129</a:t>
+            </a:r>
+          </a:p>
+          <a:p>
+            <a:pPr>
+              <a:lnSpc>
+                <a:spcPct val="115000"/>
+              </a:lnSpc>
+              <a:spcAft>
+                <a:spcPts val="1200"/>
+              </a:spcAft>
+            </a:pPr>
+            <a:r>
+              <a:rPr sz="1400">
+                <a:solidFill>
+                  <a:srgbClr val="333333"/>
+                </a:solidFill>
+                <a:latin typeface="Calibri"/>
+              </a:rPr>
+              <a:t>—  Com litoral: taxa = 1,036 + 0,00233·renda + 10,97·litoral   R² = 0,357</a:t>
+            </a:r>
+          </a:p>
+          <a:p>
+            <a:pPr>
+              <a:lnSpc>
+                <a:spcPct val="115000"/>
+              </a:lnSpc>
+              <a:spcAft>
+                <a:spcPts val="1200"/>
+              </a:spcAft>
+            </a:pPr>
+            <a:r>
+              <a:rPr sz="1400">
+                <a:solidFill>
+                  <a:srgbClr val="333333"/>
+                </a:solidFill>
+                <a:latin typeface="Calibri"/>
+              </a:rPr>
+              <a:t>—  O litoral soma ~11 furtos/1.000 hab., equivalente a +R$4.700 de renda.</a:t>
+            </a:r>
+          </a:p>
+        </p:txBody>
+      </p:sp>
+      <p:sp>
+        <p:nvSpPr>
+          <p:cNvPr id="7" name="TextBox 6"/>
           <p:cNvSpPr txBox="1"/>
           <p:nvPr/>
         </p:nvSpPr>
         <p:spPr>
           <a:xfrm>
-            <a:off x="548640" y="6510528"/>
-            <a:ext cx="7315200" cy="274320"/>
+            <a:off x="7223760" y="4572000"/>
+            <a:ext cx="4297680" cy="1737360"/>
           </a:xfrm>
           <a:prstGeom prst="rect">
             <a:avLst/>
@@ -10131,6 +10866,45 @@
               </a:lnSpc>
             </a:pPr>
             <a:r>
+              <a:rPr sz="1300" b="0" i="0">
+                <a:solidFill>
+                  <a:srgbClr val="595959"/>
+                </a:solidFill>
+                <a:latin typeface="Calibri"/>
+              </a:rPr>
+              <a:t>Distância de Cook: 29 municípios influentes, 8 deles litorâneos — 50% dos 16 municípios do litoral. O padrão litorâneo não é efeito de poucos pontos: é estrutural.</a:t>
+            </a:r>
+          </a:p>
+        </p:txBody>
+      </p:sp>
+      <p:sp>
+        <p:nvSpPr>
+          <p:cNvPr id="8" name="TextBox 7"/>
+          <p:cNvSpPr txBox="1"/>
+          <p:nvPr/>
+        </p:nvSpPr>
+        <p:spPr>
+          <a:xfrm>
+            <a:off x="548640" y="6510528"/>
+            <a:ext cx="7315200" cy="274320"/>
+          </a:xfrm>
+          <a:prstGeom prst="rect">
+            <a:avLst/>
+          </a:prstGeom>
+          <a:noFill/>
+        </p:spPr>
+        <p:txBody>
+          <a:bodyPr wrap="square" anchor="t">
+            <a:spAutoFit/>
+          </a:bodyPr>
+          <a:lstStyle/>
+          <a:p>
+            <a:pPr algn="l">
+              <a:lnSpc>
+                <a:spcPct val="115000"/>
+              </a:lnSpc>
+            </a:pPr>
+            <a:r>
               <a:rPr sz="1000" b="0" i="0">
                 <a:solidFill>
                   <a:srgbClr val="595959"/>
@@ -10144,7 +10918,7 @@
       </p:sp>
       <p:sp>
         <p:nvSpPr>
-          <p:cNvPr id="25" name="TextBox 24"/>
+          <p:cNvPr id="9" name="TextBox 8"/>
           <p:cNvSpPr txBox="1"/>
           <p:nvPr/>
         </p:nvSpPr>
@@ -10280,7 +11054,7 @@
                 </a:solidFill>
                 <a:latin typeface="Calibri"/>
               </a:rPr>
-              <a:t>GWR + litoral: isolando o efeito turístico</a:t>
+              <a:t>Por que sair do OLS</a:t>
             </a:r>
           </a:p>
         </p:txBody>
@@ -10331,7 +11105,7 @@
       </p:sp>
       <p:pic>
         <p:nvPicPr>
-          <p:cNvPr id="5" name="Picture 4" descr="gwr_contrafactual_dif.png"/>
+          <p:cNvPr id="5" name="Picture 4" descr="reg_esp_residuos_ols.png"/>
           <p:cNvPicPr>
             <a:picLocks noChangeAspect="1"/>
           </p:cNvPicPr>
@@ -10345,7 +11119,7 @@
         </p:blipFill>
         <p:spPr>
           <a:xfrm>
-            <a:off x="851535" y="1600200"/>
+            <a:off x="1080135" y="1600200"/>
             <a:ext cx="5246370" cy="4663440"/>
           </a:xfrm>
           <a:prstGeom prst="rect">
@@ -10361,8 +11135,8 @@
         </p:nvSpPr>
         <p:spPr>
           <a:xfrm>
-            <a:off x="6675120" y="1737360"/>
-            <a:ext cx="4937760" cy="548640"/>
+            <a:off x="7132320" y="2011680"/>
+            <a:ext cx="4389120" cy="1371600"/>
           </a:xfrm>
           <a:prstGeom prst="rect">
             <a:avLst/>
@@ -10381,13 +11155,13 @@
               </a:lnSpc>
             </a:pPr>
             <a:r>
-              <a:rPr sz="1700" b="1" i="0">
-                <a:solidFill>
-                  <a:srgbClr val="1F4E79"/>
-                </a:solidFill>
-                <a:latin typeface="Calibri"/>
-              </a:rPr>
-              <a:t>Cenário contrafactual</a:t>
+              <a:rPr sz="3400" b="1" i="0">
+                <a:solidFill>
+                  <a:srgbClr val="ED7D31"/>
+                </a:solidFill>
+                <a:latin typeface="Calibri"/>
+              </a:rPr>
+              <a:t>Moran's I = 0,38</a:t>
             </a:r>
           </a:p>
         </p:txBody>
@@ -10400,8 +11174,47 @@
         </p:nvSpPr>
         <p:spPr>
           <a:xfrm>
-            <a:off x="6675120" y="2286000"/>
-            <a:ext cx="4937760" cy="1828800"/>
+            <a:off x="7132320" y="2880360"/>
+            <a:ext cx="4389120" cy="457200"/>
+          </a:xfrm>
+          <a:prstGeom prst="rect">
+            <a:avLst/>
+          </a:prstGeom>
+          <a:noFill/>
+        </p:spPr>
+        <p:txBody>
+          <a:bodyPr wrap="square" anchor="t">
+            <a:spAutoFit/>
+          </a:bodyPr>
+          <a:lstStyle/>
+          <a:p>
+            <a:pPr algn="l">
+              <a:lnSpc>
+                <a:spcPct val="115000"/>
+              </a:lnSpc>
+            </a:pPr>
+            <a:r>
+              <a:rPr sz="1500" b="0" i="0">
+                <a:solidFill>
+                  <a:srgbClr val="595959"/>
+                </a:solidFill>
+                <a:latin typeface="Calibri"/>
+              </a:rPr>
+              <a:t>dos resíduos do modelo clássico (p &lt; 0,001)</a:t>
+            </a:r>
+          </a:p>
+        </p:txBody>
+      </p:sp>
+      <p:sp>
+        <p:nvSpPr>
+          <p:cNvPr id="8" name="TextBox 7"/>
+          <p:cNvSpPr txBox="1"/>
+          <p:nvPr/>
+        </p:nvSpPr>
+        <p:spPr>
+          <a:xfrm>
+            <a:off x="7132320" y="3657600"/>
+            <a:ext cx="4389120" cy="2560320"/>
           </a:xfrm>
           <a:prstGeom prst="rect">
             <a:avLst/>
@@ -10419,7 +11232,7 @@
                 <a:spcPct val="115000"/>
               </a:lnSpc>
               <a:spcAft>
-                <a:spcPts val="1200"/>
+                <a:spcPts val="1400"/>
               </a:spcAft>
             </a:pPr>
             <a:r>
@@ -10429,7 +11242,7 @@
                 </a:solidFill>
                 <a:latin typeface="Calibri"/>
               </a:rPr>
-              <a:t>—  O que acontece se "zerarmos" a variável litoral no GWR e recalcularmos a predição?</a:t>
+              <a:t>—  Os resíduos do OLS ainda têm forte autocorrelação espacial: municípios vizinhos erram parecido — o modelo está deixando estrutura espacial de fora.</a:t>
             </a:r>
           </a:p>
           <a:p>
@@ -10438,7 +11251,7 @@
                 <a:spcPct val="115000"/>
               </a:lnSpc>
               <a:spcAft>
-                <a:spcPts val="1200"/>
+                <a:spcPts val="1400"/>
               </a:spcAft>
             </a:pPr>
             <a:r>
@@ -10448,81 +11261,7 @@
                 </a:solidFill>
                 <a:latin typeface="Calibri"/>
               </a:rPr>
-              <a:t>—  A taxa cai em até 12 furtos/1.000 hab. — impacto concentrado inteiramente na faixa costeira.</a:t>
-            </a:r>
-          </a:p>
-        </p:txBody>
-      </p:sp>
-      <p:sp>
-        <p:nvSpPr>
-          <p:cNvPr id="8" name="Rounded Rectangle 7"/>
-          <p:cNvSpPr/>
-          <p:nvPr/>
-        </p:nvSpPr>
-        <p:spPr>
-          <a:xfrm>
-            <a:off x="6675120" y="4297680"/>
-            <a:ext cx="4937760" cy="1828800"/>
-          </a:xfrm>
-          <a:prstGeom prst="roundRect">
-            <a:avLst>
-              <a:gd name="adj" fmla="val 8000"/>
-            </a:avLst>
-          </a:prstGeom>
-          <a:solidFill>
-            <a:srgbClr val="F2F2F2"/>
-          </a:solidFill>
-          <a:ln>
-            <a:noFill/>
-          </a:ln>
-          <a:effectLst/>
-        </p:spPr>
-        <p:style>
-          <a:lnRef idx="1">
-            <a:schemeClr val="accent1"/>
-          </a:lnRef>
-          <a:fillRef idx="3">
-            <a:schemeClr val="accent1"/>
-          </a:fillRef>
-          <a:effectRef idx="2">
-            <a:schemeClr val="accent1"/>
-          </a:effectRef>
-          <a:fontRef idx="minor">
-            <a:schemeClr val="lt1"/>
-          </a:fontRef>
-        </p:style>
-        <p:txBody>
-          <a:bodyPr rtlCol="0" anchor="ctr" wrap="square" lIns="182880" rIns="182880"/>
-          <a:lstStyle/>
-          <a:p>
-            <a:pPr algn="ctr"/>
-            <a:r>
-              <a:rPr sz="1300">
-                <a:solidFill>
-                  <a:srgbClr val="595959"/>
-                </a:solidFill>
-              </a:rPr>
-              <a:t>Resíduo médio sem a variável litoral:</a:t>
-            </a:r>
-          </a:p>
-          <a:p>
-            <a:r>
-              <a:rPr sz="1400" b="1">
-                <a:solidFill>
-                  <a:srgbClr val="ED7D31"/>
-                </a:solidFill>
-              </a:rPr>
-              <a:t>+10,68 nos municípios litorâneos    −0,27 nos demais</a:t>
-            </a:r>
-          </a:p>
-          <a:p>
-            <a:r>
-              <a:rPr sz="1300">
-                <a:solidFill>
-                  <a:srgbClr val="595959"/>
-                </a:solidFill>
-              </a:rPr>
-              <a:t>Com a variável incluída, ambos os grupos centram em zero.</a:t>
+              <a:t>—  Isso viola a premissa de independência do OLS e motiva os modelos espaciais que seguem: spatial error e GWR.</a:t>
             </a:r>
           </a:p>
         </p:txBody>
